--- a/media/figstudio/fig01_evidence_map/fig01_evidence_synthesis_map_en_editable.pptx
+++ b/media/figstudio/fig01_evidence_map/fig01_evidence_synthesis_map_en_editable.pptx
@@ -3535,7 +3535,7 @@
           <a:solidFill>
             <a:srgbClr val="EEF2F7"/>
           </a:solidFill>
-          <a:ln w="9524">
+          <a:ln w="12699">
             <a:solidFill>
               <a:srgbClr val="5B7592"/>
             </a:solidFill>
@@ -3639,7 +3639,7 @@
           <a:solidFill>
             <a:srgbClr val="E6F2F3"/>
           </a:solidFill>
-          <a:ln w="9524">
+          <a:ln w="12699">
             <a:solidFill>
               <a:srgbClr val="1F7F8C"/>
             </a:solidFill>
@@ -3743,7 +3743,7 @@
           <a:solidFill>
             <a:srgbClr val="FFF6E3"/>
           </a:solidFill>
-          <a:ln w="9524">
+          <a:ln w="12699">
             <a:solidFill>
               <a:srgbClr val="C48A24"/>
             </a:solidFill>
@@ -3847,7 +3847,7 @@
           <a:solidFill>
             <a:srgbClr val="FFFFFF"/>
           </a:solidFill>
-          <a:ln w="11112">
+          <a:ln w="15081">
             <a:solidFill>
               <a:srgbClr val="5B7592"/>
             </a:solidFill>
@@ -3937,9 +3937,9 @@
             <a:avLst/>
           </a:prstGeom>
           <a:noFill/>
-          <a:ln w="7937">
+          <a:ln w="18216">
             <a:solidFill>
-              <a:srgbClr val="1F2937"/>
+              <a:srgbClr val="111A24"/>
             </a:solidFill>
           </a:ln>
           <a:effectLst/>
@@ -3980,9 +3980,9 @@
           <a:prstGeom prst="line">
             <a:avLst/>
           </a:prstGeom>
-          <a:ln w="7937">
+          <a:ln w="18216">
             <a:solidFill>
-              <a:srgbClr val="1F2937"/>
+              <a:srgbClr val="111A24"/>
             </a:solidFill>
           </a:ln>
           <a:effectLst/>
@@ -4016,9 +4016,9 @@
           <a:prstGeom prst="line">
             <a:avLst/>
           </a:prstGeom>
-          <a:ln w="7937">
+          <a:ln w="18216">
             <a:solidFill>
-              <a:srgbClr val="1F2937"/>
+              <a:srgbClr val="111A24"/>
             </a:solidFill>
           </a:ln>
           <a:effectLst/>
@@ -4052,9 +4052,9 @@
           <a:prstGeom prst="line">
             <a:avLst/>
           </a:prstGeom>
-          <a:ln w="7937">
+          <a:ln w="18216">
             <a:solidFill>
-              <a:srgbClr val="1F2937"/>
+              <a:srgbClr val="111A24"/>
             </a:solidFill>
           </a:ln>
           <a:effectLst/>
@@ -4149,7 +4149,7 @@
           <a:solidFill>
             <a:srgbClr val="FFFFFF"/>
           </a:solidFill>
-          <a:ln w="11112">
+          <a:ln w="15081">
             <a:solidFill>
               <a:srgbClr val="5B7592"/>
             </a:solidFill>
@@ -4238,9 +4238,9 @@
           <a:prstGeom prst="line">
             <a:avLst/>
           </a:prstGeom>
-          <a:ln w="7937">
+          <a:ln w="18216">
             <a:solidFill>
-              <a:srgbClr val="1F2937"/>
+              <a:srgbClr val="111A24"/>
             </a:solidFill>
           </a:ln>
           <a:effectLst/>
@@ -4274,9 +4274,9 @@
           <a:prstGeom prst="line">
             <a:avLst/>
           </a:prstGeom>
-          <a:ln w="7937">
+          <a:ln w="18216">
             <a:solidFill>
-              <a:srgbClr val="1F2937"/>
+              <a:srgbClr val="111A24"/>
             </a:solidFill>
           </a:ln>
           <a:effectLst/>
@@ -4310,9 +4310,9 @@
           <a:prstGeom prst="line">
             <a:avLst/>
           </a:prstGeom>
-          <a:ln w="7937">
+          <a:ln w="18216">
             <a:solidFill>
-              <a:srgbClr val="1F2937"/>
+              <a:srgbClr val="111A24"/>
             </a:solidFill>
           </a:ln>
           <a:effectLst/>
@@ -4346,9 +4346,9 @@
           <a:prstGeom prst="line">
             <a:avLst/>
           </a:prstGeom>
-          <a:ln w="7937">
+          <a:ln w="18216">
             <a:solidFill>
-              <a:srgbClr val="1F2937"/>
+              <a:srgbClr val="111A24"/>
             </a:solidFill>
           </a:ln>
           <a:effectLst/>
@@ -4382,9 +4382,9 @@
           <a:prstGeom prst="line">
             <a:avLst/>
           </a:prstGeom>
-          <a:ln w="7937">
+          <a:ln w="18216">
             <a:solidFill>
-              <a:srgbClr val="1F2937"/>
+              <a:srgbClr val="111A24"/>
             </a:solidFill>
           </a:ln>
           <a:effectLst/>
@@ -4418,9 +4418,9 @@
           <a:prstGeom prst="line">
             <a:avLst/>
           </a:prstGeom>
-          <a:ln w="7937">
+          <a:ln w="18216">
             <a:solidFill>
-              <a:srgbClr val="1F2937"/>
+              <a:srgbClr val="111A24"/>
             </a:solidFill>
           </a:ln>
           <a:effectLst/>
@@ -4454,9 +4454,9 @@
           <a:prstGeom prst="line">
             <a:avLst/>
           </a:prstGeom>
-          <a:ln w="7937">
+          <a:ln w="18216">
             <a:solidFill>
-              <a:srgbClr val="1F2937"/>
+              <a:srgbClr val="111A24"/>
             </a:solidFill>
           </a:ln>
           <a:effectLst/>
@@ -4551,7 +4551,7 @@
           <a:solidFill>
             <a:srgbClr val="FFFFFF"/>
           </a:solidFill>
-          <a:ln w="11112">
+          <a:ln w="15081">
             <a:solidFill>
               <a:srgbClr val="5B7592"/>
             </a:solidFill>
@@ -4640,9 +4640,9 @@
           <a:prstGeom prst="line">
             <a:avLst/>
           </a:prstGeom>
-          <a:ln w="7937">
+          <a:ln w="18216">
             <a:solidFill>
-              <a:srgbClr val="1F2937"/>
+              <a:srgbClr val="111A24"/>
             </a:solidFill>
           </a:ln>
           <a:effectLst/>
@@ -4676,9 +4676,9 @@
           <a:prstGeom prst="line">
             <a:avLst/>
           </a:prstGeom>
-          <a:ln w="7937">
+          <a:ln w="18216">
             <a:solidFill>
-              <a:srgbClr val="1F2937"/>
+              <a:srgbClr val="111A24"/>
             </a:solidFill>
           </a:ln>
           <a:effectLst/>
@@ -4712,9 +4712,9 @@
           <a:prstGeom prst="line">
             <a:avLst/>
           </a:prstGeom>
-          <a:ln w="7937">
+          <a:ln w="18216">
             <a:solidFill>
-              <a:srgbClr val="1F2937"/>
+              <a:srgbClr val="111A24"/>
             </a:solidFill>
           </a:ln>
           <a:effectLst/>
@@ -4748,9 +4748,9 @@
           <a:prstGeom prst="line">
             <a:avLst/>
           </a:prstGeom>
-          <a:ln w="7937">
+          <a:ln w="18216">
             <a:solidFill>
-              <a:srgbClr val="1F2937"/>
+              <a:srgbClr val="111A24"/>
             </a:solidFill>
           </a:ln>
           <a:effectLst/>
@@ -4784,9 +4784,9 @@
           <a:prstGeom prst="line">
             <a:avLst/>
           </a:prstGeom>
-          <a:ln w="7937">
+          <a:ln w="18216">
             <a:solidFill>
-              <a:srgbClr val="1F2937"/>
+              <a:srgbClr val="111A24"/>
             </a:solidFill>
           </a:ln>
           <a:effectLst/>
@@ -4820,9 +4820,9 @@
           <a:prstGeom prst="line">
             <a:avLst/>
           </a:prstGeom>
-          <a:ln w="7937">
+          <a:ln w="18216">
             <a:solidFill>
-              <a:srgbClr val="1F2937"/>
+              <a:srgbClr val="111A24"/>
             </a:solidFill>
           </a:ln>
           <a:effectLst/>
@@ -5033,7 +5033,7 @@
             <a:avLst/>
           </a:prstGeom>
           <a:solidFill>
-            <a:srgbClr val="1F2937"/>
+            <a:srgbClr val="111A24"/>
           </a:solidFill>
           <a:ln>
             <a:noFill/>
@@ -5313,7 +5313,7 @@
           <a:solidFill>
             <a:srgbClr val="FFFFFF"/>
           </a:solidFill>
-          <a:ln w="11112">
+          <a:ln w="15081">
             <a:solidFill>
               <a:srgbClr val="5B7592"/>
             </a:solidFill>
@@ -5402,9 +5402,9 @@
           <a:prstGeom prst="line">
             <a:avLst/>
           </a:prstGeom>
-          <a:ln w="7937">
+          <a:ln w="18216">
             <a:solidFill>
-              <a:srgbClr val="1F2937"/>
+              <a:srgbClr val="111A24"/>
             </a:solidFill>
           </a:ln>
           <a:effectLst/>
@@ -5438,9 +5438,9 @@
           <a:prstGeom prst="line">
             <a:avLst/>
           </a:prstGeom>
-          <a:ln w="7937">
+          <a:ln w="18216">
             <a:solidFill>
-              <a:srgbClr val="1F2937"/>
+              <a:srgbClr val="111A24"/>
             </a:solidFill>
           </a:ln>
           <a:effectLst/>
@@ -5474,9 +5474,9 @@
           <a:prstGeom prst="line">
             <a:avLst/>
           </a:prstGeom>
-          <a:ln w="7937">
+          <a:ln w="18216">
             <a:solidFill>
-              <a:srgbClr val="1F2937"/>
+              <a:srgbClr val="111A24"/>
             </a:solidFill>
           </a:ln>
           <a:effectLst/>
@@ -5510,9 +5510,9 @@
           <a:prstGeom prst="line">
             <a:avLst/>
           </a:prstGeom>
-          <a:ln w="7937">
+          <a:ln w="18216">
             <a:solidFill>
-              <a:srgbClr val="1F2937"/>
+              <a:srgbClr val="111A24"/>
             </a:solidFill>
           </a:ln>
           <a:effectLst/>
@@ -5607,12 +5607,12 @@
           <a:solidFill>
             <a:srgbClr val="FFFFFF"/>
           </a:solidFill>
-          <a:ln w="11112">
+          <a:ln w="15081">
             <a:solidFill>
               <a:srgbClr val="9AA3AB"/>
             </a:solidFill>
             <a:custDash>
-              <a:ds d="857143" sp="571429"/>
+              <a:ds d="631579" sp="421053"/>
             </a:custDash>
           </a:ln>
           <a:effectLst/>
@@ -5654,9 +5654,9 @@
             <a:avLst/>
           </a:prstGeom>
           <a:noFill/>
-          <a:ln w="7937">
+          <a:ln w="18216">
             <a:solidFill>
-              <a:srgbClr val="1F2937"/>
+              <a:srgbClr val="111A24"/>
             </a:solidFill>
           </a:ln>
           <a:effectLst/>
@@ -5697,9 +5697,9 @@
           <a:prstGeom prst="line">
             <a:avLst/>
           </a:prstGeom>
-          <a:ln w="7937">
+          <a:ln w="18216">
             <a:solidFill>
-              <a:srgbClr val="1F2937"/>
+              <a:srgbClr val="111A24"/>
             </a:solidFill>
           </a:ln>
           <a:effectLst/>
@@ -5733,9 +5733,9 @@
           <a:prstGeom prst="line">
             <a:avLst/>
           </a:prstGeom>
-          <a:ln w="7937">
+          <a:ln w="18216">
             <a:solidFill>
-              <a:srgbClr val="1F2937"/>
+              <a:srgbClr val="111A24"/>
             </a:solidFill>
           </a:ln>
           <a:effectLst/>
@@ -5769,9 +5769,9 @@
           <a:prstGeom prst="line">
             <a:avLst/>
           </a:prstGeom>
-          <a:ln w="7937">
+          <a:ln w="18216">
             <a:solidFill>
-              <a:srgbClr val="1F2937"/>
+              <a:srgbClr val="111A24"/>
             </a:solidFill>
           </a:ln>
           <a:effectLst/>
@@ -5805,9 +5805,9 @@
           <a:prstGeom prst="line">
             <a:avLst/>
           </a:prstGeom>
-          <a:ln w="7937">
+          <a:ln w="18216">
             <a:solidFill>
-              <a:srgbClr val="1F2937"/>
+              <a:srgbClr val="111A24"/>
             </a:solidFill>
           </a:ln>
           <a:effectLst/>
@@ -5891,8 +5891,8 @@
         </p:nvSpPr>
         <p:spPr>
           <a:xfrm>
-            <a:off x="456406" y="1381125"/>
-            <a:ext cx="71437" cy="2103437"/>
+            <a:off x="448469" y="1381125"/>
+            <a:ext cx="87312" cy="2103437"/>
           </a:xfrm>
           <a:custGeom>
             <a:avLst/>
@@ -5901,34 +5901,34 @@
             <a:cxnLst/>
             <a:rect l="l" t="t" r="r" b="b"/>
             <a:pathLst>
-              <a:path w="9000" h="265000">
+              <a:path w="11000" h="265000">
                 <a:moveTo>
-                  <a:pt x="3700" y="265000"/>
+                  <a:pt x="4400" y="265000"/>
                 </a:moveTo>
                 <a:lnTo>
-                  <a:pt x="3700" y="11000"/>
+                  <a:pt x="4400" y="14000"/>
                 </a:lnTo>
                 <a:lnTo>
-                  <a:pt x="0" y="11000"/>
+                  <a:pt x="0" y="14000"/>
                 </a:lnTo>
                 <a:lnTo>
-                  <a:pt x="4500" y="0"/>
+                  <a:pt x="5500" y="0"/>
                 </a:lnTo>
                 <a:lnTo>
-                  <a:pt x="9000" y="11000"/>
+                  <a:pt x="11000" y="14000"/>
                 </a:lnTo>
                 <a:lnTo>
-                  <a:pt x="5300" y="11000"/>
+                  <a:pt x="6600" y="14000"/>
                 </a:lnTo>
                 <a:lnTo>
-                  <a:pt x="5300" y="265000"/>
+                  <a:pt x="6600" y="265000"/>
                 </a:lnTo>
                 <a:close/>
               </a:path>
             </a:pathLst>
           </a:custGeom>
           <a:solidFill>
-            <a:srgbClr val="3F4854"/>
+            <a:srgbClr val="27303A"/>
           </a:solidFill>
           <a:ln>
             <a:noFill/>
@@ -5965,8 +5965,8 @@
         </p:nvSpPr>
         <p:spPr>
           <a:xfrm>
-            <a:off x="456406" y="4151312"/>
-            <a:ext cx="71437" cy="2103437"/>
+            <a:off x="448469" y="4151312"/>
+            <a:ext cx="87312" cy="2103437"/>
           </a:xfrm>
           <a:custGeom>
             <a:avLst/>
@@ -5975,34 +5975,34 @@
             <a:cxnLst/>
             <a:rect l="l" t="t" r="r" b="b"/>
             <a:pathLst>
-              <a:path w="9000" h="265000">
+              <a:path w="11000" h="265000">
                 <a:moveTo>
-                  <a:pt x="5300" y="0"/>
+                  <a:pt x="6600" y="0"/>
                 </a:moveTo>
                 <a:lnTo>
-                  <a:pt x="5300" y="254000"/>
+                  <a:pt x="6600" y="251000"/>
                 </a:lnTo>
                 <a:lnTo>
-                  <a:pt x="9000" y="254000"/>
+                  <a:pt x="11000" y="251000"/>
                 </a:lnTo>
                 <a:lnTo>
-                  <a:pt x="4500" y="265000"/>
+                  <a:pt x="5500" y="265000"/>
                 </a:lnTo>
                 <a:lnTo>
-                  <a:pt x="0" y="254000"/>
+                  <a:pt x="0" y="251000"/>
                 </a:lnTo>
                 <a:lnTo>
-                  <a:pt x="3700" y="254000"/>
+                  <a:pt x="4400" y="251000"/>
                 </a:lnTo>
                 <a:lnTo>
-                  <a:pt x="3700" y="0"/>
+                  <a:pt x="4400" y="0"/>
                 </a:lnTo>
                 <a:close/>
               </a:path>
             </a:pathLst>
           </a:custGeom>
           <a:solidFill>
-            <a:srgbClr val="3F4854"/>
+            <a:srgbClr val="27303A"/>
           </a:solidFill>
           <a:ln>
             <a:noFill/>
@@ -6066,7 +6066,7 @@
               </a:spcAft>
               <a:defRPr sz="1106" b="1" i="0" lang="zh-CN" dirty="0">
                 <a:solidFill>
-                  <a:srgbClr val="3F4854"/>
+                  <a:srgbClr val="27303A"/>
                 </a:solidFill>
                 <a:latin typeface="DejaVu Sans"/>
                 <a:ea typeface="DejaVu Sans"/>
@@ -6076,7 +6076,7 @@
             <a:r>
               <a:rPr sz="1106" b="1" i="0" lang="zh-CN" dirty="0">
                 <a:solidFill>
-                  <a:srgbClr val="3F4854"/>
+                  <a:srgbClr val="27303A"/>
                 </a:solidFill>
                 <a:latin typeface="DejaVu Sans"/>
                 <a:ea typeface="DejaVu Sans"/>
@@ -6122,7 +6122,7 @@
               </a:spcAft>
               <a:defRPr sz="1124" b="1" i="0" lang="zh-CN" dirty="0">
                 <a:solidFill>
-                  <a:srgbClr val="3F4854"/>
+                  <a:srgbClr val="27303A"/>
                 </a:solidFill>
                 <a:latin typeface="DejaVu Sans"/>
                 <a:ea typeface="DejaVu Sans"/>
@@ -6132,7 +6132,7 @@
             <a:r>
               <a:rPr sz="1124" b="1" i="0" lang="zh-CN" dirty="0">
                 <a:solidFill>
-                  <a:srgbClr val="3F4854"/>
+                  <a:srgbClr val="27303A"/>
                 </a:solidFill>
                 <a:latin typeface="DejaVu Sans"/>
                 <a:ea typeface="DejaVu Sans"/>
@@ -6168,7 +6168,7 @@
           <a:p>
             <a:pPr algn="ctr" fontAlgn="base">
               <a:lnSpc>
-                <a:spcPts val="1062"/>
+                <a:spcPts val="937"/>
               </a:lnSpc>
               <a:spcBef>
                 <a:spcPts val="0"/>
@@ -6176,9 +6176,9 @@
               <a:spcAft>
                 <a:spcPts val="0"/>
               </a:spcAft>
-              <a:defRPr sz="900" b="0" i="0" lang="zh-CN" dirty="0">
+              <a:defRPr sz="793" b="1" i="0" lang="zh-CN" dirty="0">
                 <a:solidFill>
-                  <a:srgbClr val="3F4854"/>
+                  <a:srgbClr val="27303A"/>
                 </a:solidFill>
                 <a:latin typeface="DejaVu Sans"/>
                 <a:ea typeface="DejaVu Sans"/>
@@ -6186,9 +6186,9 @@
               </a:defRPr>
             </a:pPr>
             <a:r>
-              <a:rPr sz="900" b="0" i="0" lang="zh-CN" dirty="0">
+              <a:rPr sz="793" b="1" i="0" lang="zh-CN" dirty="0">
                 <a:solidFill>
-                  <a:srgbClr val="3F4854"/>
+                  <a:srgbClr val="27303A"/>
                 </a:solidFill>
                 <a:latin typeface="DejaVu Sans"/>
                 <a:ea typeface="DejaVu Sans"/>
@@ -6218,7 +6218,7 @@
           <a:solidFill>
             <a:srgbClr val="FFFFFF"/>
           </a:solidFill>
-          <a:ln w="11112">
+          <a:ln w="15081">
             <a:solidFill>
               <a:srgbClr val="1F7F8C"/>
             </a:solidFill>
@@ -6256,11 +6256,11 @@
         <p:spPr>
           <a:xfrm>
             <a:off x="4921249" y="1190624"/>
-            <a:ext cx="63499" cy="4286249"/>
+            <a:ext cx="87312" cy="4286249"/>
           </a:xfrm>
           <a:prstGeom prst="roundRect">
             <a:avLst>
-              <a:gd name="adj" fmla="val 37500"/>
+              <a:gd name="adj" fmla="val 27272"/>
             </a:avLst>
           </a:prstGeom>
           <a:solidFill>
@@ -6308,9 +6308,9 @@
             <a:avLst/>
           </a:prstGeom>
           <a:noFill/>
-          <a:ln w="7937">
+          <a:ln w="18216">
             <a:solidFill>
-              <a:srgbClr val="1F2937"/>
+              <a:srgbClr val="111A24"/>
             </a:solidFill>
           </a:ln>
           <a:effectLst/>
@@ -6351,9 +6351,9 @@
           <a:prstGeom prst="line">
             <a:avLst/>
           </a:prstGeom>
-          <a:ln w="7937">
+          <a:ln w="18216">
             <a:solidFill>
-              <a:srgbClr val="1F2937"/>
+              <a:srgbClr val="111A24"/>
             </a:solidFill>
           </a:ln>
           <a:effectLst/>
@@ -6387,9 +6387,9 @@
           <a:prstGeom prst="line">
             <a:avLst/>
           </a:prstGeom>
-          <a:ln w="7937">
+          <a:ln w="18216">
             <a:solidFill>
-              <a:srgbClr val="1F2937"/>
+              <a:srgbClr val="111A24"/>
             </a:solidFill>
           </a:ln>
           <a:effectLst/>
@@ -6423,9 +6423,9 @@
           <a:prstGeom prst="line">
             <a:avLst/>
           </a:prstGeom>
-          <a:ln w="7937">
+          <a:ln w="18216">
             <a:solidFill>
-              <a:srgbClr val="1F2937"/>
+              <a:srgbClr val="111A24"/>
             </a:solidFill>
           </a:ln>
           <a:effectLst/>
@@ -6459,9 +6459,9 @@
           <a:prstGeom prst="line">
             <a:avLst/>
           </a:prstGeom>
-          <a:ln w="7937">
+          <a:ln w="18216">
             <a:solidFill>
-              <a:srgbClr val="1F2937"/>
+              <a:srgbClr val="111A24"/>
             </a:solidFill>
           </a:ln>
           <a:effectLst/>
@@ -6554,11 +6554,11 @@
             </a:avLst>
           </a:prstGeom>
           <a:solidFill>
-            <a:srgbClr val="F7F9FB"/>
+            <a:srgbClr val="F4F7FA"/>
           </a:solidFill>
-          <a:ln w="9524">
+          <a:ln w="12699">
             <a:solidFill>
-              <a:srgbClr val="CBD3DA"/>
+              <a:srgbClr val="AEBBC7"/>
             </a:solidFill>
           </a:ln>
           <a:effectLst/>
@@ -6600,9 +6600,9 @@
             <a:avLst/>
           </a:prstGeom>
           <a:noFill/>
-          <a:ln w="7937">
+          <a:ln w="18216">
             <a:solidFill>
-              <a:srgbClr val="1F2937"/>
+              <a:srgbClr val="111A24"/>
             </a:solidFill>
           </a:ln>
           <a:effectLst/>
@@ -6643,9 +6643,9 @@
           <a:prstGeom prst="line">
             <a:avLst/>
           </a:prstGeom>
-          <a:ln w="10318">
+          <a:ln w="23681">
             <a:solidFill>
-              <a:srgbClr val="1F2937"/>
+              <a:srgbClr val="111A24"/>
             </a:solidFill>
           </a:ln>
           <a:effectLst/>
@@ -6679,9 +6679,9 @@
           <a:prstGeom prst="line">
             <a:avLst/>
           </a:prstGeom>
-          <a:ln w="10318">
+          <a:ln w="23681">
             <a:solidFill>
-              <a:srgbClr val="1F2937"/>
+              <a:srgbClr val="111A24"/>
             </a:solidFill>
           </a:ln>
           <a:effectLst/>
@@ -6710,6 +6710,226 @@
         <p:spPr>
           <a:xfrm>
             <a:off x="5508624" y="2071687"/>
+            <a:ext cx="2127249" cy="277812"/>
+          </a:xfrm>
+          <a:prstGeom prst="rect">
+            <a:avLst/>
+          </a:prstGeom>
+          <a:noFill/>
+          <a:effectLst/>
+        </p:spPr>
+        <p:txBody>
+          <a:bodyPr wrap="none" anchor="ctr" tIns="0" rIns="0" bIns="0" lIns="0" anchorCtr="0" vertOverflow="overflow">
+            <a:noAutofit/>
+          </a:bodyPr>
+          <a:lstStyle/>
+          <a:p>
+            <a:pPr algn="l" fontAlgn="base">
+              <a:lnSpc>
+                <a:spcPts val="1453"/>
+              </a:lnSpc>
+              <a:spcBef>
+                <a:spcPts val="0"/>
+              </a:spcBef>
+              <a:spcAft>
+                <a:spcPts val="0"/>
+              </a:spcAft>
+              <a:defRPr sz="1237" b="1" i="0" lang="zh-CN" dirty="0">
+                <a:solidFill>
+                  <a:srgbClr val="27303A"/>
+                </a:solidFill>
+                <a:latin typeface="DejaVu Sans"/>
+                <a:ea typeface="DejaVu Sans"/>
+                <a:cs typeface="DejaVu Sans"/>
+              </a:defRPr>
+            </a:pPr>
+            <a:r>
+              <a:rPr sz="1237" b="1" i="0" lang="zh-CN" dirty="0">
+                <a:solidFill>
+                  <a:srgbClr val="27303A"/>
+                </a:solidFill>
+                <a:latin typeface="DejaVu Sans"/>
+                <a:ea typeface="DejaVu Sans"/>
+                <a:cs typeface="DejaVu Sans"/>
+              </a:rPr>
+              <a:t>Ratio and raw materials</a:t>
+            </a:r>
+          </a:p>
+        </p:txBody>
+      </p:sp>
+      <p:sp>
+        <p:nvSpPr>
+          <p:cNvPr id="75" name="ledr_r1" descr="Editable shape; source id ledr_r1"/>
+          <p:cNvSpPr/>
+          <p:nvPr/>
+        </p:nvSpPr>
+        <p:spPr>
+          <a:xfrm>
+            <a:off x="5143499" y="2532062"/>
+            <a:ext cx="2619374" cy="484187"/>
+          </a:xfrm>
+          <a:prstGeom prst="roundRect">
+            <a:avLst>
+              <a:gd name="adj" fmla="val 9836"/>
+            </a:avLst>
+          </a:prstGeom>
+          <a:solidFill>
+            <a:srgbClr val="F4F7FA"/>
+          </a:solidFill>
+          <a:ln w="12699">
+            <a:solidFill>
+              <a:srgbClr val="AEBBC7"/>
+            </a:solidFill>
+          </a:ln>
+          <a:effectLst/>
+        </p:spPr>
+        <p:style>
+          <a:lnRef idx="1">
+            <a:schemeClr val="accent1"/>
+          </a:lnRef>
+          <a:fillRef idx="3">
+            <a:schemeClr val="accent1"/>
+          </a:fillRef>
+          <a:effectRef idx="0">
+            <a:schemeClr val="accent1"/>
+          </a:effectRef>
+          <a:fontRef idx="minor">
+            <a:schemeClr val="lt1"/>
+          </a:fontRef>
+        </p:style>
+        <p:txBody>
+          <a:bodyPr rtlCol="0" anchor="ctr"/>
+          <a:lstStyle/>
+          <a:p>
+            <a:pPr algn="ctr"/>
+          </a:p>
+        </p:txBody>
+      </p:sp>
+      <p:sp>
+        <p:nvSpPr>
+          <p:cNvPr id="76" name="ledr_c1_b" descr="Editable shape; source id ledr_c1_b"/>
+          <p:cNvSpPr/>
+          <p:nvPr/>
+        </p:nvSpPr>
+        <p:spPr>
+          <a:xfrm>
+            <a:off x="5254624" y="2698749"/>
+            <a:ext cx="142874" cy="142874"/>
+          </a:xfrm>
+          <a:prstGeom prst="rect">
+            <a:avLst/>
+          </a:prstGeom>
+          <a:noFill/>
+          <a:ln w="18216">
+            <a:solidFill>
+              <a:srgbClr val="111A24"/>
+            </a:solidFill>
+          </a:ln>
+          <a:effectLst/>
+        </p:spPr>
+        <p:style>
+          <a:lnRef idx="1">
+            <a:schemeClr val="accent1"/>
+          </a:lnRef>
+          <a:fillRef idx="3">
+            <a:schemeClr val="accent1"/>
+          </a:fillRef>
+          <a:effectRef idx="0">
+            <a:schemeClr val="accent1"/>
+          </a:effectRef>
+          <a:fontRef idx="minor">
+            <a:schemeClr val="lt1"/>
+          </a:fontRef>
+        </p:style>
+        <p:txBody>
+          <a:bodyPr rtlCol="0" anchor="ctr"/>
+          <a:lstStyle/>
+          <a:p>
+            <a:pPr algn="ctr"/>
+          </a:p>
+        </p:txBody>
+      </p:sp>
+      <p:cxnSp>
+        <p:nvCxnSpPr>
+          <p:cNvPr id="77" name="ledr_c1_k_0" descr="Editable line; source id ledr_c1_k_0"/>
+          <p:cNvCxnSpPr/>
+          <p:nvPr/>
+        </p:nvCxnSpPr>
+        <p:spPr>
+          <a:xfrm>
+            <a:off x="5286374" y="2770187"/>
+            <a:ext cx="31750" cy="31750"/>
+          </a:xfrm>
+          <a:prstGeom prst="line">
+            <a:avLst/>
+          </a:prstGeom>
+          <a:ln w="23681">
+            <a:solidFill>
+              <a:srgbClr val="111A24"/>
+            </a:solidFill>
+          </a:ln>
+          <a:effectLst/>
+        </p:spPr>
+        <p:style>
+          <a:lnRef idx="2">
+            <a:schemeClr val="accent1"/>
+          </a:lnRef>
+          <a:fillRef idx="0">
+            <a:schemeClr val="accent1"/>
+          </a:fillRef>
+          <a:effectRef idx="0">
+            <a:schemeClr val="accent1"/>
+          </a:effectRef>
+          <a:fontRef idx="minor">
+            <a:schemeClr val="tx1"/>
+          </a:fontRef>
+        </p:style>
+      </p:cxnSp>
+      <p:cxnSp>
+        <p:nvCxnSpPr>
+          <p:cNvPr id="78" name="ledr_c1_k_1" descr="Editable line; source id ledr_c1_k_1"/>
+          <p:cNvCxnSpPr/>
+          <p:nvPr/>
+        </p:nvCxnSpPr>
+        <p:spPr>
+          <a:xfrm flipV="1">
+            <a:off x="5318124" y="2738437"/>
+            <a:ext cx="55563" cy="63500"/>
+          </a:xfrm>
+          <a:prstGeom prst="line">
+            <a:avLst/>
+          </a:prstGeom>
+          <a:ln w="23681">
+            <a:solidFill>
+              <a:srgbClr val="111A24"/>
+            </a:solidFill>
+          </a:ln>
+          <a:effectLst/>
+        </p:spPr>
+        <p:style>
+          <a:lnRef idx="2">
+            <a:schemeClr val="accent1"/>
+          </a:lnRef>
+          <a:fillRef idx="0">
+            <a:schemeClr val="accent1"/>
+          </a:fillRef>
+          <a:effectRef idx="0">
+            <a:schemeClr val="accent1"/>
+          </a:effectRef>
+          <a:fontRef idx="minor">
+            <a:schemeClr val="tx1"/>
+          </a:fontRef>
+        </p:style>
+      </p:cxnSp>
+      <p:sp>
+        <p:nvSpPr>
+          <p:cNvPr id="79" name="ledr_x1" descr="Editable text; source id ledr_x1"/>
+          <p:cNvSpPr txBox="1"/>
+          <p:nvPr/>
+        </p:nvSpPr>
+        <p:spPr>
+          <a:xfrm>
+            <a:off x="5508624" y="2627312"/>
             <a:ext cx="2127249" cy="277812"/>
           </a:xfrm>
           <a:prstGeom prst="rect">
@@ -6734,9 +6954,9 @@
               <a:spcAft>
                 <a:spcPts val="0"/>
               </a:spcAft>
-              <a:defRPr sz="1249" b="0" i="0" lang="zh-CN" dirty="0">
+              <a:defRPr sz="1249" b="1" i="0" lang="zh-CN" dirty="0">
                 <a:solidFill>
-                  <a:srgbClr val="3F4854"/>
+                  <a:srgbClr val="27303A"/>
                 </a:solidFill>
                 <a:latin typeface="DejaVu Sans"/>
                 <a:ea typeface="DejaVu Sans"/>
@@ -6744,28 +6964,28 @@
               </a:defRPr>
             </a:pPr>
             <a:r>
-              <a:rPr sz="1249" b="0" i="0" lang="zh-CN" dirty="0">
+              <a:rPr sz="1249" b="1" i="0" lang="zh-CN" dirty="0">
                 <a:solidFill>
-                  <a:srgbClr val="3F4854"/>
+                  <a:srgbClr val="27303A"/>
                 </a:solidFill>
                 <a:latin typeface="DejaVu Sans"/>
                 <a:ea typeface="DejaVu Sans"/>
                 <a:cs typeface="DejaVu Sans"/>
               </a:rPr>
-              <a:t>Ratio and raw materials</a:t>
+              <a:t>Thermal history</a:t>
             </a:r>
           </a:p>
         </p:txBody>
       </p:sp>
       <p:sp>
         <p:nvSpPr>
-          <p:cNvPr id="75" name="ledr_r1" descr="Editable shape; source id ledr_r1"/>
+          <p:cNvPr id="80" name="ledr_r2" descr="Editable shape; source id ledr_r2"/>
           <p:cNvSpPr/>
           <p:nvPr/>
         </p:nvSpPr>
         <p:spPr>
           <a:xfrm>
-            <a:off x="5143499" y="2532062"/>
+            <a:off x="5143499" y="3087687"/>
             <a:ext cx="2619374" cy="484187"/>
           </a:xfrm>
           <a:prstGeom prst="roundRect">
@@ -6774,11 +6994,11 @@
             </a:avLst>
           </a:prstGeom>
           <a:solidFill>
-            <a:srgbClr val="F7F9FB"/>
+            <a:srgbClr val="F4F7FA"/>
           </a:solidFill>
-          <a:ln w="9524">
+          <a:ln w="12699">
             <a:solidFill>
-              <a:srgbClr val="CBD3DA"/>
+              <a:srgbClr val="AEBBC7"/>
             </a:solidFill>
           </a:ln>
           <a:effectLst/>
@@ -6807,22 +7027,22 @@
       </p:sp>
       <p:sp>
         <p:nvSpPr>
-          <p:cNvPr id="76" name="ledr_c1_b" descr="Editable shape; source id ledr_c1_b"/>
+          <p:cNvPr id="81" name="ledr_c2_b" descr="Editable shape; source id ledr_c2_b"/>
           <p:cNvSpPr/>
           <p:nvPr/>
         </p:nvSpPr>
         <p:spPr>
           <a:xfrm>
-            <a:off x="5254624" y="2698749"/>
+            <a:off x="5254624" y="3254374"/>
             <a:ext cx="142874" cy="142874"/>
           </a:xfrm>
           <a:prstGeom prst="rect">
             <a:avLst/>
           </a:prstGeom>
           <a:noFill/>
-          <a:ln w="7937">
+          <a:ln w="18216">
             <a:solidFill>
-              <a:srgbClr val="1F2937"/>
+              <a:srgbClr val="111A24"/>
             </a:solidFill>
           </a:ln>
           <a:effectLst/>
@@ -6851,21 +7071,21 @@
       </p:sp>
       <p:cxnSp>
         <p:nvCxnSpPr>
-          <p:cNvPr id="77" name="ledr_c1_k_0" descr="Editable line; source id ledr_c1_k_0"/>
+          <p:cNvPr id="82" name="ledr_c2_k_0" descr="Editable line; source id ledr_c2_k_0"/>
           <p:cNvCxnSpPr/>
           <p:nvPr/>
         </p:nvCxnSpPr>
         <p:spPr>
           <a:xfrm>
-            <a:off x="5286374" y="2770187"/>
+            <a:off x="5286374" y="3333749"/>
             <a:ext cx="31750" cy="31750"/>
           </a:xfrm>
           <a:prstGeom prst="line">
             <a:avLst/>
           </a:prstGeom>
-          <a:ln w="10318">
+          <a:ln w="23681">
             <a:solidFill>
-              <a:srgbClr val="1F2937"/>
+              <a:srgbClr val="111A24"/>
             </a:solidFill>
           </a:ln>
           <a:effectLst/>
@@ -6887,21 +7107,21 @@
       </p:cxnSp>
       <p:cxnSp>
         <p:nvCxnSpPr>
-          <p:cNvPr id="78" name="ledr_c1_k_1" descr="Editable line; source id ledr_c1_k_1"/>
+          <p:cNvPr id="83" name="ledr_c2_k_1" descr="Editable line; source id ledr_c2_k_1"/>
           <p:cNvCxnSpPr/>
           <p:nvPr/>
         </p:nvCxnSpPr>
         <p:spPr>
           <a:xfrm flipV="1">
-            <a:off x="5318124" y="2738437"/>
-            <a:ext cx="55563" cy="63500"/>
+            <a:off x="5318124" y="3294062"/>
+            <a:ext cx="55563" cy="71437"/>
           </a:xfrm>
           <a:prstGeom prst="line">
             <a:avLst/>
           </a:prstGeom>
-          <a:ln w="10318">
+          <a:ln w="23681">
             <a:solidFill>
-              <a:srgbClr val="1F2937"/>
+              <a:srgbClr val="111A24"/>
             </a:solidFill>
           </a:ln>
           <a:effectLst/>
@@ -6923,13 +7143,13 @@
       </p:cxnSp>
       <p:sp>
         <p:nvSpPr>
-          <p:cNvPr id="79" name="ledr_x1" descr="Editable text; source id ledr_x1"/>
+          <p:cNvPr id="84" name="ledr_x2" descr="Editable text; source id ledr_x2"/>
           <p:cNvSpPr txBox="1"/>
           <p:nvPr/>
         </p:nvSpPr>
         <p:spPr>
           <a:xfrm>
-            <a:off x="5508624" y="2627312"/>
+            <a:off x="5508624" y="3190874"/>
             <a:ext cx="2127249" cy="277812"/>
           </a:xfrm>
           <a:prstGeom prst="rect">
@@ -6954,9 +7174,9 @@
               <a:spcAft>
                 <a:spcPts val="0"/>
               </a:spcAft>
-              <a:defRPr sz="1249" b="0" i="0" lang="zh-CN" dirty="0">
+              <a:defRPr sz="1249" b="1" i="0" lang="zh-CN" dirty="0">
                 <a:solidFill>
-                  <a:srgbClr val="3F4854"/>
+                  <a:srgbClr val="27303A"/>
                 </a:solidFill>
                 <a:latin typeface="DejaVu Sans"/>
                 <a:ea typeface="DejaVu Sans"/>
@@ -6964,28 +7184,28 @@
               </a:defRPr>
             </a:pPr>
             <a:r>
-              <a:rPr sz="1249" b="0" i="0" lang="zh-CN" dirty="0">
+              <a:rPr sz="1249" b="1" i="0" lang="zh-CN" dirty="0">
                 <a:solidFill>
-                  <a:srgbClr val="3F4854"/>
+                  <a:srgbClr val="27303A"/>
                 </a:solidFill>
                 <a:latin typeface="DejaVu Sans"/>
                 <a:ea typeface="DejaVu Sans"/>
                 <a:cs typeface="DejaVu Sans"/>
               </a:rPr>
-              <a:t>Thermal history</a:t>
+              <a:t>Atmosphere</a:t>
             </a:r>
           </a:p>
         </p:txBody>
       </p:sp>
       <p:sp>
         <p:nvSpPr>
-          <p:cNvPr id="80" name="ledr_r2" descr="Editable shape; source id ledr_r2"/>
+          <p:cNvPr id="85" name="ledr_r3" descr="Editable shape; source id ledr_r3"/>
           <p:cNvSpPr/>
           <p:nvPr/>
         </p:nvSpPr>
         <p:spPr>
           <a:xfrm>
-            <a:off x="5143499" y="3087687"/>
+            <a:off x="5143499" y="3651249"/>
             <a:ext cx="2619374" cy="484187"/>
           </a:xfrm>
           <a:prstGeom prst="roundRect">
@@ -6994,11 +7214,11 @@
             </a:avLst>
           </a:prstGeom>
           <a:solidFill>
-            <a:srgbClr val="F7F9FB"/>
+            <a:srgbClr val="F4F7FA"/>
           </a:solidFill>
-          <a:ln w="9524">
+          <a:ln w="12699">
             <a:solidFill>
-              <a:srgbClr val="CBD3DA"/>
+              <a:srgbClr val="AEBBC7"/>
             </a:solidFill>
           </a:ln>
           <a:effectLst/>
@@ -7027,22 +7247,22 @@
       </p:sp>
       <p:sp>
         <p:nvSpPr>
-          <p:cNvPr id="81" name="ledr_c2_b" descr="Editable shape; source id ledr_c2_b"/>
+          <p:cNvPr id="86" name="ledr_c3_b" descr="Editable shape; source id ledr_c3_b"/>
           <p:cNvSpPr/>
           <p:nvPr/>
         </p:nvSpPr>
         <p:spPr>
           <a:xfrm>
-            <a:off x="5254624" y="3254374"/>
+            <a:off x="5254624" y="3817937"/>
             <a:ext cx="142874" cy="142874"/>
           </a:xfrm>
           <a:prstGeom prst="rect">
             <a:avLst/>
           </a:prstGeom>
           <a:noFill/>
-          <a:ln w="7937">
+          <a:ln w="18216">
             <a:solidFill>
-              <a:srgbClr val="1F2937"/>
+              <a:srgbClr val="111A24"/>
             </a:solidFill>
           </a:ln>
           <a:effectLst/>
@@ -7071,21 +7291,21 @@
       </p:sp>
       <p:cxnSp>
         <p:nvCxnSpPr>
-          <p:cNvPr id="82" name="ledr_c2_k_0" descr="Editable line; source id ledr_c2_k_0"/>
+          <p:cNvPr id="87" name="ledr_c3_k_0" descr="Editable line; source id ledr_c3_k_0"/>
           <p:cNvCxnSpPr/>
           <p:nvPr/>
         </p:nvCxnSpPr>
         <p:spPr>
           <a:xfrm>
-            <a:off x="5286374" y="3333749"/>
+            <a:off x="5286374" y="3897312"/>
             <a:ext cx="31750" cy="31750"/>
           </a:xfrm>
           <a:prstGeom prst="line">
             <a:avLst/>
           </a:prstGeom>
-          <a:ln w="10318">
+          <a:ln w="23681">
             <a:solidFill>
-              <a:srgbClr val="1F2937"/>
+              <a:srgbClr val="111A24"/>
             </a:solidFill>
           </a:ln>
           <a:effectLst/>
@@ -7107,21 +7327,21 @@
       </p:cxnSp>
       <p:cxnSp>
         <p:nvCxnSpPr>
-          <p:cNvPr id="83" name="ledr_c2_k_1" descr="Editable line; source id ledr_c2_k_1"/>
+          <p:cNvPr id="88" name="ledr_c3_k_1" descr="Editable line; source id ledr_c3_k_1"/>
           <p:cNvCxnSpPr/>
           <p:nvPr/>
         </p:nvCxnSpPr>
         <p:spPr>
           <a:xfrm flipV="1">
-            <a:off x="5318124" y="3294062"/>
-            <a:ext cx="55563" cy="71437"/>
+            <a:off x="5318124" y="3857624"/>
+            <a:ext cx="55563" cy="71438"/>
           </a:xfrm>
           <a:prstGeom prst="line">
             <a:avLst/>
           </a:prstGeom>
-          <a:ln w="10318">
+          <a:ln w="23681">
             <a:solidFill>
-              <a:srgbClr val="1F2937"/>
+              <a:srgbClr val="111A24"/>
             </a:solidFill>
           </a:ln>
           <a:effectLst/>
@@ -7143,13 +7363,13 @@
       </p:cxnSp>
       <p:sp>
         <p:nvSpPr>
-          <p:cNvPr id="84" name="ledr_x2" descr="Editable text; source id ledr_x2"/>
+          <p:cNvPr id="89" name="ledr_x3" descr="Editable text; source id ledr_x3"/>
           <p:cNvSpPr txBox="1"/>
           <p:nvPr/>
         </p:nvSpPr>
         <p:spPr>
           <a:xfrm>
-            <a:off x="5508624" y="3190874"/>
+            <a:off x="5508624" y="3754437"/>
             <a:ext cx="2127249" cy="277812"/>
           </a:xfrm>
           <a:prstGeom prst="rect">
@@ -7174,9 +7394,9 @@
               <a:spcAft>
                 <a:spcPts val="0"/>
               </a:spcAft>
-              <a:defRPr sz="1249" b="0" i="0" lang="zh-CN" dirty="0">
+              <a:defRPr sz="1249" b="1" i="0" lang="zh-CN" dirty="0">
                 <a:solidFill>
-                  <a:srgbClr val="3F4854"/>
+                  <a:srgbClr val="27303A"/>
                 </a:solidFill>
                 <a:latin typeface="DejaVu Sans"/>
                 <a:ea typeface="DejaVu Sans"/>
@@ -7184,28 +7404,28 @@
               </a:defRPr>
             </a:pPr>
             <a:r>
-              <a:rPr sz="1249" b="0" i="0" lang="zh-CN" dirty="0">
+              <a:rPr sz="1249" b="1" i="0" lang="zh-CN" dirty="0">
                 <a:solidFill>
-                  <a:srgbClr val="3F4854"/>
+                  <a:srgbClr val="27303A"/>
                 </a:solidFill>
                 <a:latin typeface="DejaVu Sans"/>
                 <a:ea typeface="DejaVu Sans"/>
                 <a:cs typeface="DejaVu Sans"/>
               </a:rPr>
-              <a:t>Atmosphere</a:t>
+              <a:t>Crucible and flux</a:t>
             </a:r>
           </a:p>
         </p:txBody>
       </p:sp>
       <p:sp>
         <p:nvSpPr>
-          <p:cNvPr id="85" name="ledr_r3" descr="Editable shape; source id ledr_r3"/>
+          <p:cNvPr id="90" name="ledr_r4" descr="Editable shape; source id ledr_r4"/>
           <p:cNvSpPr/>
           <p:nvPr/>
         </p:nvSpPr>
         <p:spPr>
           <a:xfrm>
-            <a:off x="5143499" y="3651249"/>
+            <a:off x="5143499" y="4214812"/>
             <a:ext cx="2619374" cy="484187"/>
           </a:xfrm>
           <a:prstGeom prst="roundRect">
@@ -7214,11 +7434,11 @@
             </a:avLst>
           </a:prstGeom>
           <a:solidFill>
-            <a:srgbClr val="F7F9FB"/>
+            <a:srgbClr val="F4F7FA"/>
           </a:solidFill>
-          <a:ln w="9524">
+          <a:ln w="12699">
             <a:solidFill>
-              <a:srgbClr val="CBD3DA"/>
+              <a:srgbClr val="AEBBC7"/>
             </a:solidFill>
           </a:ln>
           <a:effectLst/>
@@ -7247,22 +7467,22 @@
       </p:sp>
       <p:sp>
         <p:nvSpPr>
-          <p:cNvPr id="86" name="ledr_c3_b" descr="Editable shape; source id ledr_c3_b"/>
+          <p:cNvPr id="91" name="ledr_c4_b" descr="Editable shape; source id ledr_c4_b"/>
           <p:cNvSpPr/>
           <p:nvPr/>
         </p:nvSpPr>
         <p:spPr>
           <a:xfrm>
-            <a:off x="5254624" y="3817937"/>
+            <a:off x="5254624" y="4381499"/>
             <a:ext cx="142874" cy="142874"/>
           </a:xfrm>
           <a:prstGeom prst="rect">
             <a:avLst/>
           </a:prstGeom>
           <a:noFill/>
-          <a:ln w="7937">
+          <a:ln w="18216">
             <a:solidFill>
-              <a:srgbClr val="1F2937"/>
+              <a:srgbClr val="111A24"/>
             </a:solidFill>
           </a:ln>
           <a:effectLst/>
@@ -7291,21 +7511,21 @@
       </p:sp>
       <p:cxnSp>
         <p:nvCxnSpPr>
-          <p:cNvPr id="87" name="ledr_c3_k_0" descr="Editable line; source id ledr_c3_k_0"/>
+          <p:cNvPr id="92" name="ledr_c4_k_0" descr="Editable line; source id ledr_c4_k_0"/>
           <p:cNvCxnSpPr/>
           <p:nvPr/>
         </p:nvCxnSpPr>
         <p:spPr>
           <a:xfrm>
-            <a:off x="5286374" y="3897312"/>
+            <a:off x="5286374" y="4452937"/>
             <a:ext cx="31750" cy="31750"/>
           </a:xfrm>
           <a:prstGeom prst="line">
             <a:avLst/>
           </a:prstGeom>
-          <a:ln w="10318">
+          <a:ln w="23681">
             <a:solidFill>
-              <a:srgbClr val="1F2937"/>
+              <a:srgbClr val="111A24"/>
             </a:solidFill>
           </a:ln>
           <a:effectLst/>
@@ -7327,21 +7547,21 @@
       </p:cxnSp>
       <p:cxnSp>
         <p:nvCxnSpPr>
-          <p:cNvPr id="88" name="ledr_c3_k_1" descr="Editable line; source id ledr_c3_k_1"/>
+          <p:cNvPr id="93" name="ledr_c4_k_1" descr="Editable line; source id ledr_c4_k_1"/>
           <p:cNvCxnSpPr/>
           <p:nvPr/>
         </p:nvCxnSpPr>
         <p:spPr>
           <a:xfrm flipV="1">
-            <a:off x="5318124" y="3857624"/>
-            <a:ext cx="55563" cy="71438"/>
+            <a:off x="5318124" y="4421187"/>
+            <a:ext cx="55563" cy="63500"/>
           </a:xfrm>
           <a:prstGeom prst="line">
             <a:avLst/>
           </a:prstGeom>
-          <a:ln w="10318">
+          <a:ln w="23681">
             <a:solidFill>
-              <a:srgbClr val="1F2937"/>
+              <a:srgbClr val="111A24"/>
             </a:solidFill>
           </a:ln>
           <a:effectLst/>
@@ -7363,13 +7583,13 @@
       </p:cxnSp>
       <p:sp>
         <p:nvSpPr>
-          <p:cNvPr id="89" name="ledr_x3" descr="Editable text; source id ledr_x3"/>
+          <p:cNvPr id="94" name="ledr_x4" descr="Editable text; source id ledr_x4"/>
           <p:cNvSpPr txBox="1"/>
           <p:nvPr/>
         </p:nvSpPr>
         <p:spPr>
           <a:xfrm>
-            <a:off x="5508624" y="3754437"/>
+            <a:off x="5508624" y="4317999"/>
             <a:ext cx="2127249" cy="277812"/>
           </a:xfrm>
           <a:prstGeom prst="rect">
@@ -7394,9 +7614,9 @@
               <a:spcAft>
                 <a:spcPts val="0"/>
               </a:spcAft>
-              <a:defRPr sz="1249" b="0" i="0" lang="zh-CN" dirty="0">
+              <a:defRPr sz="1249" b="1" i="0" lang="zh-CN" dirty="0">
                 <a:solidFill>
-                  <a:srgbClr val="3F4854"/>
+                  <a:srgbClr val="27303A"/>
                 </a:solidFill>
                 <a:latin typeface="DejaVu Sans"/>
                 <a:ea typeface="DejaVu Sans"/>
@@ -7404,28 +7624,28 @@
               </a:defRPr>
             </a:pPr>
             <a:r>
-              <a:rPr sz="1249" b="0" i="0" lang="zh-CN" dirty="0">
+              <a:rPr sz="1249" b="1" i="0" lang="zh-CN" dirty="0">
                 <a:solidFill>
-                  <a:srgbClr val="3F4854"/>
+                  <a:srgbClr val="27303A"/>
                 </a:solidFill>
                 <a:latin typeface="DejaVu Sans"/>
                 <a:ea typeface="DejaVu Sans"/>
                 <a:cs typeface="DejaVu Sans"/>
               </a:rPr>
-              <a:t>Crucible and flux</a:t>
+              <a:t>Cooling and separation</a:t>
             </a:r>
           </a:p>
         </p:txBody>
       </p:sp>
       <p:sp>
         <p:nvSpPr>
-          <p:cNvPr id="90" name="ledr_r4" descr="Editable shape; source id ledr_r4"/>
+          <p:cNvPr id="95" name="ledr_r5" descr="Editable shape; source id ledr_r5"/>
           <p:cNvSpPr/>
           <p:nvPr/>
         </p:nvSpPr>
         <p:spPr>
           <a:xfrm>
-            <a:off x="5143499" y="4214812"/>
+            <a:off x="5143499" y="4770437"/>
             <a:ext cx="2619374" cy="484187"/>
           </a:xfrm>
           <a:prstGeom prst="roundRect">
@@ -7434,11 +7654,11 @@
             </a:avLst>
           </a:prstGeom>
           <a:solidFill>
-            <a:srgbClr val="F7F9FB"/>
+            <a:srgbClr val="F4F7FA"/>
           </a:solidFill>
-          <a:ln w="9524">
+          <a:ln w="12699">
             <a:solidFill>
-              <a:srgbClr val="CBD3DA"/>
+              <a:srgbClr val="AEBBC7"/>
             </a:solidFill>
           </a:ln>
           <a:effectLst/>
@@ -7467,22 +7687,22 @@
       </p:sp>
       <p:sp>
         <p:nvSpPr>
-          <p:cNvPr id="91" name="ledr_c4_b" descr="Editable shape; source id ledr_c4_b"/>
+          <p:cNvPr id="96" name="ledr_c5_b" descr="Editable shape; source id ledr_c5_b"/>
           <p:cNvSpPr/>
           <p:nvPr/>
         </p:nvSpPr>
         <p:spPr>
           <a:xfrm>
-            <a:off x="5254624" y="4381499"/>
+            <a:off x="5254624" y="4937124"/>
             <a:ext cx="142874" cy="142874"/>
           </a:xfrm>
           <a:prstGeom prst="rect">
             <a:avLst/>
           </a:prstGeom>
           <a:noFill/>
-          <a:ln w="7937">
+          <a:ln w="18216">
             <a:solidFill>
-              <a:srgbClr val="1F2937"/>
+              <a:srgbClr val="111A24"/>
             </a:solidFill>
           </a:ln>
           <a:effectLst/>
@@ -7511,21 +7731,21 @@
       </p:sp>
       <p:cxnSp>
         <p:nvCxnSpPr>
-          <p:cNvPr id="92" name="ledr_c4_k_0" descr="Editable line; source id ledr_c4_k_0"/>
+          <p:cNvPr id="97" name="ledr_c5_k_0" descr="Editable line; source id ledr_c5_k_0"/>
           <p:cNvCxnSpPr/>
           <p:nvPr/>
         </p:nvCxnSpPr>
         <p:spPr>
           <a:xfrm>
-            <a:off x="5286374" y="4452937"/>
+            <a:off x="5286374" y="5016499"/>
             <a:ext cx="31750" cy="31750"/>
           </a:xfrm>
           <a:prstGeom prst="line">
             <a:avLst/>
           </a:prstGeom>
-          <a:ln w="10318">
+          <a:ln w="23681">
             <a:solidFill>
-              <a:srgbClr val="1F2937"/>
+              <a:srgbClr val="111A24"/>
             </a:solidFill>
           </a:ln>
           <a:effectLst/>
@@ -7547,21 +7767,21 @@
       </p:cxnSp>
       <p:cxnSp>
         <p:nvCxnSpPr>
-          <p:cNvPr id="93" name="ledr_c4_k_1" descr="Editable line; source id ledr_c4_k_1"/>
+          <p:cNvPr id="98" name="ledr_c5_k_1" descr="Editable line; source id ledr_c5_k_1"/>
           <p:cNvCxnSpPr/>
           <p:nvPr/>
         </p:nvCxnSpPr>
         <p:spPr>
           <a:xfrm flipV="1">
-            <a:off x="5318124" y="4421187"/>
-            <a:ext cx="55563" cy="63500"/>
+            <a:off x="5318124" y="4976812"/>
+            <a:ext cx="55563" cy="71437"/>
           </a:xfrm>
           <a:prstGeom prst="line">
             <a:avLst/>
           </a:prstGeom>
-          <a:ln w="10318">
+          <a:ln w="23681">
             <a:solidFill>
-              <a:srgbClr val="1F2937"/>
+              <a:srgbClr val="111A24"/>
             </a:solidFill>
           </a:ln>
           <a:effectLst/>
@@ -7583,13 +7803,13 @@
       </p:cxnSp>
       <p:sp>
         <p:nvSpPr>
-          <p:cNvPr id="94" name="ledr_x4" descr="Editable text; source id ledr_x4"/>
+          <p:cNvPr id="99" name="ledr_x5" descr="Editable text; source id ledr_x5"/>
           <p:cNvSpPr txBox="1"/>
           <p:nvPr/>
         </p:nvSpPr>
         <p:spPr>
           <a:xfrm>
-            <a:off x="5508624" y="4317999"/>
+            <a:off x="5508624" y="4873624"/>
             <a:ext cx="2127249" cy="277812"/>
           </a:xfrm>
           <a:prstGeom prst="rect">
@@ -7614,9 +7834,9 @@
               <a:spcAft>
                 <a:spcPts val="0"/>
               </a:spcAft>
-              <a:defRPr sz="1249" b="0" i="0" lang="zh-CN" dirty="0">
+              <a:defRPr sz="1249" b="1" i="0" lang="zh-CN" dirty="0">
                 <a:solidFill>
-                  <a:srgbClr val="3F4854"/>
+                  <a:srgbClr val="27303A"/>
                 </a:solidFill>
                 <a:latin typeface="DejaVu Sans"/>
                 <a:ea typeface="DejaVu Sans"/>
@@ -7624,229 +7844,9 @@
               </a:defRPr>
             </a:pPr>
             <a:r>
-              <a:rPr sz="1249" b="0" i="0" lang="zh-CN" dirty="0">
+              <a:rPr sz="1249" b="1" i="0" lang="zh-CN" dirty="0">
                 <a:solidFill>
-                  <a:srgbClr val="3F4854"/>
-                </a:solidFill>
-                <a:latin typeface="DejaVu Sans"/>
-                <a:ea typeface="DejaVu Sans"/>
-                <a:cs typeface="DejaVu Sans"/>
-              </a:rPr>
-              <a:t>Cooling and separation</a:t>
-            </a:r>
-          </a:p>
-        </p:txBody>
-      </p:sp>
-      <p:sp>
-        <p:nvSpPr>
-          <p:cNvPr id="95" name="ledr_r5" descr="Editable shape; source id ledr_r5"/>
-          <p:cNvSpPr/>
-          <p:nvPr/>
-        </p:nvSpPr>
-        <p:spPr>
-          <a:xfrm>
-            <a:off x="5143499" y="4770437"/>
-            <a:ext cx="2619374" cy="484187"/>
-          </a:xfrm>
-          <a:prstGeom prst="roundRect">
-            <a:avLst>
-              <a:gd name="adj" fmla="val 9836"/>
-            </a:avLst>
-          </a:prstGeom>
-          <a:solidFill>
-            <a:srgbClr val="F7F9FB"/>
-          </a:solidFill>
-          <a:ln w="9524">
-            <a:solidFill>
-              <a:srgbClr val="CBD3DA"/>
-            </a:solidFill>
-          </a:ln>
-          <a:effectLst/>
-        </p:spPr>
-        <p:style>
-          <a:lnRef idx="1">
-            <a:schemeClr val="accent1"/>
-          </a:lnRef>
-          <a:fillRef idx="3">
-            <a:schemeClr val="accent1"/>
-          </a:fillRef>
-          <a:effectRef idx="0">
-            <a:schemeClr val="accent1"/>
-          </a:effectRef>
-          <a:fontRef idx="minor">
-            <a:schemeClr val="lt1"/>
-          </a:fontRef>
-        </p:style>
-        <p:txBody>
-          <a:bodyPr rtlCol="0" anchor="ctr"/>
-          <a:lstStyle/>
-          <a:p>
-            <a:pPr algn="ctr"/>
-          </a:p>
-        </p:txBody>
-      </p:sp>
-      <p:sp>
-        <p:nvSpPr>
-          <p:cNvPr id="96" name="ledr_c5_b" descr="Editable shape; source id ledr_c5_b"/>
-          <p:cNvSpPr/>
-          <p:nvPr/>
-        </p:nvSpPr>
-        <p:spPr>
-          <a:xfrm>
-            <a:off x="5254624" y="4937124"/>
-            <a:ext cx="142874" cy="142874"/>
-          </a:xfrm>
-          <a:prstGeom prst="rect">
-            <a:avLst/>
-          </a:prstGeom>
-          <a:noFill/>
-          <a:ln w="7937">
-            <a:solidFill>
-              <a:srgbClr val="1F2937"/>
-            </a:solidFill>
-          </a:ln>
-          <a:effectLst/>
-        </p:spPr>
-        <p:style>
-          <a:lnRef idx="1">
-            <a:schemeClr val="accent1"/>
-          </a:lnRef>
-          <a:fillRef idx="3">
-            <a:schemeClr val="accent1"/>
-          </a:fillRef>
-          <a:effectRef idx="0">
-            <a:schemeClr val="accent1"/>
-          </a:effectRef>
-          <a:fontRef idx="minor">
-            <a:schemeClr val="lt1"/>
-          </a:fontRef>
-        </p:style>
-        <p:txBody>
-          <a:bodyPr rtlCol="0" anchor="ctr"/>
-          <a:lstStyle/>
-          <a:p>
-            <a:pPr algn="ctr"/>
-          </a:p>
-        </p:txBody>
-      </p:sp>
-      <p:cxnSp>
-        <p:nvCxnSpPr>
-          <p:cNvPr id="97" name="ledr_c5_k_0" descr="Editable line; source id ledr_c5_k_0"/>
-          <p:cNvCxnSpPr/>
-          <p:nvPr/>
-        </p:nvCxnSpPr>
-        <p:spPr>
-          <a:xfrm>
-            <a:off x="5286374" y="5016499"/>
-            <a:ext cx="31750" cy="31750"/>
-          </a:xfrm>
-          <a:prstGeom prst="line">
-            <a:avLst/>
-          </a:prstGeom>
-          <a:ln w="10318">
-            <a:solidFill>
-              <a:srgbClr val="1F2937"/>
-            </a:solidFill>
-          </a:ln>
-          <a:effectLst/>
-        </p:spPr>
-        <p:style>
-          <a:lnRef idx="2">
-            <a:schemeClr val="accent1"/>
-          </a:lnRef>
-          <a:fillRef idx="0">
-            <a:schemeClr val="accent1"/>
-          </a:fillRef>
-          <a:effectRef idx="0">
-            <a:schemeClr val="accent1"/>
-          </a:effectRef>
-          <a:fontRef idx="minor">
-            <a:schemeClr val="tx1"/>
-          </a:fontRef>
-        </p:style>
-      </p:cxnSp>
-      <p:cxnSp>
-        <p:nvCxnSpPr>
-          <p:cNvPr id="98" name="ledr_c5_k_1" descr="Editable line; source id ledr_c5_k_1"/>
-          <p:cNvCxnSpPr/>
-          <p:nvPr/>
-        </p:nvCxnSpPr>
-        <p:spPr>
-          <a:xfrm flipV="1">
-            <a:off x="5318124" y="4976812"/>
-            <a:ext cx="55563" cy="71437"/>
-          </a:xfrm>
-          <a:prstGeom prst="line">
-            <a:avLst/>
-          </a:prstGeom>
-          <a:ln w="10318">
-            <a:solidFill>
-              <a:srgbClr val="1F2937"/>
-            </a:solidFill>
-          </a:ln>
-          <a:effectLst/>
-        </p:spPr>
-        <p:style>
-          <a:lnRef idx="2">
-            <a:schemeClr val="accent1"/>
-          </a:lnRef>
-          <a:fillRef idx="0">
-            <a:schemeClr val="accent1"/>
-          </a:fillRef>
-          <a:effectRef idx="0">
-            <a:schemeClr val="accent1"/>
-          </a:effectRef>
-          <a:fontRef idx="minor">
-            <a:schemeClr val="tx1"/>
-          </a:fontRef>
-        </p:style>
-      </p:cxnSp>
-      <p:sp>
-        <p:nvSpPr>
-          <p:cNvPr id="99" name="ledr_x5" descr="Editable text; source id ledr_x5"/>
-          <p:cNvSpPr txBox="1"/>
-          <p:nvPr/>
-        </p:nvSpPr>
-        <p:spPr>
-          <a:xfrm>
-            <a:off x="5508624" y="4873624"/>
-            <a:ext cx="2127249" cy="277812"/>
-          </a:xfrm>
-          <a:prstGeom prst="rect">
-            <a:avLst/>
-          </a:prstGeom>
-          <a:noFill/>
-          <a:effectLst/>
-        </p:spPr>
-        <p:txBody>
-          <a:bodyPr wrap="none" anchor="ctr" tIns="0" rIns="0" bIns="0" lIns="0" anchorCtr="0" vertOverflow="overflow">
-            <a:noAutofit/>
-          </a:bodyPr>
-          <a:lstStyle/>
-          <a:p>
-            <a:pPr algn="l" fontAlgn="base">
-              <a:lnSpc>
-                <a:spcPts val="1468"/>
-              </a:lnSpc>
-              <a:spcBef>
-                <a:spcPts val="0"/>
-              </a:spcBef>
-              <a:spcAft>
-                <a:spcPts val="0"/>
-              </a:spcAft>
-              <a:defRPr sz="1249" b="0" i="0" lang="zh-CN" dirty="0">
-                <a:solidFill>
-                  <a:srgbClr val="3F4854"/>
-                </a:solidFill>
-                <a:latin typeface="DejaVu Sans"/>
-                <a:ea typeface="DejaVu Sans"/>
-                <a:cs typeface="DejaVu Sans"/>
-              </a:defRPr>
-            </a:pPr>
-            <a:r>
-              <a:rPr sz="1249" b="0" i="0" lang="zh-CN" dirty="0">
-                <a:solidFill>
-                  <a:srgbClr val="3F4854"/>
+                  <a:srgbClr val="27303A"/>
                 </a:solidFill>
                 <a:latin typeface="DejaVu Sans"/>
                 <a:ea typeface="DejaVu Sans"/>
@@ -7876,7 +7876,7 @@
           <a:solidFill>
             <a:srgbClr val="FFFFFF"/>
           </a:solidFill>
-          <a:ln w="11112">
+          <a:ln w="15081">
             <a:solidFill>
               <a:srgbClr val="C48A24"/>
             </a:solidFill>
@@ -7965,9 +7965,9 @@
           <a:prstGeom prst="line">
             <a:avLst/>
           </a:prstGeom>
-          <a:ln w="7937">
+          <a:ln w="18216">
             <a:solidFill>
-              <a:srgbClr val="1F2937"/>
+              <a:srgbClr val="111A24"/>
             </a:solidFill>
           </a:ln>
           <a:effectLst/>
@@ -8001,9 +8001,9 @@
           <a:prstGeom prst="line">
             <a:avLst/>
           </a:prstGeom>
-          <a:ln w="7937">
+          <a:ln w="18216">
             <a:solidFill>
-              <a:srgbClr val="1F2937"/>
+              <a:srgbClr val="111A24"/>
             </a:solidFill>
           </a:ln>
           <a:effectLst/>
@@ -8037,9 +8037,9 @@
           <a:prstGeom prst="line">
             <a:avLst/>
           </a:prstGeom>
-          <a:ln w="7937">
+          <a:ln w="18216">
             <a:solidFill>
-              <a:srgbClr val="1F2937"/>
+              <a:srgbClr val="111A24"/>
             </a:solidFill>
           </a:ln>
           <a:effectLst/>
@@ -8073,9 +8073,9 @@
           <a:prstGeom prst="line">
             <a:avLst/>
           </a:prstGeom>
-          <a:ln w="7937">
+          <a:ln w="18216">
             <a:solidFill>
-              <a:srgbClr val="1F2937"/>
+              <a:srgbClr val="111A24"/>
             </a:solidFill>
           </a:ln>
           <a:effectLst/>
@@ -8109,9 +8109,9 @@
           <a:prstGeom prst="line">
             <a:avLst/>
           </a:prstGeom>
-          <a:ln w="7937">
+          <a:ln w="18216">
             <a:solidFill>
-              <a:srgbClr val="1F2937"/>
+              <a:srgbClr val="111A24"/>
             </a:solidFill>
           </a:ln>
           <a:effectLst/>
@@ -8145,9 +8145,9 @@
           <a:prstGeom prst="line">
             <a:avLst/>
           </a:prstGeom>
-          <a:ln w="7937">
+          <a:ln w="18216">
             <a:solidFill>
-              <a:srgbClr val="1F2937"/>
+              <a:srgbClr val="111A24"/>
             </a:solidFill>
           </a:ln>
           <a:effectLst/>
@@ -8182,9 +8182,9 @@
             <a:avLst/>
           </a:prstGeom>
           <a:noFill/>
-          <a:ln w="7937">
+          <a:ln w="18216">
             <a:solidFill>
-              <a:srgbClr val="1F2937"/>
+              <a:srgbClr val="111A24"/>
             </a:solidFill>
           </a:ln>
           <a:effectLst/>
@@ -8226,9 +8226,9 @@
             <a:avLst/>
           </a:prstGeom>
           <a:noFill/>
-          <a:ln w="7937">
+          <a:ln w="18216">
             <a:solidFill>
-              <a:srgbClr val="1F2937"/>
+              <a:srgbClr val="111A24"/>
             </a:solidFill>
           </a:ln>
           <a:effectLst/>
@@ -8330,7 +8330,7 @@
           <a:solidFill>
             <a:srgbClr val="FFFFFF"/>
           </a:solidFill>
-          <a:ln w="11112">
+          <a:ln w="15081">
             <a:solidFill>
               <a:srgbClr val="C48A24"/>
             </a:solidFill>
@@ -8419,9 +8419,9 @@
           <a:prstGeom prst="line">
             <a:avLst/>
           </a:prstGeom>
-          <a:ln w="7937">
+          <a:ln w="18216">
             <a:solidFill>
-              <a:srgbClr val="1F2937"/>
+              <a:srgbClr val="111A24"/>
             </a:solidFill>
           </a:ln>
           <a:effectLst/>
@@ -8455,9 +8455,9 @@
           <a:prstGeom prst="line">
             <a:avLst/>
           </a:prstGeom>
-          <a:ln w="7937">
+          <a:ln w="18216">
             <a:solidFill>
-              <a:srgbClr val="1F2937"/>
+              <a:srgbClr val="111A24"/>
             </a:solidFill>
           </a:ln>
           <a:effectLst/>
@@ -8491,9 +8491,9 @@
           <a:prstGeom prst="line">
             <a:avLst/>
           </a:prstGeom>
-          <a:ln w="7937">
+          <a:ln w="18216">
             <a:solidFill>
-              <a:srgbClr val="1F2937"/>
+              <a:srgbClr val="111A24"/>
             </a:solidFill>
           </a:ln>
           <a:effectLst/>
@@ -8527,9 +8527,9 @@
           <a:prstGeom prst="line">
             <a:avLst/>
           </a:prstGeom>
-          <a:ln w="7937">
+          <a:ln w="18216">
             <a:solidFill>
-              <a:srgbClr val="1F2937"/>
+              <a:srgbClr val="111A24"/>
             </a:solidFill>
           </a:ln>
           <a:effectLst/>
@@ -8563,9 +8563,9 @@
           <a:prstGeom prst="line">
             <a:avLst/>
           </a:prstGeom>
-          <a:ln w="7937">
+          <a:ln w="18216">
             <a:solidFill>
-              <a:srgbClr val="1F2937"/>
+              <a:srgbClr val="111A24"/>
             </a:solidFill>
           </a:ln>
           <a:effectLst/>
@@ -8599,9 +8599,9 @@
           <a:prstGeom prst="line">
             <a:avLst/>
           </a:prstGeom>
-          <a:ln w="7937">
+          <a:ln w="18216">
             <a:solidFill>
-              <a:srgbClr val="1F2937"/>
+              <a:srgbClr val="111A24"/>
             </a:solidFill>
           </a:ln>
           <a:effectLst/>
@@ -8635,9 +8635,9 @@
           <a:prstGeom prst="line">
             <a:avLst/>
           </a:prstGeom>
-          <a:ln w="7937">
+          <a:ln w="18216">
             <a:solidFill>
-              <a:srgbClr val="1F2937"/>
+              <a:srgbClr val="111A24"/>
             </a:solidFill>
           </a:ln>
           <a:effectLst/>
@@ -8732,7 +8732,7 @@
           <a:solidFill>
             <a:srgbClr val="FFFFFF"/>
           </a:solidFill>
-          <a:ln w="11112">
+          <a:ln w="15081">
             <a:solidFill>
               <a:srgbClr val="C48A24"/>
             </a:solidFill>
@@ -8821,9 +8821,9 @@
           <a:prstGeom prst="line">
             <a:avLst/>
           </a:prstGeom>
-          <a:ln w="7937">
+          <a:ln w="18216">
             <a:solidFill>
-              <a:srgbClr val="1F2937"/>
+              <a:srgbClr val="111A24"/>
             </a:solidFill>
           </a:ln>
           <a:effectLst/>
@@ -8857,9 +8857,9 @@
           <a:prstGeom prst="line">
             <a:avLst/>
           </a:prstGeom>
-          <a:ln w="7937">
+          <a:ln w="18216">
             <a:solidFill>
-              <a:srgbClr val="1F2937"/>
+              <a:srgbClr val="111A24"/>
             </a:solidFill>
           </a:ln>
           <a:effectLst/>
@@ -8893,9 +8893,9 @@
           <a:prstGeom prst="line">
             <a:avLst/>
           </a:prstGeom>
-          <a:ln w="7937">
+          <a:ln w="18216">
             <a:solidFill>
-              <a:srgbClr val="1F2937"/>
+              <a:srgbClr val="111A24"/>
             </a:solidFill>
           </a:ln>
           <a:effectLst/>
@@ -8929,9 +8929,9 @@
           <a:prstGeom prst="line">
             <a:avLst/>
           </a:prstGeom>
-          <a:ln w="7937">
+          <a:ln w="18216">
             <a:solidFill>
-              <a:srgbClr val="1F2937"/>
+              <a:srgbClr val="111A24"/>
             </a:solidFill>
           </a:ln>
           <a:effectLst/>
@@ -8965,9 +8965,9 @@
           <a:prstGeom prst="line">
             <a:avLst/>
           </a:prstGeom>
-          <a:ln w="7937">
+          <a:ln w="18216">
             <a:solidFill>
-              <a:srgbClr val="1F2937"/>
+              <a:srgbClr val="111A24"/>
             </a:solidFill>
           </a:ln>
           <a:effectLst/>
@@ -9001,9 +9001,9 @@
           <a:prstGeom prst="line">
             <a:avLst/>
           </a:prstGeom>
-          <a:ln w="7937">
+          <a:ln w="18216">
             <a:solidFill>
-              <a:srgbClr val="1F2937"/>
+              <a:srgbClr val="111A24"/>
             </a:solidFill>
           </a:ln>
           <a:effectLst/>
@@ -9037,9 +9037,9 @@
           <a:prstGeom prst="line">
             <a:avLst/>
           </a:prstGeom>
-          <a:ln w="7937">
+          <a:ln w="18216">
             <a:solidFill>
-              <a:srgbClr val="1F2937"/>
+              <a:srgbClr val="111A24"/>
             </a:solidFill>
           </a:ln>
           <a:effectLst/>
@@ -9073,9 +9073,9 @@
           <a:prstGeom prst="line">
             <a:avLst/>
           </a:prstGeom>
-          <a:ln w="7937">
+          <a:ln w="18216">
             <a:solidFill>
-              <a:srgbClr val="1F2937"/>
+              <a:srgbClr val="111A24"/>
             </a:solidFill>
           </a:ln>
           <a:effectLst/>
@@ -9109,9 +9109,9 @@
           <a:prstGeom prst="line">
             <a:avLst/>
           </a:prstGeom>
-          <a:ln w="7937">
+          <a:ln w="18216">
             <a:solidFill>
-              <a:srgbClr val="1F2937"/>
+              <a:srgbClr val="111A24"/>
             </a:solidFill>
           </a:ln>
           <a:effectLst/>
@@ -9206,7 +9206,7 @@
           <a:solidFill>
             <a:srgbClr val="FFF6E3"/>
           </a:solidFill>
-          <a:ln w="8731">
+          <a:ln w="12699">
             <a:solidFill>
               <a:srgbClr val="C48A24"/>
             </a:solidFill>
@@ -9268,7 +9268,7 @@
               <a:spcAft>
                 <a:spcPts val="0"/>
               </a:spcAft>
-              <a:defRPr sz="1187" b="0" i="0" lang="zh-CN" dirty="0">
+              <a:defRPr sz="1187" b="1" i="0" lang="zh-CN" dirty="0">
                 <a:solidFill>
                   <a:srgbClr val="7A5410"/>
                 </a:solidFill>
@@ -9278,7 +9278,7 @@
               </a:defRPr>
             </a:pPr>
             <a:r>
-              <a:rPr sz="1187" b="0" i="0" lang="zh-CN" dirty="0">
+              <a:rPr sz="1187" b="1" i="0" lang="zh-CN" dirty="0">
                 <a:solidFill>
                   <a:srgbClr val="7A5410"/>
                 </a:solidFill>
@@ -9310,12 +9310,12 @@
           <a:solidFill>
             <a:srgbClr val="FFFFFF"/>
           </a:solidFill>
-          <a:ln w="11112">
+          <a:ln w="15081">
             <a:solidFill>
               <a:srgbClr val="9AA3AB"/>
             </a:solidFill>
             <a:custDash>
-              <a:ds d="857143" sp="571429"/>
+              <a:ds d="631579" sp="421053"/>
             </a:custDash>
           </a:ln>
           <a:effectLst/>
@@ -9357,9 +9357,9 @@
             <a:avLst/>
           </a:prstGeom>
           <a:noFill/>
-          <a:ln w="7937">
+          <a:ln w="18216">
             <a:solidFill>
-              <a:srgbClr val="1F2937"/>
+              <a:srgbClr val="111A24"/>
             </a:solidFill>
           </a:ln>
           <a:effectLst/>
@@ -9401,9 +9401,9 @@
             <a:avLst/>
           </a:prstGeom>
           <a:noFill/>
-          <a:ln w="7937">
+          <a:ln w="18216">
             <a:solidFill>
-              <a:srgbClr val="1F2937"/>
+              <a:srgbClr val="111A24"/>
             </a:solidFill>
           </a:ln>
           <a:effectLst/>
@@ -9444,9 +9444,9 @@
           <a:prstGeom prst="line">
             <a:avLst/>
           </a:prstGeom>
-          <a:ln w="7937">
+          <a:ln w="18216">
             <a:solidFill>
-              <a:srgbClr val="1F2937"/>
+              <a:srgbClr val="111A24"/>
             </a:solidFill>
           </a:ln>
           <a:effectLst/>
@@ -9480,9 +9480,9 @@
           <a:prstGeom prst="line">
             <a:avLst/>
           </a:prstGeom>
-          <a:ln w="7937">
+          <a:ln w="18216">
             <a:solidFill>
-              <a:srgbClr val="1F2937"/>
+              <a:srgbClr val="111A24"/>
             </a:solidFill>
           </a:ln>
           <a:effectLst/>
@@ -9516,9 +9516,9 @@
           <a:prstGeom prst="line">
             <a:avLst/>
           </a:prstGeom>
-          <a:ln w="7937">
+          <a:ln w="18216">
             <a:solidFill>
-              <a:srgbClr val="1F2937"/>
+              <a:srgbClr val="111A24"/>
             </a:solidFill>
           </a:ln>
           <a:effectLst/>
@@ -9552,9 +9552,9 @@
           <a:prstGeom prst="line">
             <a:avLst/>
           </a:prstGeom>
-          <a:ln w="7937">
+          <a:ln w="18216">
             <a:solidFill>
-              <a:srgbClr val="1F2937"/>
+              <a:srgbClr val="111A24"/>
             </a:solidFill>
           </a:ln>
           <a:effectLst/>
@@ -9644,9 +9644,9 @@
           <a:prstGeom prst="line">
             <a:avLst/>
           </a:prstGeom>
-          <a:ln w="14287">
+          <a:ln w="19843">
             <a:solidFill>
-              <a:srgbClr val="4B5563"/>
+              <a:srgbClr val="3C4753"/>
             </a:solidFill>
           </a:ln>
           <a:effectLst/>
@@ -9680,9 +9680,9 @@
           <a:prstGeom prst="line">
             <a:avLst/>
           </a:prstGeom>
-          <a:ln w="14287">
+          <a:ln w="19843">
             <a:solidFill>
-              <a:srgbClr val="4B5563"/>
+              <a:srgbClr val="3C4753"/>
             </a:solidFill>
           </a:ln>
           <a:effectLst/>
@@ -9716,9 +9716,9 @@
           <a:prstGeom prst="line">
             <a:avLst/>
           </a:prstGeom>
-          <a:ln w="14287">
+          <a:ln w="19843">
             <a:solidFill>
-              <a:srgbClr val="4B5563"/>
+              <a:srgbClr val="3C4753"/>
             </a:solidFill>
           </a:ln>
           <a:effectLst/>
@@ -9752,9 +9752,9 @@
           <a:prstGeom prst="line">
             <a:avLst/>
           </a:prstGeom>
-          <a:ln w="14287">
+          <a:ln w="19843">
             <a:solidFill>
-              <a:srgbClr val="4B5563"/>
+              <a:srgbClr val="3C4753"/>
             </a:solidFill>
           </a:ln>
           <a:effectLst/>
@@ -9788,9 +9788,9 @@
           <a:prstGeom prst="line">
             <a:avLst/>
           </a:prstGeom>
-          <a:ln w="14287">
+          <a:ln w="19843">
             <a:solidFill>
-              <a:srgbClr val="4B5563"/>
+              <a:srgbClr val="3C4753"/>
             </a:solidFill>
           </a:ln>
           <a:effectLst/>
@@ -9818,8 +9818,8 @@
         </p:nvSpPr>
         <p:spPr>
           <a:xfrm>
-            <a:off x="4635500" y="2889250"/>
-            <a:ext cx="254000" cy="79375"/>
+            <a:off x="4635500" y="2881312"/>
+            <a:ext cx="254000" cy="95250"/>
           </a:xfrm>
           <a:custGeom>
             <a:avLst/>
@@ -9828,34 +9828,34 @@
             <a:cxnLst/>
             <a:rect l="l" t="t" r="r" b="b"/>
             <a:pathLst>
-              <a:path w="32000" h="10000">
+              <a:path w="32000" h="12000">
                 <a:moveTo>
-                  <a:pt x="0" y="4100"/>
+                  <a:pt x="0" y="4750"/>
                 </a:moveTo>
                 <a:lnTo>
-                  <a:pt x="20000" y="4100"/>
+                  <a:pt x="17000" y="4750"/>
                 </a:lnTo>
                 <a:lnTo>
-                  <a:pt x="20000" y="0"/>
+                  <a:pt x="17000" y="0"/>
                 </a:lnTo>
                 <a:lnTo>
-                  <a:pt x="32000" y="5000"/>
+                  <a:pt x="32000" y="6000"/>
                 </a:lnTo>
                 <a:lnTo>
-                  <a:pt x="20000" y="10000"/>
+                  <a:pt x="17000" y="12000"/>
                 </a:lnTo>
                 <a:lnTo>
-                  <a:pt x="20000" y="5900"/>
+                  <a:pt x="17000" y="7250"/>
                 </a:lnTo>
                 <a:lnTo>
-                  <a:pt x="0" y="5900"/>
+                  <a:pt x="0" y="7250"/>
                 </a:lnTo>
                 <a:close/>
               </a:path>
             </a:pathLst>
           </a:custGeom>
           <a:solidFill>
-            <a:srgbClr val="4B5563"/>
+            <a:srgbClr val="3C4753"/>
           </a:solidFill>
           <a:ln>
             <a:noFill/>
@@ -9898,9 +9898,9 @@
           <a:prstGeom prst="line">
             <a:avLst/>
           </a:prstGeom>
-          <a:ln w="14287">
+          <a:ln w="19843">
             <a:solidFill>
-              <a:srgbClr val="4B5563"/>
+              <a:srgbClr val="3C4753"/>
             </a:solidFill>
           </a:ln>
           <a:effectLst/>
@@ -9934,9 +9934,9 @@
           <a:prstGeom prst="line">
             <a:avLst/>
           </a:prstGeom>
-          <a:ln w="14287">
+          <a:ln w="19843">
             <a:solidFill>
-              <a:srgbClr val="4B5563"/>
+              <a:srgbClr val="3C4753"/>
             </a:solidFill>
           </a:ln>
           <a:effectLst/>
@@ -9964,8 +9964,8 @@
         </p:nvSpPr>
         <p:spPr>
           <a:xfrm>
-            <a:off x="8175625" y="1595437"/>
-            <a:ext cx="333375" cy="79375"/>
+            <a:off x="8175625" y="1587500"/>
+            <a:ext cx="333375" cy="95250"/>
           </a:xfrm>
           <a:custGeom>
             <a:avLst/>
@@ -9974,34 +9974,34 @@
             <a:cxnLst/>
             <a:rect l="l" t="t" r="r" b="b"/>
             <a:pathLst>
-              <a:path w="42000" h="10000">
+              <a:path w="42000" h="12000">
                 <a:moveTo>
-                  <a:pt x="0" y="4100"/>
+                  <a:pt x="0" y="4750"/>
                 </a:moveTo>
                 <a:lnTo>
-                  <a:pt x="30000" y="4100"/>
+                  <a:pt x="27000" y="4750"/>
                 </a:lnTo>
                 <a:lnTo>
-                  <a:pt x="30000" y="0"/>
+                  <a:pt x="27000" y="0"/>
                 </a:lnTo>
                 <a:lnTo>
-                  <a:pt x="42000" y="5000"/>
+                  <a:pt x="42000" y="6000"/>
                 </a:lnTo>
                 <a:lnTo>
-                  <a:pt x="30000" y="10000"/>
+                  <a:pt x="27000" y="12000"/>
                 </a:lnTo>
                 <a:lnTo>
-                  <a:pt x="30000" y="5900"/>
+                  <a:pt x="27000" y="7250"/>
                 </a:lnTo>
                 <a:lnTo>
-                  <a:pt x="0" y="5900"/>
+                  <a:pt x="0" y="7250"/>
                 </a:lnTo>
                 <a:close/>
               </a:path>
             </a:pathLst>
           </a:custGeom>
           <a:solidFill>
-            <a:srgbClr val="4B5563"/>
+            <a:srgbClr val="3C4753"/>
           </a:solidFill>
           <a:ln>
             <a:noFill/>
@@ -10038,8 +10038,8 @@
         </p:nvSpPr>
         <p:spPr>
           <a:xfrm>
-            <a:off x="8175625" y="2643187"/>
-            <a:ext cx="333375" cy="79375"/>
+            <a:off x="8175625" y="2635250"/>
+            <a:ext cx="333375" cy="95250"/>
           </a:xfrm>
           <a:custGeom>
             <a:avLst/>
@@ -10048,34 +10048,34 @@
             <a:cxnLst/>
             <a:rect l="l" t="t" r="r" b="b"/>
             <a:pathLst>
-              <a:path w="42000" h="10000">
+              <a:path w="42000" h="12000">
                 <a:moveTo>
-                  <a:pt x="0" y="4100"/>
+                  <a:pt x="0" y="4750"/>
                 </a:moveTo>
                 <a:lnTo>
-                  <a:pt x="30000" y="4100"/>
+                  <a:pt x="27000" y="4750"/>
                 </a:lnTo>
                 <a:lnTo>
-                  <a:pt x="30000" y="0"/>
+                  <a:pt x="27000" y="0"/>
                 </a:lnTo>
                 <a:lnTo>
-                  <a:pt x="42000" y="5000"/>
+                  <a:pt x="42000" y="6000"/>
                 </a:lnTo>
                 <a:lnTo>
-                  <a:pt x="30000" y="10000"/>
+                  <a:pt x="27000" y="12000"/>
                 </a:lnTo>
                 <a:lnTo>
-                  <a:pt x="30000" y="5900"/>
+                  <a:pt x="27000" y="7250"/>
                 </a:lnTo>
                 <a:lnTo>
-                  <a:pt x="0" y="5900"/>
+                  <a:pt x="0" y="7250"/>
                 </a:lnTo>
                 <a:close/>
               </a:path>
             </a:pathLst>
           </a:custGeom>
           <a:solidFill>
-            <a:srgbClr val="4B5563"/>
+            <a:srgbClr val="3C4753"/>
           </a:solidFill>
           <a:ln>
             <a:noFill/>
@@ -10112,8 +10112,8 @@
         </p:nvSpPr>
         <p:spPr>
           <a:xfrm>
-            <a:off x="8175625" y="3690937"/>
-            <a:ext cx="333375" cy="79375"/>
+            <a:off x="8175625" y="3683000"/>
+            <a:ext cx="333375" cy="95250"/>
           </a:xfrm>
           <a:custGeom>
             <a:avLst/>
@@ -10122,34 +10122,34 @@
             <a:cxnLst/>
             <a:rect l="l" t="t" r="r" b="b"/>
             <a:pathLst>
-              <a:path w="42000" h="10000">
+              <a:path w="42000" h="12000">
                 <a:moveTo>
-                  <a:pt x="0" y="4100"/>
+                  <a:pt x="0" y="4750"/>
                 </a:moveTo>
                 <a:lnTo>
-                  <a:pt x="30000" y="4100"/>
+                  <a:pt x="27000" y="4750"/>
                 </a:lnTo>
                 <a:lnTo>
-                  <a:pt x="30000" y="0"/>
+                  <a:pt x="27000" y="0"/>
                 </a:lnTo>
                 <a:lnTo>
-                  <a:pt x="42000" y="5000"/>
+                  <a:pt x="42000" y="6000"/>
                 </a:lnTo>
                 <a:lnTo>
-                  <a:pt x="30000" y="10000"/>
+                  <a:pt x="27000" y="12000"/>
                 </a:lnTo>
                 <a:lnTo>
-                  <a:pt x="30000" y="5900"/>
+                  <a:pt x="27000" y="7250"/>
                 </a:lnTo>
                 <a:lnTo>
-                  <a:pt x="0" y="5900"/>
+                  <a:pt x="0" y="7250"/>
                 </a:lnTo>
                 <a:close/>
               </a:path>
             </a:pathLst>
           </a:custGeom>
           <a:solidFill>
-            <a:srgbClr val="4B5563"/>
+            <a:srgbClr val="3C4753"/>
           </a:solidFill>
           <a:ln>
             <a:noFill/>
@@ -10192,12 +10192,12 @@
           <a:prstGeom prst="line">
             <a:avLst/>
           </a:prstGeom>
-          <a:ln w="14287">
+          <a:ln w="19843">
             <a:solidFill>
-              <a:srgbClr val="4B5563"/>
+              <a:srgbClr val="3C4753"/>
             </a:solidFill>
             <a:custDash>
-              <a:ds d="611111" sp="388889"/>
+              <a:ds d="440000" sp="280000"/>
             </a:custDash>
             <a:tailEnd type="triangle"/>
           </a:ln>
@@ -10237,7 +10237,7 @@
           <a:solidFill>
             <a:srgbClr val="FFFFFF"/>
           </a:solidFill>
-          <a:ln w="8731">
+          <a:ln w="12699">
             <a:solidFill>
               <a:srgbClr val="CBD3DA"/>
             </a:solidFill>
@@ -10299,9 +10299,9 @@
               <a:spcAft>
                 <a:spcPts val="0"/>
               </a:spcAft>
-              <a:defRPr sz="1062" b="0" i="0" lang="zh-CN" dirty="0">
+              <a:defRPr sz="1062" b="1" i="0" lang="zh-CN" dirty="0">
                 <a:solidFill>
-                  <a:srgbClr val="3F4854"/>
+                  <a:srgbClr val="27303A"/>
                 </a:solidFill>
                 <a:latin typeface="DejaVu Sans"/>
                 <a:ea typeface="DejaVu Sans"/>
@@ -10309,9 +10309,9 @@
               </a:defRPr>
             </a:pPr>
             <a:r>
-              <a:rPr sz="1062" b="0" i="0" lang="zh-CN" dirty="0">
+              <a:rPr sz="1062" b="1" i="0" lang="zh-CN" dirty="0">
                 <a:solidFill>
-                  <a:srgbClr val="3F4854"/>
+                  <a:srgbClr val="27303A"/>
                 </a:solidFill>
                 <a:latin typeface="DejaVu Sans"/>
                 <a:ea typeface="DejaVu Sans"/>

--- a/media/figstudio/fig01_evidence_map/fig01_evidence_synthesis_map_en_editable.pptx
+++ b/media/figstudio/fig01_evidence_map/fig01_evidence_synthesis_map_en_editable.pptx
@@ -7,7 +7,7 @@
   <p:sldIdLst>
     <p:sldId id="256" r:id="rId7"/>
   </p:sldIdLst>
-  <p:sldSz cx="12191999" cy="8127999" type="screen4x3"/>
+  <p:sldSz cx="12191999" cy="8501062" type="screen4x3"/>
   <p:notesSz cx="6858000" cy="9144000"/>
   <p:defaultTextStyle>
     <a:defPPr>
@@ -502,7 +502,7 @@
           <a:lstStyle/>
           <a:p>
             <a:r>
-              <a:t>Figure 1 · Applicability of different literature classes to the target compound (round 5, F02).</a:t>
+              <a:t>图 1 不同文献对目标化合物合成研究的适用范围（第六轮：印刷字号 + 内容定尺寸） [paper=byzso] [print_width_pt=451.4]</a:t>
             </a:r>
           </a:p>
         </p:txBody>
@@ -3524,12 +3524,12 @@
         </p:nvSpPr>
         <p:spPr>
           <a:xfrm>
-            <a:off x="873124" y="396874"/>
-            <a:ext cx="3667124" cy="6397624"/>
+            <a:off x="206374" y="206374"/>
+            <a:ext cx="4254499" cy="8088312"/>
           </a:xfrm>
           <a:prstGeom prst="roundRect">
             <a:avLst>
-              <a:gd name="adj" fmla="val 3030"/>
+              <a:gd name="adj" fmla="val 2611"/>
             </a:avLst>
           </a:prstGeom>
           <a:solidFill>
@@ -3572,8 +3572,8 @@
         </p:nvSpPr>
         <p:spPr>
           <a:xfrm>
-            <a:off x="1015999" y="476249"/>
-            <a:ext cx="2595562" cy="357187"/>
+            <a:off x="349249" y="285749"/>
+            <a:ext cx="2778124" cy="380999"/>
           </a:xfrm>
           <a:prstGeom prst="rect">
             <a:avLst/>
@@ -3589,7 +3589,7 @@
           <a:p>
             <a:pPr algn="l" fontAlgn="base">
               <a:lnSpc>
-                <a:spcPts val="1906"/>
+                <a:spcPts val="2046"/>
               </a:lnSpc>
               <a:spcBef>
                 <a:spcPts val="0"/>
@@ -3597,7 +3597,7 @@
               <a:spcAft>
                 <a:spcPts val="0"/>
               </a:spcAft>
-              <a:defRPr sz="1624" b="1" i="0" lang="zh-CN" dirty="0">
+              <a:defRPr sz="1749" b="1" i="0" lang="zh-CN" dirty="0">
                 <a:solidFill>
                   <a:srgbClr val="2B3E57"/>
                 </a:solidFill>
@@ -3607,7 +3607,7 @@
               </a:defRPr>
             </a:pPr>
             <a:r>
-              <a:rPr sz="1624" b="1" i="0" lang="zh-CN" dirty="0">
+              <a:rPr sz="1749" b="1" i="0" lang="zh-CN" dirty="0">
                 <a:solidFill>
                   <a:srgbClr val="2B3E57"/>
                 </a:solidFill>
@@ -3628,12 +3628,12 @@
         </p:nvSpPr>
         <p:spPr>
           <a:xfrm>
-            <a:off x="4698999" y="396874"/>
-            <a:ext cx="3492499" cy="6397624"/>
+            <a:off x="4651374" y="206374"/>
+            <a:ext cx="3174999" cy="8088312"/>
           </a:xfrm>
           <a:prstGeom prst="roundRect">
             <a:avLst>
-              <a:gd name="adj" fmla="val 3181"/>
+              <a:gd name="adj" fmla="val 3500"/>
             </a:avLst>
           </a:prstGeom>
           <a:solidFill>
@@ -3676,8 +3676,8 @@
         </p:nvSpPr>
         <p:spPr>
           <a:xfrm>
-            <a:off x="4841874" y="476249"/>
-            <a:ext cx="2468562" cy="357187"/>
+            <a:off x="4794249" y="285749"/>
+            <a:ext cx="2643187" cy="380999"/>
           </a:xfrm>
           <a:prstGeom prst="rect">
             <a:avLst/>
@@ -3693,7 +3693,7 @@
           <a:p>
             <a:pPr algn="l" fontAlgn="base">
               <a:lnSpc>
-                <a:spcPts val="1906"/>
+                <a:spcPts val="2046"/>
               </a:lnSpc>
               <a:spcBef>
                 <a:spcPts val="0"/>
@@ -3701,7 +3701,7 @@
               <a:spcAft>
                 <a:spcPts val="0"/>
               </a:spcAft>
-              <a:defRPr sz="1624" b="1" i="0" lang="zh-CN" dirty="0">
+              <a:defRPr sz="1749" b="1" i="0" lang="zh-CN" dirty="0">
                 <a:solidFill>
                   <a:srgbClr val="0F4F58"/>
                 </a:solidFill>
@@ -3711,7 +3711,7 @@
               </a:defRPr>
             </a:pPr>
             <a:r>
-              <a:rPr sz="1624" b="1" i="0" lang="zh-CN" dirty="0">
+              <a:rPr sz="1749" b="1" i="0" lang="zh-CN" dirty="0">
                 <a:solidFill>
                   <a:srgbClr val="0F4F58"/>
                 </a:solidFill>
@@ -3732,12 +3732,12 @@
         </p:nvSpPr>
         <p:spPr>
           <a:xfrm>
-            <a:off x="8350249" y="396874"/>
-            <a:ext cx="3635374" cy="6397624"/>
+            <a:off x="8016874" y="206374"/>
+            <a:ext cx="3968749" cy="8088312"/>
           </a:xfrm>
           <a:prstGeom prst="roundRect">
             <a:avLst>
-              <a:gd name="adj" fmla="val 3056"/>
+              <a:gd name="adj" fmla="val 2800"/>
             </a:avLst>
           </a:prstGeom>
           <a:solidFill>
@@ -3780,8 +3780,8 @@
         </p:nvSpPr>
         <p:spPr>
           <a:xfrm>
-            <a:off x="8493124" y="476249"/>
-            <a:ext cx="2730499" cy="357187"/>
+            <a:off x="8159749" y="285749"/>
+            <a:ext cx="2920999" cy="380999"/>
           </a:xfrm>
           <a:prstGeom prst="rect">
             <a:avLst/>
@@ -3797,7 +3797,7 @@
           <a:p>
             <a:pPr algn="l" fontAlgn="base">
               <a:lnSpc>
-                <a:spcPts val="1906"/>
+                <a:spcPts val="2046"/>
               </a:lnSpc>
               <a:spcBef>
                 <a:spcPts val="0"/>
@@ -3805,7 +3805,7 @@
               <a:spcAft>
                 <a:spcPts val="0"/>
               </a:spcAft>
-              <a:defRPr sz="1624" b="1" i="0" lang="zh-CN" dirty="0">
+              <a:defRPr sz="1749" b="1" i="0" lang="zh-CN" dirty="0">
                 <a:solidFill>
                   <a:srgbClr val="7A5410"/>
                 </a:solidFill>
@@ -3815,7 +3815,7 @@
               </a:defRPr>
             </a:pPr>
             <a:r>
-              <a:rPr sz="1624" b="1" i="0" lang="zh-CN" dirty="0">
+              <a:rPr sz="1749" b="1" i="0" lang="zh-CN" dirty="0">
                 <a:solidFill>
                   <a:srgbClr val="7A5410"/>
                 </a:solidFill>
@@ -3836,12 +3836,12 @@
         </p:nvSpPr>
         <p:spPr>
           <a:xfrm>
-            <a:off x="1031874" y="1190624"/>
-            <a:ext cx="3333749" cy="809624"/>
+            <a:off x="1015999" y="746124"/>
+            <a:ext cx="3317874" cy="1309687"/>
           </a:xfrm>
           <a:prstGeom prst="roundRect">
             <a:avLst>
-              <a:gd name="adj" fmla="val 8823"/>
+              <a:gd name="adj" fmla="val 5454"/>
             </a:avLst>
           </a:prstGeom>
           <a:solidFill>
@@ -3884,12 +3884,12 @@
         </p:nvSpPr>
         <p:spPr>
           <a:xfrm>
-            <a:off x="1031874" y="1190624"/>
-            <a:ext cx="63499" cy="809624"/>
+            <a:off x="1015999" y="746124"/>
+            <a:ext cx="47624" cy="1309687"/>
           </a:xfrm>
           <a:prstGeom prst="roundRect">
             <a:avLst>
-              <a:gd name="adj" fmla="val 37500"/>
+              <a:gd name="adj" fmla="val 50000"/>
             </a:avLst>
           </a:prstGeom>
           <a:solidFill>
@@ -3930,7 +3930,7 @@
         </p:nvSpPr>
         <p:spPr>
           <a:xfrm>
-            <a:off x="1277937" y="1484312"/>
+            <a:off x="1214437" y="1285874"/>
             <a:ext cx="150812" cy="230187"/>
           </a:xfrm>
           <a:prstGeom prst="rect">
@@ -3974,7 +3974,7 @@
         </p:nvCxnSpPr>
         <p:spPr>
           <a:xfrm>
-            <a:off x="1317624" y="1563687"/>
+            <a:off x="1254124" y="1365249"/>
             <a:ext cx="103188" cy="0"/>
           </a:xfrm>
           <a:prstGeom prst="line">
@@ -4010,7 +4010,7 @@
         </p:nvCxnSpPr>
         <p:spPr>
           <a:xfrm>
-            <a:off x="1317624" y="1611312"/>
+            <a:off x="1254124" y="1412874"/>
             <a:ext cx="103188" cy="0"/>
           </a:xfrm>
           <a:prstGeom prst="line">
@@ -4046,7 +4046,7 @@
         </p:nvCxnSpPr>
         <p:spPr>
           <a:xfrm>
-            <a:off x="1317624" y="1650999"/>
+            <a:off x="1254124" y="1460499"/>
             <a:ext cx="71438" cy="0"/>
           </a:xfrm>
           <a:prstGeom prst="line">
@@ -4082,8 +4082,8 @@
         </p:nvSpPr>
         <p:spPr>
           <a:xfrm>
-            <a:off x="1635124" y="1428749"/>
-            <a:ext cx="2603499" cy="325437"/>
+            <a:off x="1555749" y="865187"/>
+            <a:ext cx="2682874" cy="1071562"/>
           </a:xfrm>
           <a:prstGeom prst="rect">
             <a:avLst/>
@@ -4099,7 +4099,7 @@
           <a:p>
             <a:pPr algn="l" fontAlgn="base">
               <a:lnSpc>
-                <a:spcPts val="1734"/>
+                <a:spcPts val="1984"/>
               </a:lnSpc>
               <a:spcBef>
                 <a:spcPts val="0"/>
@@ -4107,7 +4107,7 @@
               <a:spcAft>
                 <a:spcPts val="0"/>
               </a:spcAft>
-              <a:defRPr sz="1475" b="1" i="0" lang="zh-CN" dirty="0">
+              <a:defRPr sz="1687" b="1" i="0" lang="zh-CN" dirty="0">
                 <a:solidFill>
                   <a:srgbClr val="2B3E57"/>
                 </a:solidFill>
@@ -4117,7 +4117,7 @@
               </a:defRPr>
             </a:pPr>
             <a:r>
-              <a:rPr sz="1475" b="1" i="0" lang="zh-CN" dirty="0">
+              <a:rPr sz="1687" b="1" i="0" lang="zh-CN" dirty="0">
                 <a:solidFill>
                   <a:srgbClr val="2B3E57"/>
                 </a:solidFill>
@@ -4125,383 +4125,13 @@
                 <a:ea typeface="DejaVu Sans"/>
                 <a:cs typeface="DejaVu Sans"/>
               </a:rPr>
-              <a:t>Direct Reports on Target</a:t>
+              <a:t>Direct Reports on </a:t>
             </a:r>
           </a:p>
-        </p:txBody>
-      </p:sp>
-      <p:sp>
-        <p:nvSpPr>
-          <p:cNvPr id="15" name="a2" descr="Editable shape; source id a2"/>
-          <p:cNvSpPr/>
-          <p:nvPr/>
-        </p:nvSpPr>
-        <p:spPr>
-          <a:xfrm>
-            <a:off x="1031874" y="2079624"/>
-            <a:ext cx="3333749" cy="809624"/>
-          </a:xfrm>
-          <a:prstGeom prst="roundRect">
-            <a:avLst>
-              <a:gd name="adj" fmla="val 8823"/>
-            </a:avLst>
-          </a:prstGeom>
-          <a:solidFill>
-            <a:srgbClr val="FFFFFF"/>
-          </a:solidFill>
-          <a:ln w="15081">
-            <a:solidFill>
-              <a:srgbClr val="5B7592"/>
-            </a:solidFill>
-          </a:ln>
-          <a:effectLst/>
-        </p:spPr>
-        <p:style>
-          <a:lnRef idx="1">
-            <a:schemeClr val="accent1"/>
-          </a:lnRef>
-          <a:fillRef idx="3">
-            <a:schemeClr val="accent1"/>
-          </a:fillRef>
-          <a:effectRef idx="0">
-            <a:schemeClr val="accent1"/>
-          </a:effectRef>
-          <a:fontRef idx="minor">
-            <a:schemeClr val="lt1"/>
-          </a:fontRef>
-        </p:style>
-        <p:txBody>
-          <a:bodyPr rtlCol="0" anchor="ctr"/>
-          <a:lstStyle/>
-          <a:p>
-            <a:pPr algn="ctr"/>
-          </a:p>
-        </p:txBody>
-      </p:sp>
-      <p:sp>
-        <p:nvSpPr>
-          <p:cNvPr id="16" name="a2_b" descr="Editable shape; source id a2_b"/>
-          <p:cNvSpPr/>
-          <p:nvPr/>
-        </p:nvSpPr>
-        <p:spPr>
-          <a:xfrm>
-            <a:off x="1031874" y="2079624"/>
-            <a:ext cx="63499" cy="809624"/>
-          </a:xfrm>
-          <a:prstGeom prst="roundRect">
-            <a:avLst>
-              <a:gd name="adj" fmla="val 37500"/>
-            </a:avLst>
-          </a:prstGeom>
-          <a:solidFill>
-            <a:srgbClr val="5B7592"/>
-          </a:solidFill>
-          <a:ln>
-            <a:noFill/>
-          </a:ln>
-          <a:effectLst/>
-        </p:spPr>
-        <p:style>
-          <a:lnRef idx="1">
-            <a:schemeClr val="accent1"/>
-          </a:lnRef>
-          <a:fillRef idx="3">
-            <a:schemeClr val="accent1"/>
-          </a:fillRef>
-          <a:effectRef idx="0">
-            <a:schemeClr val="accent1"/>
-          </a:effectRef>
-          <a:fontRef idx="minor">
-            <a:schemeClr val="lt1"/>
-          </a:fontRef>
-        </p:style>
-        <p:txBody>
-          <a:bodyPr rtlCol="0" anchor="ctr"/>
-          <a:lstStyle/>
-          <a:p>
-            <a:pPr algn="ctr"/>
-          </a:p>
-        </p:txBody>
-      </p:sp>
-      <p:cxnSp>
-        <p:nvCxnSpPr>
-          <p:cNvPr id="17" name="a2_g_o_0" descr="Editable line; source id a2_g_o_0"/>
-          <p:cNvCxnSpPr/>
-          <p:nvPr/>
-        </p:nvCxnSpPr>
-        <p:spPr>
-          <a:xfrm>
-            <a:off x="1381124" y="2349499"/>
-            <a:ext cx="127000" cy="87313"/>
-          </a:xfrm>
-          <a:prstGeom prst="line">
-            <a:avLst/>
-          </a:prstGeom>
-          <a:ln w="18216">
-            <a:solidFill>
-              <a:srgbClr val="111A24"/>
-            </a:solidFill>
-          </a:ln>
-          <a:effectLst/>
-        </p:spPr>
-        <p:style>
-          <a:lnRef idx="2">
-            <a:schemeClr val="accent1"/>
-          </a:lnRef>
-          <a:fillRef idx="0">
-            <a:schemeClr val="accent1"/>
-          </a:fillRef>
-          <a:effectRef idx="0">
-            <a:schemeClr val="accent1"/>
-          </a:effectRef>
-          <a:fontRef idx="minor">
-            <a:schemeClr val="tx1"/>
-          </a:fontRef>
-        </p:style>
-      </p:cxnSp>
-      <p:cxnSp>
-        <p:nvCxnSpPr>
-          <p:cNvPr id="18" name="a2_g_o_1" descr="Editable line; source id a2_g_o_1"/>
-          <p:cNvCxnSpPr/>
-          <p:nvPr/>
-        </p:nvCxnSpPr>
-        <p:spPr>
-          <a:xfrm flipH="1">
-            <a:off x="1452562" y="2436812"/>
-            <a:ext cx="55562" cy="166687"/>
-          </a:xfrm>
-          <a:prstGeom prst="line">
-            <a:avLst/>
-          </a:prstGeom>
-          <a:ln w="18216">
-            <a:solidFill>
-              <a:srgbClr val="111A24"/>
-            </a:solidFill>
-          </a:ln>
-          <a:effectLst/>
-        </p:spPr>
-        <p:style>
-          <a:lnRef idx="2">
-            <a:schemeClr val="accent1"/>
-          </a:lnRef>
-          <a:fillRef idx="0">
-            <a:schemeClr val="accent1"/>
-          </a:fillRef>
-          <a:effectRef idx="0">
-            <a:schemeClr val="accent1"/>
-          </a:effectRef>
-          <a:fontRef idx="minor">
-            <a:schemeClr val="tx1"/>
-          </a:fontRef>
-        </p:style>
-      </p:cxnSp>
-      <p:cxnSp>
-        <p:nvCxnSpPr>
-          <p:cNvPr id="19" name="a2_g_o_2" descr="Editable line; source id a2_g_o_2"/>
-          <p:cNvCxnSpPr/>
-          <p:nvPr/>
-        </p:nvCxnSpPr>
-        <p:spPr>
-          <a:xfrm flipH="1">
-            <a:off x="1309687" y="2603499"/>
-            <a:ext cx="142875" cy="0"/>
-          </a:xfrm>
-          <a:prstGeom prst="line">
-            <a:avLst/>
-          </a:prstGeom>
-          <a:ln w="18216">
-            <a:solidFill>
-              <a:srgbClr val="111A24"/>
-            </a:solidFill>
-          </a:ln>
-          <a:effectLst/>
-        </p:spPr>
-        <p:style>
-          <a:lnRef idx="2">
-            <a:schemeClr val="accent1"/>
-          </a:lnRef>
-          <a:fillRef idx="0">
-            <a:schemeClr val="accent1"/>
-          </a:fillRef>
-          <a:effectRef idx="0">
-            <a:schemeClr val="accent1"/>
-          </a:effectRef>
-          <a:fontRef idx="minor">
-            <a:schemeClr val="tx1"/>
-          </a:fontRef>
-        </p:style>
-      </p:cxnSp>
-      <p:cxnSp>
-        <p:nvCxnSpPr>
-          <p:cNvPr id="20" name="a2_g_o_3" descr="Editable line; source id a2_g_o_3"/>
-          <p:cNvCxnSpPr/>
-          <p:nvPr/>
-        </p:nvCxnSpPr>
-        <p:spPr>
-          <a:xfrm flipH="1" flipV="1">
-            <a:off x="1254124" y="2436812"/>
-            <a:ext cx="55563" cy="166687"/>
-          </a:xfrm>
-          <a:prstGeom prst="line">
-            <a:avLst/>
-          </a:prstGeom>
-          <a:ln w="18216">
-            <a:solidFill>
-              <a:srgbClr val="111A24"/>
-            </a:solidFill>
-          </a:ln>
-          <a:effectLst/>
-        </p:spPr>
-        <p:style>
-          <a:lnRef idx="2">
-            <a:schemeClr val="accent1"/>
-          </a:lnRef>
-          <a:fillRef idx="0">
-            <a:schemeClr val="accent1"/>
-          </a:fillRef>
-          <a:effectRef idx="0">
-            <a:schemeClr val="accent1"/>
-          </a:effectRef>
-          <a:fontRef idx="minor">
-            <a:schemeClr val="tx1"/>
-          </a:fontRef>
-        </p:style>
-      </p:cxnSp>
-      <p:cxnSp>
-        <p:nvCxnSpPr>
-          <p:cNvPr id="21" name="a2_g_o_4" descr="Editable line; source id a2_g_o_4"/>
-          <p:cNvCxnSpPr/>
-          <p:nvPr/>
-        </p:nvCxnSpPr>
-        <p:spPr>
-          <a:xfrm flipV="1">
-            <a:off x="1254124" y="2349499"/>
-            <a:ext cx="127000" cy="87313"/>
-          </a:xfrm>
-          <a:prstGeom prst="line">
-            <a:avLst/>
-          </a:prstGeom>
-          <a:ln w="18216">
-            <a:solidFill>
-              <a:srgbClr val="111A24"/>
-            </a:solidFill>
-          </a:ln>
-          <a:effectLst/>
-        </p:spPr>
-        <p:style>
-          <a:lnRef idx="2">
-            <a:schemeClr val="accent1"/>
-          </a:lnRef>
-          <a:fillRef idx="0">
-            <a:schemeClr val="accent1"/>
-          </a:fillRef>
-          <a:effectRef idx="0">
-            <a:schemeClr val="accent1"/>
-          </a:effectRef>
-          <a:fontRef idx="minor">
-            <a:schemeClr val="tx1"/>
-          </a:fontRef>
-        </p:style>
-      </p:cxnSp>
-      <p:cxnSp>
-        <p:nvCxnSpPr>
-          <p:cNvPr id="22" name="a2_g_a" descr="Editable line; source id a2_g_a"/>
-          <p:cNvCxnSpPr/>
-          <p:nvPr/>
-        </p:nvCxnSpPr>
-        <p:spPr>
-          <a:xfrm>
-            <a:off x="1381124" y="2349499"/>
-            <a:ext cx="0" cy="254000"/>
-          </a:xfrm>
-          <a:prstGeom prst="line">
-            <a:avLst/>
-          </a:prstGeom>
-          <a:ln w="18216">
-            <a:solidFill>
-              <a:srgbClr val="111A24"/>
-            </a:solidFill>
-          </a:ln>
-          <a:effectLst/>
-        </p:spPr>
-        <p:style>
-          <a:lnRef idx="2">
-            <a:schemeClr val="accent1"/>
-          </a:lnRef>
-          <a:fillRef idx="0">
-            <a:schemeClr val="accent1"/>
-          </a:fillRef>
-          <a:effectRef idx="0">
-            <a:schemeClr val="accent1"/>
-          </a:effectRef>
-          <a:fontRef idx="minor">
-            <a:schemeClr val="tx1"/>
-          </a:fontRef>
-        </p:style>
-      </p:cxnSp>
-      <p:cxnSp>
-        <p:nvCxnSpPr>
-          <p:cNvPr id="23" name="a2_g_b" descr="Editable line; source id a2_g_b"/>
-          <p:cNvCxnSpPr/>
-          <p:nvPr/>
-        </p:nvCxnSpPr>
-        <p:spPr>
-          <a:xfrm>
-            <a:off x="1254124" y="2436812"/>
-            <a:ext cx="254000" cy="0"/>
-          </a:xfrm>
-          <a:prstGeom prst="line">
-            <a:avLst/>
-          </a:prstGeom>
-          <a:ln w="18216">
-            <a:solidFill>
-              <a:srgbClr val="111A24"/>
-            </a:solidFill>
-          </a:ln>
-          <a:effectLst/>
-        </p:spPr>
-        <p:style>
-          <a:lnRef idx="2">
-            <a:schemeClr val="accent1"/>
-          </a:lnRef>
-          <a:fillRef idx="0">
-            <a:schemeClr val="accent1"/>
-          </a:fillRef>
-          <a:effectRef idx="0">
-            <a:schemeClr val="accent1"/>
-          </a:effectRef>
-          <a:fontRef idx="minor">
-            <a:schemeClr val="tx1"/>
-          </a:fontRef>
-        </p:style>
-      </p:cxnSp>
-      <p:sp>
-        <p:nvSpPr>
-          <p:cNvPr id="24" name="a2_t" descr="Editable text; source id a2_t"/>
-          <p:cNvSpPr txBox="1"/>
-          <p:nvPr/>
-        </p:nvSpPr>
-        <p:spPr>
-          <a:xfrm>
-            <a:off x="1635124" y="2317749"/>
-            <a:ext cx="2603499" cy="325437"/>
-          </a:xfrm>
-          <a:prstGeom prst="rect">
-            <a:avLst/>
-          </a:prstGeom>
-          <a:noFill/>
-          <a:effectLst/>
-        </p:spPr>
-        <p:txBody>
-          <a:bodyPr wrap="none" anchor="ctr" tIns="0" rIns="0" bIns="0" lIns="0" anchorCtr="0" vertOverflow="overflow">
-            <a:noAutofit/>
-          </a:bodyPr>
-          <a:lstStyle/>
           <a:p>
             <a:pPr algn="l" fontAlgn="base">
               <a:lnSpc>
-                <a:spcPts val="1374"/>
+                <a:spcPts val="1984"/>
               </a:lnSpc>
               <a:spcBef>
                 <a:spcPts val="0"/>
@@ -4509,7 +4139,7 @@
               <a:spcAft>
                 <a:spcPts val="0"/>
               </a:spcAft>
-              <a:defRPr sz="1163" b="1" i="0" lang="zh-CN" dirty="0">
+              <a:defRPr sz="1687" b="1" i="0" lang="zh-CN" dirty="0">
                 <a:solidFill>
                   <a:srgbClr val="2B3E57"/>
                 </a:solidFill>
@@ -4519,7 +4149,7 @@
               </a:defRPr>
             </a:pPr>
             <a:r>
-              <a:rPr sz="1163" b="1" i="0" lang="zh-CN" dirty="0">
+              <a:rPr sz="1687" b="1" i="0" lang="zh-CN" dirty="0">
                 <a:solidFill>
                   <a:srgbClr val="2B3E57"/>
                 </a:solidFill>
@@ -4527,25 +4157,25 @@
                 <a:ea typeface="DejaVu Sans"/>
                 <a:cs typeface="DejaVu Sans"/>
               </a:rPr>
-              <a:t>Same Ba–Y Tetragonal Silicates</a:t>
+              <a:t>Target</a:t>
             </a:r>
           </a:p>
         </p:txBody>
       </p:sp>
       <p:sp>
         <p:nvSpPr>
-          <p:cNvPr id="25" name="a3" descr="Editable shape; source id a3"/>
+          <p:cNvPr id="15" name="a2" descr="Editable shape; source id a2"/>
           <p:cNvSpPr/>
           <p:nvPr/>
         </p:nvSpPr>
         <p:spPr>
           <a:xfrm>
-            <a:off x="1031874" y="2968624"/>
-            <a:ext cx="3333749" cy="809624"/>
+            <a:off x="1015999" y="2246312"/>
+            <a:ext cx="3317874" cy="1309687"/>
           </a:xfrm>
           <a:prstGeom prst="roundRect">
             <a:avLst>
-              <a:gd name="adj" fmla="val 8823"/>
+              <a:gd name="adj" fmla="val 5454"/>
             </a:avLst>
           </a:prstGeom>
           <a:solidFill>
@@ -4582,18 +4212,18 @@
       </p:sp>
       <p:sp>
         <p:nvSpPr>
-          <p:cNvPr id="26" name="a3_b" descr="Editable shape; source id a3_b"/>
+          <p:cNvPr id="16" name="a2_b" descr="Editable shape; source id a2_b"/>
           <p:cNvSpPr/>
           <p:nvPr/>
         </p:nvSpPr>
         <p:spPr>
           <a:xfrm>
-            <a:off x="1031874" y="2968624"/>
-            <a:ext cx="63499" cy="809624"/>
+            <a:off x="1015999" y="2246312"/>
+            <a:ext cx="47624" cy="1309687"/>
           </a:xfrm>
           <a:prstGeom prst="roundRect">
             <a:avLst>
-              <a:gd name="adj" fmla="val 37500"/>
+              <a:gd name="adj" fmla="val 50000"/>
             </a:avLst>
           </a:prstGeom>
           <a:solidFill>
@@ -4628,14 +4258,14 @@
       </p:sp>
       <p:cxnSp>
         <p:nvCxnSpPr>
-          <p:cNvPr id="27" name="a3_g_h0" descr="Editable line; source id a3_g_h0"/>
+          <p:cNvPr id="17" name="a2_g_o_0" descr="Editable line; source id a2_g_o_0"/>
           <p:cNvCxnSpPr/>
           <p:nvPr/>
         </p:nvCxnSpPr>
         <p:spPr>
           <a:xfrm>
-            <a:off x="1277937" y="3270249"/>
-            <a:ext cx="206375" cy="0"/>
+            <a:off x="1317624" y="2770187"/>
+            <a:ext cx="127000" cy="79375"/>
           </a:xfrm>
           <a:prstGeom prst="line">
             <a:avLst/>
@@ -4664,14 +4294,14 @@
       </p:cxnSp>
       <p:cxnSp>
         <p:nvCxnSpPr>
-          <p:cNvPr id="28" name="a3_g_v0" descr="Editable line; source id a3_g_v0"/>
+          <p:cNvPr id="18" name="a2_g_o_1" descr="Editable line; source id a2_g_o_1"/>
           <p:cNvCxnSpPr/>
           <p:nvPr/>
         </p:nvCxnSpPr>
         <p:spPr>
-          <a:xfrm>
-            <a:off x="1277937" y="3270249"/>
-            <a:ext cx="0" cy="206375"/>
+          <a:xfrm flipH="1">
+            <a:off x="1389062" y="2849562"/>
+            <a:ext cx="55562" cy="174625"/>
           </a:xfrm>
           <a:prstGeom prst="line">
             <a:avLst/>
@@ -4700,14 +4330,14 @@
       </p:cxnSp>
       <p:cxnSp>
         <p:nvCxnSpPr>
-          <p:cNvPr id="29" name="a3_g_h1" descr="Editable line; source id a3_g_h1"/>
+          <p:cNvPr id="19" name="a2_g_o_2" descr="Editable line; source id a2_g_o_2"/>
           <p:cNvCxnSpPr/>
           <p:nvPr/>
         </p:nvCxnSpPr>
         <p:spPr>
-          <a:xfrm>
-            <a:off x="1277937" y="3373437"/>
-            <a:ext cx="206375" cy="0"/>
+          <a:xfrm flipH="1">
+            <a:off x="1246187" y="3024187"/>
+            <a:ext cx="142875" cy="0"/>
           </a:xfrm>
           <a:prstGeom prst="line">
             <a:avLst/>
@@ -4736,14 +4366,14 @@
       </p:cxnSp>
       <p:cxnSp>
         <p:nvCxnSpPr>
-          <p:cNvPr id="30" name="a3_g_v1" descr="Editable line; source id a3_g_v1"/>
+          <p:cNvPr id="20" name="a2_g_o_3" descr="Editable line; source id a2_g_o_3"/>
           <p:cNvCxnSpPr/>
           <p:nvPr/>
         </p:nvCxnSpPr>
         <p:spPr>
-          <a:xfrm>
-            <a:off x="1381124" y="3270249"/>
-            <a:ext cx="0" cy="206375"/>
+          <a:xfrm flipH="1" flipV="1">
+            <a:off x="1190624" y="2849562"/>
+            <a:ext cx="55563" cy="174625"/>
           </a:xfrm>
           <a:prstGeom prst="line">
             <a:avLst/>
@@ -4772,14 +4402,14 @@
       </p:cxnSp>
       <p:cxnSp>
         <p:nvCxnSpPr>
-          <p:cNvPr id="31" name="a3_g_h2" descr="Editable line; source id a3_g_h2"/>
+          <p:cNvPr id="21" name="a2_g_o_4" descr="Editable line; source id a2_g_o_4"/>
           <p:cNvCxnSpPr/>
           <p:nvPr/>
         </p:nvCxnSpPr>
         <p:spPr>
-          <a:xfrm>
-            <a:off x="1277937" y="3476624"/>
-            <a:ext cx="206375" cy="0"/>
+          <a:xfrm flipV="1">
+            <a:off x="1190624" y="2770187"/>
+            <a:ext cx="127000" cy="79375"/>
           </a:xfrm>
           <a:prstGeom prst="line">
             <a:avLst/>
@@ -4808,14 +4438,14 @@
       </p:cxnSp>
       <p:cxnSp>
         <p:nvCxnSpPr>
-          <p:cNvPr id="32" name="a3_g_v2" descr="Editable line; source id a3_g_v2"/>
+          <p:cNvPr id="22" name="a2_g_a" descr="Editable line; source id a2_g_a"/>
           <p:cNvCxnSpPr/>
           <p:nvPr/>
         </p:nvCxnSpPr>
         <p:spPr>
           <a:xfrm>
-            <a:off x="1484312" y="3270249"/>
-            <a:ext cx="0" cy="206375"/>
+            <a:off x="1317624" y="2770187"/>
+            <a:ext cx="0" cy="254000"/>
           </a:xfrm>
           <a:prstGeom prst="line">
             <a:avLst/>
@@ -4842,412 +4472,52 @@
           </a:fontRef>
         </p:style>
       </p:cxnSp>
-      <p:sp>
-        <p:nvSpPr>
-          <p:cNvPr id="33" name="a3_g_d00" descr="Editable shape; source id a3_g_d00"/>
-          <p:cNvSpPr/>
-          <p:nvPr/>
-        </p:nvSpPr>
-        <p:spPr>
-          <a:xfrm>
-            <a:off x="1254124" y="3246437"/>
-            <a:ext cx="47624" cy="47624"/>
-          </a:xfrm>
-          <a:prstGeom prst="ellipse">
-            <a:avLst/>
-          </a:prstGeom>
-          <a:solidFill>
-            <a:srgbClr val="FFFFFF"/>
-          </a:solidFill>
-          <a:ln>
-            <a:noFill/>
-          </a:ln>
-          <a:effectLst/>
-        </p:spPr>
-        <p:style>
-          <a:lnRef idx="1">
-            <a:schemeClr val="accent1"/>
-          </a:lnRef>
-          <a:fillRef idx="3">
-            <a:schemeClr val="accent1"/>
-          </a:fillRef>
-          <a:effectRef idx="0">
-            <a:schemeClr val="accent1"/>
-          </a:effectRef>
-          <a:fontRef idx="minor">
-            <a:schemeClr val="lt1"/>
-          </a:fontRef>
-        </p:style>
-        <p:txBody>
-          <a:bodyPr rtlCol="0" anchor="ctr"/>
-          <a:lstStyle/>
-          <a:p>
-            <a:pPr algn="ctr"/>
-          </a:p>
-        </p:txBody>
-      </p:sp>
-      <p:sp>
-        <p:nvSpPr>
-          <p:cNvPr id="34" name="a3_g_d01" descr="Editable shape; source id a3_g_d01"/>
-          <p:cNvSpPr/>
-          <p:nvPr/>
-        </p:nvSpPr>
-        <p:spPr>
-          <a:xfrm>
-            <a:off x="1254124" y="3349624"/>
-            <a:ext cx="47624" cy="47624"/>
-          </a:xfrm>
-          <a:prstGeom prst="ellipse">
-            <a:avLst/>
-          </a:prstGeom>
-          <a:solidFill>
-            <a:srgbClr val="FFFFFF"/>
-          </a:solidFill>
-          <a:ln>
-            <a:noFill/>
-          </a:ln>
-          <a:effectLst/>
-        </p:spPr>
-        <p:style>
-          <a:lnRef idx="1">
-            <a:schemeClr val="accent1"/>
-          </a:lnRef>
-          <a:fillRef idx="3">
-            <a:schemeClr val="accent1"/>
-          </a:fillRef>
-          <a:effectRef idx="0">
-            <a:schemeClr val="accent1"/>
-          </a:effectRef>
-          <a:fontRef idx="minor">
-            <a:schemeClr val="lt1"/>
-          </a:fontRef>
-        </p:style>
-        <p:txBody>
-          <a:bodyPr rtlCol="0" anchor="ctr"/>
-          <a:lstStyle/>
-          <a:p>
-            <a:pPr algn="ctr"/>
-          </a:p>
-        </p:txBody>
-      </p:sp>
-      <p:sp>
-        <p:nvSpPr>
-          <p:cNvPr id="35" name="a3_g_d02" descr="Editable shape; source id a3_g_d02"/>
-          <p:cNvSpPr/>
-          <p:nvPr/>
-        </p:nvSpPr>
-        <p:spPr>
-          <a:xfrm>
-            <a:off x="1254124" y="3452812"/>
-            <a:ext cx="47624" cy="47624"/>
-          </a:xfrm>
-          <a:prstGeom prst="ellipse">
-            <a:avLst/>
-          </a:prstGeom>
-          <a:solidFill>
-            <a:srgbClr val="FFFFFF"/>
-          </a:solidFill>
-          <a:ln>
-            <a:noFill/>
-          </a:ln>
-          <a:effectLst/>
-        </p:spPr>
-        <p:style>
-          <a:lnRef idx="1">
-            <a:schemeClr val="accent1"/>
-          </a:lnRef>
-          <a:fillRef idx="3">
-            <a:schemeClr val="accent1"/>
-          </a:fillRef>
-          <a:effectRef idx="0">
-            <a:schemeClr val="accent1"/>
-          </a:effectRef>
-          <a:fontRef idx="minor">
-            <a:schemeClr val="lt1"/>
-          </a:fontRef>
-        </p:style>
-        <p:txBody>
-          <a:bodyPr rtlCol="0" anchor="ctr"/>
-          <a:lstStyle/>
-          <a:p>
-            <a:pPr algn="ctr"/>
-          </a:p>
-        </p:txBody>
-      </p:sp>
-      <p:sp>
-        <p:nvSpPr>
-          <p:cNvPr id="36" name="a3_g_d10" descr="Editable shape; source id a3_g_d10"/>
-          <p:cNvSpPr/>
-          <p:nvPr/>
-        </p:nvSpPr>
-        <p:spPr>
-          <a:xfrm>
-            <a:off x="1357312" y="3246437"/>
-            <a:ext cx="47624" cy="47624"/>
-          </a:xfrm>
-          <a:prstGeom prst="ellipse">
-            <a:avLst/>
-          </a:prstGeom>
-          <a:solidFill>
-            <a:srgbClr val="FFFFFF"/>
-          </a:solidFill>
-          <a:ln>
-            <a:noFill/>
-          </a:ln>
-          <a:effectLst/>
-        </p:spPr>
-        <p:style>
-          <a:lnRef idx="1">
-            <a:schemeClr val="accent1"/>
-          </a:lnRef>
-          <a:fillRef idx="3">
-            <a:schemeClr val="accent1"/>
-          </a:fillRef>
-          <a:effectRef idx="0">
-            <a:schemeClr val="accent1"/>
-          </a:effectRef>
-          <a:fontRef idx="minor">
-            <a:schemeClr val="lt1"/>
-          </a:fontRef>
-        </p:style>
-        <p:txBody>
-          <a:bodyPr rtlCol="0" anchor="ctr"/>
-          <a:lstStyle/>
-          <a:p>
-            <a:pPr algn="ctr"/>
-          </a:p>
-        </p:txBody>
-      </p:sp>
-      <p:sp>
-        <p:nvSpPr>
-          <p:cNvPr id="37" name="a3_g_d11" descr="Editable shape; source id a3_g_d11"/>
-          <p:cNvSpPr/>
-          <p:nvPr/>
-        </p:nvSpPr>
-        <p:spPr>
-          <a:xfrm>
-            <a:off x="1357312" y="3349624"/>
-            <a:ext cx="47624" cy="47624"/>
-          </a:xfrm>
-          <a:prstGeom prst="ellipse">
-            <a:avLst/>
-          </a:prstGeom>
-          <a:solidFill>
-            <a:srgbClr val="111A24"/>
-          </a:solidFill>
-          <a:ln>
-            <a:noFill/>
-          </a:ln>
-          <a:effectLst/>
-        </p:spPr>
-        <p:style>
-          <a:lnRef idx="1">
-            <a:schemeClr val="accent1"/>
-          </a:lnRef>
-          <a:fillRef idx="3">
-            <a:schemeClr val="accent1"/>
-          </a:fillRef>
-          <a:effectRef idx="0">
-            <a:schemeClr val="accent1"/>
-          </a:effectRef>
-          <a:fontRef idx="minor">
-            <a:schemeClr val="lt1"/>
-          </a:fontRef>
-        </p:style>
-        <p:txBody>
-          <a:bodyPr rtlCol="0" anchor="ctr"/>
-          <a:lstStyle/>
-          <a:p>
-            <a:pPr algn="ctr"/>
-          </a:p>
-        </p:txBody>
-      </p:sp>
-      <p:sp>
-        <p:nvSpPr>
-          <p:cNvPr id="38" name="a3_g_d12" descr="Editable shape; source id a3_g_d12"/>
-          <p:cNvSpPr/>
-          <p:nvPr/>
-        </p:nvSpPr>
-        <p:spPr>
-          <a:xfrm>
-            <a:off x="1357312" y="3452812"/>
-            <a:ext cx="47624" cy="47624"/>
-          </a:xfrm>
-          <a:prstGeom prst="ellipse">
-            <a:avLst/>
-          </a:prstGeom>
-          <a:solidFill>
-            <a:srgbClr val="FFFFFF"/>
-          </a:solidFill>
-          <a:ln>
-            <a:noFill/>
-          </a:ln>
-          <a:effectLst/>
-        </p:spPr>
-        <p:style>
-          <a:lnRef idx="1">
-            <a:schemeClr val="accent1"/>
-          </a:lnRef>
-          <a:fillRef idx="3">
-            <a:schemeClr val="accent1"/>
-          </a:fillRef>
-          <a:effectRef idx="0">
-            <a:schemeClr val="accent1"/>
-          </a:effectRef>
-          <a:fontRef idx="minor">
-            <a:schemeClr val="lt1"/>
-          </a:fontRef>
-        </p:style>
-        <p:txBody>
-          <a:bodyPr rtlCol="0" anchor="ctr"/>
-          <a:lstStyle/>
-          <a:p>
-            <a:pPr algn="ctr"/>
-          </a:p>
-        </p:txBody>
-      </p:sp>
-      <p:sp>
-        <p:nvSpPr>
-          <p:cNvPr id="39" name="a3_g_d20" descr="Editable shape; source id a3_g_d20"/>
-          <p:cNvSpPr/>
-          <p:nvPr/>
-        </p:nvSpPr>
-        <p:spPr>
-          <a:xfrm>
-            <a:off x="1460499" y="3246437"/>
-            <a:ext cx="47624" cy="47624"/>
-          </a:xfrm>
-          <a:prstGeom prst="ellipse">
-            <a:avLst/>
-          </a:prstGeom>
-          <a:solidFill>
-            <a:srgbClr val="FFFFFF"/>
-          </a:solidFill>
-          <a:ln>
-            <a:noFill/>
-          </a:ln>
-          <a:effectLst/>
-        </p:spPr>
-        <p:style>
-          <a:lnRef idx="1">
-            <a:schemeClr val="accent1"/>
-          </a:lnRef>
-          <a:fillRef idx="3">
-            <a:schemeClr val="accent1"/>
-          </a:fillRef>
-          <a:effectRef idx="0">
-            <a:schemeClr val="accent1"/>
-          </a:effectRef>
-          <a:fontRef idx="minor">
-            <a:schemeClr val="lt1"/>
-          </a:fontRef>
-        </p:style>
-        <p:txBody>
-          <a:bodyPr rtlCol="0" anchor="ctr"/>
-          <a:lstStyle/>
-          <a:p>
-            <a:pPr algn="ctr"/>
-          </a:p>
-        </p:txBody>
-      </p:sp>
-      <p:sp>
-        <p:nvSpPr>
-          <p:cNvPr id="40" name="a3_g_d21" descr="Editable shape; source id a3_g_d21"/>
-          <p:cNvSpPr/>
-          <p:nvPr/>
-        </p:nvSpPr>
-        <p:spPr>
-          <a:xfrm>
-            <a:off x="1460499" y="3349624"/>
-            <a:ext cx="47624" cy="47624"/>
-          </a:xfrm>
-          <a:prstGeom prst="ellipse">
-            <a:avLst/>
-          </a:prstGeom>
-          <a:solidFill>
-            <a:srgbClr val="FFFFFF"/>
-          </a:solidFill>
-          <a:ln>
-            <a:noFill/>
-          </a:ln>
-          <a:effectLst/>
-        </p:spPr>
-        <p:style>
-          <a:lnRef idx="1">
-            <a:schemeClr val="accent1"/>
-          </a:lnRef>
-          <a:fillRef idx="3">
-            <a:schemeClr val="accent1"/>
-          </a:fillRef>
-          <a:effectRef idx="0">
-            <a:schemeClr val="accent1"/>
-          </a:effectRef>
-          <a:fontRef idx="minor">
-            <a:schemeClr val="lt1"/>
-          </a:fontRef>
-        </p:style>
-        <p:txBody>
-          <a:bodyPr rtlCol="0" anchor="ctr"/>
-          <a:lstStyle/>
-          <a:p>
-            <a:pPr algn="ctr"/>
-          </a:p>
-        </p:txBody>
-      </p:sp>
-      <p:sp>
-        <p:nvSpPr>
-          <p:cNvPr id="41" name="a3_g_d22" descr="Editable shape; source id a3_g_d22"/>
-          <p:cNvSpPr/>
-          <p:nvPr/>
-        </p:nvSpPr>
-        <p:spPr>
-          <a:xfrm>
-            <a:off x="1460499" y="3452812"/>
-            <a:ext cx="47624" cy="47624"/>
-          </a:xfrm>
-          <a:prstGeom prst="ellipse">
-            <a:avLst/>
-          </a:prstGeom>
-          <a:solidFill>
-            <a:srgbClr val="FFFFFF"/>
-          </a:solidFill>
-          <a:ln>
-            <a:noFill/>
-          </a:ln>
-          <a:effectLst/>
-        </p:spPr>
-        <p:style>
-          <a:lnRef idx="1">
-            <a:schemeClr val="accent1"/>
-          </a:lnRef>
-          <a:fillRef idx="3">
-            <a:schemeClr val="accent1"/>
-          </a:fillRef>
-          <a:effectRef idx="0">
-            <a:schemeClr val="accent1"/>
-          </a:effectRef>
-          <a:fontRef idx="minor">
-            <a:schemeClr val="lt1"/>
-          </a:fontRef>
-        </p:style>
-        <p:txBody>
-          <a:bodyPr rtlCol="0" anchor="ctr"/>
-          <a:lstStyle/>
-          <a:p>
-            <a:pPr algn="ctr"/>
-          </a:p>
-        </p:txBody>
-      </p:sp>
-      <p:sp>
-        <p:nvSpPr>
-          <p:cNvPr id="42" name="a3_t" descr="Editable text; source id a3_t"/>
+      <p:cxnSp>
+        <p:nvCxnSpPr>
+          <p:cNvPr id="23" name="a2_g_b" descr="Editable line; source id a2_g_b"/>
+          <p:cNvCxnSpPr/>
+          <p:nvPr/>
+        </p:nvCxnSpPr>
+        <p:spPr>
+          <a:xfrm>
+            <a:off x="1190624" y="2849562"/>
+            <a:ext cx="254000" cy="0"/>
+          </a:xfrm>
+          <a:prstGeom prst="line">
+            <a:avLst/>
+          </a:prstGeom>
+          <a:ln w="18216">
+            <a:solidFill>
+              <a:srgbClr val="111A24"/>
+            </a:solidFill>
+          </a:ln>
+          <a:effectLst/>
+        </p:spPr>
+        <p:style>
+          <a:lnRef idx="2">
+            <a:schemeClr val="accent1"/>
+          </a:lnRef>
+          <a:fillRef idx="0">
+            <a:schemeClr val="accent1"/>
+          </a:fillRef>
+          <a:effectRef idx="0">
+            <a:schemeClr val="accent1"/>
+          </a:effectRef>
+          <a:fontRef idx="minor">
+            <a:schemeClr val="tx1"/>
+          </a:fontRef>
+        </p:style>
+      </p:cxnSp>
+      <p:sp>
+        <p:nvSpPr>
+          <p:cNvPr id="24" name="a2_t" descr="Editable text; source id a2_t"/>
           <p:cNvSpPr txBox="1"/>
           <p:nvPr/>
         </p:nvSpPr>
         <p:spPr>
           <a:xfrm>
-            <a:off x="1635124" y="3206749"/>
-            <a:ext cx="2603499" cy="325437"/>
+            <a:off x="1555749" y="2365374"/>
+            <a:ext cx="2682874" cy="1071562"/>
           </a:xfrm>
           <a:prstGeom prst="rect">
             <a:avLst/>
@@ -5263,7 +4533,7 @@
           <a:p>
             <a:pPr algn="l" fontAlgn="base">
               <a:lnSpc>
-                <a:spcPts val="1531"/>
+                <a:spcPts val="1921"/>
               </a:lnSpc>
               <a:spcBef>
                 <a:spcPts val="0"/>
@@ -5271,7 +4541,7 @@
               <a:spcAft>
                 <a:spcPts val="0"/>
               </a:spcAft>
-              <a:defRPr sz="1309" b="1" i="0" lang="zh-CN" dirty="0">
+              <a:defRPr sz="1644" b="1" i="0" lang="zh-CN" dirty="0">
                 <a:solidFill>
                   <a:srgbClr val="2B3E57"/>
                 </a:solidFill>
@@ -5281,7 +4551,7 @@
               </a:defRPr>
             </a:pPr>
             <a:r>
-              <a:rPr sz="1309" b="1" i="0" lang="zh-CN" dirty="0">
+              <a:rPr sz="1644" b="1" i="0" lang="zh-CN" dirty="0">
                 <a:solidFill>
                   <a:srgbClr val="2B3E57"/>
                 </a:solidFill>
@@ -5289,275 +4559,13 @@
                 <a:ea typeface="DejaVu Sans"/>
                 <a:cs typeface="DejaVu Sans"/>
               </a:rPr>
-              <a:t>Crystal-Chemical Neighbors</a:t>
+              <a:t>Same Ba–Y Tetragonal </a:t>
             </a:r>
           </a:p>
-        </p:txBody>
-      </p:sp>
-      <p:sp>
-        <p:nvSpPr>
-          <p:cNvPr id="43" name="a4" descr="Editable shape; source id a4"/>
-          <p:cNvSpPr/>
-          <p:nvPr/>
-        </p:nvSpPr>
-        <p:spPr>
-          <a:xfrm>
-            <a:off x="1031874" y="3857624"/>
-            <a:ext cx="3333749" cy="809624"/>
-          </a:xfrm>
-          <a:prstGeom prst="roundRect">
-            <a:avLst>
-              <a:gd name="adj" fmla="val 8823"/>
-            </a:avLst>
-          </a:prstGeom>
-          <a:solidFill>
-            <a:srgbClr val="FFFFFF"/>
-          </a:solidFill>
-          <a:ln w="15081">
-            <a:solidFill>
-              <a:srgbClr val="5B7592"/>
-            </a:solidFill>
-          </a:ln>
-          <a:effectLst/>
-        </p:spPr>
-        <p:style>
-          <a:lnRef idx="1">
-            <a:schemeClr val="accent1"/>
-          </a:lnRef>
-          <a:fillRef idx="3">
-            <a:schemeClr val="accent1"/>
-          </a:fillRef>
-          <a:effectRef idx="0">
-            <a:schemeClr val="accent1"/>
-          </a:effectRef>
-          <a:fontRef idx="minor">
-            <a:schemeClr val="lt1"/>
-          </a:fontRef>
-        </p:style>
-        <p:txBody>
-          <a:bodyPr rtlCol="0" anchor="ctr"/>
-          <a:lstStyle/>
-          <a:p>
-            <a:pPr algn="ctr"/>
-          </a:p>
-        </p:txBody>
-      </p:sp>
-      <p:sp>
-        <p:nvSpPr>
-          <p:cNvPr id="44" name="a4_b" descr="Editable shape; source id a4_b"/>
-          <p:cNvSpPr/>
-          <p:nvPr/>
-        </p:nvSpPr>
-        <p:spPr>
-          <a:xfrm>
-            <a:off x="1031874" y="3857624"/>
-            <a:ext cx="63499" cy="809624"/>
-          </a:xfrm>
-          <a:prstGeom prst="roundRect">
-            <a:avLst>
-              <a:gd name="adj" fmla="val 37500"/>
-            </a:avLst>
-          </a:prstGeom>
-          <a:solidFill>
-            <a:srgbClr val="5B7592"/>
-          </a:solidFill>
-          <a:ln>
-            <a:noFill/>
-          </a:ln>
-          <a:effectLst/>
-        </p:spPr>
-        <p:style>
-          <a:lnRef idx="1">
-            <a:schemeClr val="accent1"/>
-          </a:lnRef>
-          <a:fillRef idx="3">
-            <a:schemeClr val="accent1"/>
-          </a:fillRef>
-          <a:effectRef idx="0">
-            <a:schemeClr val="accent1"/>
-          </a:effectRef>
-          <a:fontRef idx="minor">
-            <a:schemeClr val="lt1"/>
-          </a:fontRef>
-        </p:style>
-        <p:txBody>
-          <a:bodyPr rtlCol="0" anchor="ctr"/>
-          <a:lstStyle/>
-          <a:p>
-            <a:pPr algn="ctr"/>
-          </a:p>
-        </p:txBody>
-      </p:sp>
-      <p:cxnSp>
-        <p:nvCxnSpPr>
-          <p:cNvPr id="45" name="a4_g_b_0" descr="Editable line; source id a4_g_b_0"/>
-          <p:cNvCxnSpPr/>
-          <p:nvPr/>
-        </p:nvCxnSpPr>
-        <p:spPr>
-          <a:xfrm>
-            <a:off x="1293812" y="4198937"/>
-            <a:ext cx="31750" cy="174625"/>
-          </a:xfrm>
-          <a:prstGeom prst="line">
-            <a:avLst/>
-          </a:prstGeom>
-          <a:ln w="18216">
-            <a:solidFill>
-              <a:srgbClr val="111A24"/>
-            </a:solidFill>
-          </a:ln>
-          <a:effectLst/>
-        </p:spPr>
-        <p:style>
-          <a:lnRef idx="2">
-            <a:schemeClr val="accent1"/>
-          </a:lnRef>
-          <a:fillRef idx="0">
-            <a:schemeClr val="accent1"/>
-          </a:fillRef>
-          <a:effectRef idx="0">
-            <a:schemeClr val="accent1"/>
-          </a:effectRef>
-          <a:fontRef idx="minor">
-            <a:schemeClr val="tx1"/>
-          </a:fontRef>
-        </p:style>
-      </p:cxnSp>
-      <p:cxnSp>
-        <p:nvCxnSpPr>
-          <p:cNvPr id="46" name="a4_g_b_1" descr="Editable line; source id a4_g_b_1"/>
-          <p:cNvCxnSpPr/>
-          <p:nvPr/>
-        </p:nvCxnSpPr>
-        <p:spPr>
-          <a:xfrm>
-            <a:off x="1325562" y="4373562"/>
-            <a:ext cx="111125" cy="0"/>
-          </a:xfrm>
-          <a:prstGeom prst="line">
-            <a:avLst/>
-          </a:prstGeom>
-          <a:ln w="18216">
-            <a:solidFill>
-              <a:srgbClr val="111A24"/>
-            </a:solidFill>
-          </a:ln>
-          <a:effectLst/>
-        </p:spPr>
-        <p:style>
-          <a:lnRef idx="2">
-            <a:schemeClr val="accent1"/>
-          </a:lnRef>
-          <a:fillRef idx="0">
-            <a:schemeClr val="accent1"/>
-          </a:fillRef>
-          <a:effectRef idx="0">
-            <a:schemeClr val="accent1"/>
-          </a:effectRef>
-          <a:fontRef idx="minor">
-            <a:schemeClr val="tx1"/>
-          </a:fontRef>
-        </p:style>
-      </p:cxnSp>
-      <p:cxnSp>
-        <p:nvCxnSpPr>
-          <p:cNvPr id="47" name="a4_g_b_2" descr="Editable line; source id a4_g_b_2"/>
-          <p:cNvCxnSpPr/>
-          <p:nvPr/>
-        </p:nvCxnSpPr>
-        <p:spPr>
-          <a:xfrm flipV="1">
-            <a:off x="1436687" y="4198937"/>
-            <a:ext cx="31750" cy="174625"/>
-          </a:xfrm>
-          <a:prstGeom prst="line">
-            <a:avLst/>
-          </a:prstGeom>
-          <a:ln w="18216">
-            <a:solidFill>
-              <a:srgbClr val="111A24"/>
-            </a:solidFill>
-          </a:ln>
-          <a:effectLst/>
-        </p:spPr>
-        <p:style>
-          <a:lnRef idx="2">
-            <a:schemeClr val="accent1"/>
-          </a:lnRef>
-          <a:fillRef idx="0">
-            <a:schemeClr val="accent1"/>
-          </a:fillRef>
-          <a:effectRef idx="0">
-            <a:schemeClr val="accent1"/>
-          </a:effectRef>
-          <a:fontRef idx="minor">
-            <a:schemeClr val="tx1"/>
-          </a:fontRef>
-        </p:style>
-      </p:cxnSp>
-      <p:cxnSp>
-        <p:nvCxnSpPr>
-          <p:cNvPr id="48" name="a4_g_r" descr="Editable line; source id a4_g_r"/>
-          <p:cNvCxnSpPr/>
-          <p:nvPr/>
-        </p:nvCxnSpPr>
-        <p:spPr>
-          <a:xfrm>
-            <a:off x="1269999" y="4198937"/>
-            <a:ext cx="222250" cy="0"/>
-          </a:xfrm>
-          <a:prstGeom prst="line">
-            <a:avLst/>
-          </a:prstGeom>
-          <a:ln w="18216">
-            <a:solidFill>
-              <a:srgbClr val="111A24"/>
-            </a:solidFill>
-          </a:ln>
-          <a:effectLst/>
-        </p:spPr>
-        <p:style>
-          <a:lnRef idx="2">
-            <a:schemeClr val="accent1"/>
-          </a:lnRef>
-          <a:fillRef idx="0">
-            <a:schemeClr val="accent1"/>
-          </a:fillRef>
-          <a:effectRef idx="0">
-            <a:schemeClr val="accent1"/>
-          </a:effectRef>
-          <a:fontRef idx="minor">
-            <a:schemeClr val="tx1"/>
-          </a:fontRef>
-        </p:style>
-      </p:cxnSp>
-      <p:sp>
-        <p:nvSpPr>
-          <p:cNvPr id="49" name="a4_t" descr="Editable text; source id a4_t"/>
-          <p:cNvSpPr txBox="1"/>
-          <p:nvPr/>
-        </p:nvSpPr>
-        <p:spPr>
-          <a:xfrm>
-            <a:off x="1635124" y="4095749"/>
-            <a:ext cx="2603499" cy="325437"/>
-          </a:xfrm>
-          <a:prstGeom prst="rect">
-            <a:avLst/>
-          </a:prstGeom>
-          <a:noFill/>
-          <a:effectLst/>
-        </p:spPr>
-        <p:txBody>
-          <a:bodyPr wrap="none" anchor="ctr" tIns="0" rIns="0" bIns="0" lIns="0" anchorCtr="0" vertOverflow="overflow">
-            <a:noAutofit/>
-          </a:bodyPr>
-          <a:lstStyle/>
           <a:p>
             <a:pPr algn="l" fontAlgn="base">
               <a:lnSpc>
-                <a:spcPts val="1593"/>
+                <a:spcPts val="1921"/>
               </a:lnSpc>
               <a:spcBef>
                 <a:spcPts val="0"/>
@@ -5565,7 +4573,7 @@
               <a:spcAft>
                 <a:spcPts val="0"/>
               </a:spcAft>
-              <a:defRPr sz="1362" b="1" i="0" lang="zh-CN" dirty="0">
+              <a:defRPr sz="1644" b="1" i="0" lang="zh-CN" dirty="0">
                 <a:solidFill>
                   <a:srgbClr val="2B3E57"/>
                 </a:solidFill>
@@ -5575,7 +4583,7 @@
               </a:defRPr>
             </a:pPr>
             <a:r>
-              <a:rPr sz="1362" b="1" i="0" lang="zh-CN" dirty="0">
+              <a:rPr sz="1644" b="1" i="0" lang="zh-CN" dirty="0">
                 <a:solidFill>
                   <a:srgbClr val="2B3E57"/>
                 </a:solidFill>
@@ -5583,7 +4591,1127 @@
                 <a:ea typeface="DejaVu Sans"/>
                 <a:cs typeface="DejaVu Sans"/>
               </a:rPr>
-              <a:t>Process Reference Studies</a:t>
+              <a:t>Silicates</a:t>
+            </a:r>
+          </a:p>
+        </p:txBody>
+      </p:sp>
+      <p:sp>
+        <p:nvSpPr>
+          <p:cNvPr id="25" name="a3" descr="Editable shape; source id a3"/>
+          <p:cNvSpPr/>
+          <p:nvPr/>
+        </p:nvSpPr>
+        <p:spPr>
+          <a:xfrm>
+            <a:off x="1015999" y="3746499"/>
+            <a:ext cx="3317874" cy="1309687"/>
+          </a:xfrm>
+          <a:prstGeom prst="roundRect">
+            <a:avLst>
+              <a:gd name="adj" fmla="val 5454"/>
+            </a:avLst>
+          </a:prstGeom>
+          <a:solidFill>
+            <a:srgbClr val="FFFFFF"/>
+          </a:solidFill>
+          <a:ln w="15081">
+            <a:solidFill>
+              <a:srgbClr val="5B7592"/>
+            </a:solidFill>
+          </a:ln>
+          <a:effectLst/>
+        </p:spPr>
+        <p:style>
+          <a:lnRef idx="1">
+            <a:schemeClr val="accent1"/>
+          </a:lnRef>
+          <a:fillRef idx="3">
+            <a:schemeClr val="accent1"/>
+          </a:fillRef>
+          <a:effectRef idx="0">
+            <a:schemeClr val="accent1"/>
+          </a:effectRef>
+          <a:fontRef idx="minor">
+            <a:schemeClr val="lt1"/>
+          </a:fontRef>
+        </p:style>
+        <p:txBody>
+          <a:bodyPr rtlCol="0" anchor="ctr"/>
+          <a:lstStyle/>
+          <a:p>
+            <a:pPr algn="ctr"/>
+          </a:p>
+        </p:txBody>
+      </p:sp>
+      <p:sp>
+        <p:nvSpPr>
+          <p:cNvPr id="26" name="a3_b" descr="Editable shape; source id a3_b"/>
+          <p:cNvSpPr/>
+          <p:nvPr/>
+        </p:nvSpPr>
+        <p:spPr>
+          <a:xfrm>
+            <a:off x="1015999" y="3746499"/>
+            <a:ext cx="47624" cy="1309687"/>
+          </a:xfrm>
+          <a:prstGeom prst="roundRect">
+            <a:avLst>
+              <a:gd name="adj" fmla="val 50000"/>
+            </a:avLst>
+          </a:prstGeom>
+          <a:solidFill>
+            <a:srgbClr val="5B7592"/>
+          </a:solidFill>
+          <a:ln>
+            <a:noFill/>
+          </a:ln>
+          <a:effectLst/>
+        </p:spPr>
+        <p:style>
+          <a:lnRef idx="1">
+            <a:schemeClr val="accent1"/>
+          </a:lnRef>
+          <a:fillRef idx="3">
+            <a:schemeClr val="accent1"/>
+          </a:fillRef>
+          <a:effectRef idx="0">
+            <a:schemeClr val="accent1"/>
+          </a:effectRef>
+          <a:fontRef idx="minor">
+            <a:schemeClr val="lt1"/>
+          </a:fontRef>
+        </p:style>
+        <p:txBody>
+          <a:bodyPr rtlCol="0" anchor="ctr"/>
+          <a:lstStyle/>
+          <a:p>
+            <a:pPr algn="ctr"/>
+          </a:p>
+        </p:txBody>
+      </p:sp>
+      <p:cxnSp>
+        <p:nvCxnSpPr>
+          <p:cNvPr id="27" name="a3_g_h0" descr="Editable line; source id a3_g_h0"/>
+          <p:cNvCxnSpPr/>
+          <p:nvPr/>
+        </p:nvCxnSpPr>
+        <p:spPr>
+          <a:xfrm>
+            <a:off x="1214437" y="4302124"/>
+            <a:ext cx="206375" cy="0"/>
+          </a:xfrm>
+          <a:prstGeom prst="line">
+            <a:avLst/>
+          </a:prstGeom>
+          <a:ln w="18216">
+            <a:solidFill>
+              <a:srgbClr val="111A24"/>
+            </a:solidFill>
+          </a:ln>
+          <a:effectLst/>
+        </p:spPr>
+        <p:style>
+          <a:lnRef idx="2">
+            <a:schemeClr val="accent1"/>
+          </a:lnRef>
+          <a:fillRef idx="0">
+            <a:schemeClr val="accent1"/>
+          </a:fillRef>
+          <a:effectRef idx="0">
+            <a:schemeClr val="accent1"/>
+          </a:effectRef>
+          <a:fontRef idx="minor">
+            <a:schemeClr val="tx1"/>
+          </a:fontRef>
+        </p:style>
+      </p:cxnSp>
+      <p:cxnSp>
+        <p:nvCxnSpPr>
+          <p:cNvPr id="28" name="a3_g_v0" descr="Editable line; source id a3_g_v0"/>
+          <p:cNvCxnSpPr/>
+          <p:nvPr/>
+        </p:nvCxnSpPr>
+        <p:spPr>
+          <a:xfrm>
+            <a:off x="1214437" y="4302124"/>
+            <a:ext cx="0" cy="198438"/>
+          </a:xfrm>
+          <a:prstGeom prst="line">
+            <a:avLst/>
+          </a:prstGeom>
+          <a:ln w="18216">
+            <a:solidFill>
+              <a:srgbClr val="111A24"/>
+            </a:solidFill>
+          </a:ln>
+          <a:effectLst/>
+        </p:spPr>
+        <p:style>
+          <a:lnRef idx="2">
+            <a:schemeClr val="accent1"/>
+          </a:lnRef>
+          <a:fillRef idx="0">
+            <a:schemeClr val="accent1"/>
+          </a:fillRef>
+          <a:effectRef idx="0">
+            <a:schemeClr val="accent1"/>
+          </a:effectRef>
+          <a:fontRef idx="minor">
+            <a:schemeClr val="tx1"/>
+          </a:fontRef>
+        </p:style>
+      </p:cxnSp>
+      <p:cxnSp>
+        <p:nvCxnSpPr>
+          <p:cNvPr id="29" name="a3_g_h1" descr="Editable line; source id a3_g_h1"/>
+          <p:cNvCxnSpPr/>
+          <p:nvPr/>
+        </p:nvCxnSpPr>
+        <p:spPr>
+          <a:xfrm>
+            <a:off x="1214437" y="4397374"/>
+            <a:ext cx="206375" cy="0"/>
+          </a:xfrm>
+          <a:prstGeom prst="line">
+            <a:avLst/>
+          </a:prstGeom>
+          <a:ln w="18216">
+            <a:solidFill>
+              <a:srgbClr val="111A24"/>
+            </a:solidFill>
+          </a:ln>
+          <a:effectLst/>
+        </p:spPr>
+        <p:style>
+          <a:lnRef idx="2">
+            <a:schemeClr val="accent1"/>
+          </a:lnRef>
+          <a:fillRef idx="0">
+            <a:schemeClr val="accent1"/>
+          </a:fillRef>
+          <a:effectRef idx="0">
+            <a:schemeClr val="accent1"/>
+          </a:effectRef>
+          <a:fontRef idx="minor">
+            <a:schemeClr val="tx1"/>
+          </a:fontRef>
+        </p:style>
+      </p:cxnSp>
+      <p:cxnSp>
+        <p:nvCxnSpPr>
+          <p:cNvPr id="30" name="a3_g_v1" descr="Editable line; source id a3_g_v1"/>
+          <p:cNvCxnSpPr/>
+          <p:nvPr/>
+        </p:nvCxnSpPr>
+        <p:spPr>
+          <a:xfrm>
+            <a:off x="1317624" y="4302124"/>
+            <a:ext cx="0" cy="198438"/>
+          </a:xfrm>
+          <a:prstGeom prst="line">
+            <a:avLst/>
+          </a:prstGeom>
+          <a:ln w="18216">
+            <a:solidFill>
+              <a:srgbClr val="111A24"/>
+            </a:solidFill>
+          </a:ln>
+          <a:effectLst/>
+        </p:spPr>
+        <p:style>
+          <a:lnRef idx="2">
+            <a:schemeClr val="accent1"/>
+          </a:lnRef>
+          <a:fillRef idx="0">
+            <a:schemeClr val="accent1"/>
+          </a:fillRef>
+          <a:effectRef idx="0">
+            <a:schemeClr val="accent1"/>
+          </a:effectRef>
+          <a:fontRef idx="minor">
+            <a:schemeClr val="tx1"/>
+          </a:fontRef>
+        </p:style>
+      </p:cxnSp>
+      <p:cxnSp>
+        <p:nvCxnSpPr>
+          <p:cNvPr id="31" name="a3_g_h2" descr="Editable line; source id a3_g_h2"/>
+          <p:cNvCxnSpPr/>
+          <p:nvPr/>
+        </p:nvCxnSpPr>
+        <p:spPr>
+          <a:xfrm>
+            <a:off x="1214437" y="4500562"/>
+            <a:ext cx="206375" cy="0"/>
+          </a:xfrm>
+          <a:prstGeom prst="line">
+            <a:avLst/>
+          </a:prstGeom>
+          <a:ln w="18216">
+            <a:solidFill>
+              <a:srgbClr val="111A24"/>
+            </a:solidFill>
+          </a:ln>
+          <a:effectLst/>
+        </p:spPr>
+        <p:style>
+          <a:lnRef idx="2">
+            <a:schemeClr val="accent1"/>
+          </a:lnRef>
+          <a:fillRef idx="0">
+            <a:schemeClr val="accent1"/>
+          </a:fillRef>
+          <a:effectRef idx="0">
+            <a:schemeClr val="accent1"/>
+          </a:effectRef>
+          <a:fontRef idx="minor">
+            <a:schemeClr val="tx1"/>
+          </a:fontRef>
+        </p:style>
+      </p:cxnSp>
+      <p:cxnSp>
+        <p:nvCxnSpPr>
+          <p:cNvPr id="32" name="a3_g_v2" descr="Editable line; source id a3_g_v2"/>
+          <p:cNvCxnSpPr/>
+          <p:nvPr/>
+        </p:nvCxnSpPr>
+        <p:spPr>
+          <a:xfrm>
+            <a:off x="1420812" y="4302124"/>
+            <a:ext cx="0" cy="198438"/>
+          </a:xfrm>
+          <a:prstGeom prst="line">
+            <a:avLst/>
+          </a:prstGeom>
+          <a:ln w="18216">
+            <a:solidFill>
+              <a:srgbClr val="111A24"/>
+            </a:solidFill>
+          </a:ln>
+          <a:effectLst/>
+        </p:spPr>
+        <p:style>
+          <a:lnRef idx="2">
+            <a:schemeClr val="accent1"/>
+          </a:lnRef>
+          <a:fillRef idx="0">
+            <a:schemeClr val="accent1"/>
+          </a:fillRef>
+          <a:effectRef idx="0">
+            <a:schemeClr val="accent1"/>
+          </a:effectRef>
+          <a:fontRef idx="minor">
+            <a:schemeClr val="tx1"/>
+          </a:fontRef>
+        </p:style>
+      </p:cxnSp>
+      <p:sp>
+        <p:nvSpPr>
+          <p:cNvPr id="33" name="a3_g_d00" descr="Editable shape; source id a3_g_d00"/>
+          <p:cNvSpPr/>
+          <p:nvPr/>
+        </p:nvSpPr>
+        <p:spPr>
+          <a:xfrm>
+            <a:off x="1190624" y="4278312"/>
+            <a:ext cx="47624" cy="47624"/>
+          </a:xfrm>
+          <a:prstGeom prst="ellipse">
+            <a:avLst/>
+          </a:prstGeom>
+          <a:solidFill>
+            <a:srgbClr val="FFFFFF"/>
+          </a:solidFill>
+          <a:ln>
+            <a:noFill/>
+          </a:ln>
+          <a:effectLst/>
+        </p:spPr>
+        <p:style>
+          <a:lnRef idx="1">
+            <a:schemeClr val="accent1"/>
+          </a:lnRef>
+          <a:fillRef idx="3">
+            <a:schemeClr val="accent1"/>
+          </a:fillRef>
+          <a:effectRef idx="0">
+            <a:schemeClr val="accent1"/>
+          </a:effectRef>
+          <a:fontRef idx="minor">
+            <a:schemeClr val="lt1"/>
+          </a:fontRef>
+        </p:style>
+        <p:txBody>
+          <a:bodyPr rtlCol="0" anchor="ctr"/>
+          <a:lstStyle/>
+          <a:p>
+            <a:pPr algn="ctr"/>
+          </a:p>
+        </p:txBody>
+      </p:sp>
+      <p:sp>
+        <p:nvSpPr>
+          <p:cNvPr id="34" name="a3_g_d01" descr="Editable shape; source id a3_g_d01"/>
+          <p:cNvSpPr/>
+          <p:nvPr/>
+        </p:nvSpPr>
+        <p:spPr>
+          <a:xfrm>
+            <a:off x="1190624" y="4381499"/>
+            <a:ext cx="47624" cy="47624"/>
+          </a:xfrm>
+          <a:prstGeom prst="ellipse">
+            <a:avLst/>
+          </a:prstGeom>
+          <a:solidFill>
+            <a:srgbClr val="FFFFFF"/>
+          </a:solidFill>
+          <a:ln>
+            <a:noFill/>
+          </a:ln>
+          <a:effectLst/>
+        </p:spPr>
+        <p:style>
+          <a:lnRef idx="1">
+            <a:schemeClr val="accent1"/>
+          </a:lnRef>
+          <a:fillRef idx="3">
+            <a:schemeClr val="accent1"/>
+          </a:fillRef>
+          <a:effectRef idx="0">
+            <a:schemeClr val="accent1"/>
+          </a:effectRef>
+          <a:fontRef idx="minor">
+            <a:schemeClr val="lt1"/>
+          </a:fontRef>
+        </p:style>
+        <p:txBody>
+          <a:bodyPr rtlCol="0" anchor="ctr"/>
+          <a:lstStyle/>
+          <a:p>
+            <a:pPr algn="ctr"/>
+          </a:p>
+        </p:txBody>
+      </p:sp>
+      <p:sp>
+        <p:nvSpPr>
+          <p:cNvPr id="35" name="a3_g_d02" descr="Editable shape; source id a3_g_d02"/>
+          <p:cNvSpPr/>
+          <p:nvPr/>
+        </p:nvSpPr>
+        <p:spPr>
+          <a:xfrm>
+            <a:off x="1190624" y="4476749"/>
+            <a:ext cx="47624" cy="47624"/>
+          </a:xfrm>
+          <a:prstGeom prst="ellipse">
+            <a:avLst/>
+          </a:prstGeom>
+          <a:solidFill>
+            <a:srgbClr val="FFFFFF"/>
+          </a:solidFill>
+          <a:ln>
+            <a:noFill/>
+          </a:ln>
+          <a:effectLst/>
+        </p:spPr>
+        <p:style>
+          <a:lnRef idx="1">
+            <a:schemeClr val="accent1"/>
+          </a:lnRef>
+          <a:fillRef idx="3">
+            <a:schemeClr val="accent1"/>
+          </a:fillRef>
+          <a:effectRef idx="0">
+            <a:schemeClr val="accent1"/>
+          </a:effectRef>
+          <a:fontRef idx="minor">
+            <a:schemeClr val="lt1"/>
+          </a:fontRef>
+        </p:style>
+        <p:txBody>
+          <a:bodyPr rtlCol="0" anchor="ctr"/>
+          <a:lstStyle/>
+          <a:p>
+            <a:pPr algn="ctr"/>
+          </a:p>
+        </p:txBody>
+      </p:sp>
+      <p:sp>
+        <p:nvSpPr>
+          <p:cNvPr id="36" name="a3_g_d10" descr="Editable shape; source id a3_g_d10"/>
+          <p:cNvSpPr/>
+          <p:nvPr/>
+        </p:nvSpPr>
+        <p:spPr>
+          <a:xfrm>
+            <a:off x="1293812" y="4278312"/>
+            <a:ext cx="47624" cy="47624"/>
+          </a:xfrm>
+          <a:prstGeom prst="ellipse">
+            <a:avLst/>
+          </a:prstGeom>
+          <a:solidFill>
+            <a:srgbClr val="FFFFFF"/>
+          </a:solidFill>
+          <a:ln>
+            <a:noFill/>
+          </a:ln>
+          <a:effectLst/>
+        </p:spPr>
+        <p:style>
+          <a:lnRef idx="1">
+            <a:schemeClr val="accent1"/>
+          </a:lnRef>
+          <a:fillRef idx="3">
+            <a:schemeClr val="accent1"/>
+          </a:fillRef>
+          <a:effectRef idx="0">
+            <a:schemeClr val="accent1"/>
+          </a:effectRef>
+          <a:fontRef idx="minor">
+            <a:schemeClr val="lt1"/>
+          </a:fontRef>
+        </p:style>
+        <p:txBody>
+          <a:bodyPr rtlCol="0" anchor="ctr"/>
+          <a:lstStyle/>
+          <a:p>
+            <a:pPr algn="ctr"/>
+          </a:p>
+        </p:txBody>
+      </p:sp>
+      <p:sp>
+        <p:nvSpPr>
+          <p:cNvPr id="37" name="a3_g_d11" descr="Editable shape; source id a3_g_d11"/>
+          <p:cNvSpPr/>
+          <p:nvPr/>
+        </p:nvSpPr>
+        <p:spPr>
+          <a:xfrm>
+            <a:off x="1293812" y="4381499"/>
+            <a:ext cx="47624" cy="47624"/>
+          </a:xfrm>
+          <a:prstGeom prst="ellipse">
+            <a:avLst/>
+          </a:prstGeom>
+          <a:solidFill>
+            <a:srgbClr val="111A24"/>
+          </a:solidFill>
+          <a:ln>
+            <a:noFill/>
+          </a:ln>
+          <a:effectLst/>
+        </p:spPr>
+        <p:style>
+          <a:lnRef idx="1">
+            <a:schemeClr val="accent1"/>
+          </a:lnRef>
+          <a:fillRef idx="3">
+            <a:schemeClr val="accent1"/>
+          </a:fillRef>
+          <a:effectRef idx="0">
+            <a:schemeClr val="accent1"/>
+          </a:effectRef>
+          <a:fontRef idx="minor">
+            <a:schemeClr val="lt1"/>
+          </a:fontRef>
+        </p:style>
+        <p:txBody>
+          <a:bodyPr rtlCol="0" anchor="ctr"/>
+          <a:lstStyle/>
+          <a:p>
+            <a:pPr algn="ctr"/>
+          </a:p>
+        </p:txBody>
+      </p:sp>
+      <p:sp>
+        <p:nvSpPr>
+          <p:cNvPr id="38" name="a3_g_d12" descr="Editable shape; source id a3_g_d12"/>
+          <p:cNvSpPr/>
+          <p:nvPr/>
+        </p:nvSpPr>
+        <p:spPr>
+          <a:xfrm>
+            <a:off x="1293812" y="4476749"/>
+            <a:ext cx="47624" cy="47624"/>
+          </a:xfrm>
+          <a:prstGeom prst="ellipse">
+            <a:avLst/>
+          </a:prstGeom>
+          <a:solidFill>
+            <a:srgbClr val="FFFFFF"/>
+          </a:solidFill>
+          <a:ln>
+            <a:noFill/>
+          </a:ln>
+          <a:effectLst/>
+        </p:spPr>
+        <p:style>
+          <a:lnRef idx="1">
+            <a:schemeClr val="accent1"/>
+          </a:lnRef>
+          <a:fillRef idx="3">
+            <a:schemeClr val="accent1"/>
+          </a:fillRef>
+          <a:effectRef idx="0">
+            <a:schemeClr val="accent1"/>
+          </a:effectRef>
+          <a:fontRef idx="minor">
+            <a:schemeClr val="lt1"/>
+          </a:fontRef>
+        </p:style>
+        <p:txBody>
+          <a:bodyPr rtlCol="0" anchor="ctr"/>
+          <a:lstStyle/>
+          <a:p>
+            <a:pPr algn="ctr"/>
+          </a:p>
+        </p:txBody>
+      </p:sp>
+      <p:sp>
+        <p:nvSpPr>
+          <p:cNvPr id="39" name="a3_g_d20" descr="Editable shape; source id a3_g_d20"/>
+          <p:cNvSpPr/>
+          <p:nvPr/>
+        </p:nvSpPr>
+        <p:spPr>
+          <a:xfrm>
+            <a:off x="1396999" y="4278312"/>
+            <a:ext cx="47624" cy="47624"/>
+          </a:xfrm>
+          <a:prstGeom prst="ellipse">
+            <a:avLst/>
+          </a:prstGeom>
+          <a:solidFill>
+            <a:srgbClr val="FFFFFF"/>
+          </a:solidFill>
+          <a:ln>
+            <a:noFill/>
+          </a:ln>
+          <a:effectLst/>
+        </p:spPr>
+        <p:style>
+          <a:lnRef idx="1">
+            <a:schemeClr val="accent1"/>
+          </a:lnRef>
+          <a:fillRef idx="3">
+            <a:schemeClr val="accent1"/>
+          </a:fillRef>
+          <a:effectRef idx="0">
+            <a:schemeClr val="accent1"/>
+          </a:effectRef>
+          <a:fontRef idx="minor">
+            <a:schemeClr val="lt1"/>
+          </a:fontRef>
+        </p:style>
+        <p:txBody>
+          <a:bodyPr rtlCol="0" anchor="ctr"/>
+          <a:lstStyle/>
+          <a:p>
+            <a:pPr algn="ctr"/>
+          </a:p>
+        </p:txBody>
+      </p:sp>
+      <p:sp>
+        <p:nvSpPr>
+          <p:cNvPr id="40" name="a3_g_d21" descr="Editable shape; source id a3_g_d21"/>
+          <p:cNvSpPr/>
+          <p:nvPr/>
+        </p:nvSpPr>
+        <p:spPr>
+          <a:xfrm>
+            <a:off x="1396999" y="4381499"/>
+            <a:ext cx="47624" cy="47624"/>
+          </a:xfrm>
+          <a:prstGeom prst="ellipse">
+            <a:avLst/>
+          </a:prstGeom>
+          <a:solidFill>
+            <a:srgbClr val="FFFFFF"/>
+          </a:solidFill>
+          <a:ln>
+            <a:noFill/>
+          </a:ln>
+          <a:effectLst/>
+        </p:spPr>
+        <p:style>
+          <a:lnRef idx="1">
+            <a:schemeClr val="accent1"/>
+          </a:lnRef>
+          <a:fillRef idx="3">
+            <a:schemeClr val="accent1"/>
+          </a:fillRef>
+          <a:effectRef idx="0">
+            <a:schemeClr val="accent1"/>
+          </a:effectRef>
+          <a:fontRef idx="minor">
+            <a:schemeClr val="lt1"/>
+          </a:fontRef>
+        </p:style>
+        <p:txBody>
+          <a:bodyPr rtlCol="0" anchor="ctr"/>
+          <a:lstStyle/>
+          <a:p>
+            <a:pPr algn="ctr"/>
+          </a:p>
+        </p:txBody>
+      </p:sp>
+      <p:sp>
+        <p:nvSpPr>
+          <p:cNvPr id="41" name="a3_g_d22" descr="Editable shape; source id a3_g_d22"/>
+          <p:cNvSpPr/>
+          <p:nvPr/>
+        </p:nvSpPr>
+        <p:spPr>
+          <a:xfrm>
+            <a:off x="1396999" y="4476749"/>
+            <a:ext cx="47624" cy="47624"/>
+          </a:xfrm>
+          <a:prstGeom prst="ellipse">
+            <a:avLst/>
+          </a:prstGeom>
+          <a:solidFill>
+            <a:srgbClr val="FFFFFF"/>
+          </a:solidFill>
+          <a:ln>
+            <a:noFill/>
+          </a:ln>
+          <a:effectLst/>
+        </p:spPr>
+        <p:style>
+          <a:lnRef idx="1">
+            <a:schemeClr val="accent1"/>
+          </a:lnRef>
+          <a:fillRef idx="3">
+            <a:schemeClr val="accent1"/>
+          </a:fillRef>
+          <a:effectRef idx="0">
+            <a:schemeClr val="accent1"/>
+          </a:effectRef>
+          <a:fontRef idx="minor">
+            <a:schemeClr val="lt1"/>
+          </a:fontRef>
+        </p:style>
+        <p:txBody>
+          <a:bodyPr rtlCol="0" anchor="ctr"/>
+          <a:lstStyle/>
+          <a:p>
+            <a:pPr algn="ctr"/>
+          </a:p>
+        </p:txBody>
+      </p:sp>
+      <p:sp>
+        <p:nvSpPr>
+          <p:cNvPr id="42" name="a3_t" descr="Editable text; source id a3_t"/>
+          <p:cNvSpPr txBox="1"/>
+          <p:nvPr/>
+        </p:nvSpPr>
+        <p:spPr>
+          <a:xfrm>
+            <a:off x="1555749" y="3865562"/>
+            <a:ext cx="2682874" cy="1071562"/>
+          </a:xfrm>
+          <a:prstGeom prst="rect">
+            <a:avLst/>
+          </a:prstGeom>
+          <a:noFill/>
+          <a:effectLst/>
+        </p:spPr>
+        <p:txBody>
+          <a:bodyPr wrap="none" anchor="ctr" tIns="0" rIns="0" bIns="0" lIns="0" anchorCtr="0" vertOverflow="overflow">
+            <a:noAutofit/>
+          </a:bodyPr>
+          <a:lstStyle/>
+          <a:p>
+            <a:pPr algn="l" fontAlgn="base">
+              <a:lnSpc>
+                <a:spcPts val="1984"/>
+              </a:lnSpc>
+              <a:spcBef>
+                <a:spcPts val="0"/>
+              </a:spcBef>
+              <a:spcAft>
+                <a:spcPts val="0"/>
+              </a:spcAft>
+              <a:defRPr sz="1687" b="1" i="0" lang="zh-CN" dirty="0">
+                <a:solidFill>
+                  <a:srgbClr val="2B3E57"/>
+                </a:solidFill>
+                <a:latin typeface="DejaVu Sans"/>
+                <a:ea typeface="DejaVu Sans"/>
+                <a:cs typeface="DejaVu Sans"/>
+              </a:defRPr>
+            </a:pPr>
+            <a:r>
+              <a:rPr sz="1687" b="1" i="0" lang="zh-CN" dirty="0">
+                <a:solidFill>
+                  <a:srgbClr val="2B3E57"/>
+                </a:solidFill>
+                <a:latin typeface="DejaVu Sans"/>
+                <a:ea typeface="DejaVu Sans"/>
+                <a:cs typeface="DejaVu Sans"/>
+              </a:rPr>
+              <a:t>Crystal-Chemical </a:t>
+            </a:r>
+          </a:p>
+          <a:p>
+            <a:pPr algn="l" fontAlgn="base">
+              <a:lnSpc>
+                <a:spcPts val="1984"/>
+              </a:lnSpc>
+              <a:spcBef>
+                <a:spcPts val="0"/>
+              </a:spcBef>
+              <a:spcAft>
+                <a:spcPts val="0"/>
+              </a:spcAft>
+              <a:defRPr sz="1687" b="1" i="0" lang="zh-CN" dirty="0">
+                <a:solidFill>
+                  <a:srgbClr val="2B3E57"/>
+                </a:solidFill>
+                <a:latin typeface="DejaVu Sans"/>
+                <a:ea typeface="DejaVu Sans"/>
+                <a:cs typeface="DejaVu Sans"/>
+              </a:defRPr>
+            </a:pPr>
+            <a:r>
+              <a:rPr sz="1687" b="1" i="0" lang="zh-CN" dirty="0">
+                <a:solidFill>
+                  <a:srgbClr val="2B3E57"/>
+                </a:solidFill>
+                <a:latin typeface="DejaVu Sans"/>
+                <a:ea typeface="DejaVu Sans"/>
+                <a:cs typeface="DejaVu Sans"/>
+              </a:rPr>
+              <a:t>Neighbors</a:t>
+            </a:r>
+          </a:p>
+        </p:txBody>
+      </p:sp>
+      <p:sp>
+        <p:nvSpPr>
+          <p:cNvPr id="43" name="a4" descr="Editable shape; source id a4"/>
+          <p:cNvSpPr/>
+          <p:nvPr/>
+        </p:nvSpPr>
+        <p:spPr>
+          <a:xfrm>
+            <a:off x="1015999" y="5246687"/>
+            <a:ext cx="3317874" cy="1309687"/>
+          </a:xfrm>
+          <a:prstGeom prst="roundRect">
+            <a:avLst>
+              <a:gd name="adj" fmla="val 5454"/>
+            </a:avLst>
+          </a:prstGeom>
+          <a:solidFill>
+            <a:srgbClr val="FFFFFF"/>
+          </a:solidFill>
+          <a:ln w="15081">
+            <a:solidFill>
+              <a:srgbClr val="5B7592"/>
+            </a:solidFill>
+          </a:ln>
+          <a:effectLst/>
+        </p:spPr>
+        <p:style>
+          <a:lnRef idx="1">
+            <a:schemeClr val="accent1"/>
+          </a:lnRef>
+          <a:fillRef idx="3">
+            <a:schemeClr val="accent1"/>
+          </a:fillRef>
+          <a:effectRef idx="0">
+            <a:schemeClr val="accent1"/>
+          </a:effectRef>
+          <a:fontRef idx="minor">
+            <a:schemeClr val="lt1"/>
+          </a:fontRef>
+        </p:style>
+        <p:txBody>
+          <a:bodyPr rtlCol="0" anchor="ctr"/>
+          <a:lstStyle/>
+          <a:p>
+            <a:pPr algn="ctr"/>
+          </a:p>
+        </p:txBody>
+      </p:sp>
+      <p:sp>
+        <p:nvSpPr>
+          <p:cNvPr id="44" name="a4_b" descr="Editable shape; source id a4_b"/>
+          <p:cNvSpPr/>
+          <p:nvPr/>
+        </p:nvSpPr>
+        <p:spPr>
+          <a:xfrm>
+            <a:off x="1015999" y="5246687"/>
+            <a:ext cx="47624" cy="1309687"/>
+          </a:xfrm>
+          <a:prstGeom prst="roundRect">
+            <a:avLst>
+              <a:gd name="adj" fmla="val 50000"/>
+            </a:avLst>
+          </a:prstGeom>
+          <a:solidFill>
+            <a:srgbClr val="5B7592"/>
+          </a:solidFill>
+          <a:ln>
+            <a:noFill/>
+          </a:ln>
+          <a:effectLst/>
+        </p:spPr>
+        <p:style>
+          <a:lnRef idx="1">
+            <a:schemeClr val="accent1"/>
+          </a:lnRef>
+          <a:fillRef idx="3">
+            <a:schemeClr val="accent1"/>
+          </a:fillRef>
+          <a:effectRef idx="0">
+            <a:schemeClr val="accent1"/>
+          </a:effectRef>
+          <a:fontRef idx="minor">
+            <a:schemeClr val="lt1"/>
+          </a:fontRef>
+        </p:style>
+        <p:txBody>
+          <a:bodyPr rtlCol="0" anchor="ctr"/>
+          <a:lstStyle/>
+          <a:p>
+            <a:pPr algn="ctr"/>
+          </a:p>
+        </p:txBody>
+      </p:sp>
+      <p:cxnSp>
+        <p:nvCxnSpPr>
+          <p:cNvPr id="45" name="a4_g_b_0" descr="Editable line; source id a4_g_b_0"/>
+          <p:cNvCxnSpPr/>
+          <p:nvPr/>
+        </p:nvCxnSpPr>
+        <p:spPr>
+          <a:xfrm>
+            <a:off x="1230312" y="5841999"/>
+            <a:ext cx="31750" cy="166688"/>
+          </a:xfrm>
+          <a:prstGeom prst="line">
+            <a:avLst/>
+          </a:prstGeom>
+          <a:ln w="18216">
+            <a:solidFill>
+              <a:srgbClr val="111A24"/>
+            </a:solidFill>
+          </a:ln>
+          <a:effectLst/>
+        </p:spPr>
+        <p:style>
+          <a:lnRef idx="2">
+            <a:schemeClr val="accent1"/>
+          </a:lnRef>
+          <a:fillRef idx="0">
+            <a:schemeClr val="accent1"/>
+          </a:fillRef>
+          <a:effectRef idx="0">
+            <a:schemeClr val="accent1"/>
+          </a:effectRef>
+          <a:fontRef idx="minor">
+            <a:schemeClr val="tx1"/>
+          </a:fontRef>
+        </p:style>
+      </p:cxnSp>
+      <p:cxnSp>
+        <p:nvCxnSpPr>
+          <p:cNvPr id="46" name="a4_g_b_1" descr="Editable line; source id a4_g_b_1"/>
+          <p:cNvCxnSpPr/>
+          <p:nvPr/>
+        </p:nvCxnSpPr>
+        <p:spPr>
+          <a:xfrm>
+            <a:off x="1262062" y="6008687"/>
+            <a:ext cx="111125" cy="0"/>
+          </a:xfrm>
+          <a:prstGeom prst="line">
+            <a:avLst/>
+          </a:prstGeom>
+          <a:ln w="18216">
+            <a:solidFill>
+              <a:srgbClr val="111A24"/>
+            </a:solidFill>
+          </a:ln>
+          <a:effectLst/>
+        </p:spPr>
+        <p:style>
+          <a:lnRef idx="2">
+            <a:schemeClr val="accent1"/>
+          </a:lnRef>
+          <a:fillRef idx="0">
+            <a:schemeClr val="accent1"/>
+          </a:fillRef>
+          <a:effectRef idx="0">
+            <a:schemeClr val="accent1"/>
+          </a:effectRef>
+          <a:fontRef idx="minor">
+            <a:schemeClr val="tx1"/>
+          </a:fontRef>
+        </p:style>
+      </p:cxnSp>
+      <p:cxnSp>
+        <p:nvCxnSpPr>
+          <p:cNvPr id="47" name="a4_g_b_2" descr="Editable line; source id a4_g_b_2"/>
+          <p:cNvCxnSpPr/>
+          <p:nvPr/>
+        </p:nvCxnSpPr>
+        <p:spPr>
+          <a:xfrm flipV="1">
+            <a:off x="1373187" y="5841999"/>
+            <a:ext cx="31750" cy="166688"/>
+          </a:xfrm>
+          <a:prstGeom prst="line">
+            <a:avLst/>
+          </a:prstGeom>
+          <a:ln w="18216">
+            <a:solidFill>
+              <a:srgbClr val="111A24"/>
+            </a:solidFill>
+          </a:ln>
+          <a:effectLst/>
+        </p:spPr>
+        <p:style>
+          <a:lnRef idx="2">
+            <a:schemeClr val="accent1"/>
+          </a:lnRef>
+          <a:fillRef idx="0">
+            <a:schemeClr val="accent1"/>
+          </a:fillRef>
+          <a:effectRef idx="0">
+            <a:schemeClr val="accent1"/>
+          </a:effectRef>
+          <a:fontRef idx="minor">
+            <a:schemeClr val="tx1"/>
+          </a:fontRef>
+        </p:style>
+      </p:cxnSp>
+      <p:cxnSp>
+        <p:nvCxnSpPr>
+          <p:cNvPr id="48" name="a4_g_r" descr="Editable line; source id a4_g_r"/>
+          <p:cNvCxnSpPr/>
+          <p:nvPr/>
+        </p:nvCxnSpPr>
+        <p:spPr>
+          <a:xfrm>
+            <a:off x="1206499" y="5841999"/>
+            <a:ext cx="222250" cy="0"/>
+          </a:xfrm>
+          <a:prstGeom prst="line">
+            <a:avLst/>
+          </a:prstGeom>
+          <a:ln w="18216">
+            <a:solidFill>
+              <a:srgbClr val="111A24"/>
+            </a:solidFill>
+          </a:ln>
+          <a:effectLst/>
+        </p:spPr>
+        <p:style>
+          <a:lnRef idx="2">
+            <a:schemeClr val="accent1"/>
+          </a:lnRef>
+          <a:fillRef idx="0">
+            <a:schemeClr val="accent1"/>
+          </a:fillRef>
+          <a:effectRef idx="0">
+            <a:schemeClr val="accent1"/>
+          </a:effectRef>
+          <a:fontRef idx="minor">
+            <a:schemeClr val="tx1"/>
+          </a:fontRef>
+        </p:style>
+      </p:cxnSp>
+      <p:sp>
+        <p:nvSpPr>
+          <p:cNvPr id="49" name="a4_t" descr="Editable text; source id a4_t"/>
+          <p:cNvSpPr txBox="1"/>
+          <p:nvPr/>
+        </p:nvSpPr>
+        <p:spPr>
+          <a:xfrm>
+            <a:off x="1555749" y="5365749"/>
+            <a:ext cx="2682874" cy="1071562"/>
+          </a:xfrm>
+          <a:prstGeom prst="rect">
+            <a:avLst/>
+          </a:prstGeom>
+          <a:noFill/>
+          <a:effectLst/>
+        </p:spPr>
+        <p:txBody>
+          <a:bodyPr wrap="none" anchor="ctr" tIns="0" rIns="0" bIns="0" lIns="0" anchorCtr="0" vertOverflow="overflow">
+            <a:noAutofit/>
+          </a:bodyPr>
+          <a:lstStyle/>
+          <a:p>
+            <a:pPr algn="l" fontAlgn="base">
+              <a:lnSpc>
+                <a:spcPts val="1984"/>
+              </a:lnSpc>
+              <a:spcBef>
+                <a:spcPts val="0"/>
+              </a:spcBef>
+              <a:spcAft>
+                <a:spcPts val="0"/>
+              </a:spcAft>
+              <a:defRPr sz="1687" b="1" i="0" lang="zh-CN" dirty="0">
+                <a:solidFill>
+                  <a:srgbClr val="2B3E57"/>
+                </a:solidFill>
+                <a:latin typeface="DejaVu Sans"/>
+                <a:ea typeface="DejaVu Sans"/>
+                <a:cs typeface="DejaVu Sans"/>
+              </a:defRPr>
+            </a:pPr>
+            <a:r>
+              <a:rPr sz="1687" b="1" i="0" lang="zh-CN" dirty="0">
+                <a:solidFill>
+                  <a:srgbClr val="2B3E57"/>
+                </a:solidFill>
+                <a:latin typeface="DejaVu Sans"/>
+                <a:ea typeface="DejaVu Sans"/>
+                <a:cs typeface="DejaVu Sans"/>
+              </a:rPr>
+              <a:t>Process Reference </a:t>
+            </a:r>
+          </a:p>
+          <a:p>
+            <a:pPr algn="l" fontAlgn="base">
+              <a:lnSpc>
+                <a:spcPts val="1984"/>
+              </a:lnSpc>
+              <a:spcBef>
+                <a:spcPts val="0"/>
+              </a:spcBef>
+              <a:spcAft>
+                <a:spcPts val="0"/>
+              </a:spcAft>
+              <a:defRPr sz="1687" b="1" i="0" lang="zh-CN" dirty="0">
+                <a:solidFill>
+                  <a:srgbClr val="2B3E57"/>
+                </a:solidFill>
+                <a:latin typeface="DejaVu Sans"/>
+                <a:ea typeface="DejaVu Sans"/>
+                <a:cs typeface="DejaVu Sans"/>
+              </a:defRPr>
+            </a:pPr>
+            <a:r>
+              <a:rPr sz="1687" b="1" i="0" lang="zh-CN" dirty="0">
+                <a:solidFill>
+                  <a:srgbClr val="2B3E57"/>
+                </a:solidFill>
+                <a:latin typeface="DejaVu Sans"/>
+                <a:ea typeface="DejaVu Sans"/>
+                <a:cs typeface="DejaVu Sans"/>
+              </a:rPr>
+              <a:t>Studies</a:t>
             </a:r>
           </a:p>
         </p:txBody>
@@ -5596,12 +5724,12 @@
         </p:nvSpPr>
         <p:spPr>
           <a:xfrm>
-            <a:off x="1031874" y="5556249"/>
-            <a:ext cx="3333749" cy="888999"/>
+            <a:off x="1015999" y="6842124"/>
+            <a:ext cx="3317874" cy="1309687"/>
           </a:xfrm>
           <a:prstGeom prst="roundRect">
             <a:avLst>
-              <a:gd name="adj" fmla="val 8035"/>
+              <a:gd name="adj" fmla="val 5454"/>
             </a:avLst>
           </a:prstGeom>
           <a:solidFill>
@@ -5647,7 +5775,7 @@
         </p:nvSpPr>
         <p:spPr>
           <a:xfrm>
-            <a:off x="1293812" y="5889624"/>
+            <a:off x="1214437" y="7381874"/>
             <a:ext cx="150812" cy="230187"/>
           </a:xfrm>
           <a:prstGeom prst="rect">
@@ -5691,7 +5819,7 @@
         </p:nvCxnSpPr>
         <p:spPr>
           <a:xfrm>
-            <a:off x="1333499" y="5968999"/>
+            <a:off x="1254124" y="7461249"/>
             <a:ext cx="103188" cy="0"/>
           </a:xfrm>
           <a:prstGeom prst="line">
@@ -5727,7 +5855,7 @@
         </p:nvCxnSpPr>
         <p:spPr>
           <a:xfrm>
-            <a:off x="1333499" y="6016624"/>
+            <a:off x="1254124" y="7508874"/>
             <a:ext cx="103188" cy="0"/>
           </a:xfrm>
           <a:prstGeom prst="line">
@@ -5763,7 +5891,7 @@
         </p:nvCxnSpPr>
         <p:spPr>
           <a:xfrm>
-            <a:off x="1333499" y="6056312"/>
+            <a:off x="1254124" y="7556499"/>
             <a:ext cx="71438" cy="0"/>
           </a:xfrm>
           <a:prstGeom prst="line">
@@ -5799,7 +5927,7 @@
         </p:nvCxnSpPr>
         <p:spPr>
           <a:xfrm flipV="1">
-            <a:off x="1285874" y="5873749"/>
+            <a:off x="1206499" y="7365999"/>
             <a:ext cx="222250" cy="254000"/>
           </a:xfrm>
           <a:prstGeom prst="line">
@@ -5835,8 +5963,876 @@
         </p:nvSpPr>
         <p:spPr>
           <a:xfrm>
-            <a:off x="1650999" y="5841999"/>
-            <a:ext cx="2571749" cy="325437"/>
+            <a:off x="1555749" y="6961187"/>
+            <a:ext cx="2682874" cy="1071562"/>
+          </a:xfrm>
+          <a:prstGeom prst="rect">
+            <a:avLst/>
+          </a:prstGeom>
+          <a:noFill/>
+          <a:effectLst/>
+        </p:spPr>
+        <p:txBody>
+          <a:bodyPr wrap="none" anchor="ctr" tIns="0" rIns="0" bIns="0" lIns="0" anchorCtr="0" vertOverflow="overflow">
+            <a:noAutofit/>
+          </a:bodyPr>
+          <a:lstStyle/>
+          <a:p>
+            <a:pPr algn="l" fontAlgn="base">
+              <a:lnSpc>
+                <a:spcPts val="1984"/>
+              </a:lnSpc>
+              <a:spcBef>
+                <a:spcPts val="0"/>
+              </a:spcBef>
+              <a:spcAft>
+                <a:spcPts val="0"/>
+              </a:spcAft>
+              <a:defRPr sz="1687" b="1" i="0" lang="zh-CN" dirty="0">
+                <a:solidFill>
+                  <a:srgbClr val="5B6570"/>
+                </a:solidFill>
+                <a:latin typeface="DejaVu Sans"/>
+                <a:ea typeface="DejaVu Sans"/>
+                <a:cs typeface="DejaVu Sans"/>
+              </a:defRPr>
+            </a:pPr>
+            <a:r>
+              <a:rPr sz="1687" b="1" i="0" lang="zh-CN" dirty="0">
+                <a:solidFill>
+                  <a:srgbClr val="5B6570"/>
+                </a:solidFill>
+                <a:latin typeface="DejaVu Sans"/>
+                <a:ea typeface="DejaVu Sans"/>
+                <a:cs typeface="DejaVu Sans"/>
+              </a:rPr>
+              <a:t>Outside Study Scope</a:t>
+            </a:r>
+          </a:p>
+        </p:txBody>
+      </p:sp>
+      <p:sp>
+        <p:nvSpPr>
+          <p:cNvPr id="57" name="ax_n" descr="Editable text; source id ax_n"/>
+          <p:cNvSpPr txBox="1"/>
+          <p:nvPr/>
+        </p:nvSpPr>
+        <p:spPr>
+          <a:xfrm>
+            <a:off x="349249" y="746124"/>
+            <a:ext cx="650874" cy="317499"/>
+          </a:xfrm>
+          <a:prstGeom prst="rect">
+            <a:avLst/>
+          </a:prstGeom>
+          <a:noFill/>
+          <a:effectLst/>
+        </p:spPr>
+        <p:txBody>
+          <a:bodyPr wrap="none" anchor="ctr" tIns="0" rIns="0" bIns="0" lIns="0" anchorCtr="0" vertOverflow="overflow">
+            <a:noAutofit/>
+          </a:bodyPr>
+          <a:lstStyle/>
+          <a:p>
+            <a:pPr algn="ctr" fontAlgn="base">
+              <a:lnSpc>
+                <a:spcPts val="1765"/>
+              </a:lnSpc>
+              <a:spcBef>
+                <a:spcPts val="0"/>
+              </a:spcBef>
+              <a:spcAft>
+                <a:spcPts val="0"/>
+              </a:spcAft>
+              <a:defRPr sz="1499" b="0" i="0" lang="zh-CN" dirty="0">
+                <a:solidFill>
+                  <a:srgbClr val="27303A"/>
+                </a:solidFill>
+                <a:latin typeface="DejaVu Sans"/>
+                <a:ea typeface="DejaVu Sans"/>
+                <a:cs typeface="DejaVu Sans"/>
+              </a:defRPr>
+            </a:pPr>
+            <a:r>
+              <a:rPr sz="1499" b="0" i="0" lang="zh-CN" dirty="0">
+                <a:solidFill>
+                  <a:srgbClr val="27303A"/>
+                </a:solidFill>
+                <a:latin typeface="DejaVu Sans"/>
+                <a:ea typeface="DejaVu Sans"/>
+                <a:cs typeface="DejaVu Sans"/>
+              </a:rPr>
+              <a:t>Near</a:t>
+            </a:r>
+          </a:p>
+        </p:txBody>
+      </p:sp>
+      <p:sp>
+        <p:nvSpPr>
+          <p:cNvPr id="58" name="ax_f" descr="Editable text; source id ax_f"/>
+          <p:cNvSpPr txBox="1"/>
+          <p:nvPr/>
+        </p:nvSpPr>
+        <p:spPr>
+          <a:xfrm>
+            <a:off x="349249" y="6238874"/>
+            <a:ext cx="650874" cy="317499"/>
+          </a:xfrm>
+          <a:prstGeom prst="rect">
+            <a:avLst/>
+          </a:prstGeom>
+          <a:noFill/>
+          <a:effectLst/>
+        </p:spPr>
+        <p:txBody>
+          <a:bodyPr wrap="none" anchor="ctr" tIns="0" rIns="0" bIns="0" lIns="0" anchorCtr="0" vertOverflow="overflow">
+            <a:noAutofit/>
+          </a:bodyPr>
+          <a:lstStyle/>
+          <a:p>
+            <a:pPr algn="ctr" fontAlgn="base">
+              <a:lnSpc>
+                <a:spcPts val="1765"/>
+              </a:lnSpc>
+              <a:spcBef>
+                <a:spcPts val="0"/>
+              </a:spcBef>
+              <a:spcAft>
+                <a:spcPts val="0"/>
+              </a:spcAft>
+              <a:defRPr sz="1499" b="0" i="0" lang="zh-CN" dirty="0">
+                <a:solidFill>
+                  <a:srgbClr val="27303A"/>
+                </a:solidFill>
+                <a:latin typeface="DejaVu Sans"/>
+                <a:ea typeface="DejaVu Sans"/>
+                <a:cs typeface="DejaVu Sans"/>
+              </a:defRPr>
+            </a:pPr>
+            <a:r>
+              <a:rPr sz="1499" b="0" i="0" lang="zh-CN" dirty="0">
+                <a:solidFill>
+                  <a:srgbClr val="27303A"/>
+                </a:solidFill>
+                <a:latin typeface="DejaVu Sans"/>
+                <a:ea typeface="DejaVu Sans"/>
+                <a:cs typeface="DejaVu Sans"/>
+              </a:rPr>
+              <a:t>Far</a:t>
+            </a:r>
+          </a:p>
+        </p:txBody>
+      </p:sp>
+      <p:sp>
+        <p:nvSpPr>
+          <p:cNvPr id="59" name="ax_l" descr="Editable text; source id ax_l"/>
+          <p:cNvSpPr txBox="1"/>
+          <p:nvPr/>
+        </p:nvSpPr>
+        <p:spPr>
+          <a:xfrm rot="16200000">
+            <a:off x="-507999" y="3484562"/>
+            <a:ext cx="2373312" cy="333374"/>
+          </a:xfrm>
+          <a:prstGeom prst="rect">
+            <a:avLst/>
+          </a:prstGeom>
+          <a:noFill/>
+          <a:effectLst/>
+        </p:spPr>
+        <p:txBody>
+          <a:bodyPr wrap="none" anchor="ctr" tIns="0" rIns="0" bIns="0" lIns="0" anchorCtr="0" vertOverflow="overflow">
+            <a:noAutofit/>
+          </a:bodyPr>
+          <a:lstStyle/>
+          <a:p>
+            <a:pPr algn="ctr" fontAlgn="base">
+              <a:lnSpc>
+                <a:spcPts val="1765"/>
+              </a:lnSpc>
+              <a:spcBef>
+                <a:spcPts val="0"/>
+              </a:spcBef>
+              <a:spcAft>
+                <a:spcPts val="0"/>
+              </a:spcAft>
+              <a:defRPr sz="1499" b="0" i="0" lang="zh-CN" dirty="0">
+                <a:solidFill>
+                  <a:srgbClr val="27303A"/>
+                </a:solidFill>
+                <a:latin typeface="DejaVu Sans"/>
+                <a:ea typeface="DejaVu Sans"/>
+                <a:cs typeface="DejaVu Sans"/>
+              </a:defRPr>
+            </a:pPr>
+            <a:r>
+              <a:rPr sz="1499" b="0" i="0" lang="zh-CN" dirty="0">
+                <a:solidFill>
+                  <a:srgbClr val="27303A"/>
+                </a:solidFill>
+                <a:latin typeface="DejaVu Sans"/>
+                <a:ea typeface="DejaVu Sans"/>
+                <a:cs typeface="DejaVu Sans"/>
+              </a:rPr>
+              <a:t>Distance from target</a:t>
+            </a:r>
+          </a:p>
+        </p:txBody>
+      </p:sp>
+      <p:cxnSp>
+        <p:nvCxnSpPr>
+          <p:cNvPr id="60" name="ax_u" descr="Editable line; source id ax_u"/>
+          <p:cNvCxnSpPr/>
+          <p:nvPr/>
+        </p:nvCxnSpPr>
+        <p:spPr>
+          <a:xfrm>
+            <a:off x="674687" y="1111249"/>
+            <a:ext cx="0" cy="1285875"/>
+          </a:xfrm>
+          <a:prstGeom prst="line">
+            <a:avLst/>
+          </a:prstGeom>
+          <a:ln w="17462">
+            <a:solidFill>
+              <a:srgbClr val="27303A"/>
+            </a:solidFill>
+          </a:ln>
+          <a:effectLst/>
+        </p:spPr>
+        <p:style>
+          <a:lnRef idx="2">
+            <a:schemeClr val="accent1"/>
+          </a:lnRef>
+          <a:fillRef idx="0">
+            <a:schemeClr val="accent1"/>
+          </a:fillRef>
+          <a:effectRef idx="0">
+            <a:schemeClr val="accent1"/>
+          </a:effectRef>
+          <a:fontRef idx="minor">
+            <a:schemeClr val="tx1"/>
+          </a:fontRef>
+        </p:style>
+      </p:cxnSp>
+      <p:sp>
+        <p:nvSpPr>
+          <p:cNvPr id="61" name="ax_d" descr="Editable line; source id ax_d"/>
+          <p:cNvSpPr/>
+          <p:nvPr/>
+        </p:nvSpPr>
+        <p:spPr>
+          <a:xfrm>
+            <a:off x="635000" y="4905375"/>
+            <a:ext cx="79375" cy="1285875"/>
+          </a:xfrm>
+          <a:custGeom>
+            <a:avLst/>
+            <a:gdLst/>
+            <a:ahLst/>
+            <a:cxnLst/>
+            <a:rect l="l" t="t" r="r" b="b"/>
+            <a:pathLst>
+              <a:path w="10000" h="162000">
+                <a:moveTo>
+                  <a:pt x="6100" y="0"/>
+                </a:moveTo>
+                <a:lnTo>
+                  <a:pt x="6100" y="149000"/>
+                </a:lnTo>
+                <a:lnTo>
+                  <a:pt x="10000" y="149000"/>
+                </a:lnTo>
+                <a:lnTo>
+                  <a:pt x="5000" y="162000"/>
+                </a:lnTo>
+                <a:lnTo>
+                  <a:pt x="0" y="149000"/>
+                </a:lnTo>
+                <a:lnTo>
+                  <a:pt x="3900" y="149000"/>
+                </a:lnTo>
+                <a:lnTo>
+                  <a:pt x="3900" y="0"/>
+                </a:lnTo>
+                <a:close/>
+              </a:path>
+            </a:pathLst>
+          </a:custGeom>
+          <a:solidFill>
+            <a:srgbClr val="27303A"/>
+          </a:solidFill>
+          <a:ln>
+            <a:noFill/>
+          </a:ln>
+          <a:effectLst/>
+        </p:spPr>
+        <p:style>
+          <a:lnRef idx="1">
+            <a:schemeClr val="accent1"/>
+          </a:lnRef>
+          <a:fillRef idx="3">
+            <a:schemeClr val="accent1"/>
+          </a:fillRef>
+          <a:effectRef idx="0">
+            <a:schemeClr val="accent1"/>
+          </a:effectRef>
+          <a:fontRef idx="minor">
+            <a:schemeClr val="lt1"/>
+          </a:fontRef>
+        </p:style>
+        <p:txBody>
+          <a:bodyPr rtlCol="0" anchor="ctr"/>
+          <a:lstStyle/>
+          <a:p>
+            <a:pPr algn="ctr"/>
+          </a:p>
+        </p:txBody>
+      </p:sp>
+      <p:sp>
+        <p:nvSpPr>
+          <p:cNvPr id="62" name="led" descr="Editable shape; source id led"/>
+          <p:cNvSpPr/>
+          <p:nvPr/>
+        </p:nvSpPr>
+        <p:spPr>
+          <a:xfrm>
+            <a:off x="4778374" y="746124"/>
+            <a:ext cx="2920999" cy="5810249"/>
+          </a:xfrm>
+          <a:prstGeom prst="roundRect">
+            <a:avLst>
+              <a:gd name="adj" fmla="val 2445"/>
+            </a:avLst>
+          </a:prstGeom>
+          <a:solidFill>
+            <a:srgbClr val="FFFFFF"/>
+          </a:solidFill>
+          <a:ln w="15081">
+            <a:solidFill>
+              <a:srgbClr val="1F7F8C"/>
+            </a:solidFill>
+          </a:ln>
+          <a:effectLst/>
+        </p:spPr>
+        <p:style>
+          <a:lnRef idx="1">
+            <a:schemeClr val="accent1"/>
+          </a:lnRef>
+          <a:fillRef idx="3">
+            <a:schemeClr val="accent1"/>
+          </a:fillRef>
+          <a:effectRef idx="0">
+            <a:schemeClr val="accent1"/>
+          </a:effectRef>
+          <a:fontRef idx="minor">
+            <a:schemeClr val="lt1"/>
+          </a:fontRef>
+        </p:style>
+        <p:txBody>
+          <a:bodyPr rtlCol="0" anchor="ctr"/>
+          <a:lstStyle/>
+          <a:p>
+            <a:pPr algn="ctr"/>
+          </a:p>
+        </p:txBody>
+      </p:sp>
+      <p:sp>
+        <p:nvSpPr>
+          <p:cNvPr id="63" name="led_b" descr="Editable shape; source id led_b"/>
+          <p:cNvSpPr/>
+          <p:nvPr/>
+        </p:nvSpPr>
+        <p:spPr>
+          <a:xfrm>
+            <a:off x="4778374" y="746124"/>
+            <a:ext cx="47624" cy="5810249"/>
+          </a:xfrm>
+          <a:prstGeom prst="roundRect">
+            <a:avLst>
+              <a:gd name="adj" fmla="val 50000"/>
+            </a:avLst>
+          </a:prstGeom>
+          <a:solidFill>
+            <a:srgbClr val="1F7F8C"/>
+          </a:solidFill>
+          <a:ln>
+            <a:noFill/>
+          </a:ln>
+          <a:effectLst/>
+        </p:spPr>
+        <p:style>
+          <a:lnRef idx="1">
+            <a:schemeClr val="accent1"/>
+          </a:lnRef>
+          <a:fillRef idx="3">
+            <a:schemeClr val="accent1"/>
+          </a:fillRef>
+          <a:effectRef idx="0">
+            <a:schemeClr val="accent1"/>
+          </a:effectRef>
+          <a:fontRef idx="minor">
+            <a:schemeClr val="lt1"/>
+          </a:fontRef>
+        </p:style>
+        <p:txBody>
+          <a:bodyPr rtlCol="0" anchor="ctr"/>
+          <a:lstStyle/>
+          <a:p>
+            <a:pPr algn="ctr"/>
+          </a:p>
+        </p:txBody>
+      </p:sp>
+      <p:sp>
+        <p:nvSpPr>
+          <p:cNvPr id="64" name="led_g_b" descr="Editable shape; source id led_g_b"/>
+          <p:cNvSpPr/>
+          <p:nvPr/>
+        </p:nvSpPr>
+        <p:spPr>
+          <a:xfrm>
+            <a:off x="6127749" y="936624"/>
+            <a:ext cx="261937" cy="230187"/>
+          </a:xfrm>
+          <a:prstGeom prst="rect">
+            <a:avLst/>
+          </a:prstGeom>
+          <a:noFill/>
+          <a:ln w="18216">
+            <a:solidFill>
+              <a:srgbClr val="111A24"/>
+            </a:solidFill>
+          </a:ln>
+          <a:effectLst/>
+        </p:spPr>
+        <p:style>
+          <a:lnRef idx="1">
+            <a:schemeClr val="accent1"/>
+          </a:lnRef>
+          <a:fillRef idx="3">
+            <a:schemeClr val="accent1"/>
+          </a:fillRef>
+          <a:effectRef idx="0">
+            <a:schemeClr val="accent1"/>
+          </a:effectRef>
+          <a:fontRef idx="minor">
+            <a:schemeClr val="lt1"/>
+          </a:fontRef>
+        </p:style>
+        <p:txBody>
+          <a:bodyPr rtlCol="0" anchor="ctr"/>
+          <a:lstStyle/>
+          <a:p>
+            <a:pPr algn="ctr"/>
+          </a:p>
+        </p:txBody>
+      </p:sp>
+      <p:cxnSp>
+        <p:nvCxnSpPr>
+          <p:cNvPr id="65" name="led_g_r1" descr="Editable line; source id led_g_r1"/>
+          <p:cNvCxnSpPr/>
+          <p:nvPr/>
+        </p:nvCxnSpPr>
+        <p:spPr>
+          <a:xfrm>
+            <a:off x="6127749" y="1015999"/>
+            <a:ext cx="269875" cy="0"/>
+          </a:xfrm>
+          <a:prstGeom prst="line">
+            <a:avLst/>
+          </a:prstGeom>
+          <a:ln w="18216">
+            <a:solidFill>
+              <a:srgbClr val="111A24"/>
+            </a:solidFill>
+          </a:ln>
+          <a:effectLst/>
+        </p:spPr>
+        <p:style>
+          <a:lnRef idx="2">
+            <a:schemeClr val="accent1"/>
+          </a:lnRef>
+          <a:fillRef idx="0">
+            <a:schemeClr val="accent1"/>
+          </a:fillRef>
+          <a:effectRef idx="0">
+            <a:schemeClr val="accent1"/>
+          </a:effectRef>
+          <a:fontRef idx="minor">
+            <a:schemeClr val="tx1"/>
+          </a:fontRef>
+        </p:style>
+      </p:cxnSp>
+      <p:cxnSp>
+        <p:nvCxnSpPr>
+          <p:cNvPr id="66" name="led_g_r2" descr="Editable line; source id led_g_r2"/>
+          <p:cNvCxnSpPr/>
+          <p:nvPr/>
+        </p:nvCxnSpPr>
+        <p:spPr>
+          <a:xfrm>
+            <a:off x="6127749" y="1087437"/>
+            <a:ext cx="269875" cy="0"/>
+          </a:xfrm>
+          <a:prstGeom prst="line">
+            <a:avLst/>
+          </a:prstGeom>
+          <a:ln w="18216">
+            <a:solidFill>
+              <a:srgbClr val="111A24"/>
+            </a:solidFill>
+          </a:ln>
+          <a:effectLst/>
+        </p:spPr>
+        <p:style>
+          <a:lnRef idx="2">
+            <a:schemeClr val="accent1"/>
+          </a:lnRef>
+          <a:fillRef idx="0">
+            <a:schemeClr val="accent1"/>
+          </a:fillRef>
+          <a:effectRef idx="0">
+            <a:schemeClr val="accent1"/>
+          </a:effectRef>
+          <a:fontRef idx="minor">
+            <a:schemeClr val="tx1"/>
+          </a:fontRef>
+        </p:style>
+      </p:cxnSp>
+      <p:cxnSp>
+        <p:nvCxnSpPr>
+          <p:cNvPr id="67" name="led_g_c1" descr="Editable line; source id led_g_c1"/>
+          <p:cNvCxnSpPr/>
+          <p:nvPr/>
+        </p:nvCxnSpPr>
+        <p:spPr>
+          <a:xfrm>
+            <a:off x="6215062" y="936624"/>
+            <a:ext cx="0" cy="230188"/>
+          </a:xfrm>
+          <a:prstGeom prst="line">
+            <a:avLst/>
+          </a:prstGeom>
+          <a:ln w="18216">
+            <a:solidFill>
+              <a:srgbClr val="111A24"/>
+            </a:solidFill>
+          </a:ln>
+          <a:effectLst/>
+        </p:spPr>
+        <p:style>
+          <a:lnRef idx="2">
+            <a:schemeClr val="accent1"/>
+          </a:lnRef>
+          <a:fillRef idx="0">
+            <a:schemeClr val="accent1"/>
+          </a:fillRef>
+          <a:effectRef idx="0">
+            <a:schemeClr val="accent1"/>
+          </a:effectRef>
+          <a:fontRef idx="minor">
+            <a:schemeClr val="tx1"/>
+          </a:fontRef>
+        </p:style>
+      </p:cxnSp>
+      <p:cxnSp>
+        <p:nvCxnSpPr>
+          <p:cNvPr id="68" name="led_g_c2" descr="Editable line; source id led_g_c2"/>
+          <p:cNvCxnSpPr/>
+          <p:nvPr/>
+        </p:nvCxnSpPr>
+        <p:spPr>
+          <a:xfrm>
+            <a:off x="6310312" y="936624"/>
+            <a:ext cx="0" cy="230188"/>
+          </a:xfrm>
+          <a:prstGeom prst="line">
+            <a:avLst/>
+          </a:prstGeom>
+          <a:ln w="18216">
+            <a:solidFill>
+              <a:srgbClr val="111A24"/>
+            </a:solidFill>
+          </a:ln>
+          <a:effectLst/>
+        </p:spPr>
+        <p:style>
+          <a:lnRef idx="2">
+            <a:schemeClr val="accent1"/>
+          </a:lnRef>
+          <a:fillRef idx="0">
+            <a:schemeClr val="accent1"/>
+          </a:fillRef>
+          <a:effectRef idx="0">
+            <a:schemeClr val="accent1"/>
+          </a:effectRef>
+          <a:fontRef idx="minor">
+            <a:schemeClr val="tx1"/>
+          </a:fontRef>
+        </p:style>
+      </p:cxnSp>
+      <p:sp>
+        <p:nvSpPr>
+          <p:cNvPr id="69" name="led_t" descr="Editable text; source id led_t"/>
+          <p:cNvSpPr txBox="1"/>
+          <p:nvPr/>
+        </p:nvSpPr>
+        <p:spPr>
+          <a:xfrm>
+            <a:off x="4937124" y="1285874"/>
+            <a:ext cx="2651124" cy="746124"/>
+          </a:xfrm>
+          <a:prstGeom prst="rect">
+            <a:avLst/>
+          </a:prstGeom>
+          <a:noFill/>
+          <a:effectLst/>
+        </p:spPr>
+        <p:txBody>
+          <a:bodyPr wrap="none" anchor="ctr" tIns="0" rIns="0" bIns="0" lIns="0" anchorCtr="0" vertOverflow="overflow">
+            <a:noAutofit/>
+          </a:bodyPr>
+          <a:lstStyle/>
+          <a:p>
+            <a:pPr algn="ctr" fontAlgn="base">
+              <a:lnSpc>
+                <a:spcPts val="1984"/>
+              </a:lnSpc>
+              <a:spcBef>
+                <a:spcPts val="0"/>
+              </a:spcBef>
+              <a:spcAft>
+                <a:spcPts val="0"/>
+              </a:spcAft>
+              <a:defRPr sz="1687" b="1" i="0" lang="zh-CN" dirty="0">
+                <a:solidFill>
+                  <a:srgbClr val="0F4F58"/>
+                </a:solidFill>
+                <a:latin typeface="DejaVu Sans"/>
+                <a:ea typeface="DejaVu Sans"/>
+                <a:cs typeface="DejaVu Sans"/>
+              </a:defRPr>
+            </a:pPr>
+            <a:r>
+              <a:rPr sz="1687" b="1" i="0" lang="zh-CN" dirty="0">
+                <a:solidFill>
+                  <a:srgbClr val="0F4F58"/>
+                </a:solidFill>
+                <a:latin typeface="DejaVu Sans"/>
+                <a:ea typeface="DejaVu Sans"/>
+                <a:cs typeface="DejaVu Sans"/>
+              </a:rPr>
+              <a:t>Compared on Shared </a:t>
+            </a:r>
+          </a:p>
+          <a:p>
+            <a:pPr algn="ctr" fontAlgn="base">
+              <a:lnSpc>
+                <a:spcPts val="1984"/>
+              </a:lnSpc>
+              <a:spcBef>
+                <a:spcPts val="0"/>
+              </a:spcBef>
+              <a:spcAft>
+                <a:spcPts val="0"/>
+              </a:spcAft>
+              <a:defRPr sz="1687" b="1" i="0" lang="zh-CN" dirty="0">
+                <a:solidFill>
+                  <a:srgbClr val="0F4F58"/>
+                </a:solidFill>
+                <a:latin typeface="DejaVu Sans"/>
+                <a:ea typeface="DejaVu Sans"/>
+                <a:cs typeface="DejaVu Sans"/>
+              </a:defRPr>
+            </a:pPr>
+            <a:r>
+              <a:rPr sz="1687" b="1" i="0" lang="zh-CN" dirty="0">
+                <a:solidFill>
+                  <a:srgbClr val="0F4F58"/>
+                </a:solidFill>
+                <a:latin typeface="DejaVu Sans"/>
+                <a:ea typeface="DejaVu Sans"/>
+                <a:cs typeface="DejaVu Sans"/>
+              </a:rPr>
+              <a:t>Items</a:t>
+            </a:r>
+          </a:p>
+        </p:txBody>
+      </p:sp>
+      <p:sp>
+        <p:nvSpPr>
+          <p:cNvPr id="70" name="ledr_r0" descr="Editable shape; source id ledr_r0"/>
+          <p:cNvSpPr/>
+          <p:nvPr/>
+        </p:nvSpPr>
+        <p:spPr>
+          <a:xfrm>
+            <a:off x="4937124" y="2127249"/>
+            <a:ext cx="2651124" cy="674687"/>
+          </a:xfrm>
+          <a:prstGeom prst="roundRect">
+            <a:avLst>
+              <a:gd name="adj" fmla="val 7058"/>
+            </a:avLst>
+          </a:prstGeom>
+          <a:solidFill>
+            <a:srgbClr val="F4F7FA"/>
+          </a:solidFill>
+          <a:ln w="12699">
+            <a:solidFill>
+              <a:srgbClr val="AEBBC7"/>
+            </a:solidFill>
+          </a:ln>
+          <a:effectLst/>
+        </p:spPr>
+        <p:style>
+          <a:lnRef idx="1">
+            <a:schemeClr val="accent1"/>
+          </a:lnRef>
+          <a:fillRef idx="3">
+            <a:schemeClr val="accent1"/>
+          </a:fillRef>
+          <a:effectRef idx="0">
+            <a:schemeClr val="accent1"/>
+          </a:effectRef>
+          <a:fontRef idx="minor">
+            <a:schemeClr val="lt1"/>
+          </a:fontRef>
+        </p:style>
+        <p:txBody>
+          <a:bodyPr rtlCol="0" anchor="ctr"/>
+          <a:lstStyle/>
+          <a:p>
+            <a:pPr algn="ctr"/>
+          </a:p>
+        </p:txBody>
+      </p:sp>
+      <p:sp>
+        <p:nvSpPr>
+          <p:cNvPr id="71" name="ledr_c0_b" descr="Editable shape; source id ledr_c0_b"/>
+          <p:cNvSpPr/>
+          <p:nvPr/>
+        </p:nvSpPr>
+        <p:spPr>
+          <a:xfrm>
+            <a:off x="5048249" y="2405062"/>
+            <a:ext cx="126999" cy="126999"/>
+          </a:xfrm>
+          <a:prstGeom prst="rect">
+            <a:avLst/>
+          </a:prstGeom>
+          <a:noFill/>
+          <a:ln w="18216">
+            <a:solidFill>
+              <a:srgbClr val="111A24"/>
+            </a:solidFill>
+          </a:ln>
+          <a:effectLst/>
+        </p:spPr>
+        <p:style>
+          <a:lnRef idx="1">
+            <a:schemeClr val="accent1"/>
+          </a:lnRef>
+          <a:fillRef idx="3">
+            <a:schemeClr val="accent1"/>
+          </a:fillRef>
+          <a:effectRef idx="0">
+            <a:schemeClr val="accent1"/>
+          </a:effectRef>
+          <a:fontRef idx="minor">
+            <a:schemeClr val="lt1"/>
+          </a:fontRef>
+        </p:style>
+        <p:txBody>
+          <a:bodyPr rtlCol="0" anchor="ctr"/>
+          <a:lstStyle/>
+          <a:p>
+            <a:pPr algn="ctr"/>
+          </a:p>
+        </p:txBody>
+      </p:sp>
+      <p:cxnSp>
+        <p:nvCxnSpPr>
+          <p:cNvPr id="72" name="ledr_c0_k_0" descr="Editable line; source id ledr_c0_k_0"/>
+          <p:cNvCxnSpPr/>
+          <p:nvPr/>
+        </p:nvCxnSpPr>
+        <p:spPr>
+          <a:xfrm>
+            <a:off x="5072062" y="2468562"/>
+            <a:ext cx="23812" cy="23812"/>
+          </a:xfrm>
+          <a:prstGeom prst="line">
+            <a:avLst/>
+          </a:prstGeom>
+          <a:ln w="23681">
+            <a:solidFill>
+              <a:srgbClr val="111A24"/>
+            </a:solidFill>
+          </a:ln>
+          <a:effectLst/>
+        </p:spPr>
+        <p:style>
+          <a:lnRef idx="2">
+            <a:schemeClr val="accent1"/>
+          </a:lnRef>
+          <a:fillRef idx="0">
+            <a:schemeClr val="accent1"/>
+          </a:fillRef>
+          <a:effectRef idx="0">
+            <a:schemeClr val="accent1"/>
+          </a:effectRef>
+          <a:fontRef idx="minor">
+            <a:schemeClr val="tx1"/>
+          </a:fontRef>
+        </p:style>
+      </p:cxnSp>
+      <p:cxnSp>
+        <p:nvCxnSpPr>
+          <p:cNvPr id="73" name="ledr_c0_k_1" descr="Editable line; source id ledr_c0_k_1"/>
+          <p:cNvCxnSpPr/>
+          <p:nvPr/>
+        </p:nvCxnSpPr>
+        <p:spPr>
+          <a:xfrm flipV="1">
+            <a:off x="5095874" y="2436812"/>
+            <a:ext cx="47625" cy="55562"/>
+          </a:xfrm>
+          <a:prstGeom prst="line">
+            <a:avLst/>
+          </a:prstGeom>
+          <a:ln w="23681">
+            <a:solidFill>
+              <a:srgbClr val="111A24"/>
+            </a:solidFill>
+          </a:ln>
+          <a:effectLst/>
+        </p:spPr>
+        <p:style>
+          <a:lnRef idx="2">
+            <a:schemeClr val="accent1"/>
+          </a:lnRef>
+          <a:fillRef idx="0">
+            <a:schemeClr val="accent1"/>
+          </a:fillRef>
+          <a:effectRef idx="0">
+            <a:schemeClr val="accent1"/>
+          </a:effectRef>
+          <a:fontRef idx="minor">
+            <a:schemeClr val="tx1"/>
+          </a:fontRef>
+        </p:style>
+      </p:cxnSp>
+      <p:sp>
+        <p:nvSpPr>
+          <p:cNvPr id="74" name="ledr_x0" descr="Editable text; source id ledr_x0"/>
+          <p:cNvSpPr txBox="1"/>
+          <p:nvPr/>
+        </p:nvSpPr>
+        <p:spPr>
+          <a:xfrm>
+            <a:off x="5278437" y="2151062"/>
+            <a:ext cx="2182812" cy="627062"/>
           </a:xfrm>
           <a:prstGeom prst="rect">
             <a:avLst/>
@@ -5860,211 +6856,7 @@
               <a:spcAft>
                 <a:spcPts val="0"/>
               </a:spcAft>
-              <a:defRPr sz="1499" b="1" i="0" lang="zh-CN" dirty="0">
-                <a:solidFill>
-                  <a:srgbClr val="5B6570"/>
-                </a:solidFill>
-                <a:latin typeface="DejaVu Sans"/>
-                <a:ea typeface="DejaVu Sans"/>
-                <a:cs typeface="DejaVu Sans"/>
-              </a:defRPr>
-            </a:pPr>
-            <a:r>
-              <a:rPr sz="1499" b="1" i="0" lang="zh-CN" dirty="0">
-                <a:solidFill>
-                  <a:srgbClr val="5B6570"/>
-                </a:solidFill>
-                <a:latin typeface="DejaVu Sans"/>
-                <a:ea typeface="DejaVu Sans"/>
-                <a:cs typeface="DejaVu Sans"/>
-              </a:rPr>
-              <a:t>Outside Study Scope</a:t>
-            </a:r>
-          </a:p>
-        </p:txBody>
-      </p:sp>
-      <p:sp>
-        <p:nvSpPr>
-          <p:cNvPr id="57" name="ax_u" descr="Editable line; source id ax_u"/>
-          <p:cNvSpPr/>
-          <p:nvPr/>
-        </p:nvSpPr>
-        <p:spPr>
-          <a:xfrm>
-            <a:off x="448469" y="1381125"/>
-            <a:ext cx="87312" cy="2103437"/>
-          </a:xfrm>
-          <a:custGeom>
-            <a:avLst/>
-            <a:gdLst/>
-            <a:ahLst/>
-            <a:cxnLst/>
-            <a:rect l="l" t="t" r="r" b="b"/>
-            <a:pathLst>
-              <a:path w="11000" h="265000">
-                <a:moveTo>
-                  <a:pt x="4400" y="265000"/>
-                </a:moveTo>
-                <a:lnTo>
-                  <a:pt x="4400" y="14000"/>
-                </a:lnTo>
-                <a:lnTo>
-                  <a:pt x="0" y="14000"/>
-                </a:lnTo>
-                <a:lnTo>
-                  <a:pt x="5500" y="0"/>
-                </a:lnTo>
-                <a:lnTo>
-                  <a:pt x="11000" y="14000"/>
-                </a:lnTo>
-                <a:lnTo>
-                  <a:pt x="6600" y="14000"/>
-                </a:lnTo>
-                <a:lnTo>
-                  <a:pt x="6600" y="265000"/>
-                </a:lnTo>
-                <a:close/>
-              </a:path>
-            </a:pathLst>
-          </a:custGeom>
-          <a:solidFill>
-            <a:srgbClr val="27303A"/>
-          </a:solidFill>
-          <a:ln>
-            <a:noFill/>
-          </a:ln>
-          <a:effectLst/>
-        </p:spPr>
-        <p:style>
-          <a:lnRef idx="1">
-            <a:schemeClr val="accent1"/>
-          </a:lnRef>
-          <a:fillRef idx="3">
-            <a:schemeClr val="accent1"/>
-          </a:fillRef>
-          <a:effectRef idx="0">
-            <a:schemeClr val="accent1"/>
-          </a:effectRef>
-          <a:fontRef idx="minor">
-            <a:schemeClr val="lt1"/>
-          </a:fontRef>
-        </p:style>
-        <p:txBody>
-          <a:bodyPr rtlCol="0" anchor="ctr"/>
-          <a:lstStyle/>
-          <a:p>
-            <a:pPr algn="ctr"/>
-          </a:p>
-        </p:txBody>
-      </p:sp>
-      <p:sp>
-        <p:nvSpPr>
-          <p:cNvPr id="58" name="ax_d" descr="Editable line; source id ax_d"/>
-          <p:cNvSpPr/>
-          <p:nvPr/>
-        </p:nvSpPr>
-        <p:spPr>
-          <a:xfrm>
-            <a:off x="448469" y="4151312"/>
-            <a:ext cx="87312" cy="2103437"/>
-          </a:xfrm>
-          <a:custGeom>
-            <a:avLst/>
-            <a:gdLst/>
-            <a:ahLst/>
-            <a:cxnLst/>
-            <a:rect l="l" t="t" r="r" b="b"/>
-            <a:pathLst>
-              <a:path w="11000" h="265000">
-                <a:moveTo>
-                  <a:pt x="6600" y="0"/>
-                </a:moveTo>
-                <a:lnTo>
-                  <a:pt x="6600" y="251000"/>
-                </a:lnTo>
-                <a:lnTo>
-                  <a:pt x="11000" y="251000"/>
-                </a:lnTo>
-                <a:lnTo>
-                  <a:pt x="5500" y="265000"/>
-                </a:lnTo>
-                <a:lnTo>
-                  <a:pt x="0" y="251000"/>
-                </a:lnTo>
-                <a:lnTo>
-                  <a:pt x="4400" y="251000"/>
-                </a:lnTo>
-                <a:lnTo>
-                  <a:pt x="4400" y="0"/>
-                </a:lnTo>
-                <a:close/>
-              </a:path>
-            </a:pathLst>
-          </a:custGeom>
-          <a:solidFill>
-            <a:srgbClr val="27303A"/>
-          </a:solidFill>
-          <a:ln>
-            <a:noFill/>
-          </a:ln>
-          <a:effectLst/>
-        </p:spPr>
-        <p:style>
-          <a:lnRef idx="1">
-            <a:schemeClr val="accent1"/>
-          </a:lnRef>
-          <a:fillRef idx="3">
-            <a:schemeClr val="accent1"/>
-          </a:fillRef>
-          <a:effectRef idx="0">
-            <a:schemeClr val="accent1"/>
-          </a:effectRef>
-          <a:fontRef idx="minor">
-            <a:schemeClr val="lt1"/>
-          </a:fontRef>
-        </p:style>
-        <p:txBody>
-          <a:bodyPr rtlCol="0" anchor="ctr"/>
-          <a:lstStyle/>
-          <a:p>
-            <a:pPr algn="ctr"/>
-          </a:p>
-        </p:txBody>
-      </p:sp>
-      <p:sp>
-        <p:nvSpPr>
-          <p:cNvPr id="59" name="ax_n" descr="Editable text; source id ax_n"/>
-          <p:cNvSpPr txBox="1"/>
-          <p:nvPr/>
-        </p:nvSpPr>
-        <p:spPr>
-          <a:xfrm>
-            <a:off x="301624" y="1095374"/>
-            <a:ext cx="380999" cy="269874"/>
-          </a:xfrm>
-          <a:prstGeom prst="rect">
-            <a:avLst/>
-          </a:prstGeom>
-          <a:noFill/>
-          <a:effectLst/>
-        </p:spPr>
-        <p:txBody>
-          <a:bodyPr wrap="none" anchor="ctr" tIns="0" rIns="0" bIns="0" lIns="0" anchorCtr="0" vertOverflow="overflow">
-            <a:noAutofit/>
-          </a:bodyPr>
-          <a:lstStyle/>
-          <a:p>
-            <a:pPr algn="ctr" fontAlgn="base">
-              <a:lnSpc>
-                <a:spcPts val="1296"/>
-              </a:lnSpc>
-              <a:spcBef>
-                <a:spcPts val="0"/>
-              </a:spcBef>
-              <a:spcAft>
-                <a:spcPts val="0"/>
-              </a:spcAft>
-              <a:defRPr sz="1106" b="1" i="0" lang="zh-CN" dirty="0">
+              <a:defRPr sz="1499" b="0" i="0" lang="zh-CN" dirty="0">
                 <a:solidFill>
                   <a:srgbClr val="27303A"/>
                 </a:solidFill>
@@ -6074,7 +6866,7 @@
               </a:defRPr>
             </a:pPr>
             <a:r>
-              <a:rPr sz="1106" b="1" i="0" lang="zh-CN" dirty="0">
+              <a:rPr sz="1499" b="0" i="0" lang="zh-CN" dirty="0">
                 <a:solidFill>
                   <a:srgbClr val="27303A"/>
                 </a:solidFill>
@@ -6082,2201 +6874,9 @@
                 <a:ea typeface="DejaVu Sans"/>
                 <a:cs typeface="DejaVu Sans"/>
               </a:rPr>
-              <a:t>Near</a:t>
+              <a:t>Ratio and raw </a:t>
             </a:r>
           </a:p>
-        </p:txBody>
-      </p:sp>
-      <p:sp>
-        <p:nvSpPr>
-          <p:cNvPr id="60" name="ax_f" descr="Editable text; source id ax_f"/>
-          <p:cNvSpPr txBox="1"/>
-          <p:nvPr/>
-        </p:nvSpPr>
-        <p:spPr>
-          <a:xfrm>
-            <a:off x="301624" y="6254749"/>
-            <a:ext cx="380999" cy="269874"/>
-          </a:xfrm>
-          <a:prstGeom prst="rect">
-            <a:avLst/>
-          </a:prstGeom>
-          <a:noFill/>
-          <a:effectLst/>
-        </p:spPr>
-        <p:txBody>
-          <a:bodyPr wrap="none" anchor="ctr" tIns="0" rIns="0" bIns="0" lIns="0" anchorCtr="0" vertOverflow="overflow">
-            <a:noAutofit/>
-          </a:bodyPr>
-          <a:lstStyle/>
-          <a:p>
-            <a:pPr algn="ctr" fontAlgn="base">
-              <a:lnSpc>
-                <a:spcPts val="1312"/>
-              </a:lnSpc>
-              <a:spcBef>
-                <a:spcPts val="0"/>
-              </a:spcBef>
-              <a:spcAft>
-                <a:spcPts val="0"/>
-              </a:spcAft>
-              <a:defRPr sz="1124" b="1" i="0" lang="zh-CN" dirty="0">
-                <a:solidFill>
-                  <a:srgbClr val="27303A"/>
-                </a:solidFill>
-                <a:latin typeface="DejaVu Sans"/>
-                <a:ea typeface="DejaVu Sans"/>
-                <a:cs typeface="DejaVu Sans"/>
-              </a:defRPr>
-            </a:pPr>
-            <a:r>
-              <a:rPr sz="1124" b="1" i="0" lang="zh-CN" dirty="0">
-                <a:solidFill>
-                  <a:srgbClr val="27303A"/>
-                </a:solidFill>
-                <a:latin typeface="DejaVu Sans"/>
-                <a:ea typeface="DejaVu Sans"/>
-                <a:cs typeface="DejaVu Sans"/>
-              </a:rPr>
-              <a:t>Far</a:t>
-            </a:r>
-          </a:p>
-        </p:txBody>
-      </p:sp>
-      <p:sp>
-        <p:nvSpPr>
-          <p:cNvPr id="61" name="ax_l" descr="Editable text; source id ax_l"/>
-          <p:cNvSpPr txBox="1"/>
-          <p:nvPr/>
-        </p:nvSpPr>
-        <p:spPr>
-          <a:xfrm rot="16200000">
-            <a:off x="-261937" y="3698874"/>
-            <a:ext cx="1190624" cy="246062"/>
-          </a:xfrm>
-          <a:prstGeom prst="rect">
-            <a:avLst/>
-          </a:prstGeom>
-          <a:noFill/>
-          <a:effectLst/>
-        </p:spPr>
-        <p:txBody>
-          <a:bodyPr wrap="none" anchor="ctr" tIns="0" rIns="0" bIns="0" lIns="0" anchorCtr="0" vertOverflow="overflow">
-            <a:noAutofit/>
-          </a:bodyPr>
-          <a:lstStyle/>
-          <a:p>
-            <a:pPr algn="ctr" fontAlgn="base">
-              <a:lnSpc>
-                <a:spcPts val="937"/>
-              </a:lnSpc>
-              <a:spcBef>
-                <a:spcPts val="0"/>
-              </a:spcBef>
-              <a:spcAft>
-                <a:spcPts val="0"/>
-              </a:spcAft>
-              <a:defRPr sz="793" b="1" i="0" lang="zh-CN" dirty="0">
-                <a:solidFill>
-                  <a:srgbClr val="27303A"/>
-                </a:solidFill>
-                <a:latin typeface="DejaVu Sans"/>
-                <a:ea typeface="DejaVu Sans"/>
-                <a:cs typeface="DejaVu Sans"/>
-              </a:defRPr>
-            </a:pPr>
-            <a:r>
-              <a:rPr sz="793" b="1" i="0" lang="zh-CN" dirty="0">
-                <a:solidFill>
-                  <a:srgbClr val="27303A"/>
-                </a:solidFill>
-                <a:latin typeface="DejaVu Sans"/>
-                <a:ea typeface="DejaVu Sans"/>
-                <a:cs typeface="DejaVu Sans"/>
-              </a:rPr>
-              <a:t>Distance from target</a:t>
-            </a:r>
-          </a:p>
-        </p:txBody>
-      </p:sp>
-      <p:sp>
-        <p:nvSpPr>
-          <p:cNvPr id="62" name="led" descr="Editable shape; source id led"/>
-          <p:cNvSpPr/>
-          <p:nvPr/>
-        </p:nvSpPr>
-        <p:spPr>
-          <a:xfrm>
-            <a:off x="4921249" y="1190624"/>
-            <a:ext cx="3032124" cy="4286249"/>
-          </a:xfrm>
-          <a:prstGeom prst="roundRect">
-            <a:avLst>
-              <a:gd name="adj" fmla="val 2356"/>
-            </a:avLst>
-          </a:prstGeom>
-          <a:solidFill>
-            <a:srgbClr val="FFFFFF"/>
-          </a:solidFill>
-          <a:ln w="15081">
-            <a:solidFill>
-              <a:srgbClr val="1F7F8C"/>
-            </a:solidFill>
-          </a:ln>
-          <a:effectLst/>
-        </p:spPr>
-        <p:style>
-          <a:lnRef idx="1">
-            <a:schemeClr val="accent1"/>
-          </a:lnRef>
-          <a:fillRef idx="3">
-            <a:schemeClr val="accent1"/>
-          </a:fillRef>
-          <a:effectRef idx="0">
-            <a:schemeClr val="accent1"/>
-          </a:effectRef>
-          <a:fontRef idx="minor">
-            <a:schemeClr val="lt1"/>
-          </a:fontRef>
-        </p:style>
-        <p:txBody>
-          <a:bodyPr rtlCol="0" anchor="ctr"/>
-          <a:lstStyle/>
-          <a:p>
-            <a:pPr algn="ctr"/>
-          </a:p>
-        </p:txBody>
-      </p:sp>
-      <p:sp>
-        <p:nvSpPr>
-          <p:cNvPr id="63" name="led_b" descr="Editable shape; source id led_b"/>
-          <p:cNvSpPr/>
-          <p:nvPr/>
-        </p:nvSpPr>
-        <p:spPr>
-          <a:xfrm>
-            <a:off x="4921249" y="1190624"/>
-            <a:ext cx="87312" cy="4286249"/>
-          </a:xfrm>
-          <a:prstGeom prst="roundRect">
-            <a:avLst>
-              <a:gd name="adj" fmla="val 27272"/>
-            </a:avLst>
-          </a:prstGeom>
-          <a:solidFill>
-            <a:srgbClr val="1F7F8C"/>
-          </a:solidFill>
-          <a:ln>
-            <a:noFill/>
-          </a:ln>
-          <a:effectLst/>
-        </p:spPr>
-        <p:style>
-          <a:lnRef idx="1">
-            <a:schemeClr val="accent1"/>
-          </a:lnRef>
-          <a:fillRef idx="3">
-            <a:schemeClr val="accent1"/>
-          </a:fillRef>
-          <a:effectRef idx="0">
-            <a:schemeClr val="accent1"/>
-          </a:effectRef>
-          <a:fontRef idx="minor">
-            <a:schemeClr val="lt1"/>
-          </a:fontRef>
-        </p:style>
-        <p:txBody>
-          <a:bodyPr rtlCol="0" anchor="ctr"/>
-          <a:lstStyle/>
-          <a:p>
-            <a:pPr algn="ctr"/>
-          </a:p>
-        </p:txBody>
-      </p:sp>
-      <p:sp>
-        <p:nvSpPr>
-          <p:cNvPr id="64" name="led_g_b" descr="Editable shape; source id led_g_b"/>
-          <p:cNvSpPr/>
-          <p:nvPr/>
-        </p:nvSpPr>
-        <p:spPr>
-          <a:xfrm>
-            <a:off x="5183187" y="1476374"/>
-            <a:ext cx="261937" cy="230187"/>
-          </a:xfrm>
-          <a:prstGeom prst="rect">
-            <a:avLst/>
-          </a:prstGeom>
-          <a:noFill/>
-          <a:ln w="18216">
-            <a:solidFill>
-              <a:srgbClr val="111A24"/>
-            </a:solidFill>
-          </a:ln>
-          <a:effectLst/>
-        </p:spPr>
-        <p:style>
-          <a:lnRef idx="1">
-            <a:schemeClr val="accent1"/>
-          </a:lnRef>
-          <a:fillRef idx="3">
-            <a:schemeClr val="accent1"/>
-          </a:fillRef>
-          <a:effectRef idx="0">
-            <a:schemeClr val="accent1"/>
-          </a:effectRef>
-          <a:fontRef idx="minor">
-            <a:schemeClr val="lt1"/>
-          </a:fontRef>
-        </p:style>
-        <p:txBody>
-          <a:bodyPr rtlCol="0" anchor="ctr"/>
-          <a:lstStyle/>
-          <a:p>
-            <a:pPr algn="ctr"/>
-          </a:p>
-        </p:txBody>
-      </p:sp>
-      <p:cxnSp>
-        <p:nvCxnSpPr>
-          <p:cNvPr id="65" name="led_g_r1" descr="Editable line; source id led_g_r1"/>
-          <p:cNvCxnSpPr/>
-          <p:nvPr/>
-        </p:nvCxnSpPr>
-        <p:spPr>
-          <a:xfrm>
-            <a:off x="5183187" y="1555749"/>
-            <a:ext cx="269875" cy="0"/>
-          </a:xfrm>
-          <a:prstGeom prst="line">
-            <a:avLst/>
-          </a:prstGeom>
-          <a:ln w="18216">
-            <a:solidFill>
-              <a:srgbClr val="111A24"/>
-            </a:solidFill>
-          </a:ln>
-          <a:effectLst/>
-        </p:spPr>
-        <p:style>
-          <a:lnRef idx="2">
-            <a:schemeClr val="accent1"/>
-          </a:lnRef>
-          <a:fillRef idx="0">
-            <a:schemeClr val="accent1"/>
-          </a:fillRef>
-          <a:effectRef idx="0">
-            <a:schemeClr val="accent1"/>
-          </a:effectRef>
-          <a:fontRef idx="minor">
-            <a:schemeClr val="tx1"/>
-          </a:fontRef>
-        </p:style>
-      </p:cxnSp>
-      <p:cxnSp>
-        <p:nvCxnSpPr>
-          <p:cNvPr id="66" name="led_g_r2" descr="Editable line; source id led_g_r2"/>
-          <p:cNvCxnSpPr/>
-          <p:nvPr/>
-        </p:nvCxnSpPr>
-        <p:spPr>
-          <a:xfrm>
-            <a:off x="5183187" y="1627187"/>
-            <a:ext cx="269875" cy="0"/>
-          </a:xfrm>
-          <a:prstGeom prst="line">
-            <a:avLst/>
-          </a:prstGeom>
-          <a:ln w="18216">
-            <a:solidFill>
-              <a:srgbClr val="111A24"/>
-            </a:solidFill>
-          </a:ln>
-          <a:effectLst/>
-        </p:spPr>
-        <p:style>
-          <a:lnRef idx="2">
-            <a:schemeClr val="accent1"/>
-          </a:lnRef>
-          <a:fillRef idx="0">
-            <a:schemeClr val="accent1"/>
-          </a:fillRef>
-          <a:effectRef idx="0">
-            <a:schemeClr val="accent1"/>
-          </a:effectRef>
-          <a:fontRef idx="minor">
-            <a:schemeClr val="tx1"/>
-          </a:fontRef>
-        </p:style>
-      </p:cxnSp>
-      <p:cxnSp>
-        <p:nvCxnSpPr>
-          <p:cNvPr id="67" name="led_g_c1" descr="Editable line; source id led_g_c1"/>
-          <p:cNvCxnSpPr/>
-          <p:nvPr/>
-        </p:nvCxnSpPr>
-        <p:spPr>
-          <a:xfrm>
-            <a:off x="5270499" y="1476374"/>
-            <a:ext cx="0" cy="230188"/>
-          </a:xfrm>
-          <a:prstGeom prst="line">
-            <a:avLst/>
-          </a:prstGeom>
-          <a:ln w="18216">
-            <a:solidFill>
-              <a:srgbClr val="111A24"/>
-            </a:solidFill>
-          </a:ln>
-          <a:effectLst/>
-        </p:spPr>
-        <p:style>
-          <a:lnRef idx="2">
-            <a:schemeClr val="accent1"/>
-          </a:lnRef>
-          <a:fillRef idx="0">
-            <a:schemeClr val="accent1"/>
-          </a:fillRef>
-          <a:effectRef idx="0">
-            <a:schemeClr val="accent1"/>
-          </a:effectRef>
-          <a:fontRef idx="minor">
-            <a:schemeClr val="tx1"/>
-          </a:fontRef>
-        </p:style>
-      </p:cxnSp>
-      <p:cxnSp>
-        <p:nvCxnSpPr>
-          <p:cNvPr id="68" name="led_g_c2" descr="Editable line; source id led_g_c2"/>
-          <p:cNvCxnSpPr/>
-          <p:nvPr/>
-        </p:nvCxnSpPr>
-        <p:spPr>
-          <a:xfrm>
-            <a:off x="5365749" y="1476374"/>
-            <a:ext cx="0" cy="230188"/>
-          </a:xfrm>
-          <a:prstGeom prst="line">
-            <a:avLst/>
-          </a:prstGeom>
-          <a:ln w="18216">
-            <a:solidFill>
-              <a:srgbClr val="111A24"/>
-            </a:solidFill>
-          </a:ln>
-          <a:effectLst/>
-        </p:spPr>
-        <p:style>
-          <a:lnRef idx="2">
-            <a:schemeClr val="accent1"/>
-          </a:lnRef>
-          <a:fillRef idx="0">
-            <a:schemeClr val="accent1"/>
-          </a:fillRef>
-          <a:effectRef idx="0">
-            <a:schemeClr val="accent1"/>
-          </a:effectRef>
-          <a:fontRef idx="minor">
-            <a:schemeClr val="tx1"/>
-          </a:fontRef>
-        </p:style>
-      </p:cxnSp>
-      <p:sp>
-        <p:nvSpPr>
-          <p:cNvPr id="69" name="led_t" descr="Editable text; source id led_t"/>
-          <p:cNvSpPr txBox="1"/>
-          <p:nvPr/>
-        </p:nvSpPr>
-        <p:spPr>
-          <a:xfrm>
-            <a:off x="5587999" y="1412874"/>
-            <a:ext cx="2238374" cy="349249"/>
-          </a:xfrm>
-          <a:prstGeom prst="rect">
-            <a:avLst/>
-          </a:prstGeom>
-          <a:noFill/>
-          <a:effectLst/>
-        </p:spPr>
-        <p:txBody>
-          <a:bodyPr wrap="none" anchor="ctr" tIns="0" rIns="0" bIns="0" lIns="0" anchorCtr="0" vertOverflow="overflow">
-            <a:noAutofit/>
-          </a:bodyPr>
-          <a:lstStyle/>
-          <a:p>
-            <a:pPr algn="l" fontAlgn="base">
-              <a:lnSpc>
-                <a:spcPts val="1359"/>
-              </a:lnSpc>
-              <a:spcBef>
-                <a:spcPts val="0"/>
-              </a:spcBef>
-              <a:spcAft>
-                <a:spcPts val="0"/>
-              </a:spcAft>
-              <a:defRPr sz="1146" b="1" i="0" lang="zh-CN" dirty="0">
-                <a:solidFill>
-                  <a:srgbClr val="0F4F58"/>
-                </a:solidFill>
-                <a:latin typeface="DejaVu Sans"/>
-                <a:ea typeface="DejaVu Sans"/>
-                <a:cs typeface="DejaVu Sans"/>
-              </a:defRPr>
-            </a:pPr>
-            <a:r>
-              <a:rPr sz="1146" b="1" i="0" lang="zh-CN" dirty="0">
-                <a:solidFill>
-                  <a:srgbClr val="0F4F58"/>
-                </a:solidFill>
-                <a:latin typeface="DejaVu Sans"/>
-                <a:ea typeface="DejaVu Sans"/>
-                <a:cs typeface="DejaVu Sans"/>
-              </a:rPr>
-              <a:t>Compared on Shared Items</a:t>
-            </a:r>
-          </a:p>
-        </p:txBody>
-      </p:sp>
-      <p:sp>
-        <p:nvSpPr>
-          <p:cNvPr id="70" name="ledr_r0" descr="Editable shape; source id ledr_r0"/>
-          <p:cNvSpPr/>
-          <p:nvPr/>
-        </p:nvSpPr>
-        <p:spPr>
-          <a:xfrm>
-            <a:off x="5143499" y="1968499"/>
-            <a:ext cx="2619374" cy="484187"/>
-          </a:xfrm>
-          <a:prstGeom prst="roundRect">
-            <a:avLst>
-              <a:gd name="adj" fmla="val 9836"/>
-            </a:avLst>
-          </a:prstGeom>
-          <a:solidFill>
-            <a:srgbClr val="F4F7FA"/>
-          </a:solidFill>
-          <a:ln w="12699">
-            <a:solidFill>
-              <a:srgbClr val="AEBBC7"/>
-            </a:solidFill>
-          </a:ln>
-          <a:effectLst/>
-        </p:spPr>
-        <p:style>
-          <a:lnRef idx="1">
-            <a:schemeClr val="accent1"/>
-          </a:lnRef>
-          <a:fillRef idx="3">
-            <a:schemeClr val="accent1"/>
-          </a:fillRef>
-          <a:effectRef idx="0">
-            <a:schemeClr val="accent1"/>
-          </a:effectRef>
-          <a:fontRef idx="minor">
-            <a:schemeClr val="lt1"/>
-          </a:fontRef>
-        </p:style>
-        <p:txBody>
-          <a:bodyPr rtlCol="0" anchor="ctr"/>
-          <a:lstStyle/>
-          <a:p>
-            <a:pPr algn="ctr"/>
-          </a:p>
-        </p:txBody>
-      </p:sp>
-      <p:sp>
-        <p:nvSpPr>
-          <p:cNvPr id="71" name="ledr_c0_b" descr="Editable shape; source id ledr_c0_b"/>
-          <p:cNvSpPr/>
-          <p:nvPr/>
-        </p:nvSpPr>
-        <p:spPr>
-          <a:xfrm>
-            <a:off x="5254624" y="2135187"/>
-            <a:ext cx="142874" cy="142874"/>
-          </a:xfrm>
-          <a:prstGeom prst="rect">
-            <a:avLst/>
-          </a:prstGeom>
-          <a:noFill/>
-          <a:ln w="18216">
-            <a:solidFill>
-              <a:srgbClr val="111A24"/>
-            </a:solidFill>
-          </a:ln>
-          <a:effectLst/>
-        </p:spPr>
-        <p:style>
-          <a:lnRef idx="1">
-            <a:schemeClr val="accent1"/>
-          </a:lnRef>
-          <a:fillRef idx="3">
-            <a:schemeClr val="accent1"/>
-          </a:fillRef>
-          <a:effectRef idx="0">
-            <a:schemeClr val="accent1"/>
-          </a:effectRef>
-          <a:fontRef idx="minor">
-            <a:schemeClr val="lt1"/>
-          </a:fontRef>
-        </p:style>
-        <p:txBody>
-          <a:bodyPr rtlCol="0" anchor="ctr"/>
-          <a:lstStyle/>
-          <a:p>
-            <a:pPr algn="ctr"/>
-          </a:p>
-        </p:txBody>
-      </p:sp>
-      <p:cxnSp>
-        <p:nvCxnSpPr>
-          <p:cNvPr id="72" name="ledr_c0_k_0" descr="Editable line; source id ledr_c0_k_0"/>
-          <p:cNvCxnSpPr/>
-          <p:nvPr/>
-        </p:nvCxnSpPr>
-        <p:spPr>
-          <a:xfrm>
-            <a:off x="5286374" y="2214562"/>
-            <a:ext cx="31750" cy="31750"/>
-          </a:xfrm>
-          <a:prstGeom prst="line">
-            <a:avLst/>
-          </a:prstGeom>
-          <a:ln w="23681">
-            <a:solidFill>
-              <a:srgbClr val="111A24"/>
-            </a:solidFill>
-          </a:ln>
-          <a:effectLst/>
-        </p:spPr>
-        <p:style>
-          <a:lnRef idx="2">
-            <a:schemeClr val="accent1"/>
-          </a:lnRef>
-          <a:fillRef idx="0">
-            <a:schemeClr val="accent1"/>
-          </a:fillRef>
-          <a:effectRef idx="0">
-            <a:schemeClr val="accent1"/>
-          </a:effectRef>
-          <a:fontRef idx="minor">
-            <a:schemeClr val="tx1"/>
-          </a:fontRef>
-        </p:style>
-      </p:cxnSp>
-      <p:cxnSp>
-        <p:nvCxnSpPr>
-          <p:cNvPr id="73" name="ledr_c0_k_1" descr="Editable line; source id ledr_c0_k_1"/>
-          <p:cNvCxnSpPr/>
-          <p:nvPr/>
-        </p:nvCxnSpPr>
-        <p:spPr>
-          <a:xfrm flipV="1">
-            <a:off x="5318124" y="2174874"/>
-            <a:ext cx="55563" cy="71438"/>
-          </a:xfrm>
-          <a:prstGeom prst="line">
-            <a:avLst/>
-          </a:prstGeom>
-          <a:ln w="23681">
-            <a:solidFill>
-              <a:srgbClr val="111A24"/>
-            </a:solidFill>
-          </a:ln>
-          <a:effectLst/>
-        </p:spPr>
-        <p:style>
-          <a:lnRef idx="2">
-            <a:schemeClr val="accent1"/>
-          </a:lnRef>
-          <a:fillRef idx="0">
-            <a:schemeClr val="accent1"/>
-          </a:fillRef>
-          <a:effectRef idx="0">
-            <a:schemeClr val="accent1"/>
-          </a:effectRef>
-          <a:fontRef idx="minor">
-            <a:schemeClr val="tx1"/>
-          </a:fontRef>
-        </p:style>
-      </p:cxnSp>
-      <p:sp>
-        <p:nvSpPr>
-          <p:cNvPr id="74" name="ledr_x0" descr="Editable text; source id ledr_x0"/>
-          <p:cNvSpPr txBox="1"/>
-          <p:nvPr/>
-        </p:nvSpPr>
-        <p:spPr>
-          <a:xfrm>
-            <a:off x="5508624" y="2071687"/>
-            <a:ext cx="2127249" cy="277812"/>
-          </a:xfrm>
-          <a:prstGeom prst="rect">
-            <a:avLst/>
-          </a:prstGeom>
-          <a:noFill/>
-          <a:effectLst/>
-        </p:spPr>
-        <p:txBody>
-          <a:bodyPr wrap="none" anchor="ctr" tIns="0" rIns="0" bIns="0" lIns="0" anchorCtr="0" vertOverflow="overflow">
-            <a:noAutofit/>
-          </a:bodyPr>
-          <a:lstStyle/>
-          <a:p>
-            <a:pPr algn="l" fontAlgn="base">
-              <a:lnSpc>
-                <a:spcPts val="1453"/>
-              </a:lnSpc>
-              <a:spcBef>
-                <a:spcPts val="0"/>
-              </a:spcBef>
-              <a:spcAft>
-                <a:spcPts val="0"/>
-              </a:spcAft>
-              <a:defRPr sz="1237" b="1" i="0" lang="zh-CN" dirty="0">
-                <a:solidFill>
-                  <a:srgbClr val="27303A"/>
-                </a:solidFill>
-                <a:latin typeface="DejaVu Sans"/>
-                <a:ea typeface="DejaVu Sans"/>
-                <a:cs typeface="DejaVu Sans"/>
-              </a:defRPr>
-            </a:pPr>
-            <a:r>
-              <a:rPr sz="1237" b="1" i="0" lang="zh-CN" dirty="0">
-                <a:solidFill>
-                  <a:srgbClr val="27303A"/>
-                </a:solidFill>
-                <a:latin typeface="DejaVu Sans"/>
-                <a:ea typeface="DejaVu Sans"/>
-                <a:cs typeface="DejaVu Sans"/>
-              </a:rPr>
-              <a:t>Ratio and raw materials</a:t>
-            </a:r>
-          </a:p>
-        </p:txBody>
-      </p:sp>
-      <p:sp>
-        <p:nvSpPr>
-          <p:cNvPr id="75" name="ledr_r1" descr="Editable shape; source id ledr_r1"/>
-          <p:cNvSpPr/>
-          <p:nvPr/>
-        </p:nvSpPr>
-        <p:spPr>
-          <a:xfrm>
-            <a:off x="5143499" y="2532062"/>
-            <a:ext cx="2619374" cy="484187"/>
-          </a:xfrm>
-          <a:prstGeom prst="roundRect">
-            <a:avLst>
-              <a:gd name="adj" fmla="val 9836"/>
-            </a:avLst>
-          </a:prstGeom>
-          <a:solidFill>
-            <a:srgbClr val="F4F7FA"/>
-          </a:solidFill>
-          <a:ln w="12699">
-            <a:solidFill>
-              <a:srgbClr val="AEBBC7"/>
-            </a:solidFill>
-          </a:ln>
-          <a:effectLst/>
-        </p:spPr>
-        <p:style>
-          <a:lnRef idx="1">
-            <a:schemeClr val="accent1"/>
-          </a:lnRef>
-          <a:fillRef idx="3">
-            <a:schemeClr val="accent1"/>
-          </a:fillRef>
-          <a:effectRef idx="0">
-            <a:schemeClr val="accent1"/>
-          </a:effectRef>
-          <a:fontRef idx="minor">
-            <a:schemeClr val="lt1"/>
-          </a:fontRef>
-        </p:style>
-        <p:txBody>
-          <a:bodyPr rtlCol="0" anchor="ctr"/>
-          <a:lstStyle/>
-          <a:p>
-            <a:pPr algn="ctr"/>
-          </a:p>
-        </p:txBody>
-      </p:sp>
-      <p:sp>
-        <p:nvSpPr>
-          <p:cNvPr id="76" name="ledr_c1_b" descr="Editable shape; source id ledr_c1_b"/>
-          <p:cNvSpPr/>
-          <p:nvPr/>
-        </p:nvSpPr>
-        <p:spPr>
-          <a:xfrm>
-            <a:off x="5254624" y="2698749"/>
-            <a:ext cx="142874" cy="142874"/>
-          </a:xfrm>
-          <a:prstGeom prst="rect">
-            <a:avLst/>
-          </a:prstGeom>
-          <a:noFill/>
-          <a:ln w="18216">
-            <a:solidFill>
-              <a:srgbClr val="111A24"/>
-            </a:solidFill>
-          </a:ln>
-          <a:effectLst/>
-        </p:spPr>
-        <p:style>
-          <a:lnRef idx="1">
-            <a:schemeClr val="accent1"/>
-          </a:lnRef>
-          <a:fillRef idx="3">
-            <a:schemeClr val="accent1"/>
-          </a:fillRef>
-          <a:effectRef idx="0">
-            <a:schemeClr val="accent1"/>
-          </a:effectRef>
-          <a:fontRef idx="minor">
-            <a:schemeClr val="lt1"/>
-          </a:fontRef>
-        </p:style>
-        <p:txBody>
-          <a:bodyPr rtlCol="0" anchor="ctr"/>
-          <a:lstStyle/>
-          <a:p>
-            <a:pPr algn="ctr"/>
-          </a:p>
-        </p:txBody>
-      </p:sp>
-      <p:cxnSp>
-        <p:nvCxnSpPr>
-          <p:cNvPr id="77" name="ledr_c1_k_0" descr="Editable line; source id ledr_c1_k_0"/>
-          <p:cNvCxnSpPr/>
-          <p:nvPr/>
-        </p:nvCxnSpPr>
-        <p:spPr>
-          <a:xfrm>
-            <a:off x="5286374" y="2770187"/>
-            <a:ext cx="31750" cy="31750"/>
-          </a:xfrm>
-          <a:prstGeom prst="line">
-            <a:avLst/>
-          </a:prstGeom>
-          <a:ln w="23681">
-            <a:solidFill>
-              <a:srgbClr val="111A24"/>
-            </a:solidFill>
-          </a:ln>
-          <a:effectLst/>
-        </p:spPr>
-        <p:style>
-          <a:lnRef idx="2">
-            <a:schemeClr val="accent1"/>
-          </a:lnRef>
-          <a:fillRef idx="0">
-            <a:schemeClr val="accent1"/>
-          </a:fillRef>
-          <a:effectRef idx="0">
-            <a:schemeClr val="accent1"/>
-          </a:effectRef>
-          <a:fontRef idx="minor">
-            <a:schemeClr val="tx1"/>
-          </a:fontRef>
-        </p:style>
-      </p:cxnSp>
-      <p:cxnSp>
-        <p:nvCxnSpPr>
-          <p:cNvPr id="78" name="ledr_c1_k_1" descr="Editable line; source id ledr_c1_k_1"/>
-          <p:cNvCxnSpPr/>
-          <p:nvPr/>
-        </p:nvCxnSpPr>
-        <p:spPr>
-          <a:xfrm flipV="1">
-            <a:off x="5318124" y="2738437"/>
-            <a:ext cx="55563" cy="63500"/>
-          </a:xfrm>
-          <a:prstGeom prst="line">
-            <a:avLst/>
-          </a:prstGeom>
-          <a:ln w="23681">
-            <a:solidFill>
-              <a:srgbClr val="111A24"/>
-            </a:solidFill>
-          </a:ln>
-          <a:effectLst/>
-        </p:spPr>
-        <p:style>
-          <a:lnRef idx="2">
-            <a:schemeClr val="accent1"/>
-          </a:lnRef>
-          <a:fillRef idx="0">
-            <a:schemeClr val="accent1"/>
-          </a:fillRef>
-          <a:effectRef idx="0">
-            <a:schemeClr val="accent1"/>
-          </a:effectRef>
-          <a:fontRef idx="minor">
-            <a:schemeClr val="tx1"/>
-          </a:fontRef>
-        </p:style>
-      </p:cxnSp>
-      <p:sp>
-        <p:nvSpPr>
-          <p:cNvPr id="79" name="ledr_x1" descr="Editable text; source id ledr_x1"/>
-          <p:cNvSpPr txBox="1"/>
-          <p:nvPr/>
-        </p:nvSpPr>
-        <p:spPr>
-          <a:xfrm>
-            <a:off x="5508624" y="2627312"/>
-            <a:ext cx="2127249" cy="277812"/>
-          </a:xfrm>
-          <a:prstGeom prst="rect">
-            <a:avLst/>
-          </a:prstGeom>
-          <a:noFill/>
-          <a:effectLst/>
-        </p:spPr>
-        <p:txBody>
-          <a:bodyPr wrap="none" anchor="ctr" tIns="0" rIns="0" bIns="0" lIns="0" anchorCtr="0" vertOverflow="overflow">
-            <a:noAutofit/>
-          </a:bodyPr>
-          <a:lstStyle/>
-          <a:p>
-            <a:pPr algn="l" fontAlgn="base">
-              <a:lnSpc>
-                <a:spcPts val="1468"/>
-              </a:lnSpc>
-              <a:spcBef>
-                <a:spcPts val="0"/>
-              </a:spcBef>
-              <a:spcAft>
-                <a:spcPts val="0"/>
-              </a:spcAft>
-              <a:defRPr sz="1249" b="1" i="0" lang="zh-CN" dirty="0">
-                <a:solidFill>
-                  <a:srgbClr val="27303A"/>
-                </a:solidFill>
-                <a:latin typeface="DejaVu Sans"/>
-                <a:ea typeface="DejaVu Sans"/>
-                <a:cs typeface="DejaVu Sans"/>
-              </a:defRPr>
-            </a:pPr>
-            <a:r>
-              <a:rPr sz="1249" b="1" i="0" lang="zh-CN" dirty="0">
-                <a:solidFill>
-                  <a:srgbClr val="27303A"/>
-                </a:solidFill>
-                <a:latin typeface="DejaVu Sans"/>
-                <a:ea typeface="DejaVu Sans"/>
-                <a:cs typeface="DejaVu Sans"/>
-              </a:rPr>
-              <a:t>Thermal history</a:t>
-            </a:r>
-          </a:p>
-        </p:txBody>
-      </p:sp>
-      <p:sp>
-        <p:nvSpPr>
-          <p:cNvPr id="80" name="ledr_r2" descr="Editable shape; source id ledr_r2"/>
-          <p:cNvSpPr/>
-          <p:nvPr/>
-        </p:nvSpPr>
-        <p:spPr>
-          <a:xfrm>
-            <a:off x="5143499" y="3087687"/>
-            <a:ext cx="2619374" cy="484187"/>
-          </a:xfrm>
-          <a:prstGeom prst="roundRect">
-            <a:avLst>
-              <a:gd name="adj" fmla="val 9836"/>
-            </a:avLst>
-          </a:prstGeom>
-          <a:solidFill>
-            <a:srgbClr val="F4F7FA"/>
-          </a:solidFill>
-          <a:ln w="12699">
-            <a:solidFill>
-              <a:srgbClr val="AEBBC7"/>
-            </a:solidFill>
-          </a:ln>
-          <a:effectLst/>
-        </p:spPr>
-        <p:style>
-          <a:lnRef idx="1">
-            <a:schemeClr val="accent1"/>
-          </a:lnRef>
-          <a:fillRef idx="3">
-            <a:schemeClr val="accent1"/>
-          </a:fillRef>
-          <a:effectRef idx="0">
-            <a:schemeClr val="accent1"/>
-          </a:effectRef>
-          <a:fontRef idx="minor">
-            <a:schemeClr val="lt1"/>
-          </a:fontRef>
-        </p:style>
-        <p:txBody>
-          <a:bodyPr rtlCol="0" anchor="ctr"/>
-          <a:lstStyle/>
-          <a:p>
-            <a:pPr algn="ctr"/>
-          </a:p>
-        </p:txBody>
-      </p:sp>
-      <p:sp>
-        <p:nvSpPr>
-          <p:cNvPr id="81" name="ledr_c2_b" descr="Editable shape; source id ledr_c2_b"/>
-          <p:cNvSpPr/>
-          <p:nvPr/>
-        </p:nvSpPr>
-        <p:spPr>
-          <a:xfrm>
-            <a:off x="5254624" y="3254374"/>
-            <a:ext cx="142874" cy="142874"/>
-          </a:xfrm>
-          <a:prstGeom prst="rect">
-            <a:avLst/>
-          </a:prstGeom>
-          <a:noFill/>
-          <a:ln w="18216">
-            <a:solidFill>
-              <a:srgbClr val="111A24"/>
-            </a:solidFill>
-          </a:ln>
-          <a:effectLst/>
-        </p:spPr>
-        <p:style>
-          <a:lnRef idx="1">
-            <a:schemeClr val="accent1"/>
-          </a:lnRef>
-          <a:fillRef idx="3">
-            <a:schemeClr val="accent1"/>
-          </a:fillRef>
-          <a:effectRef idx="0">
-            <a:schemeClr val="accent1"/>
-          </a:effectRef>
-          <a:fontRef idx="minor">
-            <a:schemeClr val="lt1"/>
-          </a:fontRef>
-        </p:style>
-        <p:txBody>
-          <a:bodyPr rtlCol="0" anchor="ctr"/>
-          <a:lstStyle/>
-          <a:p>
-            <a:pPr algn="ctr"/>
-          </a:p>
-        </p:txBody>
-      </p:sp>
-      <p:cxnSp>
-        <p:nvCxnSpPr>
-          <p:cNvPr id="82" name="ledr_c2_k_0" descr="Editable line; source id ledr_c2_k_0"/>
-          <p:cNvCxnSpPr/>
-          <p:nvPr/>
-        </p:nvCxnSpPr>
-        <p:spPr>
-          <a:xfrm>
-            <a:off x="5286374" y="3333749"/>
-            <a:ext cx="31750" cy="31750"/>
-          </a:xfrm>
-          <a:prstGeom prst="line">
-            <a:avLst/>
-          </a:prstGeom>
-          <a:ln w="23681">
-            <a:solidFill>
-              <a:srgbClr val="111A24"/>
-            </a:solidFill>
-          </a:ln>
-          <a:effectLst/>
-        </p:spPr>
-        <p:style>
-          <a:lnRef idx="2">
-            <a:schemeClr val="accent1"/>
-          </a:lnRef>
-          <a:fillRef idx="0">
-            <a:schemeClr val="accent1"/>
-          </a:fillRef>
-          <a:effectRef idx="0">
-            <a:schemeClr val="accent1"/>
-          </a:effectRef>
-          <a:fontRef idx="minor">
-            <a:schemeClr val="tx1"/>
-          </a:fontRef>
-        </p:style>
-      </p:cxnSp>
-      <p:cxnSp>
-        <p:nvCxnSpPr>
-          <p:cNvPr id="83" name="ledr_c2_k_1" descr="Editable line; source id ledr_c2_k_1"/>
-          <p:cNvCxnSpPr/>
-          <p:nvPr/>
-        </p:nvCxnSpPr>
-        <p:spPr>
-          <a:xfrm flipV="1">
-            <a:off x="5318124" y="3294062"/>
-            <a:ext cx="55563" cy="71437"/>
-          </a:xfrm>
-          <a:prstGeom prst="line">
-            <a:avLst/>
-          </a:prstGeom>
-          <a:ln w="23681">
-            <a:solidFill>
-              <a:srgbClr val="111A24"/>
-            </a:solidFill>
-          </a:ln>
-          <a:effectLst/>
-        </p:spPr>
-        <p:style>
-          <a:lnRef idx="2">
-            <a:schemeClr val="accent1"/>
-          </a:lnRef>
-          <a:fillRef idx="0">
-            <a:schemeClr val="accent1"/>
-          </a:fillRef>
-          <a:effectRef idx="0">
-            <a:schemeClr val="accent1"/>
-          </a:effectRef>
-          <a:fontRef idx="minor">
-            <a:schemeClr val="tx1"/>
-          </a:fontRef>
-        </p:style>
-      </p:cxnSp>
-      <p:sp>
-        <p:nvSpPr>
-          <p:cNvPr id="84" name="ledr_x2" descr="Editable text; source id ledr_x2"/>
-          <p:cNvSpPr txBox="1"/>
-          <p:nvPr/>
-        </p:nvSpPr>
-        <p:spPr>
-          <a:xfrm>
-            <a:off x="5508624" y="3190874"/>
-            <a:ext cx="2127249" cy="277812"/>
-          </a:xfrm>
-          <a:prstGeom prst="rect">
-            <a:avLst/>
-          </a:prstGeom>
-          <a:noFill/>
-          <a:effectLst/>
-        </p:spPr>
-        <p:txBody>
-          <a:bodyPr wrap="none" anchor="ctr" tIns="0" rIns="0" bIns="0" lIns="0" anchorCtr="0" vertOverflow="overflow">
-            <a:noAutofit/>
-          </a:bodyPr>
-          <a:lstStyle/>
-          <a:p>
-            <a:pPr algn="l" fontAlgn="base">
-              <a:lnSpc>
-                <a:spcPts val="1468"/>
-              </a:lnSpc>
-              <a:spcBef>
-                <a:spcPts val="0"/>
-              </a:spcBef>
-              <a:spcAft>
-                <a:spcPts val="0"/>
-              </a:spcAft>
-              <a:defRPr sz="1249" b="1" i="0" lang="zh-CN" dirty="0">
-                <a:solidFill>
-                  <a:srgbClr val="27303A"/>
-                </a:solidFill>
-                <a:latin typeface="DejaVu Sans"/>
-                <a:ea typeface="DejaVu Sans"/>
-                <a:cs typeface="DejaVu Sans"/>
-              </a:defRPr>
-            </a:pPr>
-            <a:r>
-              <a:rPr sz="1249" b="1" i="0" lang="zh-CN" dirty="0">
-                <a:solidFill>
-                  <a:srgbClr val="27303A"/>
-                </a:solidFill>
-                <a:latin typeface="DejaVu Sans"/>
-                <a:ea typeface="DejaVu Sans"/>
-                <a:cs typeface="DejaVu Sans"/>
-              </a:rPr>
-              <a:t>Atmosphere</a:t>
-            </a:r>
-          </a:p>
-        </p:txBody>
-      </p:sp>
-      <p:sp>
-        <p:nvSpPr>
-          <p:cNvPr id="85" name="ledr_r3" descr="Editable shape; source id ledr_r3"/>
-          <p:cNvSpPr/>
-          <p:nvPr/>
-        </p:nvSpPr>
-        <p:spPr>
-          <a:xfrm>
-            <a:off x="5143499" y="3651249"/>
-            <a:ext cx="2619374" cy="484187"/>
-          </a:xfrm>
-          <a:prstGeom prst="roundRect">
-            <a:avLst>
-              <a:gd name="adj" fmla="val 9836"/>
-            </a:avLst>
-          </a:prstGeom>
-          <a:solidFill>
-            <a:srgbClr val="F4F7FA"/>
-          </a:solidFill>
-          <a:ln w="12699">
-            <a:solidFill>
-              <a:srgbClr val="AEBBC7"/>
-            </a:solidFill>
-          </a:ln>
-          <a:effectLst/>
-        </p:spPr>
-        <p:style>
-          <a:lnRef idx="1">
-            <a:schemeClr val="accent1"/>
-          </a:lnRef>
-          <a:fillRef idx="3">
-            <a:schemeClr val="accent1"/>
-          </a:fillRef>
-          <a:effectRef idx="0">
-            <a:schemeClr val="accent1"/>
-          </a:effectRef>
-          <a:fontRef idx="minor">
-            <a:schemeClr val="lt1"/>
-          </a:fontRef>
-        </p:style>
-        <p:txBody>
-          <a:bodyPr rtlCol="0" anchor="ctr"/>
-          <a:lstStyle/>
-          <a:p>
-            <a:pPr algn="ctr"/>
-          </a:p>
-        </p:txBody>
-      </p:sp>
-      <p:sp>
-        <p:nvSpPr>
-          <p:cNvPr id="86" name="ledr_c3_b" descr="Editable shape; source id ledr_c3_b"/>
-          <p:cNvSpPr/>
-          <p:nvPr/>
-        </p:nvSpPr>
-        <p:spPr>
-          <a:xfrm>
-            <a:off x="5254624" y="3817937"/>
-            <a:ext cx="142874" cy="142874"/>
-          </a:xfrm>
-          <a:prstGeom prst="rect">
-            <a:avLst/>
-          </a:prstGeom>
-          <a:noFill/>
-          <a:ln w="18216">
-            <a:solidFill>
-              <a:srgbClr val="111A24"/>
-            </a:solidFill>
-          </a:ln>
-          <a:effectLst/>
-        </p:spPr>
-        <p:style>
-          <a:lnRef idx="1">
-            <a:schemeClr val="accent1"/>
-          </a:lnRef>
-          <a:fillRef idx="3">
-            <a:schemeClr val="accent1"/>
-          </a:fillRef>
-          <a:effectRef idx="0">
-            <a:schemeClr val="accent1"/>
-          </a:effectRef>
-          <a:fontRef idx="minor">
-            <a:schemeClr val="lt1"/>
-          </a:fontRef>
-        </p:style>
-        <p:txBody>
-          <a:bodyPr rtlCol="0" anchor="ctr"/>
-          <a:lstStyle/>
-          <a:p>
-            <a:pPr algn="ctr"/>
-          </a:p>
-        </p:txBody>
-      </p:sp>
-      <p:cxnSp>
-        <p:nvCxnSpPr>
-          <p:cNvPr id="87" name="ledr_c3_k_0" descr="Editable line; source id ledr_c3_k_0"/>
-          <p:cNvCxnSpPr/>
-          <p:nvPr/>
-        </p:nvCxnSpPr>
-        <p:spPr>
-          <a:xfrm>
-            <a:off x="5286374" y="3897312"/>
-            <a:ext cx="31750" cy="31750"/>
-          </a:xfrm>
-          <a:prstGeom prst="line">
-            <a:avLst/>
-          </a:prstGeom>
-          <a:ln w="23681">
-            <a:solidFill>
-              <a:srgbClr val="111A24"/>
-            </a:solidFill>
-          </a:ln>
-          <a:effectLst/>
-        </p:spPr>
-        <p:style>
-          <a:lnRef idx="2">
-            <a:schemeClr val="accent1"/>
-          </a:lnRef>
-          <a:fillRef idx="0">
-            <a:schemeClr val="accent1"/>
-          </a:fillRef>
-          <a:effectRef idx="0">
-            <a:schemeClr val="accent1"/>
-          </a:effectRef>
-          <a:fontRef idx="minor">
-            <a:schemeClr val="tx1"/>
-          </a:fontRef>
-        </p:style>
-      </p:cxnSp>
-      <p:cxnSp>
-        <p:nvCxnSpPr>
-          <p:cNvPr id="88" name="ledr_c3_k_1" descr="Editable line; source id ledr_c3_k_1"/>
-          <p:cNvCxnSpPr/>
-          <p:nvPr/>
-        </p:nvCxnSpPr>
-        <p:spPr>
-          <a:xfrm flipV="1">
-            <a:off x="5318124" y="3857624"/>
-            <a:ext cx="55563" cy="71438"/>
-          </a:xfrm>
-          <a:prstGeom prst="line">
-            <a:avLst/>
-          </a:prstGeom>
-          <a:ln w="23681">
-            <a:solidFill>
-              <a:srgbClr val="111A24"/>
-            </a:solidFill>
-          </a:ln>
-          <a:effectLst/>
-        </p:spPr>
-        <p:style>
-          <a:lnRef idx="2">
-            <a:schemeClr val="accent1"/>
-          </a:lnRef>
-          <a:fillRef idx="0">
-            <a:schemeClr val="accent1"/>
-          </a:fillRef>
-          <a:effectRef idx="0">
-            <a:schemeClr val="accent1"/>
-          </a:effectRef>
-          <a:fontRef idx="minor">
-            <a:schemeClr val="tx1"/>
-          </a:fontRef>
-        </p:style>
-      </p:cxnSp>
-      <p:sp>
-        <p:nvSpPr>
-          <p:cNvPr id="89" name="ledr_x3" descr="Editable text; source id ledr_x3"/>
-          <p:cNvSpPr txBox="1"/>
-          <p:nvPr/>
-        </p:nvSpPr>
-        <p:spPr>
-          <a:xfrm>
-            <a:off x="5508624" y="3754437"/>
-            <a:ext cx="2127249" cy="277812"/>
-          </a:xfrm>
-          <a:prstGeom prst="rect">
-            <a:avLst/>
-          </a:prstGeom>
-          <a:noFill/>
-          <a:effectLst/>
-        </p:spPr>
-        <p:txBody>
-          <a:bodyPr wrap="none" anchor="ctr" tIns="0" rIns="0" bIns="0" lIns="0" anchorCtr="0" vertOverflow="overflow">
-            <a:noAutofit/>
-          </a:bodyPr>
-          <a:lstStyle/>
-          <a:p>
-            <a:pPr algn="l" fontAlgn="base">
-              <a:lnSpc>
-                <a:spcPts val="1468"/>
-              </a:lnSpc>
-              <a:spcBef>
-                <a:spcPts val="0"/>
-              </a:spcBef>
-              <a:spcAft>
-                <a:spcPts val="0"/>
-              </a:spcAft>
-              <a:defRPr sz="1249" b="1" i="0" lang="zh-CN" dirty="0">
-                <a:solidFill>
-                  <a:srgbClr val="27303A"/>
-                </a:solidFill>
-                <a:latin typeface="DejaVu Sans"/>
-                <a:ea typeface="DejaVu Sans"/>
-                <a:cs typeface="DejaVu Sans"/>
-              </a:defRPr>
-            </a:pPr>
-            <a:r>
-              <a:rPr sz="1249" b="1" i="0" lang="zh-CN" dirty="0">
-                <a:solidFill>
-                  <a:srgbClr val="27303A"/>
-                </a:solidFill>
-                <a:latin typeface="DejaVu Sans"/>
-                <a:ea typeface="DejaVu Sans"/>
-                <a:cs typeface="DejaVu Sans"/>
-              </a:rPr>
-              <a:t>Crucible and flux</a:t>
-            </a:r>
-          </a:p>
-        </p:txBody>
-      </p:sp>
-      <p:sp>
-        <p:nvSpPr>
-          <p:cNvPr id="90" name="ledr_r4" descr="Editable shape; source id ledr_r4"/>
-          <p:cNvSpPr/>
-          <p:nvPr/>
-        </p:nvSpPr>
-        <p:spPr>
-          <a:xfrm>
-            <a:off x="5143499" y="4214812"/>
-            <a:ext cx="2619374" cy="484187"/>
-          </a:xfrm>
-          <a:prstGeom prst="roundRect">
-            <a:avLst>
-              <a:gd name="adj" fmla="val 9836"/>
-            </a:avLst>
-          </a:prstGeom>
-          <a:solidFill>
-            <a:srgbClr val="F4F7FA"/>
-          </a:solidFill>
-          <a:ln w="12699">
-            <a:solidFill>
-              <a:srgbClr val="AEBBC7"/>
-            </a:solidFill>
-          </a:ln>
-          <a:effectLst/>
-        </p:spPr>
-        <p:style>
-          <a:lnRef idx="1">
-            <a:schemeClr val="accent1"/>
-          </a:lnRef>
-          <a:fillRef idx="3">
-            <a:schemeClr val="accent1"/>
-          </a:fillRef>
-          <a:effectRef idx="0">
-            <a:schemeClr val="accent1"/>
-          </a:effectRef>
-          <a:fontRef idx="minor">
-            <a:schemeClr val="lt1"/>
-          </a:fontRef>
-        </p:style>
-        <p:txBody>
-          <a:bodyPr rtlCol="0" anchor="ctr"/>
-          <a:lstStyle/>
-          <a:p>
-            <a:pPr algn="ctr"/>
-          </a:p>
-        </p:txBody>
-      </p:sp>
-      <p:sp>
-        <p:nvSpPr>
-          <p:cNvPr id="91" name="ledr_c4_b" descr="Editable shape; source id ledr_c4_b"/>
-          <p:cNvSpPr/>
-          <p:nvPr/>
-        </p:nvSpPr>
-        <p:spPr>
-          <a:xfrm>
-            <a:off x="5254624" y="4381499"/>
-            <a:ext cx="142874" cy="142874"/>
-          </a:xfrm>
-          <a:prstGeom prst="rect">
-            <a:avLst/>
-          </a:prstGeom>
-          <a:noFill/>
-          <a:ln w="18216">
-            <a:solidFill>
-              <a:srgbClr val="111A24"/>
-            </a:solidFill>
-          </a:ln>
-          <a:effectLst/>
-        </p:spPr>
-        <p:style>
-          <a:lnRef idx="1">
-            <a:schemeClr val="accent1"/>
-          </a:lnRef>
-          <a:fillRef idx="3">
-            <a:schemeClr val="accent1"/>
-          </a:fillRef>
-          <a:effectRef idx="0">
-            <a:schemeClr val="accent1"/>
-          </a:effectRef>
-          <a:fontRef idx="minor">
-            <a:schemeClr val="lt1"/>
-          </a:fontRef>
-        </p:style>
-        <p:txBody>
-          <a:bodyPr rtlCol="0" anchor="ctr"/>
-          <a:lstStyle/>
-          <a:p>
-            <a:pPr algn="ctr"/>
-          </a:p>
-        </p:txBody>
-      </p:sp>
-      <p:cxnSp>
-        <p:nvCxnSpPr>
-          <p:cNvPr id="92" name="ledr_c4_k_0" descr="Editable line; source id ledr_c4_k_0"/>
-          <p:cNvCxnSpPr/>
-          <p:nvPr/>
-        </p:nvCxnSpPr>
-        <p:spPr>
-          <a:xfrm>
-            <a:off x="5286374" y="4452937"/>
-            <a:ext cx="31750" cy="31750"/>
-          </a:xfrm>
-          <a:prstGeom prst="line">
-            <a:avLst/>
-          </a:prstGeom>
-          <a:ln w="23681">
-            <a:solidFill>
-              <a:srgbClr val="111A24"/>
-            </a:solidFill>
-          </a:ln>
-          <a:effectLst/>
-        </p:spPr>
-        <p:style>
-          <a:lnRef idx="2">
-            <a:schemeClr val="accent1"/>
-          </a:lnRef>
-          <a:fillRef idx="0">
-            <a:schemeClr val="accent1"/>
-          </a:fillRef>
-          <a:effectRef idx="0">
-            <a:schemeClr val="accent1"/>
-          </a:effectRef>
-          <a:fontRef idx="minor">
-            <a:schemeClr val="tx1"/>
-          </a:fontRef>
-        </p:style>
-      </p:cxnSp>
-      <p:cxnSp>
-        <p:nvCxnSpPr>
-          <p:cNvPr id="93" name="ledr_c4_k_1" descr="Editable line; source id ledr_c4_k_1"/>
-          <p:cNvCxnSpPr/>
-          <p:nvPr/>
-        </p:nvCxnSpPr>
-        <p:spPr>
-          <a:xfrm flipV="1">
-            <a:off x="5318124" y="4421187"/>
-            <a:ext cx="55563" cy="63500"/>
-          </a:xfrm>
-          <a:prstGeom prst="line">
-            <a:avLst/>
-          </a:prstGeom>
-          <a:ln w="23681">
-            <a:solidFill>
-              <a:srgbClr val="111A24"/>
-            </a:solidFill>
-          </a:ln>
-          <a:effectLst/>
-        </p:spPr>
-        <p:style>
-          <a:lnRef idx="2">
-            <a:schemeClr val="accent1"/>
-          </a:lnRef>
-          <a:fillRef idx="0">
-            <a:schemeClr val="accent1"/>
-          </a:fillRef>
-          <a:effectRef idx="0">
-            <a:schemeClr val="accent1"/>
-          </a:effectRef>
-          <a:fontRef idx="minor">
-            <a:schemeClr val="tx1"/>
-          </a:fontRef>
-        </p:style>
-      </p:cxnSp>
-      <p:sp>
-        <p:nvSpPr>
-          <p:cNvPr id="94" name="ledr_x4" descr="Editable text; source id ledr_x4"/>
-          <p:cNvSpPr txBox="1"/>
-          <p:nvPr/>
-        </p:nvSpPr>
-        <p:spPr>
-          <a:xfrm>
-            <a:off x="5508624" y="4317999"/>
-            <a:ext cx="2127249" cy="277812"/>
-          </a:xfrm>
-          <a:prstGeom prst="rect">
-            <a:avLst/>
-          </a:prstGeom>
-          <a:noFill/>
-          <a:effectLst/>
-        </p:spPr>
-        <p:txBody>
-          <a:bodyPr wrap="none" anchor="ctr" tIns="0" rIns="0" bIns="0" lIns="0" anchorCtr="0" vertOverflow="overflow">
-            <a:noAutofit/>
-          </a:bodyPr>
-          <a:lstStyle/>
-          <a:p>
-            <a:pPr algn="l" fontAlgn="base">
-              <a:lnSpc>
-                <a:spcPts val="1468"/>
-              </a:lnSpc>
-              <a:spcBef>
-                <a:spcPts val="0"/>
-              </a:spcBef>
-              <a:spcAft>
-                <a:spcPts val="0"/>
-              </a:spcAft>
-              <a:defRPr sz="1249" b="1" i="0" lang="zh-CN" dirty="0">
-                <a:solidFill>
-                  <a:srgbClr val="27303A"/>
-                </a:solidFill>
-                <a:latin typeface="DejaVu Sans"/>
-                <a:ea typeface="DejaVu Sans"/>
-                <a:cs typeface="DejaVu Sans"/>
-              </a:defRPr>
-            </a:pPr>
-            <a:r>
-              <a:rPr sz="1249" b="1" i="0" lang="zh-CN" dirty="0">
-                <a:solidFill>
-                  <a:srgbClr val="27303A"/>
-                </a:solidFill>
-                <a:latin typeface="DejaVu Sans"/>
-                <a:ea typeface="DejaVu Sans"/>
-                <a:cs typeface="DejaVu Sans"/>
-              </a:rPr>
-              <a:t>Cooling and separation</a:t>
-            </a:r>
-          </a:p>
-        </p:txBody>
-      </p:sp>
-      <p:sp>
-        <p:nvSpPr>
-          <p:cNvPr id="95" name="ledr_r5" descr="Editable shape; source id ledr_r5"/>
-          <p:cNvSpPr/>
-          <p:nvPr/>
-        </p:nvSpPr>
-        <p:spPr>
-          <a:xfrm>
-            <a:off x="5143499" y="4770437"/>
-            <a:ext cx="2619374" cy="484187"/>
-          </a:xfrm>
-          <a:prstGeom prst="roundRect">
-            <a:avLst>
-              <a:gd name="adj" fmla="val 9836"/>
-            </a:avLst>
-          </a:prstGeom>
-          <a:solidFill>
-            <a:srgbClr val="F4F7FA"/>
-          </a:solidFill>
-          <a:ln w="12699">
-            <a:solidFill>
-              <a:srgbClr val="AEBBC7"/>
-            </a:solidFill>
-          </a:ln>
-          <a:effectLst/>
-        </p:spPr>
-        <p:style>
-          <a:lnRef idx="1">
-            <a:schemeClr val="accent1"/>
-          </a:lnRef>
-          <a:fillRef idx="3">
-            <a:schemeClr val="accent1"/>
-          </a:fillRef>
-          <a:effectRef idx="0">
-            <a:schemeClr val="accent1"/>
-          </a:effectRef>
-          <a:fontRef idx="minor">
-            <a:schemeClr val="lt1"/>
-          </a:fontRef>
-        </p:style>
-        <p:txBody>
-          <a:bodyPr rtlCol="0" anchor="ctr"/>
-          <a:lstStyle/>
-          <a:p>
-            <a:pPr algn="ctr"/>
-          </a:p>
-        </p:txBody>
-      </p:sp>
-      <p:sp>
-        <p:nvSpPr>
-          <p:cNvPr id="96" name="ledr_c5_b" descr="Editable shape; source id ledr_c5_b"/>
-          <p:cNvSpPr/>
-          <p:nvPr/>
-        </p:nvSpPr>
-        <p:spPr>
-          <a:xfrm>
-            <a:off x="5254624" y="4937124"/>
-            <a:ext cx="142874" cy="142874"/>
-          </a:xfrm>
-          <a:prstGeom prst="rect">
-            <a:avLst/>
-          </a:prstGeom>
-          <a:noFill/>
-          <a:ln w="18216">
-            <a:solidFill>
-              <a:srgbClr val="111A24"/>
-            </a:solidFill>
-          </a:ln>
-          <a:effectLst/>
-        </p:spPr>
-        <p:style>
-          <a:lnRef idx="1">
-            <a:schemeClr val="accent1"/>
-          </a:lnRef>
-          <a:fillRef idx="3">
-            <a:schemeClr val="accent1"/>
-          </a:fillRef>
-          <a:effectRef idx="0">
-            <a:schemeClr val="accent1"/>
-          </a:effectRef>
-          <a:fontRef idx="minor">
-            <a:schemeClr val="lt1"/>
-          </a:fontRef>
-        </p:style>
-        <p:txBody>
-          <a:bodyPr rtlCol="0" anchor="ctr"/>
-          <a:lstStyle/>
-          <a:p>
-            <a:pPr algn="ctr"/>
-          </a:p>
-        </p:txBody>
-      </p:sp>
-      <p:cxnSp>
-        <p:nvCxnSpPr>
-          <p:cNvPr id="97" name="ledr_c5_k_0" descr="Editable line; source id ledr_c5_k_0"/>
-          <p:cNvCxnSpPr/>
-          <p:nvPr/>
-        </p:nvCxnSpPr>
-        <p:spPr>
-          <a:xfrm>
-            <a:off x="5286374" y="5016499"/>
-            <a:ext cx="31750" cy="31750"/>
-          </a:xfrm>
-          <a:prstGeom prst="line">
-            <a:avLst/>
-          </a:prstGeom>
-          <a:ln w="23681">
-            <a:solidFill>
-              <a:srgbClr val="111A24"/>
-            </a:solidFill>
-          </a:ln>
-          <a:effectLst/>
-        </p:spPr>
-        <p:style>
-          <a:lnRef idx="2">
-            <a:schemeClr val="accent1"/>
-          </a:lnRef>
-          <a:fillRef idx="0">
-            <a:schemeClr val="accent1"/>
-          </a:fillRef>
-          <a:effectRef idx="0">
-            <a:schemeClr val="accent1"/>
-          </a:effectRef>
-          <a:fontRef idx="minor">
-            <a:schemeClr val="tx1"/>
-          </a:fontRef>
-        </p:style>
-      </p:cxnSp>
-      <p:cxnSp>
-        <p:nvCxnSpPr>
-          <p:cNvPr id="98" name="ledr_c5_k_1" descr="Editable line; source id ledr_c5_k_1"/>
-          <p:cNvCxnSpPr/>
-          <p:nvPr/>
-        </p:nvCxnSpPr>
-        <p:spPr>
-          <a:xfrm flipV="1">
-            <a:off x="5318124" y="4976812"/>
-            <a:ext cx="55563" cy="71437"/>
-          </a:xfrm>
-          <a:prstGeom prst="line">
-            <a:avLst/>
-          </a:prstGeom>
-          <a:ln w="23681">
-            <a:solidFill>
-              <a:srgbClr val="111A24"/>
-            </a:solidFill>
-          </a:ln>
-          <a:effectLst/>
-        </p:spPr>
-        <p:style>
-          <a:lnRef idx="2">
-            <a:schemeClr val="accent1"/>
-          </a:lnRef>
-          <a:fillRef idx="0">
-            <a:schemeClr val="accent1"/>
-          </a:fillRef>
-          <a:effectRef idx="0">
-            <a:schemeClr val="accent1"/>
-          </a:effectRef>
-          <a:fontRef idx="minor">
-            <a:schemeClr val="tx1"/>
-          </a:fontRef>
-        </p:style>
-      </p:cxnSp>
-      <p:sp>
-        <p:nvSpPr>
-          <p:cNvPr id="99" name="ledr_x5" descr="Editable text; source id ledr_x5"/>
-          <p:cNvSpPr txBox="1"/>
-          <p:nvPr/>
-        </p:nvSpPr>
-        <p:spPr>
-          <a:xfrm>
-            <a:off x="5508624" y="4873624"/>
-            <a:ext cx="2127249" cy="277812"/>
-          </a:xfrm>
-          <a:prstGeom prst="rect">
-            <a:avLst/>
-          </a:prstGeom>
-          <a:noFill/>
-          <a:effectLst/>
-        </p:spPr>
-        <p:txBody>
-          <a:bodyPr wrap="none" anchor="ctr" tIns="0" rIns="0" bIns="0" lIns="0" anchorCtr="0" vertOverflow="overflow">
-            <a:noAutofit/>
-          </a:bodyPr>
-          <a:lstStyle/>
-          <a:p>
-            <a:pPr algn="l" fontAlgn="base">
-              <a:lnSpc>
-                <a:spcPts val="1468"/>
-              </a:lnSpc>
-              <a:spcBef>
-                <a:spcPts val="0"/>
-              </a:spcBef>
-              <a:spcAft>
-                <a:spcPts val="0"/>
-              </a:spcAft>
-              <a:defRPr sz="1249" b="1" i="0" lang="zh-CN" dirty="0">
-                <a:solidFill>
-                  <a:srgbClr val="27303A"/>
-                </a:solidFill>
-                <a:latin typeface="DejaVu Sans"/>
-                <a:ea typeface="DejaVu Sans"/>
-                <a:cs typeface="DejaVu Sans"/>
-              </a:defRPr>
-            </a:pPr>
-            <a:r>
-              <a:rPr sz="1249" b="1" i="0" lang="zh-CN" dirty="0">
-                <a:solidFill>
-                  <a:srgbClr val="27303A"/>
-                </a:solidFill>
-                <a:latin typeface="DejaVu Sans"/>
-                <a:ea typeface="DejaVu Sans"/>
-                <a:cs typeface="DejaVu Sans"/>
-              </a:rPr>
-              <a:t>Characterization</a:t>
-            </a:r>
-          </a:p>
-        </p:txBody>
-      </p:sp>
-      <p:sp>
-        <p:nvSpPr>
-          <p:cNvPr id="100" name="u1" descr="Editable shape; source id u1"/>
-          <p:cNvSpPr/>
-          <p:nvPr/>
-        </p:nvSpPr>
-        <p:spPr>
-          <a:xfrm>
-            <a:off x="8540749" y="1190624"/>
-            <a:ext cx="3254374" cy="888999"/>
-          </a:xfrm>
-          <a:prstGeom prst="roundRect">
-            <a:avLst>
-              <a:gd name="adj" fmla="val 8035"/>
-            </a:avLst>
-          </a:prstGeom>
-          <a:solidFill>
-            <a:srgbClr val="FFFFFF"/>
-          </a:solidFill>
-          <a:ln w="15081">
-            <a:solidFill>
-              <a:srgbClr val="C48A24"/>
-            </a:solidFill>
-          </a:ln>
-          <a:effectLst/>
-        </p:spPr>
-        <p:style>
-          <a:lnRef idx="1">
-            <a:schemeClr val="accent1"/>
-          </a:lnRef>
-          <a:fillRef idx="3">
-            <a:schemeClr val="accent1"/>
-          </a:fillRef>
-          <a:effectRef idx="0">
-            <a:schemeClr val="accent1"/>
-          </a:effectRef>
-          <a:fontRef idx="minor">
-            <a:schemeClr val="lt1"/>
-          </a:fontRef>
-        </p:style>
-        <p:txBody>
-          <a:bodyPr rtlCol="0" anchor="ctr"/>
-          <a:lstStyle/>
-          <a:p>
-            <a:pPr algn="ctr"/>
-          </a:p>
-        </p:txBody>
-      </p:sp>
-      <p:sp>
-        <p:nvSpPr>
-          <p:cNvPr id="101" name="u1_b" descr="Editable shape; source id u1_b"/>
-          <p:cNvSpPr/>
-          <p:nvPr/>
-        </p:nvSpPr>
-        <p:spPr>
-          <a:xfrm>
-            <a:off x="8540749" y="1190624"/>
-            <a:ext cx="63499" cy="888999"/>
-          </a:xfrm>
-          <a:prstGeom prst="roundRect">
-            <a:avLst>
-              <a:gd name="adj" fmla="val 37500"/>
-            </a:avLst>
-          </a:prstGeom>
-          <a:solidFill>
-            <a:srgbClr val="C48A24"/>
-          </a:solidFill>
-          <a:ln>
-            <a:noFill/>
-          </a:ln>
-          <a:effectLst/>
-        </p:spPr>
-        <p:style>
-          <a:lnRef idx="1">
-            <a:schemeClr val="accent1"/>
-          </a:lnRef>
-          <a:fillRef idx="3">
-            <a:schemeClr val="accent1"/>
-          </a:fillRef>
-          <a:effectRef idx="0">
-            <a:schemeClr val="accent1"/>
-          </a:effectRef>
-          <a:fontRef idx="minor">
-            <a:schemeClr val="lt1"/>
-          </a:fontRef>
-        </p:style>
-        <p:txBody>
-          <a:bodyPr rtlCol="0" anchor="ctr"/>
-          <a:lstStyle/>
-          <a:p>
-            <a:pPr algn="ctr"/>
-          </a:p>
-        </p:txBody>
-      </p:sp>
-      <p:cxnSp>
-        <p:nvCxnSpPr>
-          <p:cNvPr id="102" name="u1_g_n_0" descr="Editable line; source id u1_g_n_0"/>
-          <p:cNvCxnSpPr/>
-          <p:nvPr/>
-        </p:nvCxnSpPr>
-        <p:spPr>
-          <a:xfrm>
-            <a:off x="8874124" y="1508124"/>
-            <a:ext cx="0" cy="87313"/>
-          </a:xfrm>
-          <a:prstGeom prst="line">
-            <a:avLst/>
-          </a:prstGeom>
-          <a:ln w="18216">
-            <a:solidFill>
-              <a:srgbClr val="111A24"/>
-            </a:solidFill>
-          </a:ln>
-          <a:effectLst/>
-        </p:spPr>
-        <p:style>
-          <a:lnRef idx="2">
-            <a:schemeClr val="accent1"/>
-          </a:lnRef>
-          <a:fillRef idx="0">
-            <a:schemeClr val="accent1"/>
-          </a:fillRef>
-          <a:effectRef idx="0">
-            <a:schemeClr val="accent1"/>
-          </a:effectRef>
-          <a:fontRef idx="minor">
-            <a:schemeClr val="tx1"/>
-          </a:fontRef>
-        </p:style>
-      </p:cxnSp>
-      <p:cxnSp>
-        <p:nvCxnSpPr>
-          <p:cNvPr id="103" name="u1_g_n_1" descr="Editable line; source id u1_g_n_1"/>
-          <p:cNvCxnSpPr/>
-          <p:nvPr/>
-        </p:nvCxnSpPr>
-        <p:spPr>
-          <a:xfrm flipH="1">
-            <a:off x="8794749" y="1595437"/>
-            <a:ext cx="79375" cy="158750"/>
-          </a:xfrm>
-          <a:prstGeom prst="line">
-            <a:avLst/>
-          </a:prstGeom>
-          <a:ln w="18216">
-            <a:solidFill>
-              <a:srgbClr val="111A24"/>
-            </a:solidFill>
-          </a:ln>
-          <a:effectLst/>
-        </p:spPr>
-        <p:style>
-          <a:lnRef idx="2">
-            <a:schemeClr val="accent1"/>
-          </a:lnRef>
-          <a:fillRef idx="0">
-            <a:schemeClr val="accent1"/>
-          </a:fillRef>
-          <a:effectRef idx="0">
-            <a:schemeClr val="accent1"/>
-          </a:effectRef>
-          <a:fontRef idx="minor">
-            <a:schemeClr val="tx1"/>
-          </a:fontRef>
-        </p:style>
-      </p:cxnSp>
-      <p:cxnSp>
-        <p:nvCxnSpPr>
-          <p:cNvPr id="104" name="u1_g_n_2" descr="Editable line; source id u1_g_n_2"/>
-          <p:cNvCxnSpPr/>
-          <p:nvPr/>
-        </p:nvCxnSpPr>
-        <p:spPr>
-          <a:xfrm>
-            <a:off x="8794749" y="1754187"/>
-            <a:ext cx="222250" cy="0"/>
-          </a:xfrm>
-          <a:prstGeom prst="line">
-            <a:avLst/>
-          </a:prstGeom>
-          <a:ln w="18216">
-            <a:solidFill>
-              <a:srgbClr val="111A24"/>
-            </a:solidFill>
-          </a:ln>
-          <a:effectLst/>
-        </p:spPr>
-        <p:style>
-          <a:lnRef idx="2">
-            <a:schemeClr val="accent1"/>
-          </a:lnRef>
-          <a:fillRef idx="0">
-            <a:schemeClr val="accent1"/>
-          </a:fillRef>
-          <a:effectRef idx="0">
-            <a:schemeClr val="accent1"/>
-          </a:effectRef>
-          <a:fontRef idx="minor">
-            <a:schemeClr val="tx1"/>
-          </a:fontRef>
-        </p:style>
-      </p:cxnSp>
-      <p:cxnSp>
-        <p:nvCxnSpPr>
-          <p:cNvPr id="105" name="u1_g_n_3" descr="Editable line; source id u1_g_n_3"/>
-          <p:cNvCxnSpPr/>
-          <p:nvPr/>
-        </p:nvCxnSpPr>
-        <p:spPr>
-          <a:xfrm flipH="1" flipV="1">
-            <a:off x="8937624" y="1595437"/>
-            <a:ext cx="79375" cy="158750"/>
-          </a:xfrm>
-          <a:prstGeom prst="line">
-            <a:avLst/>
-          </a:prstGeom>
-          <a:ln w="18216">
-            <a:solidFill>
-              <a:srgbClr val="111A24"/>
-            </a:solidFill>
-          </a:ln>
-          <a:effectLst/>
-        </p:spPr>
-        <p:style>
-          <a:lnRef idx="2">
-            <a:schemeClr val="accent1"/>
-          </a:lnRef>
-          <a:fillRef idx="0">
-            <a:schemeClr val="accent1"/>
-          </a:fillRef>
-          <a:effectRef idx="0">
-            <a:schemeClr val="accent1"/>
-          </a:effectRef>
-          <a:fontRef idx="minor">
-            <a:schemeClr val="tx1"/>
-          </a:fontRef>
-        </p:style>
-      </p:cxnSp>
-      <p:cxnSp>
-        <p:nvCxnSpPr>
-          <p:cNvPr id="106" name="u1_g_n_4" descr="Editable line; source id u1_g_n_4"/>
-          <p:cNvCxnSpPr/>
-          <p:nvPr/>
-        </p:nvCxnSpPr>
-        <p:spPr>
-          <a:xfrm flipV="1">
-            <a:off x="8937624" y="1508124"/>
-            <a:ext cx="0" cy="87313"/>
-          </a:xfrm>
-          <a:prstGeom prst="line">
-            <a:avLst/>
-          </a:prstGeom>
-          <a:ln w="18216">
-            <a:solidFill>
-              <a:srgbClr val="111A24"/>
-            </a:solidFill>
-          </a:ln>
-          <a:effectLst/>
-        </p:spPr>
-        <p:style>
-          <a:lnRef idx="2">
-            <a:schemeClr val="accent1"/>
-          </a:lnRef>
-          <a:fillRef idx="0">
-            <a:schemeClr val="accent1"/>
-          </a:fillRef>
-          <a:effectRef idx="0">
-            <a:schemeClr val="accent1"/>
-          </a:effectRef>
-          <a:fontRef idx="minor">
-            <a:schemeClr val="tx1"/>
-          </a:fontRef>
-        </p:style>
-      </p:cxnSp>
-      <p:cxnSp>
-        <p:nvCxnSpPr>
-          <p:cNvPr id="107" name="u1_g_m" descr="Editable line; source id u1_g_m"/>
-          <p:cNvCxnSpPr/>
-          <p:nvPr/>
-        </p:nvCxnSpPr>
-        <p:spPr>
-          <a:xfrm>
-            <a:off x="8858249" y="1508124"/>
-            <a:ext cx="95250" cy="0"/>
-          </a:xfrm>
-          <a:prstGeom prst="line">
-            <a:avLst/>
-          </a:prstGeom>
-          <a:ln w="18216">
-            <a:solidFill>
-              <a:srgbClr val="111A24"/>
-            </a:solidFill>
-          </a:ln>
-          <a:effectLst/>
-        </p:spPr>
-        <p:style>
-          <a:lnRef idx="2">
-            <a:schemeClr val="accent1"/>
-          </a:lnRef>
-          <a:fillRef idx="0">
-            <a:schemeClr val="accent1"/>
-          </a:fillRef>
-          <a:effectRef idx="0">
-            <a:schemeClr val="accent1"/>
-          </a:effectRef>
-          <a:fontRef idx="minor">
-            <a:schemeClr val="tx1"/>
-          </a:fontRef>
-        </p:style>
-      </p:cxnSp>
-      <p:sp>
-        <p:nvSpPr>
-          <p:cNvPr id="108" name="u1_g_d1" descr="Editable shape; source id u1_g_d1"/>
-          <p:cNvSpPr/>
-          <p:nvPr/>
-        </p:nvSpPr>
-        <p:spPr>
-          <a:xfrm>
-            <a:off x="8866187" y="1682749"/>
-            <a:ext cx="23812" cy="23812"/>
-          </a:xfrm>
-          <a:prstGeom prst="ellipse">
-            <a:avLst/>
-          </a:prstGeom>
-          <a:noFill/>
-          <a:ln w="18216">
-            <a:solidFill>
-              <a:srgbClr val="111A24"/>
-            </a:solidFill>
-          </a:ln>
-          <a:effectLst/>
-        </p:spPr>
-        <p:style>
-          <a:lnRef idx="1">
-            <a:schemeClr val="accent1"/>
-          </a:lnRef>
-          <a:fillRef idx="3">
-            <a:schemeClr val="accent1"/>
-          </a:fillRef>
-          <a:effectRef idx="0">
-            <a:schemeClr val="accent1"/>
-          </a:effectRef>
-          <a:fontRef idx="minor">
-            <a:schemeClr val="lt1"/>
-          </a:fontRef>
-        </p:style>
-        <p:txBody>
-          <a:bodyPr rtlCol="0" anchor="ctr"/>
-          <a:lstStyle/>
-          <a:p>
-            <a:pPr algn="ctr"/>
-          </a:p>
-        </p:txBody>
-      </p:sp>
-      <p:sp>
-        <p:nvSpPr>
-          <p:cNvPr id="109" name="u1_g_d2" descr="Editable shape; source id u1_g_d2"/>
-          <p:cNvSpPr/>
-          <p:nvPr/>
-        </p:nvSpPr>
-        <p:spPr>
-          <a:xfrm>
-            <a:off x="8921749" y="1706562"/>
-            <a:ext cx="15874" cy="15874"/>
-          </a:xfrm>
-          <a:prstGeom prst="ellipse">
-            <a:avLst/>
-          </a:prstGeom>
-          <a:noFill/>
-          <a:ln w="18216">
-            <a:solidFill>
-              <a:srgbClr val="111A24"/>
-            </a:solidFill>
-          </a:ln>
-          <a:effectLst/>
-        </p:spPr>
-        <p:style>
-          <a:lnRef idx="1">
-            <a:schemeClr val="accent1"/>
-          </a:lnRef>
-          <a:fillRef idx="3">
-            <a:schemeClr val="accent1"/>
-          </a:fillRef>
-          <a:effectRef idx="0">
-            <a:schemeClr val="accent1"/>
-          </a:effectRef>
-          <a:fontRef idx="minor">
-            <a:schemeClr val="lt1"/>
-          </a:fontRef>
-        </p:style>
-        <p:txBody>
-          <a:bodyPr rtlCol="0" anchor="ctr"/>
-          <a:lstStyle/>
-          <a:p>
-            <a:pPr algn="ctr"/>
-          </a:p>
-        </p:txBody>
-      </p:sp>
-      <p:sp>
-        <p:nvSpPr>
-          <p:cNvPr id="110" name="u1_t" descr="Editable text; source id u1_t"/>
-          <p:cNvSpPr txBox="1"/>
-          <p:nvPr/>
-        </p:nvSpPr>
-        <p:spPr>
-          <a:xfrm>
-            <a:off x="9159874" y="1476374"/>
-            <a:ext cx="2492374" cy="325437"/>
-          </a:xfrm>
-          <a:prstGeom prst="rect">
-            <a:avLst/>
-          </a:prstGeom>
-          <a:noFill/>
-          <a:effectLst/>
-        </p:spPr>
-        <p:txBody>
-          <a:bodyPr wrap="none" anchor="ctr" tIns="0" rIns="0" bIns="0" lIns="0" anchorCtr="0" vertOverflow="overflow">
-            <a:noAutofit/>
-          </a:bodyPr>
-          <a:lstStyle/>
           <a:p>
             <a:pPr algn="l" fontAlgn="base">
               <a:lnSpc>
@@ -8288,9 +6888,9 @@
               <a:spcAft>
                 <a:spcPts val="0"/>
               </a:spcAft>
-              <a:defRPr sz="1499" b="1" i="0" lang="zh-CN" dirty="0">
+              <a:defRPr sz="1499" b="0" i="0" lang="zh-CN" dirty="0">
                 <a:solidFill>
-                  <a:srgbClr val="7A5410"/>
+                  <a:srgbClr val="27303A"/>
                 </a:solidFill>
                 <a:latin typeface="DejaVu Sans"/>
                 <a:ea typeface="DejaVu Sans"/>
@@ -8298,41 +6898,41 @@
               </a:defRPr>
             </a:pPr>
             <a:r>
-              <a:rPr sz="1499" b="1" i="0" lang="zh-CN" dirty="0">
+              <a:rPr sz="1499" b="0" i="0" lang="zh-CN" dirty="0">
                 <a:solidFill>
-                  <a:srgbClr val="7A5410"/>
+                  <a:srgbClr val="27303A"/>
                 </a:solidFill>
                 <a:latin typeface="DejaVu Sans"/>
                 <a:ea typeface="DejaVu Sans"/>
                 <a:cs typeface="DejaVu Sans"/>
               </a:rPr>
-              <a:t>Direct Reproduction</a:t>
+              <a:t>materials</a:t>
             </a:r>
           </a:p>
         </p:txBody>
       </p:sp>
       <p:sp>
         <p:nvSpPr>
-          <p:cNvPr id="111" name="u2" descr="Editable shape; source id u2"/>
+          <p:cNvPr id="75" name="ledr_r1" descr="Editable shape; source id ledr_r1"/>
           <p:cNvSpPr/>
           <p:nvPr/>
         </p:nvSpPr>
         <p:spPr>
           <a:xfrm>
-            <a:off x="8540749" y="2238374"/>
-            <a:ext cx="3254374" cy="888999"/>
+            <a:off x="4937124" y="2849562"/>
+            <a:ext cx="2651124" cy="674687"/>
           </a:xfrm>
           <a:prstGeom prst="roundRect">
             <a:avLst>
-              <a:gd name="adj" fmla="val 8035"/>
+              <a:gd name="adj" fmla="val 7058"/>
             </a:avLst>
           </a:prstGeom>
           <a:solidFill>
-            <a:srgbClr val="FFFFFF"/>
+            <a:srgbClr val="F4F7FA"/>
           </a:solidFill>
-          <a:ln w="15081">
+          <a:ln w="12699">
             <a:solidFill>
-              <a:srgbClr val="C48A24"/>
+              <a:srgbClr val="AEBBC7"/>
             </a:solidFill>
           </a:ln>
           <a:effectLst/>
@@ -8361,64 +6961,19 @@
       </p:sp>
       <p:sp>
         <p:nvSpPr>
-          <p:cNvPr id="112" name="u2_b" descr="Editable shape; source id u2_b"/>
+          <p:cNvPr id="76" name="ledr_c1_b" descr="Editable shape; source id ledr_c1_b"/>
           <p:cNvSpPr/>
           <p:nvPr/>
         </p:nvSpPr>
         <p:spPr>
           <a:xfrm>
-            <a:off x="8540749" y="2238374"/>
-            <a:ext cx="63499" cy="888999"/>
-          </a:xfrm>
-          <a:prstGeom prst="roundRect">
-            <a:avLst>
-              <a:gd name="adj" fmla="val 37500"/>
-            </a:avLst>
-          </a:prstGeom>
-          <a:solidFill>
-            <a:srgbClr val="C48A24"/>
-          </a:solidFill>
-          <a:ln>
-            <a:noFill/>
-          </a:ln>
-          <a:effectLst/>
-        </p:spPr>
-        <p:style>
-          <a:lnRef idx="1">
-            <a:schemeClr val="accent1"/>
-          </a:lnRef>
-          <a:fillRef idx="3">
-            <a:schemeClr val="accent1"/>
-          </a:fillRef>
-          <a:effectRef idx="0">
-            <a:schemeClr val="accent1"/>
-          </a:effectRef>
-          <a:fontRef idx="minor">
-            <a:schemeClr val="lt1"/>
-          </a:fontRef>
-        </p:style>
-        <p:txBody>
-          <a:bodyPr rtlCol="0" anchor="ctr"/>
-          <a:lstStyle/>
-          <a:p>
-            <a:pPr algn="ctr"/>
-          </a:p>
-        </p:txBody>
-      </p:sp>
-      <p:cxnSp>
-        <p:nvCxnSpPr>
-          <p:cNvPr id="113" name="u2_g_o_0" descr="Editable line; source id u2_g_o_0"/>
-          <p:cNvCxnSpPr/>
-          <p:nvPr/>
-        </p:nvCxnSpPr>
-        <p:spPr>
-          <a:xfrm>
-            <a:off x="8905874" y="2547937"/>
-            <a:ext cx="127000" cy="87312"/>
-          </a:xfrm>
-          <a:prstGeom prst="line">
-            <a:avLst/>
-          </a:prstGeom>
+            <a:off x="5048249" y="3127374"/>
+            <a:ext cx="126999" cy="126999"/>
+          </a:xfrm>
+          <a:prstGeom prst="rect">
+            <a:avLst/>
+          </a:prstGeom>
+          <a:noFill/>
           <a:ln w="18216">
             <a:solidFill>
               <a:srgbClr val="111A24"/>
@@ -8427,6 +6982,49 @@
           <a:effectLst/>
         </p:spPr>
         <p:style>
+          <a:lnRef idx="1">
+            <a:schemeClr val="accent1"/>
+          </a:lnRef>
+          <a:fillRef idx="3">
+            <a:schemeClr val="accent1"/>
+          </a:fillRef>
+          <a:effectRef idx="0">
+            <a:schemeClr val="accent1"/>
+          </a:effectRef>
+          <a:fontRef idx="minor">
+            <a:schemeClr val="lt1"/>
+          </a:fontRef>
+        </p:style>
+        <p:txBody>
+          <a:bodyPr rtlCol="0" anchor="ctr"/>
+          <a:lstStyle/>
+          <a:p>
+            <a:pPr algn="ctr"/>
+          </a:p>
+        </p:txBody>
+      </p:sp>
+      <p:cxnSp>
+        <p:nvCxnSpPr>
+          <p:cNvPr id="77" name="ledr_c1_k_0" descr="Editable line; source id ledr_c1_k_0"/>
+          <p:cNvCxnSpPr/>
+          <p:nvPr/>
+        </p:nvCxnSpPr>
+        <p:spPr>
+          <a:xfrm>
+            <a:off x="5072062" y="3190874"/>
+            <a:ext cx="23812" cy="31750"/>
+          </a:xfrm>
+          <a:prstGeom prst="line">
+            <a:avLst/>
+          </a:prstGeom>
+          <a:ln w="23681">
+            <a:solidFill>
+              <a:srgbClr val="111A24"/>
+            </a:solidFill>
+          </a:ln>
+          <a:effectLst/>
+        </p:spPr>
+        <p:style>
           <a:lnRef idx="2">
             <a:schemeClr val="accent1"/>
           </a:lnRef>
@@ -8443,19 +7041,19 @@
       </p:cxnSp>
       <p:cxnSp>
         <p:nvCxnSpPr>
-          <p:cNvPr id="114" name="u2_g_o_1" descr="Editable line; source id u2_g_o_1"/>
+          <p:cNvPr id="78" name="ledr_c1_k_1" descr="Editable line; source id ledr_c1_k_1"/>
           <p:cNvCxnSpPr/>
           <p:nvPr/>
         </p:nvCxnSpPr>
         <p:spPr>
-          <a:xfrm flipH="1">
-            <a:off x="8977312" y="2635249"/>
-            <a:ext cx="55562" cy="166688"/>
+          <a:xfrm flipV="1">
+            <a:off x="5095874" y="3159124"/>
+            <a:ext cx="47625" cy="63500"/>
           </a:xfrm>
           <a:prstGeom prst="line">
             <a:avLst/>
           </a:prstGeom>
-          <a:ln w="18216">
+          <a:ln w="23681">
             <a:solidFill>
               <a:srgbClr val="111A24"/>
             </a:solidFill>
@@ -8477,670 +7075,16 @@
           </a:fontRef>
         </p:style>
       </p:cxnSp>
-      <p:cxnSp>
-        <p:nvCxnSpPr>
-          <p:cNvPr id="115" name="u2_g_o_2" descr="Editable line; source id u2_g_o_2"/>
-          <p:cNvCxnSpPr/>
-          <p:nvPr/>
-        </p:nvCxnSpPr>
-        <p:spPr>
-          <a:xfrm flipH="1">
-            <a:off x="8834437" y="2801937"/>
-            <a:ext cx="142875" cy="0"/>
-          </a:xfrm>
-          <a:prstGeom prst="line">
-            <a:avLst/>
-          </a:prstGeom>
-          <a:ln w="18216">
-            <a:solidFill>
-              <a:srgbClr val="111A24"/>
-            </a:solidFill>
-          </a:ln>
-          <a:effectLst/>
-        </p:spPr>
-        <p:style>
-          <a:lnRef idx="2">
-            <a:schemeClr val="accent1"/>
-          </a:lnRef>
-          <a:fillRef idx="0">
-            <a:schemeClr val="accent1"/>
-          </a:fillRef>
-          <a:effectRef idx="0">
-            <a:schemeClr val="accent1"/>
-          </a:effectRef>
-          <a:fontRef idx="minor">
-            <a:schemeClr val="tx1"/>
-          </a:fontRef>
-        </p:style>
-      </p:cxnSp>
-      <p:cxnSp>
-        <p:nvCxnSpPr>
-          <p:cNvPr id="116" name="u2_g_o_3" descr="Editable line; source id u2_g_o_3"/>
-          <p:cNvCxnSpPr/>
-          <p:nvPr/>
-        </p:nvCxnSpPr>
-        <p:spPr>
-          <a:xfrm flipH="1" flipV="1">
-            <a:off x="8778874" y="2635249"/>
-            <a:ext cx="55563" cy="166688"/>
-          </a:xfrm>
-          <a:prstGeom prst="line">
-            <a:avLst/>
-          </a:prstGeom>
-          <a:ln w="18216">
-            <a:solidFill>
-              <a:srgbClr val="111A24"/>
-            </a:solidFill>
-          </a:ln>
-          <a:effectLst/>
-        </p:spPr>
-        <p:style>
-          <a:lnRef idx="2">
-            <a:schemeClr val="accent1"/>
-          </a:lnRef>
-          <a:fillRef idx="0">
-            <a:schemeClr val="accent1"/>
-          </a:fillRef>
-          <a:effectRef idx="0">
-            <a:schemeClr val="accent1"/>
-          </a:effectRef>
-          <a:fontRef idx="minor">
-            <a:schemeClr val="tx1"/>
-          </a:fontRef>
-        </p:style>
-      </p:cxnSp>
-      <p:cxnSp>
-        <p:nvCxnSpPr>
-          <p:cNvPr id="117" name="u2_g_o_4" descr="Editable line; source id u2_g_o_4"/>
-          <p:cNvCxnSpPr/>
-          <p:nvPr/>
-        </p:nvCxnSpPr>
-        <p:spPr>
-          <a:xfrm flipV="1">
-            <a:off x="8778874" y="2547937"/>
-            <a:ext cx="127000" cy="87312"/>
-          </a:xfrm>
-          <a:prstGeom prst="line">
-            <a:avLst/>
-          </a:prstGeom>
-          <a:ln w="18216">
-            <a:solidFill>
-              <a:srgbClr val="111A24"/>
-            </a:solidFill>
-          </a:ln>
-          <a:effectLst/>
-        </p:spPr>
-        <p:style>
-          <a:lnRef idx="2">
-            <a:schemeClr val="accent1"/>
-          </a:lnRef>
-          <a:fillRef idx="0">
-            <a:schemeClr val="accent1"/>
-          </a:fillRef>
-          <a:effectRef idx="0">
-            <a:schemeClr val="accent1"/>
-          </a:effectRef>
-          <a:fontRef idx="minor">
-            <a:schemeClr val="tx1"/>
-          </a:fontRef>
-        </p:style>
-      </p:cxnSp>
-      <p:cxnSp>
-        <p:nvCxnSpPr>
-          <p:cNvPr id="118" name="u2_g_a" descr="Editable line; source id u2_g_a"/>
-          <p:cNvCxnSpPr/>
-          <p:nvPr/>
-        </p:nvCxnSpPr>
-        <p:spPr>
-          <a:xfrm>
-            <a:off x="8905874" y="2547937"/>
-            <a:ext cx="0" cy="254000"/>
-          </a:xfrm>
-          <a:prstGeom prst="line">
-            <a:avLst/>
-          </a:prstGeom>
-          <a:ln w="18216">
-            <a:solidFill>
-              <a:srgbClr val="111A24"/>
-            </a:solidFill>
-          </a:ln>
-          <a:effectLst/>
-        </p:spPr>
-        <p:style>
-          <a:lnRef idx="2">
-            <a:schemeClr val="accent1"/>
-          </a:lnRef>
-          <a:fillRef idx="0">
-            <a:schemeClr val="accent1"/>
-          </a:fillRef>
-          <a:effectRef idx="0">
-            <a:schemeClr val="accent1"/>
-          </a:effectRef>
-          <a:fontRef idx="minor">
-            <a:schemeClr val="tx1"/>
-          </a:fontRef>
-        </p:style>
-      </p:cxnSp>
-      <p:cxnSp>
-        <p:nvCxnSpPr>
-          <p:cNvPr id="119" name="u2_g_b" descr="Editable line; source id u2_g_b"/>
-          <p:cNvCxnSpPr/>
-          <p:nvPr/>
-        </p:nvCxnSpPr>
-        <p:spPr>
-          <a:xfrm>
-            <a:off x="8778874" y="2635249"/>
-            <a:ext cx="254000" cy="0"/>
-          </a:xfrm>
-          <a:prstGeom prst="line">
-            <a:avLst/>
-          </a:prstGeom>
-          <a:ln w="18216">
-            <a:solidFill>
-              <a:srgbClr val="111A24"/>
-            </a:solidFill>
-          </a:ln>
-          <a:effectLst/>
-        </p:spPr>
-        <p:style>
-          <a:lnRef idx="2">
-            <a:schemeClr val="accent1"/>
-          </a:lnRef>
-          <a:fillRef idx="0">
-            <a:schemeClr val="accent1"/>
-          </a:fillRef>
-          <a:effectRef idx="0">
-            <a:schemeClr val="accent1"/>
-          </a:effectRef>
-          <a:fontRef idx="minor">
-            <a:schemeClr val="tx1"/>
-          </a:fontRef>
-        </p:style>
-      </p:cxnSp>
-      <p:sp>
-        <p:nvSpPr>
-          <p:cNvPr id="120" name="u2_t" descr="Editable text; source id u2_t"/>
+      <p:sp>
+        <p:nvSpPr>
+          <p:cNvPr id="79" name="ledr_x1" descr="Editable text; source id ledr_x1"/>
           <p:cNvSpPr txBox="1"/>
           <p:nvPr/>
         </p:nvSpPr>
         <p:spPr>
           <a:xfrm>
-            <a:off x="9159874" y="2524124"/>
-            <a:ext cx="2492374" cy="325437"/>
-          </a:xfrm>
-          <a:prstGeom prst="rect">
-            <a:avLst/>
-          </a:prstGeom>
-          <a:noFill/>
-          <a:effectLst/>
-        </p:spPr>
-        <p:txBody>
-          <a:bodyPr wrap="none" anchor="ctr" tIns="0" rIns="0" bIns="0" lIns="0" anchorCtr="0" vertOverflow="overflow">
-            <a:noAutofit/>
-          </a:bodyPr>
-          <a:lstStyle/>
-          <a:p>
-            <a:pPr algn="l" fontAlgn="base">
-              <a:lnSpc>
-                <a:spcPts val="1593"/>
-              </a:lnSpc>
-              <a:spcBef>
-                <a:spcPts val="0"/>
-              </a:spcBef>
-              <a:spcAft>
-                <a:spcPts val="0"/>
-              </a:spcAft>
-              <a:defRPr sz="1355" b="1" i="0" lang="zh-CN" dirty="0">
-                <a:solidFill>
-                  <a:srgbClr val="7A5410"/>
-                </a:solidFill>
-                <a:latin typeface="DejaVu Sans"/>
-                <a:ea typeface="DejaVu Sans"/>
-                <a:cs typeface="DejaVu Sans"/>
-              </a:defRPr>
-            </a:pPr>
-            <a:r>
-              <a:rPr sz="1355" b="1" i="0" lang="zh-CN" dirty="0">
-                <a:solidFill>
-                  <a:srgbClr val="7A5410"/>
-                </a:solidFill>
-                <a:latin typeface="DejaVu Sans"/>
-                <a:ea typeface="DejaVu Sans"/>
-                <a:cs typeface="DejaVu Sans"/>
-              </a:rPr>
-              <a:t>Family Phase Comparison</a:t>
-            </a:r>
-          </a:p>
-        </p:txBody>
-      </p:sp>
-      <p:sp>
-        <p:nvSpPr>
-          <p:cNvPr id="121" name="u3" descr="Editable shape; source id u3"/>
-          <p:cNvSpPr/>
-          <p:nvPr/>
-        </p:nvSpPr>
-        <p:spPr>
-          <a:xfrm>
-            <a:off x="8540749" y="3286124"/>
-            <a:ext cx="3254374" cy="888999"/>
-          </a:xfrm>
-          <a:prstGeom prst="roundRect">
-            <a:avLst>
-              <a:gd name="adj" fmla="val 8035"/>
-            </a:avLst>
-          </a:prstGeom>
-          <a:solidFill>
-            <a:srgbClr val="FFFFFF"/>
-          </a:solidFill>
-          <a:ln w="15081">
-            <a:solidFill>
-              <a:srgbClr val="C48A24"/>
-            </a:solidFill>
-          </a:ln>
-          <a:effectLst/>
-        </p:spPr>
-        <p:style>
-          <a:lnRef idx="1">
-            <a:schemeClr val="accent1"/>
-          </a:lnRef>
-          <a:fillRef idx="3">
-            <a:schemeClr val="accent1"/>
-          </a:fillRef>
-          <a:effectRef idx="0">
-            <a:schemeClr val="accent1"/>
-          </a:effectRef>
-          <a:fontRef idx="minor">
-            <a:schemeClr val="lt1"/>
-          </a:fontRef>
-        </p:style>
-        <p:txBody>
-          <a:bodyPr rtlCol="0" anchor="ctr"/>
-          <a:lstStyle/>
-          <a:p>
-            <a:pPr algn="ctr"/>
-          </a:p>
-        </p:txBody>
-      </p:sp>
-      <p:sp>
-        <p:nvSpPr>
-          <p:cNvPr id="122" name="u3_b" descr="Editable shape; source id u3_b"/>
-          <p:cNvSpPr/>
-          <p:nvPr/>
-        </p:nvSpPr>
-        <p:spPr>
-          <a:xfrm>
-            <a:off x="8540749" y="3286124"/>
-            <a:ext cx="63499" cy="888999"/>
-          </a:xfrm>
-          <a:prstGeom prst="roundRect">
-            <a:avLst>
-              <a:gd name="adj" fmla="val 37500"/>
-            </a:avLst>
-          </a:prstGeom>
-          <a:solidFill>
-            <a:srgbClr val="C48A24"/>
-          </a:solidFill>
-          <a:ln>
-            <a:noFill/>
-          </a:ln>
-          <a:effectLst/>
-        </p:spPr>
-        <p:style>
-          <a:lnRef idx="1">
-            <a:schemeClr val="accent1"/>
-          </a:lnRef>
-          <a:fillRef idx="3">
-            <a:schemeClr val="accent1"/>
-          </a:fillRef>
-          <a:effectRef idx="0">
-            <a:schemeClr val="accent1"/>
-          </a:effectRef>
-          <a:fontRef idx="minor">
-            <a:schemeClr val="lt1"/>
-          </a:fontRef>
-        </p:style>
-        <p:txBody>
-          <a:bodyPr rtlCol="0" anchor="ctr"/>
-          <a:lstStyle/>
-          <a:p>
-            <a:pPr algn="ctr"/>
-          </a:p>
-        </p:txBody>
-      </p:sp>
-      <p:cxnSp>
-        <p:nvCxnSpPr>
-          <p:cNvPr id="123" name="u3_g_p" descr="Editable line; source id u3_g_p"/>
-          <p:cNvCxnSpPr/>
-          <p:nvPr/>
-        </p:nvCxnSpPr>
-        <p:spPr>
-          <a:xfrm>
-            <a:off x="8905874" y="3619499"/>
-            <a:ext cx="0" cy="198438"/>
-          </a:xfrm>
-          <a:prstGeom prst="line">
-            <a:avLst/>
-          </a:prstGeom>
-          <a:ln w="18216">
-            <a:solidFill>
-              <a:srgbClr val="111A24"/>
-            </a:solidFill>
-          </a:ln>
-          <a:effectLst/>
-        </p:spPr>
-        <p:style>
-          <a:lnRef idx="2">
-            <a:schemeClr val="accent1"/>
-          </a:lnRef>
-          <a:fillRef idx="0">
-            <a:schemeClr val="accent1"/>
-          </a:fillRef>
-          <a:effectRef idx="0">
-            <a:schemeClr val="accent1"/>
-          </a:effectRef>
-          <a:fontRef idx="minor">
-            <a:schemeClr val="tx1"/>
-          </a:fontRef>
-        </p:style>
-      </p:cxnSp>
-      <p:cxnSp>
-        <p:nvCxnSpPr>
-          <p:cNvPr id="124" name="u3_g_b" descr="Editable line; source id u3_g_b"/>
-          <p:cNvCxnSpPr/>
-          <p:nvPr/>
-        </p:nvCxnSpPr>
-        <p:spPr>
-          <a:xfrm>
-            <a:off x="8794749" y="3659187"/>
-            <a:ext cx="222250" cy="0"/>
-          </a:xfrm>
-          <a:prstGeom prst="line">
-            <a:avLst/>
-          </a:prstGeom>
-          <a:ln w="18216">
-            <a:solidFill>
-              <a:srgbClr val="111A24"/>
-            </a:solidFill>
-          </a:ln>
-          <a:effectLst/>
-        </p:spPr>
-        <p:style>
-          <a:lnRef idx="2">
-            <a:schemeClr val="accent1"/>
-          </a:lnRef>
-          <a:fillRef idx="0">
-            <a:schemeClr val="accent1"/>
-          </a:fillRef>
-          <a:effectRef idx="0">
-            <a:schemeClr val="accent1"/>
-          </a:effectRef>
-          <a:fontRef idx="minor">
-            <a:schemeClr val="tx1"/>
-          </a:fontRef>
-        </p:style>
-      </p:cxnSp>
-      <p:cxnSp>
-        <p:nvCxnSpPr>
-          <p:cNvPr id="125" name="u3_g_l_0" descr="Editable line; source id u3_g_l_0"/>
-          <p:cNvCxnSpPr/>
-          <p:nvPr/>
-        </p:nvCxnSpPr>
-        <p:spPr>
-          <a:xfrm flipH="1">
-            <a:off x="8762999" y="3659187"/>
-            <a:ext cx="31750" cy="71437"/>
-          </a:xfrm>
-          <a:prstGeom prst="line">
-            <a:avLst/>
-          </a:prstGeom>
-          <a:ln w="18216">
-            <a:solidFill>
-              <a:srgbClr val="111A24"/>
-            </a:solidFill>
-          </a:ln>
-          <a:effectLst/>
-        </p:spPr>
-        <p:style>
-          <a:lnRef idx="2">
-            <a:schemeClr val="accent1"/>
-          </a:lnRef>
-          <a:fillRef idx="0">
-            <a:schemeClr val="accent1"/>
-          </a:fillRef>
-          <a:effectRef idx="0">
-            <a:schemeClr val="accent1"/>
-          </a:effectRef>
-          <a:fontRef idx="minor">
-            <a:schemeClr val="tx1"/>
-          </a:fontRef>
-        </p:style>
-      </p:cxnSp>
-      <p:cxnSp>
-        <p:nvCxnSpPr>
-          <p:cNvPr id="126" name="u3_g_l_1" descr="Editable line; source id u3_g_l_1"/>
-          <p:cNvCxnSpPr/>
-          <p:nvPr/>
-        </p:nvCxnSpPr>
-        <p:spPr>
-          <a:xfrm>
-            <a:off x="8762999" y="3730624"/>
-            <a:ext cx="63500" cy="0"/>
-          </a:xfrm>
-          <a:prstGeom prst="line">
-            <a:avLst/>
-          </a:prstGeom>
-          <a:ln w="18216">
-            <a:solidFill>
-              <a:srgbClr val="111A24"/>
-            </a:solidFill>
-          </a:ln>
-          <a:effectLst/>
-        </p:spPr>
-        <p:style>
-          <a:lnRef idx="2">
-            <a:schemeClr val="accent1"/>
-          </a:lnRef>
-          <a:fillRef idx="0">
-            <a:schemeClr val="accent1"/>
-          </a:fillRef>
-          <a:effectRef idx="0">
-            <a:schemeClr val="accent1"/>
-          </a:effectRef>
-          <a:fontRef idx="minor">
-            <a:schemeClr val="tx1"/>
-          </a:fontRef>
-        </p:style>
-      </p:cxnSp>
-      <p:cxnSp>
-        <p:nvCxnSpPr>
-          <p:cNvPr id="127" name="u3_g_l_2" descr="Editable line; source id u3_g_l_2"/>
-          <p:cNvCxnSpPr/>
-          <p:nvPr/>
-        </p:nvCxnSpPr>
-        <p:spPr>
-          <a:xfrm flipH="1" flipV="1">
-            <a:off x="8794749" y="3659187"/>
-            <a:ext cx="31750" cy="71437"/>
-          </a:xfrm>
-          <a:prstGeom prst="line">
-            <a:avLst/>
-          </a:prstGeom>
-          <a:ln w="18216">
-            <a:solidFill>
-              <a:srgbClr val="111A24"/>
-            </a:solidFill>
-          </a:ln>
-          <a:effectLst/>
-        </p:spPr>
-        <p:style>
-          <a:lnRef idx="2">
-            <a:schemeClr val="accent1"/>
-          </a:lnRef>
-          <a:fillRef idx="0">
-            <a:schemeClr val="accent1"/>
-          </a:fillRef>
-          <a:effectRef idx="0">
-            <a:schemeClr val="accent1"/>
-          </a:effectRef>
-          <a:fontRef idx="minor">
-            <a:schemeClr val="tx1"/>
-          </a:fontRef>
-        </p:style>
-      </p:cxnSp>
-      <p:cxnSp>
-        <p:nvCxnSpPr>
-          <p:cNvPr id="128" name="u3_g_r_0" descr="Editable line; source id u3_g_r_0"/>
-          <p:cNvCxnSpPr/>
-          <p:nvPr/>
-        </p:nvCxnSpPr>
-        <p:spPr>
-          <a:xfrm flipH="1">
-            <a:off x="8985249" y="3659187"/>
-            <a:ext cx="31750" cy="71437"/>
-          </a:xfrm>
-          <a:prstGeom prst="line">
-            <a:avLst/>
-          </a:prstGeom>
-          <a:ln w="18216">
-            <a:solidFill>
-              <a:srgbClr val="111A24"/>
-            </a:solidFill>
-          </a:ln>
-          <a:effectLst/>
-        </p:spPr>
-        <p:style>
-          <a:lnRef idx="2">
-            <a:schemeClr val="accent1"/>
-          </a:lnRef>
-          <a:fillRef idx="0">
-            <a:schemeClr val="accent1"/>
-          </a:fillRef>
-          <a:effectRef idx="0">
-            <a:schemeClr val="accent1"/>
-          </a:effectRef>
-          <a:fontRef idx="minor">
-            <a:schemeClr val="tx1"/>
-          </a:fontRef>
-        </p:style>
-      </p:cxnSp>
-      <p:cxnSp>
-        <p:nvCxnSpPr>
-          <p:cNvPr id="129" name="u3_g_r_1" descr="Editable line; source id u3_g_r_1"/>
-          <p:cNvCxnSpPr/>
-          <p:nvPr/>
-        </p:nvCxnSpPr>
-        <p:spPr>
-          <a:xfrm>
-            <a:off x="8985249" y="3730624"/>
-            <a:ext cx="63500" cy="0"/>
-          </a:xfrm>
-          <a:prstGeom prst="line">
-            <a:avLst/>
-          </a:prstGeom>
-          <a:ln w="18216">
-            <a:solidFill>
-              <a:srgbClr val="111A24"/>
-            </a:solidFill>
-          </a:ln>
-          <a:effectLst/>
-        </p:spPr>
-        <p:style>
-          <a:lnRef idx="2">
-            <a:schemeClr val="accent1"/>
-          </a:lnRef>
-          <a:fillRef idx="0">
-            <a:schemeClr val="accent1"/>
-          </a:fillRef>
-          <a:effectRef idx="0">
-            <a:schemeClr val="accent1"/>
-          </a:effectRef>
-          <a:fontRef idx="minor">
-            <a:schemeClr val="tx1"/>
-          </a:fontRef>
-        </p:style>
-      </p:cxnSp>
-      <p:cxnSp>
-        <p:nvCxnSpPr>
-          <p:cNvPr id="130" name="u3_g_r_2" descr="Editable line; source id u3_g_r_2"/>
-          <p:cNvCxnSpPr/>
-          <p:nvPr/>
-        </p:nvCxnSpPr>
-        <p:spPr>
-          <a:xfrm flipH="1" flipV="1">
-            <a:off x="9016999" y="3659187"/>
-            <a:ext cx="31750" cy="71437"/>
-          </a:xfrm>
-          <a:prstGeom prst="line">
-            <a:avLst/>
-          </a:prstGeom>
-          <a:ln w="18216">
-            <a:solidFill>
-              <a:srgbClr val="111A24"/>
-            </a:solidFill>
-          </a:ln>
-          <a:effectLst/>
-        </p:spPr>
-        <p:style>
-          <a:lnRef idx="2">
-            <a:schemeClr val="accent1"/>
-          </a:lnRef>
-          <a:fillRef idx="0">
-            <a:schemeClr val="accent1"/>
-          </a:fillRef>
-          <a:effectRef idx="0">
-            <a:schemeClr val="accent1"/>
-          </a:effectRef>
-          <a:fontRef idx="minor">
-            <a:schemeClr val="tx1"/>
-          </a:fontRef>
-        </p:style>
-      </p:cxnSp>
-      <p:cxnSp>
-        <p:nvCxnSpPr>
-          <p:cNvPr id="131" name="u3_g_f" descr="Editable line; source id u3_g_f"/>
-          <p:cNvCxnSpPr/>
-          <p:nvPr/>
-        </p:nvCxnSpPr>
-        <p:spPr>
-          <a:xfrm>
-            <a:off x="8842374" y="3841749"/>
-            <a:ext cx="127000" cy="0"/>
-          </a:xfrm>
-          <a:prstGeom prst="line">
-            <a:avLst/>
-          </a:prstGeom>
-          <a:ln w="18216">
-            <a:solidFill>
-              <a:srgbClr val="111A24"/>
-            </a:solidFill>
-          </a:ln>
-          <a:effectLst/>
-        </p:spPr>
-        <p:style>
-          <a:lnRef idx="2">
-            <a:schemeClr val="accent1"/>
-          </a:lnRef>
-          <a:fillRef idx="0">
-            <a:schemeClr val="accent1"/>
-          </a:fillRef>
-          <a:effectRef idx="0">
-            <a:schemeClr val="accent1"/>
-          </a:effectRef>
-          <a:fontRef idx="minor">
-            <a:schemeClr val="tx1"/>
-          </a:fontRef>
-        </p:style>
-      </p:cxnSp>
-      <p:sp>
-        <p:nvSpPr>
-          <p:cNvPr id="132" name="u3_t" descr="Editable text; source id u3_t"/>
-          <p:cNvSpPr txBox="1"/>
-          <p:nvPr/>
-        </p:nvSpPr>
-        <p:spPr>
-          <a:xfrm>
-            <a:off x="9159874" y="3571874"/>
-            <a:ext cx="2492374" cy="325437"/>
+            <a:off x="5278437" y="2873374"/>
+            <a:ext cx="2182812" cy="627062"/>
           </a:xfrm>
           <a:prstGeom prst="rect">
             <a:avLst/>
@@ -9164,7 +7108,1373 @@
               <a:spcAft>
                 <a:spcPts val="0"/>
               </a:spcAft>
-              <a:defRPr sz="1499" b="1" i="0" lang="zh-CN" dirty="0">
+              <a:defRPr sz="1499" b="0" i="0" lang="zh-CN" dirty="0">
+                <a:solidFill>
+                  <a:srgbClr val="27303A"/>
+                </a:solidFill>
+                <a:latin typeface="DejaVu Sans"/>
+                <a:ea typeface="DejaVu Sans"/>
+                <a:cs typeface="DejaVu Sans"/>
+              </a:defRPr>
+            </a:pPr>
+            <a:r>
+              <a:rPr sz="1499" b="0" i="0" lang="zh-CN" dirty="0">
+                <a:solidFill>
+                  <a:srgbClr val="27303A"/>
+                </a:solidFill>
+                <a:latin typeface="DejaVu Sans"/>
+                <a:ea typeface="DejaVu Sans"/>
+                <a:cs typeface="DejaVu Sans"/>
+              </a:rPr>
+              <a:t>Thermal history</a:t>
+            </a:r>
+          </a:p>
+        </p:txBody>
+      </p:sp>
+      <p:sp>
+        <p:nvSpPr>
+          <p:cNvPr id="80" name="ledr_r2" descr="Editable shape; source id ledr_r2"/>
+          <p:cNvSpPr/>
+          <p:nvPr/>
+        </p:nvSpPr>
+        <p:spPr>
+          <a:xfrm>
+            <a:off x="4937124" y="3579812"/>
+            <a:ext cx="2651124" cy="674687"/>
+          </a:xfrm>
+          <a:prstGeom prst="roundRect">
+            <a:avLst>
+              <a:gd name="adj" fmla="val 7058"/>
+            </a:avLst>
+          </a:prstGeom>
+          <a:solidFill>
+            <a:srgbClr val="F4F7FA"/>
+          </a:solidFill>
+          <a:ln w="12699">
+            <a:solidFill>
+              <a:srgbClr val="AEBBC7"/>
+            </a:solidFill>
+          </a:ln>
+          <a:effectLst/>
+        </p:spPr>
+        <p:style>
+          <a:lnRef idx="1">
+            <a:schemeClr val="accent1"/>
+          </a:lnRef>
+          <a:fillRef idx="3">
+            <a:schemeClr val="accent1"/>
+          </a:fillRef>
+          <a:effectRef idx="0">
+            <a:schemeClr val="accent1"/>
+          </a:effectRef>
+          <a:fontRef idx="minor">
+            <a:schemeClr val="lt1"/>
+          </a:fontRef>
+        </p:style>
+        <p:txBody>
+          <a:bodyPr rtlCol="0" anchor="ctr"/>
+          <a:lstStyle/>
+          <a:p>
+            <a:pPr algn="ctr"/>
+          </a:p>
+        </p:txBody>
+      </p:sp>
+      <p:sp>
+        <p:nvSpPr>
+          <p:cNvPr id="81" name="ledr_c2_b" descr="Editable shape; source id ledr_c2_b"/>
+          <p:cNvSpPr/>
+          <p:nvPr/>
+        </p:nvSpPr>
+        <p:spPr>
+          <a:xfrm>
+            <a:off x="5048249" y="3849687"/>
+            <a:ext cx="126999" cy="126999"/>
+          </a:xfrm>
+          <a:prstGeom prst="rect">
+            <a:avLst/>
+          </a:prstGeom>
+          <a:noFill/>
+          <a:ln w="18216">
+            <a:solidFill>
+              <a:srgbClr val="111A24"/>
+            </a:solidFill>
+          </a:ln>
+          <a:effectLst/>
+        </p:spPr>
+        <p:style>
+          <a:lnRef idx="1">
+            <a:schemeClr val="accent1"/>
+          </a:lnRef>
+          <a:fillRef idx="3">
+            <a:schemeClr val="accent1"/>
+          </a:fillRef>
+          <a:effectRef idx="0">
+            <a:schemeClr val="accent1"/>
+          </a:effectRef>
+          <a:fontRef idx="minor">
+            <a:schemeClr val="lt1"/>
+          </a:fontRef>
+        </p:style>
+        <p:txBody>
+          <a:bodyPr rtlCol="0" anchor="ctr"/>
+          <a:lstStyle/>
+          <a:p>
+            <a:pPr algn="ctr"/>
+          </a:p>
+        </p:txBody>
+      </p:sp>
+      <p:cxnSp>
+        <p:nvCxnSpPr>
+          <p:cNvPr id="82" name="ledr_c2_k_0" descr="Editable line; source id ledr_c2_k_0"/>
+          <p:cNvCxnSpPr/>
+          <p:nvPr/>
+        </p:nvCxnSpPr>
+        <p:spPr>
+          <a:xfrm>
+            <a:off x="5072062" y="3921124"/>
+            <a:ext cx="23812" cy="23813"/>
+          </a:xfrm>
+          <a:prstGeom prst="line">
+            <a:avLst/>
+          </a:prstGeom>
+          <a:ln w="23681">
+            <a:solidFill>
+              <a:srgbClr val="111A24"/>
+            </a:solidFill>
+          </a:ln>
+          <a:effectLst/>
+        </p:spPr>
+        <p:style>
+          <a:lnRef idx="2">
+            <a:schemeClr val="accent1"/>
+          </a:lnRef>
+          <a:fillRef idx="0">
+            <a:schemeClr val="accent1"/>
+          </a:fillRef>
+          <a:effectRef idx="0">
+            <a:schemeClr val="accent1"/>
+          </a:effectRef>
+          <a:fontRef idx="minor">
+            <a:schemeClr val="tx1"/>
+          </a:fontRef>
+        </p:style>
+      </p:cxnSp>
+      <p:cxnSp>
+        <p:nvCxnSpPr>
+          <p:cNvPr id="83" name="ledr_c2_k_1" descr="Editable line; source id ledr_c2_k_1"/>
+          <p:cNvCxnSpPr/>
+          <p:nvPr/>
+        </p:nvCxnSpPr>
+        <p:spPr>
+          <a:xfrm flipV="1">
+            <a:off x="5095874" y="3889374"/>
+            <a:ext cx="47625" cy="55563"/>
+          </a:xfrm>
+          <a:prstGeom prst="line">
+            <a:avLst/>
+          </a:prstGeom>
+          <a:ln w="23681">
+            <a:solidFill>
+              <a:srgbClr val="111A24"/>
+            </a:solidFill>
+          </a:ln>
+          <a:effectLst/>
+        </p:spPr>
+        <p:style>
+          <a:lnRef idx="2">
+            <a:schemeClr val="accent1"/>
+          </a:lnRef>
+          <a:fillRef idx="0">
+            <a:schemeClr val="accent1"/>
+          </a:fillRef>
+          <a:effectRef idx="0">
+            <a:schemeClr val="accent1"/>
+          </a:effectRef>
+          <a:fontRef idx="minor">
+            <a:schemeClr val="tx1"/>
+          </a:fontRef>
+        </p:style>
+      </p:cxnSp>
+      <p:sp>
+        <p:nvSpPr>
+          <p:cNvPr id="84" name="ledr_x2" descr="Editable text; source id ledr_x2"/>
+          <p:cNvSpPr txBox="1"/>
+          <p:nvPr/>
+        </p:nvSpPr>
+        <p:spPr>
+          <a:xfrm>
+            <a:off x="5278437" y="3603624"/>
+            <a:ext cx="2182812" cy="627062"/>
+          </a:xfrm>
+          <a:prstGeom prst="rect">
+            <a:avLst/>
+          </a:prstGeom>
+          <a:noFill/>
+          <a:effectLst/>
+        </p:spPr>
+        <p:txBody>
+          <a:bodyPr wrap="none" anchor="ctr" tIns="0" rIns="0" bIns="0" lIns="0" anchorCtr="0" vertOverflow="overflow">
+            <a:noAutofit/>
+          </a:bodyPr>
+          <a:lstStyle/>
+          <a:p>
+            <a:pPr algn="l" fontAlgn="base">
+              <a:lnSpc>
+                <a:spcPts val="1765"/>
+              </a:lnSpc>
+              <a:spcBef>
+                <a:spcPts val="0"/>
+              </a:spcBef>
+              <a:spcAft>
+                <a:spcPts val="0"/>
+              </a:spcAft>
+              <a:defRPr sz="1499" b="0" i="0" lang="zh-CN" dirty="0">
+                <a:solidFill>
+                  <a:srgbClr val="27303A"/>
+                </a:solidFill>
+                <a:latin typeface="DejaVu Sans"/>
+                <a:ea typeface="DejaVu Sans"/>
+                <a:cs typeface="DejaVu Sans"/>
+              </a:defRPr>
+            </a:pPr>
+            <a:r>
+              <a:rPr sz="1499" b="0" i="0" lang="zh-CN" dirty="0">
+                <a:solidFill>
+                  <a:srgbClr val="27303A"/>
+                </a:solidFill>
+                <a:latin typeface="DejaVu Sans"/>
+                <a:ea typeface="DejaVu Sans"/>
+                <a:cs typeface="DejaVu Sans"/>
+              </a:rPr>
+              <a:t>Atmosphere</a:t>
+            </a:r>
+          </a:p>
+        </p:txBody>
+      </p:sp>
+      <p:sp>
+        <p:nvSpPr>
+          <p:cNvPr id="85" name="ledr_r3" descr="Editable shape; source id ledr_r3"/>
+          <p:cNvSpPr/>
+          <p:nvPr/>
+        </p:nvSpPr>
+        <p:spPr>
+          <a:xfrm>
+            <a:off x="4937124" y="4302124"/>
+            <a:ext cx="2651124" cy="674687"/>
+          </a:xfrm>
+          <a:prstGeom prst="roundRect">
+            <a:avLst>
+              <a:gd name="adj" fmla="val 7058"/>
+            </a:avLst>
+          </a:prstGeom>
+          <a:solidFill>
+            <a:srgbClr val="F4F7FA"/>
+          </a:solidFill>
+          <a:ln w="12699">
+            <a:solidFill>
+              <a:srgbClr val="AEBBC7"/>
+            </a:solidFill>
+          </a:ln>
+          <a:effectLst/>
+        </p:spPr>
+        <p:style>
+          <a:lnRef idx="1">
+            <a:schemeClr val="accent1"/>
+          </a:lnRef>
+          <a:fillRef idx="3">
+            <a:schemeClr val="accent1"/>
+          </a:fillRef>
+          <a:effectRef idx="0">
+            <a:schemeClr val="accent1"/>
+          </a:effectRef>
+          <a:fontRef idx="minor">
+            <a:schemeClr val="lt1"/>
+          </a:fontRef>
+        </p:style>
+        <p:txBody>
+          <a:bodyPr rtlCol="0" anchor="ctr"/>
+          <a:lstStyle/>
+          <a:p>
+            <a:pPr algn="ctr"/>
+          </a:p>
+        </p:txBody>
+      </p:sp>
+      <p:sp>
+        <p:nvSpPr>
+          <p:cNvPr id="86" name="ledr_c3_b" descr="Editable shape; source id ledr_c3_b"/>
+          <p:cNvSpPr/>
+          <p:nvPr/>
+        </p:nvSpPr>
+        <p:spPr>
+          <a:xfrm>
+            <a:off x="5048249" y="4579937"/>
+            <a:ext cx="126999" cy="126999"/>
+          </a:xfrm>
+          <a:prstGeom prst="rect">
+            <a:avLst/>
+          </a:prstGeom>
+          <a:noFill/>
+          <a:ln w="18216">
+            <a:solidFill>
+              <a:srgbClr val="111A24"/>
+            </a:solidFill>
+          </a:ln>
+          <a:effectLst/>
+        </p:spPr>
+        <p:style>
+          <a:lnRef idx="1">
+            <a:schemeClr val="accent1"/>
+          </a:lnRef>
+          <a:fillRef idx="3">
+            <a:schemeClr val="accent1"/>
+          </a:fillRef>
+          <a:effectRef idx="0">
+            <a:schemeClr val="accent1"/>
+          </a:effectRef>
+          <a:fontRef idx="minor">
+            <a:schemeClr val="lt1"/>
+          </a:fontRef>
+        </p:style>
+        <p:txBody>
+          <a:bodyPr rtlCol="0" anchor="ctr"/>
+          <a:lstStyle/>
+          <a:p>
+            <a:pPr algn="ctr"/>
+          </a:p>
+        </p:txBody>
+      </p:sp>
+      <p:cxnSp>
+        <p:nvCxnSpPr>
+          <p:cNvPr id="87" name="ledr_c3_k_0" descr="Editable line; source id ledr_c3_k_0"/>
+          <p:cNvCxnSpPr/>
+          <p:nvPr/>
+        </p:nvCxnSpPr>
+        <p:spPr>
+          <a:xfrm>
+            <a:off x="5072062" y="4643437"/>
+            <a:ext cx="23812" cy="23812"/>
+          </a:xfrm>
+          <a:prstGeom prst="line">
+            <a:avLst/>
+          </a:prstGeom>
+          <a:ln w="23681">
+            <a:solidFill>
+              <a:srgbClr val="111A24"/>
+            </a:solidFill>
+          </a:ln>
+          <a:effectLst/>
+        </p:spPr>
+        <p:style>
+          <a:lnRef idx="2">
+            <a:schemeClr val="accent1"/>
+          </a:lnRef>
+          <a:fillRef idx="0">
+            <a:schemeClr val="accent1"/>
+          </a:fillRef>
+          <a:effectRef idx="0">
+            <a:schemeClr val="accent1"/>
+          </a:effectRef>
+          <a:fontRef idx="minor">
+            <a:schemeClr val="tx1"/>
+          </a:fontRef>
+        </p:style>
+      </p:cxnSp>
+      <p:cxnSp>
+        <p:nvCxnSpPr>
+          <p:cNvPr id="88" name="ledr_c3_k_1" descr="Editable line; source id ledr_c3_k_1"/>
+          <p:cNvCxnSpPr/>
+          <p:nvPr/>
+        </p:nvCxnSpPr>
+        <p:spPr>
+          <a:xfrm flipV="1">
+            <a:off x="5095874" y="4611687"/>
+            <a:ext cx="47625" cy="55562"/>
+          </a:xfrm>
+          <a:prstGeom prst="line">
+            <a:avLst/>
+          </a:prstGeom>
+          <a:ln w="23681">
+            <a:solidFill>
+              <a:srgbClr val="111A24"/>
+            </a:solidFill>
+          </a:ln>
+          <a:effectLst/>
+        </p:spPr>
+        <p:style>
+          <a:lnRef idx="2">
+            <a:schemeClr val="accent1"/>
+          </a:lnRef>
+          <a:fillRef idx="0">
+            <a:schemeClr val="accent1"/>
+          </a:fillRef>
+          <a:effectRef idx="0">
+            <a:schemeClr val="accent1"/>
+          </a:effectRef>
+          <a:fontRef idx="minor">
+            <a:schemeClr val="tx1"/>
+          </a:fontRef>
+        </p:style>
+      </p:cxnSp>
+      <p:sp>
+        <p:nvSpPr>
+          <p:cNvPr id="89" name="ledr_x3" descr="Editable text; source id ledr_x3"/>
+          <p:cNvSpPr txBox="1"/>
+          <p:nvPr/>
+        </p:nvSpPr>
+        <p:spPr>
+          <a:xfrm>
+            <a:off x="5278437" y="4325937"/>
+            <a:ext cx="2182812" cy="627062"/>
+          </a:xfrm>
+          <a:prstGeom prst="rect">
+            <a:avLst/>
+          </a:prstGeom>
+          <a:noFill/>
+          <a:effectLst/>
+        </p:spPr>
+        <p:txBody>
+          <a:bodyPr wrap="none" anchor="ctr" tIns="0" rIns="0" bIns="0" lIns="0" anchorCtr="0" vertOverflow="overflow">
+            <a:noAutofit/>
+          </a:bodyPr>
+          <a:lstStyle/>
+          <a:p>
+            <a:pPr algn="l" fontAlgn="base">
+              <a:lnSpc>
+                <a:spcPts val="1765"/>
+              </a:lnSpc>
+              <a:spcBef>
+                <a:spcPts val="0"/>
+              </a:spcBef>
+              <a:spcAft>
+                <a:spcPts val="0"/>
+              </a:spcAft>
+              <a:defRPr sz="1499" b="0" i="0" lang="zh-CN" dirty="0">
+                <a:solidFill>
+                  <a:srgbClr val="27303A"/>
+                </a:solidFill>
+                <a:latin typeface="DejaVu Sans"/>
+                <a:ea typeface="DejaVu Sans"/>
+                <a:cs typeface="DejaVu Sans"/>
+              </a:defRPr>
+            </a:pPr>
+            <a:r>
+              <a:rPr sz="1499" b="0" i="0" lang="zh-CN" dirty="0">
+                <a:solidFill>
+                  <a:srgbClr val="27303A"/>
+                </a:solidFill>
+                <a:latin typeface="DejaVu Sans"/>
+                <a:ea typeface="DejaVu Sans"/>
+                <a:cs typeface="DejaVu Sans"/>
+              </a:rPr>
+              <a:t>Crucible and flux</a:t>
+            </a:r>
+          </a:p>
+        </p:txBody>
+      </p:sp>
+      <p:sp>
+        <p:nvSpPr>
+          <p:cNvPr id="90" name="ledr_r4" descr="Editable shape; source id ledr_r4"/>
+          <p:cNvSpPr/>
+          <p:nvPr/>
+        </p:nvSpPr>
+        <p:spPr>
+          <a:xfrm>
+            <a:off x="4937124" y="5024437"/>
+            <a:ext cx="2651124" cy="674687"/>
+          </a:xfrm>
+          <a:prstGeom prst="roundRect">
+            <a:avLst>
+              <a:gd name="adj" fmla="val 7058"/>
+            </a:avLst>
+          </a:prstGeom>
+          <a:solidFill>
+            <a:srgbClr val="F4F7FA"/>
+          </a:solidFill>
+          <a:ln w="12699">
+            <a:solidFill>
+              <a:srgbClr val="AEBBC7"/>
+            </a:solidFill>
+          </a:ln>
+          <a:effectLst/>
+        </p:spPr>
+        <p:style>
+          <a:lnRef idx="1">
+            <a:schemeClr val="accent1"/>
+          </a:lnRef>
+          <a:fillRef idx="3">
+            <a:schemeClr val="accent1"/>
+          </a:fillRef>
+          <a:effectRef idx="0">
+            <a:schemeClr val="accent1"/>
+          </a:effectRef>
+          <a:fontRef idx="minor">
+            <a:schemeClr val="lt1"/>
+          </a:fontRef>
+        </p:style>
+        <p:txBody>
+          <a:bodyPr rtlCol="0" anchor="ctr"/>
+          <a:lstStyle/>
+          <a:p>
+            <a:pPr algn="ctr"/>
+          </a:p>
+        </p:txBody>
+      </p:sp>
+      <p:sp>
+        <p:nvSpPr>
+          <p:cNvPr id="91" name="ledr_c4_b" descr="Editable shape; source id ledr_c4_b"/>
+          <p:cNvSpPr/>
+          <p:nvPr/>
+        </p:nvSpPr>
+        <p:spPr>
+          <a:xfrm>
+            <a:off x="5048249" y="5302249"/>
+            <a:ext cx="126999" cy="126999"/>
+          </a:xfrm>
+          <a:prstGeom prst="rect">
+            <a:avLst/>
+          </a:prstGeom>
+          <a:noFill/>
+          <a:ln w="18216">
+            <a:solidFill>
+              <a:srgbClr val="111A24"/>
+            </a:solidFill>
+          </a:ln>
+          <a:effectLst/>
+        </p:spPr>
+        <p:style>
+          <a:lnRef idx="1">
+            <a:schemeClr val="accent1"/>
+          </a:lnRef>
+          <a:fillRef idx="3">
+            <a:schemeClr val="accent1"/>
+          </a:fillRef>
+          <a:effectRef idx="0">
+            <a:schemeClr val="accent1"/>
+          </a:effectRef>
+          <a:fontRef idx="minor">
+            <a:schemeClr val="lt1"/>
+          </a:fontRef>
+        </p:style>
+        <p:txBody>
+          <a:bodyPr rtlCol="0" anchor="ctr"/>
+          <a:lstStyle/>
+          <a:p>
+            <a:pPr algn="ctr"/>
+          </a:p>
+        </p:txBody>
+      </p:sp>
+      <p:cxnSp>
+        <p:nvCxnSpPr>
+          <p:cNvPr id="92" name="ledr_c4_k_0" descr="Editable line; source id ledr_c4_k_0"/>
+          <p:cNvCxnSpPr/>
+          <p:nvPr/>
+        </p:nvCxnSpPr>
+        <p:spPr>
+          <a:xfrm>
+            <a:off x="5072062" y="5365749"/>
+            <a:ext cx="23812" cy="31750"/>
+          </a:xfrm>
+          <a:prstGeom prst="line">
+            <a:avLst/>
+          </a:prstGeom>
+          <a:ln w="23681">
+            <a:solidFill>
+              <a:srgbClr val="111A24"/>
+            </a:solidFill>
+          </a:ln>
+          <a:effectLst/>
+        </p:spPr>
+        <p:style>
+          <a:lnRef idx="2">
+            <a:schemeClr val="accent1"/>
+          </a:lnRef>
+          <a:fillRef idx="0">
+            <a:schemeClr val="accent1"/>
+          </a:fillRef>
+          <a:effectRef idx="0">
+            <a:schemeClr val="accent1"/>
+          </a:effectRef>
+          <a:fontRef idx="minor">
+            <a:schemeClr val="tx1"/>
+          </a:fontRef>
+        </p:style>
+      </p:cxnSp>
+      <p:cxnSp>
+        <p:nvCxnSpPr>
+          <p:cNvPr id="93" name="ledr_c4_k_1" descr="Editable line; source id ledr_c4_k_1"/>
+          <p:cNvCxnSpPr/>
+          <p:nvPr/>
+        </p:nvCxnSpPr>
+        <p:spPr>
+          <a:xfrm flipV="1">
+            <a:off x="5095874" y="5333999"/>
+            <a:ext cx="47625" cy="63500"/>
+          </a:xfrm>
+          <a:prstGeom prst="line">
+            <a:avLst/>
+          </a:prstGeom>
+          <a:ln w="23681">
+            <a:solidFill>
+              <a:srgbClr val="111A24"/>
+            </a:solidFill>
+          </a:ln>
+          <a:effectLst/>
+        </p:spPr>
+        <p:style>
+          <a:lnRef idx="2">
+            <a:schemeClr val="accent1"/>
+          </a:lnRef>
+          <a:fillRef idx="0">
+            <a:schemeClr val="accent1"/>
+          </a:fillRef>
+          <a:effectRef idx="0">
+            <a:schemeClr val="accent1"/>
+          </a:effectRef>
+          <a:fontRef idx="minor">
+            <a:schemeClr val="tx1"/>
+          </a:fontRef>
+        </p:style>
+      </p:cxnSp>
+      <p:sp>
+        <p:nvSpPr>
+          <p:cNvPr id="94" name="ledr_x4" descr="Editable text; source id ledr_x4"/>
+          <p:cNvSpPr txBox="1"/>
+          <p:nvPr/>
+        </p:nvSpPr>
+        <p:spPr>
+          <a:xfrm>
+            <a:off x="5278437" y="5048249"/>
+            <a:ext cx="2182812" cy="627062"/>
+          </a:xfrm>
+          <a:prstGeom prst="rect">
+            <a:avLst/>
+          </a:prstGeom>
+          <a:noFill/>
+          <a:effectLst/>
+        </p:spPr>
+        <p:txBody>
+          <a:bodyPr wrap="none" anchor="ctr" tIns="0" rIns="0" bIns="0" lIns="0" anchorCtr="0" vertOverflow="overflow">
+            <a:noAutofit/>
+          </a:bodyPr>
+          <a:lstStyle/>
+          <a:p>
+            <a:pPr algn="l" fontAlgn="base">
+              <a:lnSpc>
+                <a:spcPts val="1765"/>
+              </a:lnSpc>
+              <a:spcBef>
+                <a:spcPts val="0"/>
+              </a:spcBef>
+              <a:spcAft>
+                <a:spcPts val="0"/>
+              </a:spcAft>
+              <a:defRPr sz="1499" b="0" i="0" lang="zh-CN" dirty="0">
+                <a:solidFill>
+                  <a:srgbClr val="27303A"/>
+                </a:solidFill>
+                <a:latin typeface="DejaVu Sans"/>
+                <a:ea typeface="DejaVu Sans"/>
+                <a:cs typeface="DejaVu Sans"/>
+              </a:defRPr>
+            </a:pPr>
+            <a:r>
+              <a:rPr sz="1499" b="0" i="0" lang="zh-CN" dirty="0">
+                <a:solidFill>
+                  <a:srgbClr val="27303A"/>
+                </a:solidFill>
+                <a:latin typeface="DejaVu Sans"/>
+                <a:ea typeface="DejaVu Sans"/>
+                <a:cs typeface="DejaVu Sans"/>
+              </a:rPr>
+              <a:t>Cooling and </a:t>
+            </a:r>
+          </a:p>
+          <a:p>
+            <a:pPr algn="l" fontAlgn="base">
+              <a:lnSpc>
+                <a:spcPts val="1765"/>
+              </a:lnSpc>
+              <a:spcBef>
+                <a:spcPts val="0"/>
+              </a:spcBef>
+              <a:spcAft>
+                <a:spcPts val="0"/>
+              </a:spcAft>
+              <a:defRPr sz="1499" b="0" i="0" lang="zh-CN" dirty="0">
+                <a:solidFill>
+                  <a:srgbClr val="27303A"/>
+                </a:solidFill>
+                <a:latin typeface="DejaVu Sans"/>
+                <a:ea typeface="DejaVu Sans"/>
+                <a:cs typeface="DejaVu Sans"/>
+              </a:defRPr>
+            </a:pPr>
+            <a:r>
+              <a:rPr sz="1499" b="0" i="0" lang="zh-CN" dirty="0">
+                <a:solidFill>
+                  <a:srgbClr val="27303A"/>
+                </a:solidFill>
+                <a:latin typeface="DejaVu Sans"/>
+                <a:ea typeface="DejaVu Sans"/>
+                <a:cs typeface="DejaVu Sans"/>
+              </a:rPr>
+              <a:t>separation</a:t>
+            </a:r>
+          </a:p>
+        </p:txBody>
+      </p:sp>
+      <p:sp>
+        <p:nvSpPr>
+          <p:cNvPr id="95" name="ledr_r5" descr="Editable shape; source id ledr_r5"/>
+          <p:cNvSpPr/>
+          <p:nvPr/>
+        </p:nvSpPr>
+        <p:spPr>
+          <a:xfrm>
+            <a:off x="4937124" y="5754687"/>
+            <a:ext cx="2651124" cy="674687"/>
+          </a:xfrm>
+          <a:prstGeom prst="roundRect">
+            <a:avLst>
+              <a:gd name="adj" fmla="val 7058"/>
+            </a:avLst>
+          </a:prstGeom>
+          <a:solidFill>
+            <a:srgbClr val="F4F7FA"/>
+          </a:solidFill>
+          <a:ln w="12699">
+            <a:solidFill>
+              <a:srgbClr val="AEBBC7"/>
+            </a:solidFill>
+          </a:ln>
+          <a:effectLst/>
+        </p:spPr>
+        <p:style>
+          <a:lnRef idx="1">
+            <a:schemeClr val="accent1"/>
+          </a:lnRef>
+          <a:fillRef idx="3">
+            <a:schemeClr val="accent1"/>
+          </a:fillRef>
+          <a:effectRef idx="0">
+            <a:schemeClr val="accent1"/>
+          </a:effectRef>
+          <a:fontRef idx="minor">
+            <a:schemeClr val="lt1"/>
+          </a:fontRef>
+        </p:style>
+        <p:txBody>
+          <a:bodyPr rtlCol="0" anchor="ctr"/>
+          <a:lstStyle/>
+          <a:p>
+            <a:pPr algn="ctr"/>
+          </a:p>
+        </p:txBody>
+      </p:sp>
+      <p:sp>
+        <p:nvSpPr>
+          <p:cNvPr id="96" name="ledr_c5_b" descr="Editable shape; source id ledr_c5_b"/>
+          <p:cNvSpPr/>
+          <p:nvPr/>
+        </p:nvSpPr>
+        <p:spPr>
+          <a:xfrm>
+            <a:off x="5048249" y="6024562"/>
+            <a:ext cx="126999" cy="126999"/>
+          </a:xfrm>
+          <a:prstGeom prst="rect">
+            <a:avLst/>
+          </a:prstGeom>
+          <a:noFill/>
+          <a:ln w="18216">
+            <a:solidFill>
+              <a:srgbClr val="111A24"/>
+            </a:solidFill>
+          </a:ln>
+          <a:effectLst/>
+        </p:spPr>
+        <p:style>
+          <a:lnRef idx="1">
+            <a:schemeClr val="accent1"/>
+          </a:lnRef>
+          <a:fillRef idx="3">
+            <a:schemeClr val="accent1"/>
+          </a:fillRef>
+          <a:effectRef idx="0">
+            <a:schemeClr val="accent1"/>
+          </a:effectRef>
+          <a:fontRef idx="minor">
+            <a:schemeClr val="lt1"/>
+          </a:fontRef>
+        </p:style>
+        <p:txBody>
+          <a:bodyPr rtlCol="0" anchor="ctr"/>
+          <a:lstStyle/>
+          <a:p>
+            <a:pPr algn="ctr"/>
+          </a:p>
+        </p:txBody>
+      </p:sp>
+      <p:cxnSp>
+        <p:nvCxnSpPr>
+          <p:cNvPr id="97" name="ledr_c5_k_0" descr="Editable line; source id ledr_c5_k_0"/>
+          <p:cNvCxnSpPr/>
+          <p:nvPr/>
+        </p:nvCxnSpPr>
+        <p:spPr>
+          <a:xfrm>
+            <a:off x="5072062" y="6095999"/>
+            <a:ext cx="23812" cy="23813"/>
+          </a:xfrm>
+          <a:prstGeom prst="line">
+            <a:avLst/>
+          </a:prstGeom>
+          <a:ln w="23681">
+            <a:solidFill>
+              <a:srgbClr val="111A24"/>
+            </a:solidFill>
+          </a:ln>
+          <a:effectLst/>
+        </p:spPr>
+        <p:style>
+          <a:lnRef idx="2">
+            <a:schemeClr val="accent1"/>
+          </a:lnRef>
+          <a:fillRef idx="0">
+            <a:schemeClr val="accent1"/>
+          </a:fillRef>
+          <a:effectRef idx="0">
+            <a:schemeClr val="accent1"/>
+          </a:effectRef>
+          <a:fontRef idx="minor">
+            <a:schemeClr val="tx1"/>
+          </a:fontRef>
+        </p:style>
+      </p:cxnSp>
+      <p:cxnSp>
+        <p:nvCxnSpPr>
+          <p:cNvPr id="98" name="ledr_c5_k_1" descr="Editable line; source id ledr_c5_k_1"/>
+          <p:cNvCxnSpPr/>
+          <p:nvPr/>
+        </p:nvCxnSpPr>
+        <p:spPr>
+          <a:xfrm flipV="1">
+            <a:off x="5095874" y="6064249"/>
+            <a:ext cx="47625" cy="55563"/>
+          </a:xfrm>
+          <a:prstGeom prst="line">
+            <a:avLst/>
+          </a:prstGeom>
+          <a:ln w="23681">
+            <a:solidFill>
+              <a:srgbClr val="111A24"/>
+            </a:solidFill>
+          </a:ln>
+          <a:effectLst/>
+        </p:spPr>
+        <p:style>
+          <a:lnRef idx="2">
+            <a:schemeClr val="accent1"/>
+          </a:lnRef>
+          <a:fillRef idx="0">
+            <a:schemeClr val="accent1"/>
+          </a:fillRef>
+          <a:effectRef idx="0">
+            <a:schemeClr val="accent1"/>
+          </a:effectRef>
+          <a:fontRef idx="minor">
+            <a:schemeClr val="tx1"/>
+          </a:fontRef>
+        </p:style>
+      </p:cxnSp>
+      <p:sp>
+        <p:nvSpPr>
+          <p:cNvPr id="99" name="ledr_x5" descr="Editable text; source id ledr_x5"/>
+          <p:cNvSpPr txBox="1"/>
+          <p:nvPr/>
+        </p:nvSpPr>
+        <p:spPr>
+          <a:xfrm>
+            <a:off x="5278437" y="5778499"/>
+            <a:ext cx="2182812" cy="627062"/>
+          </a:xfrm>
+          <a:prstGeom prst="rect">
+            <a:avLst/>
+          </a:prstGeom>
+          <a:noFill/>
+          <a:effectLst/>
+        </p:spPr>
+        <p:txBody>
+          <a:bodyPr wrap="none" anchor="ctr" tIns="0" rIns="0" bIns="0" lIns="0" anchorCtr="0" vertOverflow="overflow">
+            <a:noAutofit/>
+          </a:bodyPr>
+          <a:lstStyle/>
+          <a:p>
+            <a:pPr algn="l" fontAlgn="base">
+              <a:lnSpc>
+                <a:spcPts val="1765"/>
+              </a:lnSpc>
+              <a:spcBef>
+                <a:spcPts val="0"/>
+              </a:spcBef>
+              <a:spcAft>
+                <a:spcPts val="0"/>
+              </a:spcAft>
+              <a:defRPr sz="1499" b="0" i="0" lang="zh-CN" dirty="0">
+                <a:solidFill>
+                  <a:srgbClr val="27303A"/>
+                </a:solidFill>
+                <a:latin typeface="DejaVu Sans"/>
+                <a:ea typeface="DejaVu Sans"/>
+                <a:cs typeface="DejaVu Sans"/>
+              </a:defRPr>
+            </a:pPr>
+            <a:r>
+              <a:rPr sz="1499" b="0" i="0" lang="zh-CN" dirty="0">
+                <a:solidFill>
+                  <a:srgbClr val="27303A"/>
+                </a:solidFill>
+                <a:latin typeface="DejaVu Sans"/>
+                <a:ea typeface="DejaVu Sans"/>
+                <a:cs typeface="DejaVu Sans"/>
+              </a:rPr>
+              <a:t>Characterization</a:t>
+            </a:r>
+          </a:p>
+        </p:txBody>
+      </p:sp>
+      <p:sp>
+        <p:nvSpPr>
+          <p:cNvPr id="100" name="u1" descr="Editable shape; source id u1"/>
+          <p:cNvSpPr/>
+          <p:nvPr/>
+        </p:nvSpPr>
+        <p:spPr>
+          <a:xfrm>
+            <a:off x="8143874" y="746124"/>
+            <a:ext cx="3714749" cy="1309687"/>
+          </a:xfrm>
+          <a:prstGeom prst="roundRect">
+            <a:avLst>
+              <a:gd name="adj" fmla="val 5454"/>
+            </a:avLst>
+          </a:prstGeom>
+          <a:solidFill>
+            <a:srgbClr val="FFFFFF"/>
+          </a:solidFill>
+          <a:ln w="15081">
+            <a:solidFill>
+              <a:srgbClr val="C48A24"/>
+            </a:solidFill>
+          </a:ln>
+          <a:effectLst/>
+        </p:spPr>
+        <p:style>
+          <a:lnRef idx="1">
+            <a:schemeClr val="accent1"/>
+          </a:lnRef>
+          <a:fillRef idx="3">
+            <a:schemeClr val="accent1"/>
+          </a:fillRef>
+          <a:effectRef idx="0">
+            <a:schemeClr val="accent1"/>
+          </a:effectRef>
+          <a:fontRef idx="minor">
+            <a:schemeClr val="lt1"/>
+          </a:fontRef>
+        </p:style>
+        <p:txBody>
+          <a:bodyPr rtlCol="0" anchor="ctr"/>
+          <a:lstStyle/>
+          <a:p>
+            <a:pPr algn="ctr"/>
+          </a:p>
+        </p:txBody>
+      </p:sp>
+      <p:sp>
+        <p:nvSpPr>
+          <p:cNvPr id="101" name="u1_b" descr="Editable shape; source id u1_b"/>
+          <p:cNvSpPr/>
+          <p:nvPr/>
+        </p:nvSpPr>
+        <p:spPr>
+          <a:xfrm>
+            <a:off x="8143874" y="746124"/>
+            <a:ext cx="47624" cy="1309687"/>
+          </a:xfrm>
+          <a:prstGeom prst="roundRect">
+            <a:avLst>
+              <a:gd name="adj" fmla="val 50000"/>
+            </a:avLst>
+          </a:prstGeom>
+          <a:solidFill>
+            <a:srgbClr val="C48A24"/>
+          </a:solidFill>
+          <a:ln>
+            <a:noFill/>
+          </a:ln>
+          <a:effectLst/>
+        </p:spPr>
+        <p:style>
+          <a:lnRef idx="1">
+            <a:schemeClr val="accent1"/>
+          </a:lnRef>
+          <a:fillRef idx="3">
+            <a:schemeClr val="accent1"/>
+          </a:fillRef>
+          <a:effectRef idx="0">
+            <a:schemeClr val="accent1"/>
+          </a:effectRef>
+          <a:fontRef idx="minor">
+            <a:schemeClr val="lt1"/>
+          </a:fontRef>
+        </p:style>
+        <p:txBody>
+          <a:bodyPr rtlCol="0" anchor="ctr"/>
+          <a:lstStyle/>
+          <a:p>
+            <a:pPr algn="ctr"/>
+          </a:p>
+        </p:txBody>
+      </p:sp>
+      <p:cxnSp>
+        <p:nvCxnSpPr>
+          <p:cNvPr id="102" name="u1_g_n_0" descr="Editable line; source id u1_g_n_0"/>
+          <p:cNvCxnSpPr/>
+          <p:nvPr/>
+        </p:nvCxnSpPr>
+        <p:spPr>
+          <a:xfrm>
+            <a:off x="8413749" y="1269999"/>
+            <a:ext cx="0" cy="95250"/>
+          </a:xfrm>
+          <a:prstGeom prst="line">
+            <a:avLst/>
+          </a:prstGeom>
+          <a:ln w="18216">
+            <a:solidFill>
+              <a:srgbClr val="111A24"/>
+            </a:solidFill>
+          </a:ln>
+          <a:effectLst/>
+        </p:spPr>
+        <p:style>
+          <a:lnRef idx="2">
+            <a:schemeClr val="accent1"/>
+          </a:lnRef>
+          <a:fillRef idx="0">
+            <a:schemeClr val="accent1"/>
+          </a:fillRef>
+          <a:effectRef idx="0">
+            <a:schemeClr val="accent1"/>
+          </a:effectRef>
+          <a:fontRef idx="minor">
+            <a:schemeClr val="tx1"/>
+          </a:fontRef>
+        </p:style>
+      </p:cxnSp>
+      <p:cxnSp>
+        <p:nvCxnSpPr>
+          <p:cNvPr id="103" name="u1_g_n_1" descr="Editable line; source id u1_g_n_1"/>
+          <p:cNvCxnSpPr/>
+          <p:nvPr/>
+        </p:nvCxnSpPr>
+        <p:spPr>
+          <a:xfrm flipH="1">
+            <a:off x="8334374" y="1365249"/>
+            <a:ext cx="79375" cy="158750"/>
+          </a:xfrm>
+          <a:prstGeom prst="line">
+            <a:avLst/>
+          </a:prstGeom>
+          <a:ln w="18216">
+            <a:solidFill>
+              <a:srgbClr val="111A24"/>
+            </a:solidFill>
+          </a:ln>
+          <a:effectLst/>
+        </p:spPr>
+        <p:style>
+          <a:lnRef idx="2">
+            <a:schemeClr val="accent1"/>
+          </a:lnRef>
+          <a:fillRef idx="0">
+            <a:schemeClr val="accent1"/>
+          </a:fillRef>
+          <a:effectRef idx="0">
+            <a:schemeClr val="accent1"/>
+          </a:effectRef>
+          <a:fontRef idx="minor">
+            <a:schemeClr val="tx1"/>
+          </a:fontRef>
+        </p:style>
+      </p:cxnSp>
+      <p:cxnSp>
+        <p:nvCxnSpPr>
+          <p:cNvPr id="104" name="u1_g_n_2" descr="Editable line; source id u1_g_n_2"/>
+          <p:cNvCxnSpPr/>
+          <p:nvPr/>
+        </p:nvCxnSpPr>
+        <p:spPr>
+          <a:xfrm>
+            <a:off x="8334374" y="1523999"/>
+            <a:ext cx="222250" cy="0"/>
+          </a:xfrm>
+          <a:prstGeom prst="line">
+            <a:avLst/>
+          </a:prstGeom>
+          <a:ln w="18216">
+            <a:solidFill>
+              <a:srgbClr val="111A24"/>
+            </a:solidFill>
+          </a:ln>
+          <a:effectLst/>
+        </p:spPr>
+        <p:style>
+          <a:lnRef idx="2">
+            <a:schemeClr val="accent1"/>
+          </a:lnRef>
+          <a:fillRef idx="0">
+            <a:schemeClr val="accent1"/>
+          </a:fillRef>
+          <a:effectRef idx="0">
+            <a:schemeClr val="accent1"/>
+          </a:effectRef>
+          <a:fontRef idx="minor">
+            <a:schemeClr val="tx1"/>
+          </a:fontRef>
+        </p:style>
+      </p:cxnSp>
+      <p:cxnSp>
+        <p:nvCxnSpPr>
+          <p:cNvPr id="105" name="u1_g_n_3" descr="Editable line; source id u1_g_n_3"/>
+          <p:cNvCxnSpPr/>
+          <p:nvPr/>
+        </p:nvCxnSpPr>
+        <p:spPr>
+          <a:xfrm flipH="1" flipV="1">
+            <a:off x="8477249" y="1365249"/>
+            <a:ext cx="79375" cy="158750"/>
+          </a:xfrm>
+          <a:prstGeom prst="line">
+            <a:avLst/>
+          </a:prstGeom>
+          <a:ln w="18216">
+            <a:solidFill>
+              <a:srgbClr val="111A24"/>
+            </a:solidFill>
+          </a:ln>
+          <a:effectLst/>
+        </p:spPr>
+        <p:style>
+          <a:lnRef idx="2">
+            <a:schemeClr val="accent1"/>
+          </a:lnRef>
+          <a:fillRef idx="0">
+            <a:schemeClr val="accent1"/>
+          </a:fillRef>
+          <a:effectRef idx="0">
+            <a:schemeClr val="accent1"/>
+          </a:effectRef>
+          <a:fontRef idx="minor">
+            <a:schemeClr val="tx1"/>
+          </a:fontRef>
+        </p:style>
+      </p:cxnSp>
+      <p:cxnSp>
+        <p:nvCxnSpPr>
+          <p:cNvPr id="106" name="u1_g_n_4" descr="Editable line; source id u1_g_n_4"/>
+          <p:cNvCxnSpPr/>
+          <p:nvPr/>
+        </p:nvCxnSpPr>
+        <p:spPr>
+          <a:xfrm flipV="1">
+            <a:off x="8477249" y="1269999"/>
+            <a:ext cx="0" cy="95250"/>
+          </a:xfrm>
+          <a:prstGeom prst="line">
+            <a:avLst/>
+          </a:prstGeom>
+          <a:ln w="18216">
+            <a:solidFill>
+              <a:srgbClr val="111A24"/>
+            </a:solidFill>
+          </a:ln>
+          <a:effectLst/>
+        </p:spPr>
+        <p:style>
+          <a:lnRef idx="2">
+            <a:schemeClr val="accent1"/>
+          </a:lnRef>
+          <a:fillRef idx="0">
+            <a:schemeClr val="accent1"/>
+          </a:fillRef>
+          <a:effectRef idx="0">
+            <a:schemeClr val="accent1"/>
+          </a:effectRef>
+          <a:fontRef idx="minor">
+            <a:schemeClr val="tx1"/>
+          </a:fontRef>
+        </p:style>
+      </p:cxnSp>
+      <p:cxnSp>
+        <p:nvCxnSpPr>
+          <p:cNvPr id="107" name="u1_g_m" descr="Editable line; source id u1_g_m"/>
+          <p:cNvCxnSpPr/>
+          <p:nvPr/>
+        </p:nvCxnSpPr>
+        <p:spPr>
+          <a:xfrm>
+            <a:off x="8397874" y="1269999"/>
+            <a:ext cx="95250" cy="0"/>
+          </a:xfrm>
+          <a:prstGeom prst="line">
+            <a:avLst/>
+          </a:prstGeom>
+          <a:ln w="18216">
+            <a:solidFill>
+              <a:srgbClr val="111A24"/>
+            </a:solidFill>
+          </a:ln>
+          <a:effectLst/>
+        </p:spPr>
+        <p:style>
+          <a:lnRef idx="2">
+            <a:schemeClr val="accent1"/>
+          </a:lnRef>
+          <a:fillRef idx="0">
+            <a:schemeClr val="accent1"/>
+          </a:fillRef>
+          <a:effectRef idx="0">
+            <a:schemeClr val="accent1"/>
+          </a:effectRef>
+          <a:fontRef idx="minor">
+            <a:schemeClr val="tx1"/>
+          </a:fontRef>
+        </p:style>
+      </p:cxnSp>
+      <p:sp>
+        <p:nvSpPr>
+          <p:cNvPr id="108" name="u1_g_d1" descr="Editable shape; source id u1_g_d1"/>
+          <p:cNvSpPr/>
+          <p:nvPr/>
+        </p:nvSpPr>
+        <p:spPr>
+          <a:xfrm>
+            <a:off x="8405812" y="1452562"/>
+            <a:ext cx="23812" cy="23812"/>
+          </a:xfrm>
+          <a:prstGeom prst="ellipse">
+            <a:avLst/>
+          </a:prstGeom>
+          <a:noFill/>
+          <a:ln w="18216">
+            <a:solidFill>
+              <a:srgbClr val="111A24"/>
+            </a:solidFill>
+          </a:ln>
+          <a:effectLst/>
+        </p:spPr>
+        <p:style>
+          <a:lnRef idx="1">
+            <a:schemeClr val="accent1"/>
+          </a:lnRef>
+          <a:fillRef idx="3">
+            <a:schemeClr val="accent1"/>
+          </a:fillRef>
+          <a:effectRef idx="0">
+            <a:schemeClr val="accent1"/>
+          </a:effectRef>
+          <a:fontRef idx="minor">
+            <a:schemeClr val="lt1"/>
+          </a:fontRef>
+        </p:style>
+        <p:txBody>
+          <a:bodyPr rtlCol="0" anchor="ctr"/>
+          <a:lstStyle/>
+          <a:p>
+            <a:pPr algn="ctr"/>
+          </a:p>
+        </p:txBody>
+      </p:sp>
+      <p:sp>
+        <p:nvSpPr>
+          <p:cNvPr id="109" name="u1_g_d2" descr="Editable shape; source id u1_g_d2"/>
+          <p:cNvSpPr/>
+          <p:nvPr/>
+        </p:nvSpPr>
+        <p:spPr>
+          <a:xfrm>
+            <a:off x="8461374" y="1476374"/>
+            <a:ext cx="15874" cy="15874"/>
+          </a:xfrm>
+          <a:prstGeom prst="ellipse">
+            <a:avLst/>
+          </a:prstGeom>
+          <a:noFill/>
+          <a:ln w="18216">
+            <a:solidFill>
+              <a:srgbClr val="111A24"/>
+            </a:solidFill>
+          </a:ln>
+          <a:effectLst/>
+        </p:spPr>
+        <p:style>
+          <a:lnRef idx="1">
+            <a:schemeClr val="accent1"/>
+          </a:lnRef>
+          <a:fillRef idx="3">
+            <a:schemeClr val="accent1"/>
+          </a:fillRef>
+          <a:effectRef idx="0">
+            <a:schemeClr val="accent1"/>
+          </a:effectRef>
+          <a:fontRef idx="minor">
+            <a:schemeClr val="lt1"/>
+          </a:fontRef>
+        </p:style>
+        <p:txBody>
+          <a:bodyPr rtlCol="0" anchor="ctr"/>
+          <a:lstStyle/>
+          <a:p>
+            <a:pPr algn="ctr"/>
+          </a:p>
+        </p:txBody>
+      </p:sp>
+      <p:sp>
+        <p:nvSpPr>
+          <p:cNvPr id="110" name="u1_t" descr="Editable text; source id u1_t"/>
+          <p:cNvSpPr txBox="1"/>
+          <p:nvPr/>
+        </p:nvSpPr>
+        <p:spPr>
+          <a:xfrm>
+            <a:off x="8683624" y="1031874"/>
+            <a:ext cx="3079749" cy="746124"/>
+          </a:xfrm>
+          <a:prstGeom prst="rect">
+            <a:avLst/>
+          </a:prstGeom>
+          <a:noFill/>
+          <a:effectLst/>
+        </p:spPr>
+        <p:txBody>
+          <a:bodyPr wrap="none" anchor="ctr" tIns="0" rIns="0" bIns="0" lIns="0" anchorCtr="0" vertOverflow="overflow">
+            <a:noAutofit/>
+          </a:bodyPr>
+          <a:lstStyle/>
+          <a:p>
+            <a:pPr algn="l" fontAlgn="base">
+              <a:lnSpc>
+                <a:spcPts val="1984"/>
+              </a:lnSpc>
+              <a:spcBef>
+                <a:spcPts val="0"/>
+              </a:spcBef>
+              <a:spcAft>
+                <a:spcPts val="0"/>
+              </a:spcAft>
+              <a:defRPr sz="1687" b="1" i="0" lang="zh-CN" dirty="0">
                 <a:solidFill>
                   <a:srgbClr val="7A5410"/>
                 </a:solidFill>
@@ -9174,7 +8484,915 @@
               </a:defRPr>
             </a:pPr>
             <a:r>
-              <a:rPr sz="1499" b="1" i="0" lang="zh-CN" dirty="0">
+              <a:rPr sz="1687" b="1" i="0" lang="zh-CN" dirty="0">
+                <a:solidFill>
+                  <a:srgbClr val="7A5410"/>
+                </a:solidFill>
+                <a:latin typeface="DejaVu Sans"/>
+                <a:ea typeface="DejaVu Sans"/>
+                <a:cs typeface="DejaVu Sans"/>
+              </a:rPr>
+              <a:t>Direct Reproduction</a:t>
+            </a:r>
+          </a:p>
+        </p:txBody>
+      </p:sp>
+      <p:sp>
+        <p:nvSpPr>
+          <p:cNvPr id="111" name="u2" descr="Editable shape; source id u2"/>
+          <p:cNvSpPr/>
+          <p:nvPr/>
+        </p:nvSpPr>
+        <p:spPr>
+          <a:xfrm>
+            <a:off x="8143874" y="2246312"/>
+            <a:ext cx="3714749" cy="1309687"/>
+          </a:xfrm>
+          <a:prstGeom prst="roundRect">
+            <a:avLst>
+              <a:gd name="adj" fmla="val 5454"/>
+            </a:avLst>
+          </a:prstGeom>
+          <a:solidFill>
+            <a:srgbClr val="FFFFFF"/>
+          </a:solidFill>
+          <a:ln w="15081">
+            <a:solidFill>
+              <a:srgbClr val="C48A24"/>
+            </a:solidFill>
+          </a:ln>
+          <a:effectLst/>
+        </p:spPr>
+        <p:style>
+          <a:lnRef idx="1">
+            <a:schemeClr val="accent1"/>
+          </a:lnRef>
+          <a:fillRef idx="3">
+            <a:schemeClr val="accent1"/>
+          </a:fillRef>
+          <a:effectRef idx="0">
+            <a:schemeClr val="accent1"/>
+          </a:effectRef>
+          <a:fontRef idx="minor">
+            <a:schemeClr val="lt1"/>
+          </a:fontRef>
+        </p:style>
+        <p:txBody>
+          <a:bodyPr rtlCol="0" anchor="ctr"/>
+          <a:lstStyle/>
+          <a:p>
+            <a:pPr algn="ctr"/>
+          </a:p>
+        </p:txBody>
+      </p:sp>
+      <p:sp>
+        <p:nvSpPr>
+          <p:cNvPr id="112" name="u2_b" descr="Editable shape; source id u2_b"/>
+          <p:cNvSpPr/>
+          <p:nvPr/>
+        </p:nvSpPr>
+        <p:spPr>
+          <a:xfrm>
+            <a:off x="8143874" y="2246312"/>
+            <a:ext cx="47624" cy="1309687"/>
+          </a:xfrm>
+          <a:prstGeom prst="roundRect">
+            <a:avLst>
+              <a:gd name="adj" fmla="val 50000"/>
+            </a:avLst>
+          </a:prstGeom>
+          <a:solidFill>
+            <a:srgbClr val="C48A24"/>
+          </a:solidFill>
+          <a:ln>
+            <a:noFill/>
+          </a:ln>
+          <a:effectLst/>
+        </p:spPr>
+        <p:style>
+          <a:lnRef idx="1">
+            <a:schemeClr val="accent1"/>
+          </a:lnRef>
+          <a:fillRef idx="3">
+            <a:schemeClr val="accent1"/>
+          </a:fillRef>
+          <a:effectRef idx="0">
+            <a:schemeClr val="accent1"/>
+          </a:effectRef>
+          <a:fontRef idx="minor">
+            <a:schemeClr val="lt1"/>
+          </a:fontRef>
+        </p:style>
+        <p:txBody>
+          <a:bodyPr rtlCol="0" anchor="ctr"/>
+          <a:lstStyle/>
+          <a:p>
+            <a:pPr algn="ctr"/>
+          </a:p>
+        </p:txBody>
+      </p:sp>
+      <p:cxnSp>
+        <p:nvCxnSpPr>
+          <p:cNvPr id="113" name="u2_g_o_0" descr="Editable line; source id u2_g_o_0"/>
+          <p:cNvCxnSpPr/>
+          <p:nvPr/>
+        </p:nvCxnSpPr>
+        <p:spPr>
+          <a:xfrm>
+            <a:off x="8445499" y="2770187"/>
+            <a:ext cx="127000" cy="79375"/>
+          </a:xfrm>
+          <a:prstGeom prst="line">
+            <a:avLst/>
+          </a:prstGeom>
+          <a:ln w="18216">
+            <a:solidFill>
+              <a:srgbClr val="111A24"/>
+            </a:solidFill>
+          </a:ln>
+          <a:effectLst/>
+        </p:spPr>
+        <p:style>
+          <a:lnRef idx="2">
+            <a:schemeClr val="accent1"/>
+          </a:lnRef>
+          <a:fillRef idx="0">
+            <a:schemeClr val="accent1"/>
+          </a:fillRef>
+          <a:effectRef idx="0">
+            <a:schemeClr val="accent1"/>
+          </a:effectRef>
+          <a:fontRef idx="minor">
+            <a:schemeClr val="tx1"/>
+          </a:fontRef>
+        </p:style>
+      </p:cxnSp>
+      <p:cxnSp>
+        <p:nvCxnSpPr>
+          <p:cNvPr id="114" name="u2_g_o_1" descr="Editable line; source id u2_g_o_1"/>
+          <p:cNvCxnSpPr/>
+          <p:nvPr/>
+        </p:nvCxnSpPr>
+        <p:spPr>
+          <a:xfrm flipH="1">
+            <a:off x="8516937" y="2849562"/>
+            <a:ext cx="55562" cy="174625"/>
+          </a:xfrm>
+          <a:prstGeom prst="line">
+            <a:avLst/>
+          </a:prstGeom>
+          <a:ln w="18216">
+            <a:solidFill>
+              <a:srgbClr val="111A24"/>
+            </a:solidFill>
+          </a:ln>
+          <a:effectLst/>
+        </p:spPr>
+        <p:style>
+          <a:lnRef idx="2">
+            <a:schemeClr val="accent1"/>
+          </a:lnRef>
+          <a:fillRef idx="0">
+            <a:schemeClr val="accent1"/>
+          </a:fillRef>
+          <a:effectRef idx="0">
+            <a:schemeClr val="accent1"/>
+          </a:effectRef>
+          <a:fontRef idx="minor">
+            <a:schemeClr val="tx1"/>
+          </a:fontRef>
+        </p:style>
+      </p:cxnSp>
+      <p:cxnSp>
+        <p:nvCxnSpPr>
+          <p:cNvPr id="115" name="u2_g_o_2" descr="Editable line; source id u2_g_o_2"/>
+          <p:cNvCxnSpPr/>
+          <p:nvPr/>
+        </p:nvCxnSpPr>
+        <p:spPr>
+          <a:xfrm flipH="1">
+            <a:off x="8374062" y="3024187"/>
+            <a:ext cx="142875" cy="0"/>
+          </a:xfrm>
+          <a:prstGeom prst="line">
+            <a:avLst/>
+          </a:prstGeom>
+          <a:ln w="18216">
+            <a:solidFill>
+              <a:srgbClr val="111A24"/>
+            </a:solidFill>
+          </a:ln>
+          <a:effectLst/>
+        </p:spPr>
+        <p:style>
+          <a:lnRef idx="2">
+            <a:schemeClr val="accent1"/>
+          </a:lnRef>
+          <a:fillRef idx="0">
+            <a:schemeClr val="accent1"/>
+          </a:fillRef>
+          <a:effectRef idx="0">
+            <a:schemeClr val="accent1"/>
+          </a:effectRef>
+          <a:fontRef idx="minor">
+            <a:schemeClr val="tx1"/>
+          </a:fontRef>
+        </p:style>
+      </p:cxnSp>
+      <p:cxnSp>
+        <p:nvCxnSpPr>
+          <p:cNvPr id="116" name="u2_g_o_3" descr="Editable line; source id u2_g_o_3"/>
+          <p:cNvCxnSpPr/>
+          <p:nvPr/>
+        </p:nvCxnSpPr>
+        <p:spPr>
+          <a:xfrm flipH="1" flipV="1">
+            <a:off x="8318499" y="2849562"/>
+            <a:ext cx="55563" cy="174625"/>
+          </a:xfrm>
+          <a:prstGeom prst="line">
+            <a:avLst/>
+          </a:prstGeom>
+          <a:ln w="18216">
+            <a:solidFill>
+              <a:srgbClr val="111A24"/>
+            </a:solidFill>
+          </a:ln>
+          <a:effectLst/>
+        </p:spPr>
+        <p:style>
+          <a:lnRef idx="2">
+            <a:schemeClr val="accent1"/>
+          </a:lnRef>
+          <a:fillRef idx="0">
+            <a:schemeClr val="accent1"/>
+          </a:fillRef>
+          <a:effectRef idx="0">
+            <a:schemeClr val="accent1"/>
+          </a:effectRef>
+          <a:fontRef idx="minor">
+            <a:schemeClr val="tx1"/>
+          </a:fontRef>
+        </p:style>
+      </p:cxnSp>
+      <p:cxnSp>
+        <p:nvCxnSpPr>
+          <p:cNvPr id="117" name="u2_g_o_4" descr="Editable line; source id u2_g_o_4"/>
+          <p:cNvCxnSpPr/>
+          <p:nvPr/>
+        </p:nvCxnSpPr>
+        <p:spPr>
+          <a:xfrm flipV="1">
+            <a:off x="8318499" y="2770187"/>
+            <a:ext cx="127000" cy="79375"/>
+          </a:xfrm>
+          <a:prstGeom prst="line">
+            <a:avLst/>
+          </a:prstGeom>
+          <a:ln w="18216">
+            <a:solidFill>
+              <a:srgbClr val="111A24"/>
+            </a:solidFill>
+          </a:ln>
+          <a:effectLst/>
+        </p:spPr>
+        <p:style>
+          <a:lnRef idx="2">
+            <a:schemeClr val="accent1"/>
+          </a:lnRef>
+          <a:fillRef idx="0">
+            <a:schemeClr val="accent1"/>
+          </a:fillRef>
+          <a:effectRef idx="0">
+            <a:schemeClr val="accent1"/>
+          </a:effectRef>
+          <a:fontRef idx="minor">
+            <a:schemeClr val="tx1"/>
+          </a:fontRef>
+        </p:style>
+      </p:cxnSp>
+      <p:cxnSp>
+        <p:nvCxnSpPr>
+          <p:cNvPr id="118" name="u2_g_a" descr="Editable line; source id u2_g_a"/>
+          <p:cNvCxnSpPr/>
+          <p:nvPr/>
+        </p:nvCxnSpPr>
+        <p:spPr>
+          <a:xfrm>
+            <a:off x="8445499" y="2770187"/>
+            <a:ext cx="0" cy="254000"/>
+          </a:xfrm>
+          <a:prstGeom prst="line">
+            <a:avLst/>
+          </a:prstGeom>
+          <a:ln w="18216">
+            <a:solidFill>
+              <a:srgbClr val="111A24"/>
+            </a:solidFill>
+          </a:ln>
+          <a:effectLst/>
+        </p:spPr>
+        <p:style>
+          <a:lnRef idx="2">
+            <a:schemeClr val="accent1"/>
+          </a:lnRef>
+          <a:fillRef idx="0">
+            <a:schemeClr val="accent1"/>
+          </a:fillRef>
+          <a:effectRef idx="0">
+            <a:schemeClr val="accent1"/>
+          </a:effectRef>
+          <a:fontRef idx="minor">
+            <a:schemeClr val="tx1"/>
+          </a:fontRef>
+        </p:style>
+      </p:cxnSp>
+      <p:cxnSp>
+        <p:nvCxnSpPr>
+          <p:cNvPr id="119" name="u2_g_b" descr="Editable line; source id u2_g_b"/>
+          <p:cNvCxnSpPr/>
+          <p:nvPr/>
+        </p:nvCxnSpPr>
+        <p:spPr>
+          <a:xfrm>
+            <a:off x="8318499" y="2849562"/>
+            <a:ext cx="254000" cy="0"/>
+          </a:xfrm>
+          <a:prstGeom prst="line">
+            <a:avLst/>
+          </a:prstGeom>
+          <a:ln w="18216">
+            <a:solidFill>
+              <a:srgbClr val="111A24"/>
+            </a:solidFill>
+          </a:ln>
+          <a:effectLst/>
+        </p:spPr>
+        <p:style>
+          <a:lnRef idx="2">
+            <a:schemeClr val="accent1"/>
+          </a:lnRef>
+          <a:fillRef idx="0">
+            <a:schemeClr val="accent1"/>
+          </a:fillRef>
+          <a:effectRef idx="0">
+            <a:schemeClr val="accent1"/>
+          </a:effectRef>
+          <a:fontRef idx="minor">
+            <a:schemeClr val="tx1"/>
+          </a:fontRef>
+        </p:style>
+      </p:cxnSp>
+      <p:sp>
+        <p:nvSpPr>
+          <p:cNvPr id="120" name="u2_t" descr="Editable text; source id u2_t"/>
+          <p:cNvSpPr txBox="1"/>
+          <p:nvPr/>
+        </p:nvSpPr>
+        <p:spPr>
+          <a:xfrm>
+            <a:off x="8683624" y="2524124"/>
+            <a:ext cx="3079749" cy="746124"/>
+          </a:xfrm>
+          <a:prstGeom prst="rect">
+            <a:avLst/>
+          </a:prstGeom>
+          <a:noFill/>
+          <a:effectLst/>
+        </p:spPr>
+        <p:txBody>
+          <a:bodyPr wrap="none" anchor="ctr" tIns="0" rIns="0" bIns="0" lIns="0" anchorCtr="0" vertOverflow="overflow">
+            <a:noAutofit/>
+          </a:bodyPr>
+          <a:lstStyle/>
+          <a:p>
+            <a:pPr algn="l" fontAlgn="base">
+              <a:lnSpc>
+                <a:spcPts val="1984"/>
+              </a:lnSpc>
+              <a:spcBef>
+                <a:spcPts val="0"/>
+              </a:spcBef>
+              <a:spcAft>
+                <a:spcPts val="0"/>
+              </a:spcAft>
+              <a:defRPr sz="1687" b="1" i="0" lang="zh-CN" dirty="0">
+                <a:solidFill>
+                  <a:srgbClr val="7A5410"/>
+                </a:solidFill>
+                <a:latin typeface="DejaVu Sans"/>
+                <a:ea typeface="DejaVu Sans"/>
+                <a:cs typeface="DejaVu Sans"/>
+              </a:defRPr>
+            </a:pPr>
+            <a:r>
+              <a:rPr sz="1687" b="1" i="0" lang="zh-CN" dirty="0">
+                <a:solidFill>
+                  <a:srgbClr val="7A5410"/>
+                </a:solidFill>
+                <a:latin typeface="DejaVu Sans"/>
+                <a:ea typeface="DejaVu Sans"/>
+                <a:cs typeface="DejaVu Sans"/>
+              </a:rPr>
+              <a:t>Family Phase </a:t>
+            </a:r>
+          </a:p>
+          <a:p>
+            <a:pPr algn="l" fontAlgn="base">
+              <a:lnSpc>
+                <a:spcPts val="1984"/>
+              </a:lnSpc>
+              <a:spcBef>
+                <a:spcPts val="0"/>
+              </a:spcBef>
+              <a:spcAft>
+                <a:spcPts val="0"/>
+              </a:spcAft>
+              <a:defRPr sz="1687" b="1" i="0" lang="zh-CN" dirty="0">
+                <a:solidFill>
+                  <a:srgbClr val="7A5410"/>
+                </a:solidFill>
+                <a:latin typeface="DejaVu Sans"/>
+                <a:ea typeface="DejaVu Sans"/>
+                <a:cs typeface="DejaVu Sans"/>
+              </a:defRPr>
+            </a:pPr>
+            <a:r>
+              <a:rPr sz="1687" b="1" i="0" lang="zh-CN" dirty="0">
+                <a:solidFill>
+                  <a:srgbClr val="7A5410"/>
+                </a:solidFill>
+                <a:latin typeface="DejaVu Sans"/>
+                <a:ea typeface="DejaVu Sans"/>
+                <a:cs typeface="DejaVu Sans"/>
+              </a:rPr>
+              <a:t>Comparison</a:t>
+            </a:r>
+          </a:p>
+        </p:txBody>
+      </p:sp>
+      <p:sp>
+        <p:nvSpPr>
+          <p:cNvPr id="121" name="u3" descr="Editable shape; source id u3"/>
+          <p:cNvSpPr/>
+          <p:nvPr/>
+        </p:nvSpPr>
+        <p:spPr>
+          <a:xfrm>
+            <a:off x="8143874" y="3746499"/>
+            <a:ext cx="3714749" cy="1309687"/>
+          </a:xfrm>
+          <a:prstGeom prst="roundRect">
+            <a:avLst>
+              <a:gd name="adj" fmla="val 5454"/>
+            </a:avLst>
+          </a:prstGeom>
+          <a:solidFill>
+            <a:srgbClr val="FFFFFF"/>
+          </a:solidFill>
+          <a:ln w="15081">
+            <a:solidFill>
+              <a:srgbClr val="C48A24"/>
+            </a:solidFill>
+          </a:ln>
+          <a:effectLst/>
+        </p:spPr>
+        <p:style>
+          <a:lnRef idx="1">
+            <a:schemeClr val="accent1"/>
+          </a:lnRef>
+          <a:fillRef idx="3">
+            <a:schemeClr val="accent1"/>
+          </a:fillRef>
+          <a:effectRef idx="0">
+            <a:schemeClr val="accent1"/>
+          </a:effectRef>
+          <a:fontRef idx="minor">
+            <a:schemeClr val="lt1"/>
+          </a:fontRef>
+        </p:style>
+        <p:txBody>
+          <a:bodyPr rtlCol="0" anchor="ctr"/>
+          <a:lstStyle/>
+          <a:p>
+            <a:pPr algn="ctr"/>
+          </a:p>
+        </p:txBody>
+      </p:sp>
+      <p:sp>
+        <p:nvSpPr>
+          <p:cNvPr id="122" name="u3_b" descr="Editable shape; source id u3_b"/>
+          <p:cNvSpPr/>
+          <p:nvPr/>
+        </p:nvSpPr>
+        <p:spPr>
+          <a:xfrm>
+            <a:off x="8143874" y="3746499"/>
+            <a:ext cx="47624" cy="1309687"/>
+          </a:xfrm>
+          <a:prstGeom prst="roundRect">
+            <a:avLst>
+              <a:gd name="adj" fmla="val 50000"/>
+            </a:avLst>
+          </a:prstGeom>
+          <a:solidFill>
+            <a:srgbClr val="C48A24"/>
+          </a:solidFill>
+          <a:ln>
+            <a:noFill/>
+          </a:ln>
+          <a:effectLst/>
+        </p:spPr>
+        <p:style>
+          <a:lnRef idx="1">
+            <a:schemeClr val="accent1"/>
+          </a:lnRef>
+          <a:fillRef idx="3">
+            <a:schemeClr val="accent1"/>
+          </a:fillRef>
+          <a:effectRef idx="0">
+            <a:schemeClr val="accent1"/>
+          </a:effectRef>
+          <a:fontRef idx="minor">
+            <a:schemeClr val="lt1"/>
+          </a:fontRef>
+        </p:style>
+        <p:txBody>
+          <a:bodyPr rtlCol="0" anchor="ctr"/>
+          <a:lstStyle/>
+          <a:p>
+            <a:pPr algn="ctr"/>
+          </a:p>
+        </p:txBody>
+      </p:sp>
+      <p:cxnSp>
+        <p:nvCxnSpPr>
+          <p:cNvPr id="123" name="u3_g_p" descr="Editable line; source id u3_g_p"/>
+          <p:cNvCxnSpPr/>
+          <p:nvPr/>
+        </p:nvCxnSpPr>
+        <p:spPr>
+          <a:xfrm>
+            <a:off x="8445499" y="4286249"/>
+            <a:ext cx="0" cy="206375"/>
+          </a:xfrm>
+          <a:prstGeom prst="line">
+            <a:avLst/>
+          </a:prstGeom>
+          <a:ln w="18216">
+            <a:solidFill>
+              <a:srgbClr val="111A24"/>
+            </a:solidFill>
+          </a:ln>
+          <a:effectLst/>
+        </p:spPr>
+        <p:style>
+          <a:lnRef idx="2">
+            <a:schemeClr val="accent1"/>
+          </a:lnRef>
+          <a:fillRef idx="0">
+            <a:schemeClr val="accent1"/>
+          </a:fillRef>
+          <a:effectRef idx="0">
+            <a:schemeClr val="accent1"/>
+          </a:effectRef>
+          <a:fontRef idx="minor">
+            <a:schemeClr val="tx1"/>
+          </a:fontRef>
+        </p:style>
+      </p:cxnSp>
+      <p:cxnSp>
+        <p:nvCxnSpPr>
+          <p:cNvPr id="124" name="u3_g_b" descr="Editable line; source id u3_g_b"/>
+          <p:cNvCxnSpPr/>
+          <p:nvPr/>
+        </p:nvCxnSpPr>
+        <p:spPr>
+          <a:xfrm>
+            <a:off x="8334374" y="4333874"/>
+            <a:ext cx="222250" cy="0"/>
+          </a:xfrm>
+          <a:prstGeom prst="line">
+            <a:avLst/>
+          </a:prstGeom>
+          <a:ln w="18216">
+            <a:solidFill>
+              <a:srgbClr val="111A24"/>
+            </a:solidFill>
+          </a:ln>
+          <a:effectLst/>
+        </p:spPr>
+        <p:style>
+          <a:lnRef idx="2">
+            <a:schemeClr val="accent1"/>
+          </a:lnRef>
+          <a:fillRef idx="0">
+            <a:schemeClr val="accent1"/>
+          </a:fillRef>
+          <a:effectRef idx="0">
+            <a:schemeClr val="accent1"/>
+          </a:effectRef>
+          <a:fontRef idx="minor">
+            <a:schemeClr val="tx1"/>
+          </a:fontRef>
+        </p:style>
+      </p:cxnSp>
+      <p:cxnSp>
+        <p:nvCxnSpPr>
+          <p:cNvPr id="125" name="u3_g_l_0" descr="Editable line; source id u3_g_l_0"/>
+          <p:cNvCxnSpPr/>
+          <p:nvPr/>
+        </p:nvCxnSpPr>
+        <p:spPr>
+          <a:xfrm flipH="1">
+            <a:off x="8302624" y="4333874"/>
+            <a:ext cx="31750" cy="63500"/>
+          </a:xfrm>
+          <a:prstGeom prst="line">
+            <a:avLst/>
+          </a:prstGeom>
+          <a:ln w="18216">
+            <a:solidFill>
+              <a:srgbClr val="111A24"/>
+            </a:solidFill>
+          </a:ln>
+          <a:effectLst/>
+        </p:spPr>
+        <p:style>
+          <a:lnRef idx="2">
+            <a:schemeClr val="accent1"/>
+          </a:lnRef>
+          <a:fillRef idx="0">
+            <a:schemeClr val="accent1"/>
+          </a:fillRef>
+          <a:effectRef idx="0">
+            <a:schemeClr val="accent1"/>
+          </a:effectRef>
+          <a:fontRef idx="minor">
+            <a:schemeClr val="tx1"/>
+          </a:fontRef>
+        </p:style>
+      </p:cxnSp>
+      <p:cxnSp>
+        <p:nvCxnSpPr>
+          <p:cNvPr id="126" name="u3_g_l_1" descr="Editable line; source id u3_g_l_1"/>
+          <p:cNvCxnSpPr/>
+          <p:nvPr/>
+        </p:nvCxnSpPr>
+        <p:spPr>
+          <a:xfrm>
+            <a:off x="8302624" y="4397374"/>
+            <a:ext cx="63500" cy="0"/>
+          </a:xfrm>
+          <a:prstGeom prst="line">
+            <a:avLst/>
+          </a:prstGeom>
+          <a:ln w="18216">
+            <a:solidFill>
+              <a:srgbClr val="111A24"/>
+            </a:solidFill>
+          </a:ln>
+          <a:effectLst/>
+        </p:spPr>
+        <p:style>
+          <a:lnRef idx="2">
+            <a:schemeClr val="accent1"/>
+          </a:lnRef>
+          <a:fillRef idx="0">
+            <a:schemeClr val="accent1"/>
+          </a:fillRef>
+          <a:effectRef idx="0">
+            <a:schemeClr val="accent1"/>
+          </a:effectRef>
+          <a:fontRef idx="minor">
+            <a:schemeClr val="tx1"/>
+          </a:fontRef>
+        </p:style>
+      </p:cxnSp>
+      <p:cxnSp>
+        <p:nvCxnSpPr>
+          <p:cNvPr id="127" name="u3_g_l_2" descr="Editable line; source id u3_g_l_2"/>
+          <p:cNvCxnSpPr/>
+          <p:nvPr/>
+        </p:nvCxnSpPr>
+        <p:spPr>
+          <a:xfrm flipH="1" flipV="1">
+            <a:off x="8334374" y="4333874"/>
+            <a:ext cx="31750" cy="63500"/>
+          </a:xfrm>
+          <a:prstGeom prst="line">
+            <a:avLst/>
+          </a:prstGeom>
+          <a:ln w="18216">
+            <a:solidFill>
+              <a:srgbClr val="111A24"/>
+            </a:solidFill>
+          </a:ln>
+          <a:effectLst/>
+        </p:spPr>
+        <p:style>
+          <a:lnRef idx="2">
+            <a:schemeClr val="accent1"/>
+          </a:lnRef>
+          <a:fillRef idx="0">
+            <a:schemeClr val="accent1"/>
+          </a:fillRef>
+          <a:effectRef idx="0">
+            <a:schemeClr val="accent1"/>
+          </a:effectRef>
+          <a:fontRef idx="minor">
+            <a:schemeClr val="tx1"/>
+          </a:fontRef>
+        </p:style>
+      </p:cxnSp>
+      <p:cxnSp>
+        <p:nvCxnSpPr>
+          <p:cNvPr id="128" name="u3_g_r_0" descr="Editable line; source id u3_g_r_0"/>
+          <p:cNvCxnSpPr/>
+          <p:nvPr/>
+        </p:nvCxnSpPr>
+        <p:spPr>
+          <a:xfrm flipH="1">
+            <a:off x="8524874" y="4333874"/>
+            <a:ext cx="31750" cy="63500"/>
+          </a:xfrm>
+          <a:prstGeom prst="line">
+            <a:avLst/>
+          </a:prstGeom>
+          <a:ln w="18216">
+            <a:solidFill>
+              <a:srgbClr val="111A24"/>
+            </a:solidFill>
+          </a:ln>
+          <a:effectLst/>
+        </p:spPr>
+        <p:style>
+          <a:lnRef idx="2">
+            <a:schemeClr val="accent1"/>
+          </a:lnRef>
+          <a:fillRef idx="0">
+            <a:schemeClr val="accent1"/>
+          </a:fillRef>
+          <a:effectRef idx="0">
+            <a:schemeClr val="accent1"/>
+          </a:effectRef>
+          <a:fontRef idx="minor">
+            <a:schemeClr val="tx1"/>
+          </a:fontRef>
+        </p:style>
+      </p:cxnSp>
+      <p:cxnSp>
+        <p:nvCxnSpPr>
+          <p:cNvPr id="129" name="u3_g_r_1" descr="Editable line; source id u3_g_r_1"/>
+          <p:cNvCxnSpPr/>
+          <p:nvPr/>
+        </p:nvCxnSpPr>
+        <p:spPr>
+          <a:xfrm>
+            <a:off x="8524874" y="4397374"/>
+            <a:ext cx="63500" cy="0"/>
+          </a:xfrm>
+          <a:prstGeom prst="line">
+            <a:avLst/>
+          </a:prstGeom>
+          <a:ln w="18216">
+            <a:solidFill>
+              <a:srgbClr val="111A24"/>
+            </a:solidFill>
+          </a:ln>
+          <a:effectLst/>
+        </p:spPr>
+        <p:style>
+          <a:lnRef idx="2">
+            <a:schemeClr val="accent1"/>
+          </a:lnRef>
+          <a:fillRef idx="0">
+            <a:schemeClr val="accent1"/>
+          </a:fillRef>
+          <a:effectRef idx="0">
+            <a:schemeClr val="accent1"/>
+          </a:effectRef>
+          <a:fontRef idx="minor">
+            <a:schemeClr val="tx1"/>
+          </a:fontRef>
+        </p:style>
+      </p:cxnSp>
+      <p:cxnSp>
+        <p:nvCxnSpPr>
+          <p:cNvPr id="130" name="u3_g_r_2" descr="Editable line; source id u3_g_r_2"/>
+          <p:cNvCxnSpPr/>
+          <p:nvPr/>
+        </p:nvCxnSpPr>
+        <p:spPr>
+          <a:xfrm flipH="1" flipV="1">
+            <a:off x="8556624" y="4333874"/>
+            <a:ext cx="31750" cy="63500"/>
+          </a:xfrm>
+          <a:prstGeom prst="line">
+            <a:avLst/>
+          </a:prstGeom>
+          <a:ln w="18216">
+            <a:solidFill>
+              <a:srgbClr val="111A24"/>
+            </a:solidFill>
+          </a:ln>
+          <a:effectLst/>
+        </p:spPr>
+        <p:style>
+          <a:lnRef idx="2">
+            <a:schemeClr val="accent1"/>
+          </a:lnRef>
+          <a:fillRef idx="0">
+            <a:schemeClr val="accent1"/>
+          </a:fillRef>
+          <a:effectRef idx="0">
+            <a:schemeClr val="accent1"/>
+          </a:effectRef>
+          <a:fontRef idx="minor">
+            <a:schemeClr val="tx1"/>
+          </a:fontRef>
+        </p:style>
+      </p:cxnSp>
+      <p:cxnSp>
+        <p:nvCxnSpPr>
+          <p:cNvPr id="131" name="u3_g_f" descr="Editable line; source id u3_g_f"/>
+          <p:cNvCxnSpPr/>
+          <p:nvPr/>
+        </p:nvCxnSpPr>
+        <p:spPr>
+          <a:xfrm>
+            <a:off x="8381999" y="4516437"/>
+            <a:ext cx="127000" cy="0"/>
+          </a:xfrm>
+          <a:prstGeom prst="line">
+            <a:avLst/>
+          </a:prstGeom>
+          <a:ln w="18216">
+            <a:solidFill>
+              <a:srgbClr val="111A24"/>
+            </a:solidFill>
+          </a:ln>
+          <a:effectLst/>
+        </p:spPr>
+        <p:style>
+          <a:lnRef idx="2">
+            <a:schemeClr val="accent1"/>
+          </a:lnRef>
+          <a:fillRef idx="0">
+            <a:schemeClr val="accent1"/>
+          </a:fillRef>
+          <a:effectRef idx="0">
+            <a:schemeClr val="accent1"/>
+          </a:effectRef>
+          <a:fontRef idx="minor">
+            <a:schemeClr val="tx1"/>
+          </a:fontRef>
+        </p:style>
+      </p:cxnSp>
+      <p:sp>
+        <p:nvSpPr>
+          <p:cNvPr id="132" name="u3_t" descr="Editable text; source id u3_t"/>
+          <p:cNvSpPr txBox="1"/>
+          <p:nvPr/>
+        </p:nvSpPr>
+        <p:spPr>
+          <a:xfrm>
+            <a:off x="8683624" y="4032249"/>
+            <a:ext cx="3079749" cy="746124"/>
+          </a:xfrm>
+          <a:prstGeom prst="rect">
+            <a:avLst/>
+          </a:prstGeom>
+          <a:noFill/>
+          <a:effectLst/>
+        </p:spPr>
+        <p:txBody>
+          <a:bodyPr wrap="none" anchor="ctr" tIns="0" rIns="0" bIns="0" lIns="0" anchorCtr="0" vertOverflow="overflow">
+            <a:noAutofit/>
+          </a:bodyPr>
+          <a:lstStyle/>
+          <a:p>
+            <a:pPr algn="l" fontAlgn="base">
+              <a:lnSpc>
+                <a:spcPts val="1984"/>
+              </a:lnSpc>
+              <a:spcBef>
+                <a:spcPts val="0"/>
+              </a:spcBef>
+              <a:spcAft>
+                <a:spcPts val="0"/>
+              </a:spcAft>
+              <a:defRPr sz="1687" b="1" i="0" lang="zh-CN" dirty="0">
+                <a:solidFill>
+                  <a:srgbClr val="7A5410"/>
+                </a:solidFill>
+                <a:latin typeface="DejaVu Sans"/>
+                <a:ea typeface="DejaVu Sans"/>
+                <a:cs typeface="DejaVu Sans"/>
+              </a:defRPr>
+            </a:pPr>
+            <a:r>
+              <a:rPr sz="1687" b="1" i="0" lang="zh-CN" dirty="0">
                 <a:solidFill>
                   <a:srgbClr val="7A5410"/>
                 </a:solidFill>
@@ -9195,8 +9413,8 @@
         </p:nvSpPr>
         <p:spPr>
           <a:xfrm>
-            <a:off x="8493124" y="4603749"/>
-            <a:ext cx="3357562" cy="317499"/>
+            <a:off x="8731249" y="5460999"/>
+            <a:ext cx="2532062" cy="682624"/>
           </a:xfrm>
           <a:prstGeom prst="roundRect">
             <a:avLst>
@@ -9243,8 +9461,8 @@
         </p:nvSpPr>
         <p:spPr>
           <a:xfrm>
-            <a:off x="8572499" y="4635499"/>
-            <a:ext cx="3198812" cy="253999"/>
+            <a:off x="8810624" y="5492749"/>
+            <a:ext cx="2373312" cy="619124"/>
           </a:xfrm>
           <a:prstGeom prst="rect">
             <a:avLst/>
@@ -9260,7 +9478,7 @@
           <a:p>
             <a:pPr algn="ctr" fontAlgn="base">
               <a:lnSpc>
-                <a:spcPts val="1390"/>
+                <a:spcPts val="1765"/>
               </a:lnSpc>
               <a:spcBef>
                 <a:spcPts val="0"/>
@@ -9268,7 +9486,7 @@
               <a:spcAft>
                 <a:spcPts val="0"/>
               </a:spcAft>
-              <a:defRPr sz="1187" b="1" i="0" lang="zh-CN" dirty="0">
+              <a:defRPr sz="1499" b="0" i="0" lang="zh-CN" dirty="0">
                 <a:solidFill>
                   <a:srgbClr val="7A5410"/>
                 </a:solidFill>
@@ -9278,7 +9496,7 @@
               </a:defRPr>
             </a:pPr>
             <a:r>
-              <a:rPr sz="1187" b="1" i="0" lang="zh-CN" dirty="0">
+              <a:rPr sz="1499" b="0" i="0" lang="zh-CN" dirty="0">
                 <a:solidFill>
                   <a:srgbClr val="7A5410"/>
                 </a:solidFill>
@@ -9286,7 +9504,39 @@
                 <a:ea typeface="DejaVu Sans"/>
                 <a:cs typeface="DejaVu Sans"/>
               </a:rPr>
-              <a:t>Neighbor conditions ≠ proven recipe</a:t>
+              <a:t>Neighbor conditions ≠ </a:t>
+            </a:r>
+          </a:p>
+          <a:p>
+            <a:pPr algn="ctr" fontAlgn="base">
+              <a:lnSpc>
+                <a:spcPts val="1765"/>
+              </a:lnSpc>
+              <a:spcBef>
+                <a:spcPts val="0"/>
+              </a:spcBef>
+              <a:spcAft>
+                <a:spcPts val="0"/>
+              </a:spcAft>
+              <a:defRPr sz="1499" b="0" i="0" lang="zh-CN" dirty="0">
+                <a:solidFill>
+                  <a:srgbClr val="7A5410"/>
+                </a:solidFill>
+                <a:latin typeface="DejaVu Sans"/>
+                <a:ea typeface="DejaVu Sans"/>
+                <a:cs typeface="DejaVu Sans"/>
+              </a:defRPr>
+            </a:pPr>
+            <a:r>
+              <a:rPr sz="1499" b="0" i="0" lang="zh-CN" dirty="0">
+                <a:solidFill>
+                  <a:srgbClr val="7A5410"/>
+                </a:solidFill>
+                <a:latin typeface="DejaVu Sans"/>
+                <a:ea typeface="DejaVu Sans"/>
+                <a:cs typeface="DejaVu Sans"/>
+              </a:rPr>
+              <a:t>proven recipe</a:t>
             </a:r>
           </a:p>
         </p:txBody>
@@ -9299,12 +9549,12 @@
         </p:nvSpPr>
         <p:spPr>
           <a:xfrm>
-            <a:off x="8540749" y="5556249"/>
-            <a:ext cx="3254374" cy="888999"/>
+            <a:off x="8143874" y="6842124"/>
+            <a:ext cx="3714749" cy="1309687"/>
           </a:xfrm>
           <a:prstGeom prst="roundRect">
             <a:avLst>
-              <a:gd name="adj" fmla="val 8035"/>
+              <a:gd name="adj" fmla="val 5454"/>
             </a:avLst>
           </a:prstGeom>
           <a:solidFill>
@@ -9350,7 +9600,7 @@
         </p:nvSpPr>
         <p:spPr>
           <a:xfrm>
-            <a:off x="8810624" y="5905499"/>
+            <a:off x="8350249" y="7397749"/>
             <a:ext cx="190499" cy="190499"/>
           </a:xfrm>
           <a:prstGeom prst="ellipse">
@@ -9394,7 +9644,7 @@
         </p:nvSpPr>
         <p:spPr>
           <a:xfrm>
-            <a:off x="8874124" y="5968999"/>
+            <a:off x="8413749" y="7461249"/>
             <a:ext cx="63499" cy="63499"/>
           </a:xfrm>
           <a:prstGeom prst="ellipse">
@@ -9438,8 +9688,8 @@
         </p:nvCxnSpPr>
         <p:spPr>
           <a:xfrm>
-            <a:off x="8905874" y="5857874"/>
-            <a:ext cx="0" cy="55563"/>
+            <a:off x="8445499" y="7358062"/>
+            <a:ext cx="0" cy="47625"/>
           </a:xfrm>
           <a:prstGeom prst="line">
             <a:avLst/>
@@ -9474,8 +9724,8 @@
         </p:nvCxnSpPr>
         <p:spPr>
           <a:xfrm>
-            <a:off x="8905874" y="6088062"/>
-            <a:ext cx="0" cy="55562"/>
+            <a:off x="8445499" y="7588249"/>
+            <a:ext cx="0" cy="47625"/>
           </a:xfrm>
           <a:prstGeom prst="line">
             <a:avLst/>
@@ -9510,7 +9760,7 @@
         </p:nvCxnSpPr>
         <p:spPr>
           <a:xfrm>
-            <a:off x="8762999" y="6000749"/>
+            <a:off x="8302624" y="7492999"/>
             <a:ext cx="55563" cy="0"/>
           </a:xfrm>
           <a:prstGeom prst="line">
@@ -9546,7 +9796,7 @@
         </p:nvCxnSpPr>
         <p:spPr>
           <a:xfrm>
-            <a:off x="8993187" y="6000749"/>
+            <a:off x="8532812" y="7492999"/>
             <a:ext cx="55562" cy="0"/>
           </a:xfrm>
           <a:prstGeom prst="line">
@@ -9582,8 +9832,8 @@
         </p:nvSpPr>
         <p:spPr>
           <a:xfrm>
-            <a:off x="9159874" y="5841999"/>
-            <a:ext cx="2492374" cy="325437"/>
+            <a:off x="8683624" y="7127874"/>
+            <a:ext cx="3079749" cy="746124"/>
           </a:xfrm>
           <a:prstGeom prst="rect">
             <a:avLst/>
@@ -9599,7 +9849,7 @@
           <a:p>
             <a:pPr algn="l" fontAlgn="base">
               <a:lnSpc>
-                <a:spcPts val="1765"/>
+                <a:spcPts val="1984"/>
               </a:lnSpc>
               <a:spcBef>
                 <a:spcPts val="0"/>
@@ -9607,7 +9857,7 @@
               <a:spcAft>
                 <a:spcPts val="0"/>
               </a:spcAft>
-              <a:defRPr sz="1499" b="1" i="0" lang="zh-CN" dirty="0">
+              <a:defRPr sz="1687" b="1" i="0" lang="zh-CN" dirty="0">
                 <a:solidFill>
                   <a:srgbClr val="5B6570"/>
                 </a:solidFill>
@@ -9617,7 +9867,7 @@
               </a:defRPr>
             </a:pPr>
             <a:r>
-              <a:rPr sz="1499" b="1" i="0" lang="zh-CN" dirty="0">
+              <a:rPr sz="1687" b="1" i="0" lang="zh-CN" dirty="0">
                 <a:solidFill>
                   <a:srgbClr val="5B6570"/>
                 </a:solidFill>
@@ -9638,8 +9888,8 @@
         </p:nvCxnSpPr>
         <p:spPr>
           <a:xfrm>
-            <a:off x="4397374" y="1595437"/>
-            <a:ext cx="238125" cy="0"/>
+            <a:off x="4373562" y="1396999"/>
+            <a:ext cx="182562" cy="0"/>
           </a:xfrm>
           <a:prstGeom prst="line">
             <a:avLst/>
@@ -9674,8 +9924,8 @@
         </p:nvCxnSpPr>
         <p:spPr>
           <a:xfrm>
-            <a:off x="4397374" y="2484437"/>
-            <a:ext cx="238125" cy="0"/>
+            <a:off x="4373562" y="2905124"/>
+            <a:ext cx="182562" cy="0"/>
           </a:xfrm>
           <a:prstGeom prst="line">
             <a:avLst/>
@@ -9710,8 +9960,8 @@
         </p:nvCxnSpPr>
         <p:spPr>
           <a:xfrm>
-            <a:off x="4397374" y="3373437"/>
-            <a:ext cx="238125" cy="0"/>
+            <a:off x="4373562" y="4397374"/>
+            <a:ext cx="182562" cy="0"/>
           </a:xfrm>
           <a:prstGeom prst="line">
             <a:avLst/>
@@ -9746,8 +9996,8 @@
         </p:nvCxnSpPr>
         <p:spPr>
           <a:xfrm>
-            <a:off x="4397374" y="4262437"/>
-            <a:ext cx="238125" cy="0"/>
+            <a:off x="4373562" y="5905499"/>
+            <a:ext cx="182562" cy="0"/>
           </a:xfrm>
           <a:prstGeom prst="line">
             <a:avLst/>
@@ -9782,8 +10032,8 @@
         </p:nvCxnSpPr>
         <p:spPr>
           <a:xfrm>
-            <a:off x="4635499" y="1595437"/>
-            <a:ext cx="0" cy="2667000"/>
+            <a:off x="4556124" y="1396999"/>
+            <a:ext cx="0" cy="4508500"/>
           </a:xfrm>
           <a:prstGeom prst="line">
             <a:avLst/>
@@ -9818,8 +10068,8 @@
         </p:nvSpPr>
         <p:spPr>
           <a:xfrm>
-            <a:off x="4635500" y="2881312"/>
-            <a:ext cx="254000" cy="95250"/>
+            <a:off x="4556125" y="3603625"/>
+            <a:ext cx="198437" cy="95250"/>
           </a:xfrm>
           <a:custGeom>
             <a:avLst/>
@@ -9828,24 +10078,24 @@
             <a:cxnLst/>
             <a:rect l="l" t="t" r="r" b="b"/>
             <a:pathLst>
-              <a:path w="32000" h="12000">
+              <a:path w="25000" h="12000">
                 <a:moveTo>
                   <a:pt x="0" y="4750"/>
                 </a:moveTo>
                 <a:lnTo>
-                  <a:pt x="17000" y="4750"/>
+                  <a:pt x="10000" y="4750"/>
                 </a:lnTo>
                 <a:lnTo>
-                  <a:pt x="17000" y="0"/>
+                  <a:pt x="10000" y="0"/>
                 </a:lnTo>
                 <a:lnTo>
-                  <a:pt x="32000" y="6000"/>
+                  <a:pt x="25000" y="6000"/>
                 </a:lnTo>
                 <a:lnTo>
-                  <a:pt x="17000" y="12000"/>
+                  <a:pt x="10000" y="12000"/>
                 </a:lnTo>
                 <a:lnTo>
-                  <a:pt x="17000" y="7250"/>
+                  <a:pt x="10000" y="7250"/>
                 </a:lnTo>
                 <a:lnTo>
                   <a:pt x="0" y="7250"/>
@@ -9892,8 +10142,8 @@
         </p:nvCxnSpPr>
         <p:spPr>
           <a:xfrm>
-            <a:off x="7985124" y="3333749"/>
-            <a:ext cx="190500" cy="0"/>
+            <a:off x="7739062" y="3651249"/>
+            <a:ext cx="182562" cy="0"/>
           </a:xfrm>
           <a:prstGeom prst="line">
             <a:avLst/>
@@ -9928,8 +10178,8 @@
         </p:nvCxnSpPr>
         <p:spPr>
           <a:xfrm>
-            <a:off x="8175624" y="1635124"/>
-            <a:ext cx="0" cy="2095500"/>
+            <a:off x="7921624" y="1396999"/>
+            <a:ext cx="0" cy="3000375"/>
           </a:xfrm>
           <a:prstGeom prst="line">
             <a:avLst/>
@@ -9964,8 +10214,8 @@
         </p:nvSpPr>
         <p:spPr>
           <a:xfrm>
-            <a:off x="8175625" y="1587500"/>
-            <a:ext cx="333375" cy="95250"/>
+            <a:off x="7921625" y="1349375"/>
+            <a:ext cx="198437" cy="95250"/>
           </a:xfrm>
           <a:custGeom>
             <a:avLst/>
@@ -9974,24 +10224,24 @@
             <a:cxnLst/>
             <a:rect l="l" t="t" r="r" b="b"/>
             <a:pathLst>
-              <a:path w="42000" h="12000">
+              <a:path w="25000" h="12000">
                 <a:moveTo>
                   <a:pt x="0" y="4750"/>
                 </a:moveTo>
                 <a:lnTo>
-                  <a:pt x="27000" y="4750"/>
+                  <a:pt x="10000" y="4750"/>
                 </a:lnTo>
                 <a:lnTo>
-                  <a:pt x="27000" y="0"/>
+                  <a:pt x="10000" y="0"/>
                 </a:lnTo>
                 <a:lnTo>
-                  <a:pt x="42000" y="6000"/>
+                  <a:pt x="25000" y="6000"/>
                 </a:lnTo>
                 <a:lnTo>
-                  <a:pt x="27000" y="12000"/>
+                  <a:pt x="10000" y="12000"/>
                 </a:lnTo>
                 <a:lnTo>
-                  <a:pt x="27000" y="7250"/>
+                  <a:pt x="10000" y="7250"/>
                 </a:lnTo>
                 <a:lnTo>
                   <a:pt x="0" y="7250"/>
@@ -10038,8 +10288,8 @@
         </p:nvSpPr>
         <p:spPr>
           <a:xfrm>
-            <a:off x="8175625" y="2635250"/>
-            <a:ext cx="333375" cy="95250"/>
+            <a:off x="7921625" y="2857500"/>
+            <a:ext cx="198437" cy="95250"/>
           </a:xfrm>
           <a:custGeom>
             <a:avLst/>
@@ -10048,24 +10298,24 @@
             <a:cxnLst/>
             <a:rect l="l" t="t" r="r" b="b"/>
             <a:pathLst>
-              <a:path w="42000" h="12000">
+              <a:path w="25000" h="12000">
                 <a:moveTo>
                   <a:pt x="0" y="4750"/>
                 </a:moveTo>
                 <a:lnTo>
-                  <a:pt x="27000" y="4750"/>
+                  <a:pt x="10000" y="4750"/>
                 </a:lnTo>
                 <a:lnTo>
-                  <a:pt x="27000" y="0"/>
+                  <a:pt x="10000" y="0"/>
                 </a:lnTo>
                 <a:lnTo>
-                  <a:pt x="42000" y="6000"/>
+                  <a:pt x="25000" y="6000"/>
                 </a:lnTo>
                 <a:lnTo>
-                  <a:pt x="27000" y="12000"/>
+                  <a:pt x="10000" y="12000"/>
                 </a:lnTo>
                 <a:lnTo>
-                  <a:pt x="27000" y="7250"/>
+                  <a:pt x="10000" y="7250"/>
                 </a:lnTo>
                 <a:lnTo>
                   <a:pt x="0" y="7250"/>
@@ -10112,8 +10362,8 @@
         </p:nvSpPr>
         <p:spPr>
           <a:xfrm>
-            <a:off x="8175625" y="3683000"/>
-            <a:ext cx="333375" cy="95250"/>
+            <a:off x="7921625" y="4349750"/>
+            <a:ext cx="198437" cy="95250"/>
           </a:xfrm>
           <a:custGeom>
             <a:avLst/>
@@ -10122,24 +10372,24 @@
             <a:cxnLst/>
             <a:rect l="l" t="t" r="r" b="b"/>
             <a:pathLst>
-              <a:path w="42000" h="12000">
+              <a:path w="25000" h="12000">
                 <a:moveTo>
                   <a:pt x="0" y="4750"/>
                 </a:moveTo>
                 <a:lnTo>
-                  <a:pt x="27000" y="4750"/>
+                  <a:pt x="10000" y="4750"/>
                 </a:lnTo>
                 <a:lnTo>
-                  <a:pt x="27000" y="0"/>
+                  <a:pt x="10000" y="0"/>
                 </a:lnTo>
                 <a:lnTo>
-                  <a:pt x="42000" y="6000"/>
+                  <a:pt x="25000" y="6000"/>
                 </a:lnTo>
                 <a:lnTo>
-                  <a:pt x="27000" y="12000"/>
+                  <a:pt x="10000" y="12000"/>
                 </a:lnTo>
                 <a:lnTo>
-                  <a:pt x="27000" y="7250"/>
+                  <a:pt x="10000" y="7250"/>
                 </a:lnTo>
                 <a:lnTo>
                   <a:pt x="0" y="7250"/>
@@ -10186,8 +10436,8 @@
         </p:nvCxnSpPr>
         <p:spPr>
           <a:xfrm>
-            <a:off x="4397374" y="6000749"/>
-            <a:ext cx="4111625" cy="0"/>
+            <a:off x="4373562" y="7492999"/>
+            <a:ext cx="3738562" cy="0"/>
           </a:xfrm>
           <a:prstGeom prst="line">
             <a:avLst/>
@@ -10226,8 +10476,8 @@
         </p:nvSpPr>
         <p:spPr>
           <a:xfrm>
-            <a:off x="5976937" y="5841999"/>
-            <a:ext cx="952499" cy="317499"/>
+            <a:off x="5619749" y="7302499"/>
+            <a:ext cx="1230312" cy="380999"/>
           </a:xfrm>
           <a:prstGeom prst="roundRect">
             <a:avLst>
@@ -10274,8 +10524,8 @@
         </p:nvSpPr>
         <p:spPr>
           <a:xfrm>
-            <a:off x="6056312" y="5873749"/>
-            <a:ext cx="793749" cy="253999"/>
+            <a:off x="5699124" y="7334249"/>
+            <a:ext cx="1071562" cy="317499"/>
           </a:xfrm>
           <a:prstGeom prst="rect">
             <a:avLst/>
@@ -10291,7 +10541,7 @@
           <a:p>
             <a:pPr algn="ctr" fontAlgn="base">
               <a:lnSpc>
-                <a:spcPts val="1265"/>
+                <a:spcPts val="1765"/>
               </a:lnSpc>
               <a:spcBef>
                 <a:spcPts val="0"/>
@@ -10299,7 +10549,7 @@
               <a:spcAft>
                 <a:spcPts val="0"/>
               </a:spcAft>
-              <a:defRPr sz="1062" b="1" i="0" lang="zh-CN" dirty="0">
+              <a:defRPr sz="1499" b="0" i="0" lang="zh-CN" dirty="0">
                 <a:solidFill>
                   <a:srgbClr val="27303A"/>
                 </a:solidFill>
@@ -10309,7 +10559,7 @@
               </a:defRPr>
             </a:pPr>
             <a:r>
-              <a:rPr sz="1062" b="1" i="0" lang="zh-CN" dirty="0">
+              <a:rPr sz="1499" b="0" i="0" lang="zh-CN" dirty="0">
                 <a:solidFill>
                   <a:srgbClr val="27303A"/>
                 </a:solidFill>
